--- a/docs/theme-preview/pptx/brutalism.pptx
+++ b/docs/theme-preview/pptx/brutalism.pptx
@@ -418,7 +418,7 @@
             <a:pPr>
               <a:defRPr sz="1100" b="0" i="0" u="none" strike="noStrike">
                 <a:solidFill>
-                  <a:srgbClr val="27272A"/>
+                  <a:srgbClr val="888888"/>
                 </a:solidFill>
                 <a:latin typeface="Pretendard"/>
               </a:defRPr>
@@ -448,7 +448,7 @@
           <a:pPr>
             <a:defRPr sz="1100">
               <a:solidFill>
-                <a:srgbClr val="27272A"/>
+                <a:srgbClr val="888888"/>
               </a:solidFill>
               <a:latin typeface="Pretendard"/>
               <a:cs typeface="Pretendard"/>
@@ -678,7 +678,7 @@
             <a:pPr>
               <a:defRPr sz="1100" b="0" i="0" u="none" strike="noStrike">
                 <a:solidFill>
-                  <a:srgbClr val="27272A"/>
+                  <a:srgbClr val="888888"/>
                 </a:solidFill>
                 <a:latin typeface="Pretendard"/>
               </a:defRPr>
@@ -10321,7 +10321,7 @@
             <a:r>
               <a:rPr lang="en-US" sz="1600" dirty="0">
                 <a:solidFill>
-                  <a:srgbClr val="27272A"/>
+                  <a:srgbClr val="888888"/>
                 </a:solidFill>
                 <a:latin typeface="Pretendard" pitchFamily="34" charset="0"/>
                 <a:ea typeface="Pretendard" pitchFamily="34" charset="-122"/>
@@ -10463,7 +10463,7 @@
             <a:r>
               <a:rPr lang="en-US" sz="1600" dirty="0">
                 <a:solidFill>
-                  <a:srgbClr val="27272A"/>
+                  <a:srgbClr val="888888"/>
                 </a:solidFill>
                 <a:latin typeface="Pretendard" pitchFamily="34" charset="0"/>
                 <a:ea typeface="Pretendard" pitchFamily="34" charset="-122"/>
@@ -10707,7 +10707,7 @@
             <a:r>
               <a:rPr lang="en-US" sz="1700" dirty="0">
                 <a:solidFill>
-                  <a:srgbClr val="27272A"/>
+                  <a:srgbClr val="888888"/>
                 </a:solidFill>
                 <a:latin typeface="Pretendard" pitchFamily="34" charset="0"/>
                 <a:ea typeface="Pretendard" pitchFamily="34" charset="-122"/>
@@ -10749,7 +10749,7 @@
             <a:r>
               <a:rPr lang="en-US" sz="1400" dirty="0">
                 <a:solidFill>
-                  <a:srgbClr val="27272A"/>
+                  <a:srgbClr val="888888"/>
                 </a:solidFill>
                 <a:latin typeface="Pretendard" pitchFamily="34" charset="0"/>
                 <a:ea typeface="Pretendard" pitchFamily="34" charset="-122"/>
@@ -10791,7 +10791,7 @@
             <a:r>
               <a:rPr lang="en-US" sz="1400" dirty="0">
                 <a:solidFill>
-                  <a:srgbClr val="27272A"/>
+                  <a:srgbClr val="888888"/>
                 </a:solidFill>
                 <a:latin typeface="Pretendard" pitchFamily="34" charset="0"/>
                 <a:ea typeface="Pretendard" pitchFamily="34" charset="-122"/>
@@ -21845,7 +21845,7 @@
         <a:srgbClr val="FFF200"/>
       </a:lt1>
       <a:dk2>
-        <a:srgbClr val="27272A"/>
+        <a:srgbClr val="888888"/>
       </a:dk2>
       <a:lt2>
         <a:srgbClr val="FFFFFF"/>
@@ -21860,7 +21860,7 @@
         <a:srgbClr val="111111"/>
       </a:accent3>
       <a:accent4>
-        <a:srgbClr val="27272A"/>
+        <a:srgbClr val="888888"/>
       </a:accent4>
       <a:accent5>
         <a:srgbClr val="111111"/>

--- a/docs/theme-preview/pptx/brutalism.pptx
+++ b/docs/theme-preview/pptx/brutalism.pptx
@@ -3654,31 +3654,8 @@
         </p:nvSpPr>
         <p:spPr>
           <a:xfrm>
-            <a:off x="475488" y="6364224"/>
-            <a:ext cx="11240719" cy="0"/>
-          </a:xfrm>
-          <a:prstGeom prst="line">
-            <a:avLst/>
-          </a:prstGeom>
-          <a:noFill/>
-          <a:ln w="12700">
-            <a:solidFill>
-              <a:srgbClr val="111111"/>
-            </a:solidFill>
-            <a:prstDash val="solid"/>
-          </a:ln>
-        </p:spPr>
-      </p:sp>
-      <p:sp>
-        <p:nvSpPr>
-          <p:cNvPr id="5" name="Shape 3"/>
-          <p:cNvSpPr/>
-          <p:nvPr/>
-        </p:nvSpPr>
-        <p:spPr>
-          <a:xfrm>
-            <a:off x="10134295" y="0"/>
-            <a:ext cx="2057400" cy="256032"/>
+            <a:off x="10033711" y="310896"/>
+            <a:ext cx="1225296" cy="201168"/>
           </a:xfrm>
           <a:prstGeom prst="rect">
             <a:avLst/>
@@ -3698,7 +3675,105 @@
       </p:sp>
       <p:sp>
         <p:nvSpPr>
+          <p:cNvPr id="5" name="Shape 3"/>
+          <p:cNvSpPr/>
+          <p:nvPr/>
+        </p:nvSpPr>
+        <p:spPr>
+          <a:xfrm>
+            <a:off x="10362895" y="457200"/>
+            <a:ext cx="859536" cy="201168"/>
+          </a:xfrm>
+          <a:prstGeom prst="rect">
+            <a:avLst/>
+          </a:prstGeom>
+          <a:solidFill>
+            <a:srgbClr val="00A6FF"/>
+          </a:solidFill>
+          <a:ln w="12700">
+            <a:solidFill>
+              <a:srgbClr val="111111"/>
+            </a:solidFill>
+            <a:prstDash val="solid"/>
+          </a:ln>
+        </p:spPr>
+      </p:sp>
+      <p:sp>
+        <p:nvSpPr>
           <p:cNvPr id="6" name="Shape 4"/>
+          <p:cNvSpPr/>
+          <p:nvPr/>
+        </p:nvSpPr>
+        <p:spPr>
+          <a:xfrm>
+            <a:off x="475488" y="768096"/>
+            <a:ext cx="1353312" cy="0"/>
+          </a:xfrm>
+          <a:prstGeom prst="line">
+            <a:avLst/>
+          </a:prstGeom>
+          <a:noFill/>
+          <a:ln w="12700">
+            <a:solidFill>
+              <a:srgbClr val="111111"/>
+            </a:solidFill>
+            <a:prstDash val="solid"/>
+          </a:ln>
+        </p:spPr>
+      </p:sp>
+      <p:sp>
+        <p:nvSpPr>
+          <p:cNvPr id="7" name="Shape 5"/>
+          <p:cNvSpPr/>
+          <p:nvPr/>
+        </p:nvSpPr>
+        <p:spPr>
+          <a:xfrm>
+            <a:off x="475488" y="6364224"/>
+            <a:ext cx="11240719" cy="0"/>
+          </a:xfrm>
+          <a:prstGeom prst="line">
+            <a:avLst/>
+          </a:prstGeom>
+          <a:noFill/>
+          <a:ln w="12700">
+            <a:solidFill>
+              <a:srgbClr val="111111"/>
+            </a:solidFill>
+            <a:prstDash val="solid"/>
+          </a:ln>
+        </p:spPr>
+      </p:sp>
+      <p:sp>
+        <p:nvSpPr>
+          <p:cNvPr id="8" name="Shape 6"/>
+          <p:cNvSpPr/>
+          <p:nvPr/>
+        </p:nvSpPr>
+        <p:spPr>
+          <a:xfrm>
+            <a:off x="10134295" y="0"/>
+            <a:ext cx="2057400" cy="256032"/>
+          </a:xfrm>
+          <a:prstGeom prst="rect">
+            <a:avLst/>
+          </a:prstGeom>
+          <a:solidFill>
+            <a:srgbClr val="111111"/>
+          </a:solidFill>
+          <a:ln w="12700">
+            <a:solidFill>
+              <a:srgbClr val="111111">
+                <a:alpha val="0"/>
+              </a:srgbClr>
+            </a:solidFill>
+            <a:prstDash val="solid"/>
+          </a:ln>
+        </p:spPr>
+      </p:sp>
+      <p:sp>
+        <p:nvSpPr>
+          <p:cNvPr id="9" name="Shape 7"/>
           <p:cNvSpPr/>
           <p:nvPr/>
         </p:nvSpPr>
@@ -3725,7 +3800,7 @@
       </p:sp>
       <p:sp>
         <p:nvSpPr>
-          <p:cNvPr id="7" name="Shape 5"/>
+          <p:cNvPr id="10" name="Shape 8"/>
           <p:cNvSpPr/>
           <p:nvPr/>
         </p:nvSpPr>
@@ -3752,7 +3827,7 @@
       </p:sp>
       <p:sp>
         <p:nvSpPr>
-          <p:cNvPr id="8" name="Shape 6"/>
+          <p:cNvPr id="11" name="Shape 9"/>
           <p:cNvSpPr/>
           <p:nvPr/>
         </p:nvSpPr>
@@ -3779,7 +3854,7 @@
       </p:sp>
       <p:sp>
         <p:nvSpPr>
-          <p:cNvPr id="9" name="Shape 7"/>
+          <p:cNvPr id="12" name="Shape 10"/>
           <p:cNvSpPr/>
           <p:nvPr/>
         </p:nvSpPr>
@@ -3808,7 +3883,7 @@
       </p:sp>
       <p:sp>
         <p:nvSpPr>
-          <p:cNvPr id="10" name="mdpr:mdpr-design-grammar-b3a462:title:__title:mdpr-design-grammar-b3a462"/>
+          <p:cNvPr id="13" name="mdpr:mdpr-design-grammar-b3a462:title:__title:mdpr-design-grammar-b3a462"/>
           <p:cNvSpPr txBox="1"/>
           <p:nvPr/>
         </p:nvSpPr>
@@ -3940,31 +4015,8 @@
         </p:nvSpPr>
         <p:spPr>
           <a:xfrm>
-            <a:off x="475488" y="6364224"/>
-            <a:ext cx="11240719" cy="0"/>
-          </a:xfrm>
-          <a:prstGeom prst="line">
-            <a:avLst/>
-          </a:prstGeom>
-          <a:noFill/>
-          <a:ln w="12700">
-            <a:solidFill>
-              <a:srgbClr val="111111"/>
-            </a:solidFill>
-            <a:prstDash val="solid"/>
-          </a:ln>
-        </p:spPr>
-      </p:sp>
-      <p:sp>
-        <p:nvSpPr>
-          <p:cNvPr id="5" name="Shape 3"/>
-          <p:cNvSpPr/>
-          <p:nvPr/>
-        </p:nvSpPr>
-        <p:spPr>
-          <a:xfrm>
-            <a:off x="10134295" y="0"/>
-            <a:ext cx="2057400" cy="256032"/>
+            <a:off x="10033711" y="310896"/>
+            <a:ext cx="1225296" cy="201168"/>
           </a:xfrm>
           <a:prstGeom prst="rect">
             <a:avLst/>
@@ -3984,7 +4036,105 @@
       </p:sp>
       <p:sp>
         <p:nvSpPr>
+          <p:cNvPr id="5" name="Shape 3"/>
+          <p:cNvSpPr/>
+          <p:nvPr/>
+        </p:nvSpPr>
+        <p:spPr>
+          <a:xfrm>
+            <a:off x="10362895" y="457200"/>
+            <a:ext cx="859536" cy="201168"/>
+          </a:xfrm>
+          <a:prstGeom prst="rect">
+            <a:avLst/>
+          </a:prstGeom>
+          <a:solidFill>
+            <a:srgbClr val="00A6FF"/>
+          </a:solidFill>
+          <a:ln w="12700">
+            <a:solidFill>
+              <a:srgbClr val="111111"/>
+            </a:solidFill>
+            <a:prstDash val="solid"/>
+          </a:ln>
+        </p:spPr>
+      </p:sp>
+      <p:sp>
+        <p:nvSpPr>
           <p:cNvPr id="6" name="Shape 4"/>
+          <p:cNvSpPr/>
+          <p:nvPr/>
+        </p:nvSpPr>
+        <p:spPr>
+          <a:xfrm>
+            <a:off x="475488" y="768096"/>
+            <a:ext cx="1353312" cy="0"/>
+          </a:xfrm>
+          <a:prstGeom prst="line">
+            <a:avLst/>
+          </a:prstGeom>
+          <a:noFill/>
+          <a:ln w="12700">
+            <a:solidFill>
+              <a:srgbClr val="111111"/>
+            </a:solidFill>
+            <a:prstDash val="solid"/>
+          </a:ln>
+        </p:spPr>
+      </p:sp>
+      <p:sp>
+        <p:nvSpPr>
+          <p:cNvPr id="7" name="Shape 5"/>
+          <p:cNvSpPr/>
+          <p:nvPr/>
+        </p:nvSpPr>
+        <p:spPr>
+          <a:xfrm>
+            <a:off x="475488" y="6364224"/>
+            <a:ext cx="11240719" cy="0"/>
+          </a:xfrm>
+          <a:prstGeom prst="line">
+            <a:avLst/>
+          </a:prstGeom>
+          <a:noFill/>
+          <a:ln w="12700">
+            <a:solidFill>
+              <a:srgbClr val="111111"/>
+            </a:solidFill>
+            <a:prstDash val="solid"/>
+          </a:ln>
+        </p:spPr>
+      </p:sp>
+      <p:sp>
+        <p:nvSpPr>
+          <p:cNvPr id="8" name="Shape 6"/>
+          <p:cNvSpPr/>
+          <p:nvPr/>
+        </p:nvSpPr>
+        <p:spPr>
+          <a:xfrm>
+            <a:off x="10134295" y="0"/>
+            <a:ext cx="2057400" cy="256032"/>
+          </a:xfrm>
+          <a:prstGeom prst="rect">
+            <a:avLst/>
+          </a:prstGeom>
+          <a:solidFill>
+            <a:srgbClr val="111111"/>
+          </a:solidFill>
+          <a:ln w="12700">
+            <a:solidFill>
+              <a:srgbClr val="111111">
+                <a:alpha val="0"/>
+              </a:srgbClr>
+            </a:solidFill>
+            <a:prstDash val="solid"/>
+          </a:ln>
+        </p:spPr>
+      </p:sp>
+      <p:sp>
+        <p:nvSpPr>
+          <p:cNvPr id="9" name="Shape 7"/>
           <p:cNvSpPr/>
           <p:nvPr/>
         </p:nvSpPr>
@@ -4011,7 +4161,7 @@
       </p:sp>
       <p:sp>
         <p:nvSpPr>
-          <p:cNvPr id="7" name="Shape 5"/>
+          <p:cNvPr id="10" name="Shape 8"/>
           <p:cNvSpPr/>
           <p:nvPr/>
         </p:nvSpPr>
@@ -4038,7 +4188,7 @@
       </p:sp>
       <p:sp>
         <p:nvSpPr>
-          <p:cNvPr id="8" name="Shape 6"/>
+          <p:cNvPr id="11" name="Shape 9"/>
           <p:cNvSpPr/>
           <p:nvPr/>
         </p:nvSpPr>
@@ -4065,7 +4215,7 @@
       </p:sp>
       <p:sp>
         <p:nvSpPr>
-          <p:cNvPr id="9" name="Shape 7"/>
+          <p:cNvPr id="12" name="Shape 10"/>
           <p:cNvSpPr/>
           <p:nvPr/>
         </p:nvSpPr>
@@ -4092,7 +4242,7 @@
       </p:sp>
       <p:sp>
         <p:nvSpPr>
-          <p:cNvPr id="10" name="mdpr:2-2-a9df10:title:__title:2-2-a9df10"/>
+          <p:cNvPr id="13" name="mdpr:2-2-a9df10:title:__title:2-2-a9df10"/>
           <p:cNvSpPr txBox="1"/>
           <p:nvPr/>
         </p:nvSpPr>
@@ -4134,7 +4284,7 @@
       </p:sp>
       <p:sp>
         <p:nvSpPr>
-          <p:cNvPr id="11" name="mdpr:2-2-a9df10:left:block-10-chunk-2"/>
+          <p:cNvPr id="14" name="mdpr:2-2-a9df10:left:block-10-chunk-2"/>
           <p:cNvSpPr txBox="1"/>
           <p:nvPr/>
         </p:nvSpPr>
@@ -4193,7 +4343,7 @@
       </p:sp>
       <p:sp>
         <p:nvSpPr>
-          <p:cNvPr id="12" name="mdpr:2-2-a9df10:right:block-10-chunk-2"/>
+          <p:cNvPr id="15" name="mdpr:2-2-a9df10:right:block-10-chunk-2"/>
           <p:cNvSpPr txBox="1"/>
           <p:nvPr/>
         </p:nvSpPr>
@@ -4342,31 +4492,8 @@
         </p:nvSpPr>
         <p:spPr>
           <a:xfrm>
-            <a:off x="475488" y="6364224"/>
-            <a:ext cx="11240719" cy="0"/>
-          </a:xfrm>
-          <a:prstGeom prst="line">
-            <a:avLst/>
-          </a:prstGeom>
-          <a:noFill/>
-          <a:ln w="12700">
-            <a:solidFill>
-              <a:srgbClr val="111111"/>
-            </a:solidFill>
-            <a:prstDash val="solid"/>
-          </a:ln>
-        </p:spPr>
-      </p:sp>
-      <p:sp>
-        <p:nvSpPr>
-          <p:cNvPr id="5" name="Shape 3"/>
-          <p:cNvSpPr/>
-          <p:nvPr/>
-        </p:nvSpPr>
-        <p:spPr>
-          <a:xfrm>
-            <a:off x="10134295" y="0"/>
-            <a:ext cx="2057400" cy="256032"/>
+            <a:off x="10033711" y="310896"/>
+            <a:ext cx="1225296" cy="201168"/>
           </a:xfrm>
           <a:prstGeom prst="rect">
             <a:avLst/>
@@ -4386,7 +4513,105 @@
       </p:sp>
       <p:sp>
         <p:nvSpPr>
+          <p:cNvPr id="5" name="Shape 3"/>
+          <p:cNvSpPr/>
+          <p:nvPr/>
+        </p:nvSpPr>
+        <p:spPr>
+          <a:xfrm>
+            <a:off x="10362895" y="457200"/>
+            <a:ext cx="859536" cy="201168"/>
+          </a:xfrm>
+          <a:prstGeom prst="rect">
+            <a:avLst/>
+          </a:prstGeom>
+          <a:solidFill>
+            <a:srgbClr val="00A6FF"/>
+          </a:solidFill>
+          <a:ln w="12700">
+            <a:solidFill>
+              <a:srgbClr val="111111"/>
+            </a:solidFill>
+            <a:prstDash val="solid"/>
+          </a:ln>
+        </p:spPr>
+      </p:sp>
+      <p:sp>
+        <p:nvSpPr>
           <p:cNvPr id="6" name="Shape 4"/>
+          <p:cNvSpPr/>
+          <p:nvPr/>
+        </p:nvSpPr>
+        <p:spPr>
+          <a:xfrm>
+            <a:off x="475488" y="768096"/>
+            <a:ext cx="1353312" cy="0"/>
+          </a:xfrm>
+          <a:prstGeom prst="line">
+            <a:avLst/>
+          </a:prstGeom>
+          <a:noFill/>
+          <a:ln w="12700">
+            <a:solidFill>
+              <a:srgbClr val="111111"/>
+            </a:solidFill>
+            <a:prstDash val="solid"/>
+          </a:ln>
+        </p:spPr>
+      </p:sp>
+      <p:sp>
+        <p:nvSpPr>
+          <p:cNvPr id="7" name="Shape 5"/>
+          <p:cNvSpPr/>
+          <p:nvPr/>
+        </p:nvSpPr>
+        <p:spPr>
+          <a:xfrm>
+            <a:off x="475488" y="6364224"/>
+            <a:ext cx="11240719" cy="0"/>
+          </a:xfrm>
+          <a:prstGeom prst="line">
+            <a:avLst/>
+          </a:prstGeom>
+          <a:noFill/>
+          <a:ln w="12700">
+            <a:solidFill>
+              <a:srgbClr val="111111"/>
+            </a:solidFill>
+            <a:prstDash val="solid"/>
+          </a:ln>
+        </p:spPr>
+      </p:sp>
+      <p:sp>
+        <p:nvSpPr>
+          <p:cNvPr id="8" name="Shape 6"/>
+          <p:cNvSpPr/>
+          <p:nvPr/>
+        </p:nvSpPr>
+        <p:spPr>
+          <a:xfrm>
+            <a:off x="10134295" y="0"/>
+            <a:ext cx="2057400" cy="256032"/>
+          </a:xfrm>
+          <a:prstGeom prst="rect">
+            <a:avLst/>
+          </a:prstGeom>
+          <a:solidFill>
+            <a:srgbClr val="111111"/>
+          </a:solidFill>
+          <a:ln w="12700">
+            <a:solidFill>
+              <a:srgbClr val="111111">
+                <a:alpha val="0"/>
+              </a:srgbClr>
+            </a:solidFill>
+            <a:prstDash val="solid"/>
+          </a:ln>
+        </p:spPr>
+      </p:sp>
+      <p:sp>
+        <p:nvSpPr>
+          <p:cNvPr id="9" name="Shape 7"/>
           <p:cNvSpPr/>
           <p:nvPr/>
         </p:nvSpPr>
@@ -4413,7 +4638,7 @@
       </p:sp>
       <p:sp>
         <p:nvSpPr>
-          <p:cNvPr id="7" name="Shape 5"/>
+          <p:cNvPr id="10" name="Shape 8"/>
           <p:cNvSpPr/>
           <p:nvPr/>
         </p:nvSpPr>
@@ -4440,7 +4665,7 @@
       </p:sp>
       <p:sp>
         <p:nvSpPr>
-          <p:cNvPr id="8" name="mdpr:pipeline-diagram-51792c:title:__title:pipeline-diagram-51792c"/>
+          <p:cNvPr id="11" name="mdpr:pipeline-diagram-51792c:title:__title:pipeline-diagram-51792c"/>
           <p:cNvSpPr txBox="1"/>
           <p:nvPr/>
         </p:nvSpPr>
@@ -4482,7 +4707,7 @@
       </p:sp>
       <p:sp>
         <p:nvSpPr>
-          <p:cNvPr id="9" name="Shape 7"/>
+          <p:cNvPr id="12" name="Shape 10"/>
           <p:cNvSpPr/>
           <p:nvPr/>
         </p:nvSpPr>
@@ -4506,7 +4731,7 @@
       </p:sp>
       <p:sp>
         <p:nvSpPr>
-          <p:cNvPr id="10" name="Shape 8"/>
+          <p:cNvPr id="13" name="Shape 11"/>
           <p:cNvSpPr/>
           <p:nvPr/>
         </p:nvSpPr>
@@ -4530,7 +4755,7 @@
       </p:sp>
       <p:sp>
         <p:nvSpPr>
-          <p:cNvPr id="11" name="Shape 9"/>
+          <p:cNvPr id="14" name="Shape 12"/>
           <p:cNvSpPr/>
           <p:nvPr/>
         </p:nvSpPr>
@@ -4554,7 +4779,7 @@
       </p:sp>
       <p:sp>
         <p:nvSpPr>
-          <p:cNvPr id="12" name="Shape 10"/>
+          <p:cNvPr id="15" name="Shape 13"/>
           <p:cNvSpPr/>
           <p:nvPr/>
         </p:nvSpPr>
@@ -4578,7 +4803,7 @@
       </p:sp>
       <p:sp>
         <p:nvSpPr>
-          <p:cNvPr id="13" name="Shape 11"/>
+          <p:cNvPr id="16" name="Shape 14"/>
           <p:cNvSpPr/>
           <p:nvPr/>
         </p:nvSpPr>
@@ -4602,7 +4827,7 @@
       </p:sp>
       <p:sp>
         <p:nvSpPr>
-          <p:cNvPr id="14" name="Shape 12"/>
+          <p:cNvPr id="17" name="Shape 15"/>
           <p:cNvSpPr/>
           <p:nvPr/>
         </p:nvSpPr>
@@ -4636,7 +4861,7 @@
       </p:sp>
       <p:sp>
         <p:nvSpPr>
-          <p:cNvPr id="15" name="Shape 13"/>
+          <p:cNvPr id="18" name="Shape 16"/>
           <p:cNvSpPr/>
           <p:nvPr/>
         </p:nvSpPr>
@@ -4663,7 +4888,7 @@
       </p:sp>
       <p:sp>
         <p:nvSpPr>
-          <p:cNvPr id="16" name="Shape 14"/>
+          <p:cNvPr id="19" name="Shape 17"/>
           <p:cNvSpPr/>
           <p:nvPr/>
         </p:nvSpPr>
@@ -4690,7 +4915,7 @@
       </p:sp>
       <p:sp>
         <p:nvSpPr>
-          <p:cNvPr id="17" name="Text 15"/>
+          <p:cNvPr id="20" name="Text 18"/>
           <p:cNvSpPr txBox="1"/>
           <p:nvPr/>
         </p:nvSpPr>
@@ -4734,7 +4959,7 @@
       </p:sp>
       <p:sp>
         <p:nvSpPr>
-          <p:cNvPr id="18" name="Text 16"/>
+          <p:cNvPr id="21" name="Text 19"/>
           <p:cNvSpPr txBox="1"/>
           <p:nvPr/>
         </p:nvSpPr>
@@ -4778,7 +5003,7 @@
       </p:sp>
       <p:sp>
         <p:nvSpPr>
-          <p:cNvPr id="19" name="Shape 17"/>
+          <p:cNvPr id="22" name="Shape 20"/>
           <p:cNvSpPr/>
           <p:nvPr/>
         </p:nvSpPr>
@@ -4812,7 +5037,7 @@
       </p:sp>
       <p:sp>
         <p:nvSpPr>
-          <p:cNvPr id="20" name="Shape 18"/>
+          <p:cNvPr id="23" name="Shape 21"/>
           <p:cNvSpPr/>
           <p:nvPr/>
         </p:nvSpPr>
@@ -4839,7 +5064,7 @@
       </p:sp>
       <p:sp>
         <p:nvSpPr>
-          <p:cNvPr id="21" name="Shape 19"/>
+          <p:cNvPr id="24" name="Shape 22"/>
           <p:cNvSpPr/>
           <p:nvPr/>
         </p:nvSpPr>
@@ -4866,7 +5091,7 @@
       </p:sp>
       <p:sp>
         <p:nvSpPr>
-          <p:cNvPr id="22" name="Text 20"/>
+          <p:cNvPr id="25" name="Text 23"/>
           <p:cNvSpPr txBox="1"/>
           <p:nvPr/>
         </p:nvSpPr>
@@ -4910,7 +5135,7 @@
       </p:sp>
       <p:sp>
         <p:nvSpPr>
-          <p:cNvPr id="23" name="Text 21"/>
+          <p:cNvPr id="26" name="Text 24"/>
           <p:cNvSpPr txBox="1"/>
           <p:nvPr/>
         </p:nvSpPr>
@@ -4954,7 +5179,7 @@
       </p:sp>
       <p:sp>
         <p:nvSpPr>
-          <p:cNvPr id="24" name="Shape 22"/>
+          <p:cNvPr id="27" name="Shape 25"/>
           <p:cNvSpPr/>
           <p:nvPr/>
         </p:nvSpPr>
@@ -4988,7 +5213,7 @@
       </p:sp>
       <p:sp>
         <p:nvSpPr>
-          <p:cNvPr id="25" name="Shape 23"/>
+          <p:cNvPr id="28" name="Shape 26"/>
           <p:cNvSpPr/>
           <p:nvPr/>
         </p:nvSpPr>
@@ -5015,7 +5240,7 @@
       </p:sp>
       <p:sp>
         <p:nvSpPr>
-          <p:cNvPr id="26" name="Shape 24"/>
+          <p:cNvPr id="29" name="Shape 27"/>
           <p:cNvSpPr/>
           <p:nvPr/>
         </p:nvSpPr>
@@ -5042,7 +5267,7 @@
       </p:sp>
       <p:sp>
         <p:nvSpPr>
-          <p:cNvPr id="27" name="Text 25"/>
+          <p:cNvPr id="30" name="Text 28"/>
           <p:cNvSpPr txBox="1"/>
           <p:nvPr/>
         </p:nvSpPr>
@@ -5086,7 +5311,7 @@
       </p:sp>
       <p:sp>
         <p:nvSpPr>
-          <p:cNvPr id="28" name="Text 26"/>
+          <p:cNvPr id="31" name="Text 29"/>
           <p:cNvSpPr txBox="1"/>
           <p:nvPr/>
         </p:nvSpPr>
@@ -5130,7 +5355,7 @@
       </p:sp>
       <p:sp>
         <p:nvSpPr>
-          <p:cNvPr id="29" name="Shape 27"/>
+          <p:cNvPr id="32" name="Shape 30"/>
           <p:cNvSpPr/>
           <p:nvPr/>
         </p:nvSpPr>
@@ -5164,7 +5389,7 @@
       </p:sp>
       <p:sp>
         <p:nvSpPr>
-          <p:cNvPr id="30" name="Shape 28"/>
+          <p:cNvPr id="33" name="Shape 31"/>
           <p:cNvSpPr/>
           <p:nvPr/>
         </p:nvSpPr>
@@ -5191,7 +5416,7 @@
       </p:sp>
       <p:sp>
         <p:nvSpPr>
-          <p:cNvPr id="31" name="Shape 29"/>
+          <p:cNvPr id="34" name="Shape 32"/>
           <p:cNvSpPr/>
           <p:nvPr/>
         </p:nvSpPr>
@@ -5218,7 +5443,7 @@
       </p:sp>
       <p:sp>
         <p:nvSpPr>
-          <p:cNvPr id="32" name="Text 30"/>
+          <p:cNvPr id="35" name="Text 33"/>
           <p:cNvSpPr txBox="1"/>
           <p:nvPr/>
         </p:nvSpPr>
@@ -5262,7 +5487,7 @@
       </p:sp>
       <p:sp>
         <p:nvSpPr>
-          <p:cNvPr id="33" name="Text 31"/>
+          <p:cNvPr id="36" name="Text 34"/>
           <p:cNvSpPr txBox="1"/>
           <p:nvPr/>
         </p:nvSpPr>
@@ -5306,7 +5531,7 @@
       </p:sp>
       <p:sp>
         <p:nvSpPr>
-          <p:cNvPr id="34" name="Shape 32"/>
+          <p:cNvPr id="37" name="Shape 35"/>
           <p:cNvSpPr/>
           <p:nvPr/>
         </p:nvSpPr>
@@ -5340,7 +5565,7 @@
       </p:sp>
       <p:sp>
         <p:nvSpPr>
-          <p:cNvPr id="35" name="Shape 33"/>
+          <p:cNvPr id="38" name="Shape 36"/>
           <p:cNvSpPr/>
           <p:nvPr/>
         </p:nvSpPr>
@@ -5367,7 +5592,7 @@
       </p:sp>
       <p:sp>
         <p:nvSpPr>
-          <p:cNvPr id="36" name="Shape 34"/>
+          <p:cNvPr id="39" name="Shape 37"/>
           <p:cNvSpPr/>
           <p:nvPr/>
         </p:nvSpPr>
@@ -5394,7 +5619,7 @@
       </p:sp>
       <p:sp>
         <p:nvSpPr>
-          <p:cNvPr id="37" name="Text 35"/>
+          <p:cNvPr id="40" name="Text 38"/>
           <p:cNvSpPr txBox="1"/>
           <p:nvPr/>
         </p:nvSpPr>
@@ -5438,7 +5663,7 @@
       </p:sp>
       <p:sp>
         <p:nvSpPr>
-          <p:cNvPr id="38" name="Text 36"/>
+          <p:cNvPr id="41" name="Text 39"/>
           <p:cNvSpPr txBox="1"/>
           <p:nvPr/>
         </p:nvSpPr>
@@ -5482,7 +5707,7 @@
       </p:sp>
       <p:sp>
         <p:nvSpPr>
-          <p:cNvPr id="39" name="Shape 37"/>
+          <p:cNvPr id="42" name="Shape 40"/>
           <p:cNvSpPr/>
           <p:nvPr/>
         </p:nvSpPr>
@@ -5516,7 +5741,7 @@
       </p:sp>
       <p:sp>
         <p:nvSpPr>
-          <p:cNvPr id="40" name="Shape 38"/>
+          <p:cNvPr id="43" name="Shape 41"/>
           <p:cNvSpPr/>
           <p:nvPr/>
         </p:nvSpPr>
@@ -5543,7 +5768,7 @@
       </p:sp>
       <p:sp>
         <p:nvSpPr>
-          <p:cNvPr id="41" name="Shape 39"/>
+          <p:cNvPr id="44" name="Shape 42"/>
           <p:cNvSpPr/>
           <p:nvPr/>
         </p:nvSpPr>
@@ -5570,7 +5795,7 @@
       </p:sp>
       <p:sp>
         <p:nvSpPr>
-          <p:cNvPr id="42" name="Text 40"/>
+          <p:cNvPr id="45" name="Text 43"/>
           <p:cNvSpPr txBox="1"/>
           <p:nvPr/>
         </p:nvSpPr>
@@ -5614,7 +5839,7 @@
       </p:sp>
       <p:sp>
         <p:nvSpPr>
-          <p:cNvPr id="43" name="Text 41"/>
+          <p:cNvPr id="46" name="Text 44"/>
           <p:cNvSpPr txBox="1"/>
           <p:nvPr/>
         </p:nvSpPr>
@@ -5748,31 +5973,8 @@
         </p:nvSpPr>
         <p:spPr>
           <a:xfrm>
-            <a:off x="475488" y="6364224"/>
-            <a:ext cx="11240719" cy="0"/>
-          </a:xfrm>
-          <a:prstGeom prst="line">
-            <a:avLst/>
-          </a:prstGeom>
-          <a:noFill/>
-          <a:ln w="12700">
-            <a:solidFill>
-              <a:srgbClr val="111111"/>
-            </a:solidFill>
-            <a:prstDash val="solid"/>
-          </a:ln>
-        </p:spPr>
-      </p:sp>
-      <p:sp>
-        <p:nvSpPr>
-          <p:cNvPr id="5" name="Shape 3"/>
-          <p:cNvSpPr/>
-          <p:nvPr/>
-        </p:nvSpPr>
-        <p:spPr>
-          <a:xfrm>
-            <a:off x="10134295" y="0"/>
-            <a:ext cx="2057400" cy="256032"/>
+            <a:off x="10033711" y="310896"/>
+            <a:ext cx="1225296" cy="201168"/>
           </a:xfrm>
           <a:prstGeom prst="rect">
             <a:avLst/>
@@ -5792,7 +5994,105 @@
       </p:sp>
       <p:sp>
         <p:nvSpPr>
+          <p:cNvPr id="5" name="Shape 3"/>
+          <p:cNvSpPr/>
+          <p:nvPr/>
+        </p:nvSpPr>
+        <p:spPr>
+          <a:xfrm>
+            <a:off x="10362895" y="457200"/>
+            <a:ext cx="859536" cy="201168"/>
+          </a:xfrm>
+          <a:prstGeom prst="rect">
+            <a:avLst/>
+          </a:prstGeom>
+          <a:solidFill>
+            <a:srgbClr val="00A6FF"/>
+          </a:solidFill>
+          <a:ln w="12700">
+            <a:solidFill>
+              <a:srgbClr val="111111"/>
+            </a:solidFill>
+            <a:prstDash val="solid"/>
+          </a:ln>
+        </p:spPr>
+      </p:sp>
+      <p:sp>
+        <p:nvSpPr>
           <p:cNvPr id="6" name="Shape 4"/>
+          <p:cNvSpPr/>
+          <p:nvPr/>
+        </p:nvSpPr>
+        <p:spPr>
+          <a:xfrm>
+            <a:off x="475488" y="768096"/>
+            <a:ext cx="1353312" cy="0"/>
+          </a:xfrm>
+          <a:prstGeom prst="line">
+            <a:avLst/>
+          </a:prstGeom>
+          <a:noFill/>
+          <a:ln w="12700">
+            <a:solidFill>
+              <a:srgbClr val="111111"/>
+            </a:solidFill>
+            <a:prstDash val="solid"/>
+          </a:ln>
+        </p:spPr>
+      </p:sp>
+      <p:sp>
+        <p:nvSpPr>
+          <p:cNvPr id="7" name="Shape 5"/>
+          <p:cNvSpPr/>
+          <p:nvPr/>
+        </p:nvSpPr>
+        <p:spPr>
+          <a:xfrm>
+            <a:off x="475488" y="6364224"/>
+            <a:ext cx="11240719" cy="0"/>
+          </a:xfrm>
+          <a:prstGeom prst="line">
+            <a:avLst/>
+          </a:prstGeom>
+          <a:noFill/>
+          <a:ln w="12700">
+            <a:solidFill>
+              <a:srgbClr val="111111"/>
+            </a:solidFill>
+            <a:prstDash val="solid"/>
+          </a:ln>
+        </p:spPr>
+      </p:sp>
+      <p:sp>
+        <p:nvSpPr>
+          <p:cNvPr id="8" name="Shape 6"/>
+          <p:cNvSpPr/>
+          <p:nvPr/>
+        </p:nvSpPr>
+        <p:spPr>
+          <a:xfrm>
+            <a:off x="10134295" y="0"/>
+            <a:ext cx="2057400" cy="256032"/>
+          </a:xfrm>
+          <a:prstGeom prst="rect">
+            <a:avLst/>
+          </a:prstGeom>
+          <a:solidFill>
+            <a:srgbClr val="111111"/>
+          </a:solidFill>
+          <a:ln w="12700">
+            <a:solidFill>
+              <a:srgbClr val="111111">
+                <a:alpha val="0"/>
+              </a:srgbClr>
+            </a:solidFill>
+            <a:prstDash val="solid"/>
+          </a:ln>
+        </p:spPr>
+      </p:sp>
+      <p:sp>
+        <p:nvSpPr>
+          <p:cNvPr id="9" name="Shape 7"/>
           <p:cNvSpPr/>
           <p:nvPr/>
         </p:nvSpPr>
@@ -5819,7 +6119,7 @@
       </p:sp>
       <p:sp>
         <p:nvSpPr>
-          <p:cNvPr id="7" name="Shape 5"/>
+          <p:cNvPr id="10" name="Shape 8"/>
           <p:cNvSpPr/>
           <p:nvPr/>
         </p:nvSpPr>
@@ -5846,7 +6146,7 @@
       </p:sp>
       <p:pic>
         <p:nvPicPr>
-          <p:cNvPr id="8" name="Image 0" descr="preencoded.png">    </p:cNvPr>
+          <p:cNvPr id="11" name="Image 0" descr="preencoded.png">    </p:cNvPr>
           <p:cNvPicPr>
             <a:picLocks noChangeAspect="1"/>
           </p:cNvPicPr>
@@ -5876,7 +6176,7 @@
       </p:pic>
       <p:pic>
         <p:nvPicPr>
-          <p:cNvPr id="9" name="Image 1" descr="preencoded.png">    </p:cNvPr>
+          <p:cNvPr id="12" name="Image 1" descr="preencoded.png">    </p:cNvPr>
           <p:cNvPicPr>
             <a:picLocks noChangeAspect="1"/>
           </p:cNvPicPr>
@@ -5906,7 +6206,7 @@
       </p:pic>
       <p:pic>
         <p:nvPicPr>
-          <p:cNvPr id="10" name="Image 2" descr="preencoded.png">    </p:cNvPr>
+          <p:cNvPr id="13" name="Image 2" descr="preencoded.png">    </p:cNvPr>
           <p:cNvPicPr>
             <a:picLocks noChangeAspect="1"/>
           </p:cNvPicPr>
@@ -5936,7 +6236,7 @@
       </p:pic>
       <p:pic>
         <p:nvPicPr>
-          <p:cNvPr id="11" name="Image 3" descr="preencoded.png">    </p:cNvPr>
+          <p:cNvPr id="14" name="Image 3" descr="preencoded.png">    </p:cNvPr>
           <p:cNvPicPr>
             <a:picLocks noChangeAspect="1"/>
           </p:cNvPicPr>
@@ -5966,7 +6266,7 @@
       </p:pic>
       <p:sp>
         <p:nvSpPr>
-          <p:cNvPr id="12" name="Shape 6"/>
+          <p:cNvPr id="15" name="Shape 9"/>
           <p:cNvSpPr/>
           <p:nvPr/>
         </p:nvSpPr>
@@ -5993,7 +6293,7 @@
       </p:sp>
       <p:sp>
         <p:nvSpPr>
-          <p:cNvPr id="13" name="Shape 7"/>
+          <p:cNvPr id="16" name="Shape 10"/>
           <p:cNvSpPr/>
           <p:nvPr/>
         </p:nvSpPr>
@@ -6020,7 +6320,7 @@
       </p:sp>
       <p:sp>
         <p:nvSpPr>
-          <p:cNvPr id="14" name="Shape 8"/>
+          <p:cNvPr id="17" name="Shape 11"/>
           <p:cNvSpPr/>
           <p:nvPr/>
         </p:nvSpPr>
@@ -6047,7 +6347,7 @@
       </p:sp>
       <p:sp>
         <p:nvSpPr>
-          <p:cNvPr id="15" name="Shape 9"/>
+          <p:cNvPr id="18" name="Shape 12"/>
           <p:cNvSpPr/>
           <p:nvPr/>
         </p:nvSpPr>
@@ -6074,7 +6374,7 @@
       </p:sp>
       <p:sp>
         <p:nvSpPr>
-          <p:cNvPr id="16" name="mdpr:1-2-e3669a:title:__title:1-2-e3669a"/>
+          <p:cNvPr id="19" name="mdpr:1-2-e3669a:title:__title:1-2-e3669a"/>
           <p:cNvSpPr txBox="1"/>
           <p:nvPr/>
         </p:nvSpPr>
@@ -6116,7 +6416,7 @@
       </p:sp>
       <p:sp>
         <p:nvSpPr>
-          <p:cNvPr id="17" name="Shape 11"/>
+          <p:cNvPr id="20" name="Shape 14"/>
           <p:cNvSpPr/>
           <p:nvPr/>
         </p:nvSpPr>
@@ -6143,7 +6443,7 @@
       </p:sp>
       <p:pic>
         <p:nvPicPr>
-          <p:cNvPr id="18" name="Image 4" descr="article icon from tabler-icons (MIT)">    </p:cNvPr>
+          <p:cNvPr id="21" name="Image 4" descr="article icon from tabler-icons (MIT)">    </p:cNvPr>
           <p:cNvPicPr>
             <a:picLocks noChangeAspect="1"/>
           </p:cNvPicPr>
@@ -6173,7 +6473,7 @@
       </p:pic>
       <p:sp>
         <p:nvSpPr>
-          <p:cNvPr id="19" name="mdpr:1-2-e3669a:item-1:block-15-chunk-1"/>
+          <p:cNvPr id="22" name="mdpr:1-2-e3669a:item-1:block-15-chunk-1"/>
           <p:cNvSpPr txBox="1"/>
           <p:nvPr/>
         </p:nvSpPr>
@@ -6232,7 +6532,7 @@
       </p:sp>
       <p:sp>
         <p:nvSpPr>
-          <p:cNvPr id="20" name="Shape 13"/>
+          <p:cNvPr id="23" name="Shape 16"/>
           <p:cNvSpPr/>
           <p:nvPr/>
         </p:nvSpPr>
@@ -6259,7 +6559,7 @@
       </p:sp>
       <p:pic>
         <p:nvPicPr>
-          <p:cNvPr id="21" name="Image 5" descr="table icon from tabler-icons (MIT)">    </p:cNvPr>
+          <p:cNvPr id="24" name="Image 5" descr="table icon from tabler-icons (MIT)">    </p:cNvPr>
           <p:cNvPicPr>
             <a:picLocks noChangeAspect="1"/>
           </p:cNvPicPr>
@@ -6289,7 +6589,7 @@
       </p:pic>
       <p:sp>
         <p:nvSpPr>
-          <p:cNvPr id="22" name="mdpr:1-2-e3669a:item-2:block-15-chunk-1"/>
+          <p:cNvPr id="25" name="mdpr:1-2-e3669a:item-2:block-15-chunk-1"/>
           <p:cNvSpPr txBox="1"/>
           <p:nvPr/>
         </p:nvSpPr>
@@ -6348,7 +6648,7 @@
       </p:sp>
       <p:sp>
         <p:nvSpPr>
-          <p:cNvPr id="23" name="Shape 15"/>
+          <p:cNvPr id="26" name="Shape 18"/>
           <p:cNvSpPr/>
           <p:nvPr/>
         </p:nvSpPr>
@@ -6375,7 +6675,7 @@
       </p:sp>
       <p:pic>
         <p:nvPicPr>
-          <p:cNvPr id="24" name="Image 6" descr="chart icon from tabler-icons (MIT)">    </p:cNvPr>
+          <p:cNvPr id="27" name="Image 6" descr="chart icon from tabler-icons (MIT)">    </p:cNvPr>
           <p:cNvPicPr>
             <a:picLocks noChangeAspect="1"/>
           </p:cNvPicPr>
@@ -6405,7 +6705,7 @@
       </p:pic>
       <p:sp>
         <p:nvSpPr>
-          <p:cNvPr id="25" name="mdpr:1-2-e3669a:item-3:block-15-chunk-1"/>
+          <p:cNvPr id="28" name="mdpr:1-2-e3669a:item-3:block-15-chunk-1"/>
           <p:cNvSpPr txBox="1"/>
           <p:nvPr/>
         </p:nvSpPr>
@@ -6464,7 +6764,7 @@
       </p:sp>
       <p:sp>
         <p:nvSpPr>
-          <p:cNvPr id="26" name="Shape 17"/>
+          <p:cNvPr id="29" name="Shape 20"/>
           <p:cNvSpPr/>
           <p:nvPr/>
         </p:nvSpPr>
@@ -6491,7 +6791,7 @@
       </p:sp>
       <p:pic>
         <p:nvPicPr>
-          <p:cNvPr id="27" name="Image 7" descr="flow icon from tabler-icons (MIT)">    </p:cNvPr>
+          <p:cNvPr id="30" name="Image 7" descr="flow icon from tabler-icons (MIT)">    </p:cNvPr>
           <p:cNvPicPr>
             <a:picLocks noChangeAspect="1"/>
           </p:cNvPicPr>
@@ -6521,7 +6821,7 @@
       </p:pic>
       <p:sp>
         <p:nvSpPr>
-          <p:cNvPr id="28" name="mdpr:1-2-e3669a:item-4:block-15-chunk-1"/>
+          <p:cNvPr id="31" name="mdpr:1-2-e3669a:item-4:block-15-chunk-1"/>
           <p:cNvSpPr txBox="1"/>
           <p:nvPr/>
         </p:nvSpPr>
@@ -6670,31 +6970,8 @@
         </p:nvSpPr>
         <p:spPr>
           <a:xfrm>
-            <a:off x="475488" y="6364224"/>
-            <a:ext cx="11240719" cy="0"/>
-          </a:xfrm>
-          <a:prstGeom prst="line">
-            <a:avLst/>
-          </a:prstGeom>
-          <a:noFill/>
-          <a:ln w="12700">
-            <a:solidFill>
-              <a:srgbClr val="111111"/>
-            </a:solidFill>
-            <a:prstDash val="solid"/>
-          </a:ln>
-        </p:spPr>
-      </p:sp>
-      <p:sp>
-        <p:nvSpPr>
-          <p:cNvPr id="5" name="Shape 3"/>
-          <p:cNvSpPr/>
-          <p:nvPr/>
-        </p:nvSpPr>
-        <p:spPr>
-          <a:xfrm>
-            <a:off x="10134295" y="0"/>
-            <a:ext cx="2057400" cy="256032"/>
+            <a:off x="10033711" y="310896"/>
+            <a:ext cx="1225296" cy="201168"/>
           </a:xfrm>
           <a:prstGeom prst="rect">
             <a:avLst/>
@@ -6714,7 +6991,105 @@
       </p:sp>
       <p:sp>
         <p:nvSpPr>
+          <p:cNvPr id="5" name="Shape 3"/>
+          <p:cNvSpPr/>
+          <p:nvPr/>
+        </p:nvSpPr>
+        <p:spPr>
+          <a:xfrm>
+            <a:off x="10362895" y="457200"/>
+            <a:ext cx="859536" cy="201168"/>
+          </a:xfrm>
+          <a:prstGeom prst="rect">
+            <a:avLst/>
+          </a:prstGeom>
+          <a:solidFill>
+            <a:srgbClr val="00A6FF"/>
+          </a:solidFill>
+          <a:ln w="12700">
+            <a:solidFill>
+              <a:srgbClr val="111111"/>
+            </a:solidFill>
+            <a:prstDash val="solid"/>
+          </a:ln>
+        </p:spPr>
+      </p:sp>
+      <p:sp>
+        <p:nvSpPr>
           <p:cNvPr id="6" name="Shape 4"/>
+          <p:cNvSpPr/>
+          <p:nvPr/>
+        </p:nvSpPr>
+        <p:spPr>
+          <a:xfrm>
+            <a:off x="475488" y="768096"/>
+            <a:ext cx="1353312" cy="0"/>
+          </a:xfrm>
+          <a:prstGeom prst="line">
+            <a:avLst/>
+          </a:prstGeom>
+          <a:noFill/>
+          <a:ln w="12700">
+            <a:solidFill>
+              <a:srgbClr val="111111"/>
+            </a:solidFill>
+            <a:prstDash val="solid"/>
+          </a:ln>
+        </p:spPr>
+      </p:sp>
+      <p:sp>
+        <p:nvSpPr>
+          <p:cNvPr id="7" name="Shape 5"/>
+          <p:cNvSpPr/>
+          <p:nvPr/>
+        </p:nvSpPr>
+        <p:spPr>
+          <a:xfrm>
+            <a:off x="475488" y="6364224"/>
+            <a:ext cx="11240719" cy="0"/>
+          </a:xfrm>
+          <a:prstGeom prst="line">
+            <a:avLst/>
+          </a:prstGeom>
+          <a:noFill/>
+          <a:ln w="12700">
+            <a:solidFill>
+              <a:srgbClr val="111111"/>
+            </a:solidFill>
+            <a:prstDash val="solid"/>
+          </a:ln>
+        </p:spPr>
+      </p:sp>
+      <p:sp>
+        <p:nvSpPr>
+          <p:cNvPr id="8" name="Shape 6"/>
+          <p:cNvSpPr/>
+          <p:nvPr/>
+        </p:nvSpPr>
+        <p:spPr>
+          <a:xfrm>
+            <a:off x="10134295" y="0"/>
+            <a:ext cx="2057400" cy="256032"/>
+          </a:xfrm>
+          <a:prstGeom prst="rect">
+            <a:avLst/>
+          </a:prstGeom>
+          <a:solidFill>
+            <a:srgbClr val="111111"/>
+          </a:solidFill>
+          <a:ln w="12700">
+            <a:solidFill>
+              <a:srgbClr val="111111">
+                <a:alpha val="0"/>
+              </a:srgbClr>
+            </a:solidFill>
+            <a:prstDash val="solid"/>
+          </a:ln>
+        </p:spPr>
+      </p:sp>
+      <p:sp>
+        <p:nvSpPr>
+          <p:cNvPr id="9" name="Shape 7"/>
           <p:cNvSpPr/>
           <p:nvPr/>
         </p:nvSpPr>
@@ -6741,7 +7116,7 @@
       </p:sp>
       <p:sp>
         <p:nvSpPr>
-          <p:cNvPr id="7" name="Shape 5"/>
+          <p:cNvPr id="10" name="Shape 8"/>
           <p:cNvSpPr/>
           <p:nvPr/>
         </p:nvSpPr>
@@ -6768,7 +7143,7 @@
       </p:sp>
       <p:sp>
         <p:nvSpPr>
-          <p:cNvPr id="8" name="Shape 6"/>
+          <p:cNvPr id="11" name="Shape 9"/>
           <p:cNvSpPr/>
           <p:nvPr/>
         </p:nvSpPr>
@@ -6795,7 +7170,7 @@
       </p:sp>
       <p:sp>
         <p:nvSpPr>
-          <p:cNvPr id="9" name="Shape 7"/>
+          <p:cNvPr id="12" name="Shape 10"/>
           <p:cNvSpPr/>
           <p:nvPr/>
         </p:nvSpPr>
@@ -6822,7 +7197,7 @@
       </p:sp>
       <p:sp>
         <p:nvSpPr>
-          <p:cNvPr id="10" name="mdpr:2-2-c23e9b:title:__title:2-2-c23e9b"/>
+          <p:cNvPr id="13" name="mdpr:2-2-c23e9b:title:__title:2-2-c23e9b"/>
           <p:cNvSpPr txBox="1"/>
           <p:nvPr/>
         </p:nvSpPr>
@@ -6864,7 +7239,7 @@
       </p:sp>
       <p:sp>
         <p:nvSpPr>
-          <p:cNvPr id="11" name="mdpr:2-2-c23e9b:left:block-15-chunk-2"/>
+          <p:cNvPr id="14" name="mdpr:2-2-c23e9b:left:block-15-chunk-2"/>
           <p:cNvSpPr txBox="1"/>
           <p:nvPr/>
         </p:nvSpPr>
@@ -6923,7 +7298,7 @@
       </p:sp>
       <p:sp>
         <p:nvSpPr>
-          <p:cNvPr id="12" name="mdpr:2-2-c23e9b:right:block-15-chunk-2"/>
+          <p:cNvPr id="15" name="mdpr:2-2-c23e9b:right:block-15-chunk-2"/>
           <p:cNvSpPr txBox="1"/>
           <p:nvPr/>
         </p:nvSpPr>
@@ -7072,31 +7447,8 @@
         </p:nvSpPr>
         <p:spPr>
           <a:xfrm>
-            <a:off x="475488" y="6364224"/>
-            <a:ext cx="11240719" cy="0"/>
-          </a:xfrm>
-          <a:prstGeom prst="line">
-            <a:avLst/>
-          </a:prstGeom>
-          <a:noFill/>
-          <a:ln w="12700">
-            <a:solidFill>
-              <a:srgbClr val="111111"/>
-            </a:solidFill>
-            <a:prstDash val="solid"/>
-          </a:ln>
-        </p:spPr>
-      </p:sp>
-      <p:sp>
-        <p:nvSpPr>
-          <p:cNvPr id="5" name="Shape 3"/>
-          <p:cNvSpPr/>
-          <p:nvPr/>
-        </p:nvSpPr>
-        <p:spPr>
-          <a:xfrm>
-            <a:off x="10134295" y="0"/>
-            <a:ext cx="2057400" cy="256032"/>
+            <a:off x="10033711" y="310896"/>
+            <a:ext cx="1225296" cy="201168"/>
           </a:xfrm>
           <a:prstGeom prst="rect">
             <a:avLst/>
@@ -7116,7 +7468,105 @@
       </p:sp>
       <p:sp>
         <p:nvSpPr>
+          <p:cNvPr id="5" name="Shape 3"/>
+          <p:cNvSpPr/>
+          <p:nvPr/>
+        </p:nvSpPr>
+        <p:spPr>
+          <a:xfrm>
+            <a:off x="10362895" y="457200"/>
+            <a:ext cx="859536" cy="201168"/>
+          </a:xfrm>
+          <a:prstGeom prst="rect">
+            <a:avLst/>
+          </a:prstGeom>
+          <a:solidFill>
+            <a:srgbClr val="00A6FF"/>
+          </a:solidFill>
+          <a:ln w="12700">
+            <a:solidFill>
+              <a:srgbClr val="111111"/>
+            </a:solidFill>
+            <a:prstDash val="solid"/>
+          </a:ln>
+        </p:spPr>
+      </p:sp>
+      <p:sp>
+        <p:nvSpPr>
           <p:cNvPr id="6" name="Shape 4"/>
+          <p:cNvSpPr/>
+          <p:nvPr/>
+        </p:nvSpPr>
+        <p:spPr>
+          <a:xfrm>
+            <a:off x="475488" y="768096"/>
+            <a:ext cx="1353312" cy="0"/>
+          </a:xfrm>
+          <a:prstGeom prst="line">
+            <a:avLst/>
+          </a:prstGeom>
+          <a:noFill/>
+          <a:ln w="12700">
+            <a:solidFill>
+              <a:srgbClr val="111111"/>
+            </a:solidFill>
+            <a:prstDash val="solid"/>
+          </a:ln>
+        </p:spPr>
+      </p:sp>
+      <p:sp>
+        <p:nvSpPr>
+          <p:cNvPr id="7" name="Shape 5"/>
+          <p:cNvSpPr/>
+          <p:nvPr/>
+        </p:nvSpPr>
+        <p:spPr>
+          <a:xfrm>
+            <a:off x="475488" y="6364224"/>
+            <a:ext cx="11240719" cy="0"/>
+          </a:xfrm>
+          <a:prstGeom prst="line">
+            <a:avLst/>
+          </a:prstGeom>
+          <a:noFill/>
+          <a:ln w="12700">
+            <a:solidFill>
+              <a:srgbClr val="111111"/>
+            </a:solidFill>
+            <a:prstDash val="solid"/>
+          </a:ln>
+        </p:spPr>
+      </p:sp>
+      <p:sp>
+        <p:nvSpPr>
+          <p:cNvPr id="8" name="Shape 6"/>
+          <p:cNvSpPr/>
+          <p:nvPr/>
+        </p:nvSpPr>
+        <p:spPr>
+          <a:xfrm>
+            <a:off x="10134295" y="0"/>
+            <a:ext cx="2057400" cy="256032"/>
+          </a:xfrm>
+          <a:prstGeom prst="rect">
+            <a:avLst/>
+          </a:prstGeom>
+          <a:solidFill>
+            <a:srgbClr val="111111"/>
+          </a:solidFill>
+          <a:ln w="12700">
+            <a:solidFill>
+              <a:srgbClr val="111111">
+                <a:alpha val="0"/>
+              </a:srgbClr>
+            </a:solidFill>
+            <a:prstDash val="solid"/>
+          </a:ln>
+        </p:spPr>
+      </p:sp>
+      <p:sp>
+        <p:nvSpPr>
+          <p:cNvPr id="9" name="Shape 7"/>
           <p:cNvSpPr/>
           <p:nvPr/>
         </p:nvSpPr>
@@ -7143,7 +7593,7 @@
       </p:sp>
       <p:sp>
         <p:nvSpPr>
-          <p:cNvPr id="7" name="Shape 5"/>
+          <p:cNvPr id="10" name="Shape 8"/>
           <p:cNvSpPr/>
           <p:nvPr/>
         </p:nvSpPr>
@@ -7170,7 +7620,7 @@
       </p:sp>
       <p:pic>
         <p:nvPicPr>
-          <p:cNvPr id="8" name="Image 0" descr="preencoded.png">    </p:cNvPr>
+          <p:cNvPr id="11" name="Image 0" descr="preencoded.png">    </p:cNvPr>
           <p:cNvPicPr>
             <a:picLocks noChangeAspect="1"/>
           </p:cNvPicPr>
@@ -7200,7 +7650,7 @@
       </p:pic>
       <p:sp>
         <p:nvSpPr>
-          <p:cNvPr id="9" name="mdpr:table-coherence-2f9a7b:title:__title:table-coherence-2f9a7b"/>
+          <p:cNvPr id="12" name="mdpr:table-coherence-2f9a7b:title:__title:table-coherence-2f9a7b"/>
           <p:cNvSpPr txBox="1"/>
           <p:nvPr/>
         </p:nvSpPr>
@@ -8387,31 +8837,8 @@
         </p:nvSpPr>
         <p:spPr>
           <a:xfrm>
-            <a:off x="475488" y="6364224"/>
-            <a:ext cx="11240719" cy="0"/>
-          </a:xfrm>
-          <a:prstGeom prst="line">
-            <a:avLst/>
-          </a:prstGeom>
-          <a:noFill/>
-          <a:ln w="12700">
-            <a:solidFill>
-              <a:srgbClr val="111111"/>
-            </a:solidFill>
-            <a:prstDash val="solid"/>
-          </a:ln>
-        </p:spPr>
-      </p:sp>
-      <p:sp>
-        <p:nvSpPr>
-          <p:cNvPr id="5" name="Shape 3"/>
-          <p:cNvSpPr/>
-          <p:nvPr/>
-        </p:nvSpPr>
-        <p:spPr>
-          <a:xfrm>
-            <a:off x="10134295" y="0"/>
-            <a:ext cx="2057400" cy="256032"/>
+            <a:off x="10033711" y="310896"/>
+            <a:ext cx="1225296" cy="201168"/>
           </a:xfrm>
           <a:prstGeom prst="rect">
             <a:avLst/>
@@ -8431,7 +8858,105 @@
       </p:sp>
       <p:sp>
         <p:nvSpPr>
+          <p:cNvPr id="5" name="Shape 3"/>
+          <p:cNvSpPr/>
+          <p:nvPr/>
+        </p:nvSpPr>
+        <p:spPr>
+          <a:xfrm>
+            <a:off x="10362895" y="457200"/>
+            <a:ext cx="859536" cy="201168"/>
+          </a:xfrm>
+          <a:prstGeom prst="rect">
+            <a:avLst/>
+          </a:prstGeom>
+          <a:solidFill>
+            <a:srgbClr val="00A6FF"/>
+          </a:solidFill>
+          <a:ln w="12700">
+            <a:solidFill>
+              <a:srgbClr val="111111"/>
+            </a:solidFill>
+            <a:prstDash val="solid"/>
+          </a:ln>
+        </p:spPr>
+      </p:sp>
+      <p:sp>
+        <p:nvSpPr>
           <p:cNvPr id="6" name="Shape 4"/>
+          <p:cNvSpPr/>
+          <p:nvPr/>
+        </p:nvSpPr>
+        <p:spPr>
+          <a:xfrm>
+            <a:off x="475488" y="768096"/>
+            <a:ext cx="1353312" cy="0"/>
+          </a:xfrm>
+          <a:prstGeom prst="line">
+            <a:avLst/>
+          </a:prstGeom>
+          <a:noFill/>
+          <a:ln w="12700">
+            <a:solidFill>
+              <a:srgbClr val="111111"/>
+            </a:solidFill>
+            <a:prstDash val="solid"/>
+          </a:ln>
+        </p:spPr>
+      </p:sp>
+      <p:sp>
+        <p:nvSpPr>
+          <p:cNvPr id="7" name="Shape 5"/>
+          <p:cNvSpPr/>
+          <p:nvPr/>
+        </p:nvSpPr>
+        <p:spPr>
+          <a:xfrm>
+            <a:off x="475488" y="6364224"/>
+            <a:ext cx="11240719" cy="0"/>
+          </a:xfrm>
+          <a:prstGeom prst="line">
+            <a:avLst/>
+          </a:prstGeom>
+          <a:noFill/>
+          <a:ln w="12700">
+            <a:solidFill>
+              <a:srgbClr val="111111"/>
+            </a:solidFill>
+            <a:prstDash val="solid"/>
+          </a:ln>
+        </p:spPr>
+      </p:sp>
+      <p:sp>
+        <p:nvSpPr>
+          <p:cNvPr id="8" name="Shape 6"/>
+          <p:cNvSpPr/>
+          <p:nvPr/>
+        </p:nvSpPr>
+        <p:spPr>
+          <a:xfrm>
+            <a:off x="10134295" y="0"/>
+            <a:ext cx="2057400" cy="256032"/>
+          </a:xfrm>
+          <a:prstGeom prst="rect">
+            <a:avLst/>
+          </a:prstGeom>
+          <a:solidFill>
+            <a:srgbClr val="111111"/>
+          </a:solidFill>
+          <a:ln w="12700">
+            <a:solidFill>
+              <a:srgbClr val="111111">
+                <a:alpha val="0"/>
+              </a:srgbClr>
+            </a:solidFill>
+            <a:prstDash val="solid"/>
+          </a:ln>
+        </p:spPr>
+      </p:sp>
+      <p:sp>
+        <p:nvSpPr>
+          <p:cNvPr id="9" name="Shape 7"/>
           <p:cNvSpPr/>
           <p:nvPr/>
         </p:nvSpPr>
@@ -8458,7 +8983,7 @@
       </p:sp>
       <p:sp>
         <p:nvSpPr>
-          <p:cNvPr id="7" name="Shape 5"/>
+          <p:cNvPr id="10" name="Shape 8"/>
           <p:cNvSpPr/>
           <p:nvPr/>
         </p:nvSpPr>
@@ -8485,7 +9010,7 @@
       </p:sp>
       <p:pic>
         <p:nvPicPr>
-          <p:cNvPr id="8" name="Image 0" descr="preencoded.png">    </p:cNvPr>
+          <p:cNvPr id="11" name="Image 0" descr="preencoded.png">    </p:cNvPr>
           <p:cNvPicPr>
             <a:picLocks noChangeAspect="1"/>
           </p:cNvPicPr>
@@ -8515,7 +9040,7 @@
       </p:pic>
       <p:sp>
         <p:nvSpPr>
-          <p:cNvPr id="9" name="Shape 6"/>
+          <p:cNvPr id="12" name="Shape 9"/>
           <p:cNvSpPr/>
           <p:nvPr/>
         </p:nvSpPr>
@@ -8542,7 +9067,7 @@
       </p:sp>
       <p:sp>
         <p:nvSpPr>
-          <p:cNvPr id="10" name="mdpr:1-2-2ff3f0:title:__title:1-2-2ff3f0"/>
+          <p:cNvPr id="13" name="mdpr:1-2-2ff3f0:title:__title:1-2-2ff3f0"/>
           <p:cNvSpPr txBox="1"/>
           <p:nvPr/>
         </p:nvSpPr>
@@ -8584,7 +9109,7 @@
       </p:sp>
       <p:sp>
         <p:nvSpPr>
-          <p:cNvPr id="11" name="mdpr:1-2-2ff3f0:body:block-19"/>
+          <p:cNvPr id="14" name="mdpr:1-2-2ff3f0:body:block-19"/>
           <p:cNvSpPr txBox="1"/>
           <p:nvPr/>
         </p:nvSpPr>
@@ -8723,7 +9248,7 @@
       </p:sp>
       <p:graphicFrame>
         <p:nvGraphicFramePr>
-          <p:cNvPr id="12" name="Chart 0" descr=""/>
+          <p:cNvPr id="15" name="Chart 0" descr=""/>
           <p:cNvGraphicFramePr/>
           <p:nvPr/>
         </p:nvGraphicFramePr>
@@ -8829,31 +9354,8 @@
         </p:nvSpPr>
         <p:spPr>
           <a:xfrm>
-            <a:off x="475488" y="6364224"/>
-            <a:ext cx="11240719" cy="0"/>
-          </a:xfrm>
-          <a:prstGeom prst="line">
-            <a:avLst/>
-          </a:prstGeom>
-          <a:noFill/>
-          <a:ln w="12700">
-            <a:solidFill>
-              <a:srgbClr val="111111"/>
-            </a:solidFill>
-            <a:prstDash val="solid"/>
-          </a:ln>
-        </p:spPr>
-      </p:sp>
-      <p:sp>
-        <p:nvSpPr>
-          <p:cNvPr id="5" name="Shape 3"/>
-          <p:cNvSpPr/>
-          <p:nvPr/>
-        </p:nvSpPr>
-        <p:spPr>
-          <a:xfrm>
-            <a:off x="10134295" y="0"/>
-            <a:ext cx="2057400" cy="256032"/>
+            <a:off x="10033711" y="310896"/>
+            <a:ext cx="1225296" cy="201168"/>
           </a:xfrm>
           <a:prstGeom prst="rect">
             <a:avLst/>
@@ -8873,7 +9375,105 @@
       </p:sp>
       <p:sp>
         <p:nvSpPr>
+          <p:cNvPr id="5" name="Shape 3"/>
+          <p:cNvSpPr/>
+          <p:nvPr/>
+        </p:nvSpPr>
+        <p:spPr>
+          <a:xfrm>
+            <a:off x="10362895" y="457200"/>
+            <a:ext cx="859536" cy="201168"/>
+          </a:xfrm>
+          <a:prstGeom prst="rect">
+            <a:avLst/>
+          </a:prstGeom>
+          <a:solidFill>
+            <a:srgbClr val="00A6FF"/>
+          </a:solidFill>
+          <a:ln w="12700">
+            <a:solidFill>
+              <a:srgbClr val="111111"/>
+            </a:solidFill>
+            <a:prstDash val="solid"/>
+          </a:ln>
+        </p:spPr>
+      </p:sp>
+      <p:sp>
+        <p:nvSpPr>
           <p:cNvPr id="6" name="Shape 4"/>
+          <p:cNvSpPr/>
+          <p:nvPr/>
+        </p:nvSpPr>
+        <p:spPr>
+          <a:xfrm>
+            <a:off x="475488" y="768096"/>
+            <a:ext cx="1353312" cy="0"/>
+          </a:xfrm>
+          <a:prstGeom prst="line">
+            <a:avLst/>
+          </a:prstGeom>
+          <a:noFill/>
+          <a:ln w="12700">
+            <a:solidFill>
+              <a:srgbClr val="111111"/>
+            </a:solidFill>
+            <a:prstDash val="solid"/>
+          </a:ln>
+        </p:spPr>
+      </p:sp>
+      <p:sp>
+        <p:nvSpPr>
+          <p:cNvPr id="7" name="Shape 5"/>
+          <p:cNvSpPr/>
+          <p:nvPr/>
+        </p:nvSpPr>
+        <p:spPr>
+          <a:xfrm>
+            <a:off x="475488" y="6364224"/>
+            <a:ext cx="11240719" cy="0"/>
+          </a:xfrm>
+          <a:prstGeom prst="line">
+            <a:avLst/>
+          </a:prstGeom>
+          <a:noFill/>
+          <a:ln w="12700">
+            <a:solidFill>
+              <a:srgbClr val="111111"/>
+            </a:solidFill>
+            <a:prstDash val="solid"/>
+          </a:ln>
+        </p:spPr>
+      </p:sp>
+      <p:sp>
+        <p:nvSpPr>
+          <p:cNvPr id="8" name="Shape 6"/>
+          <p:cNvSpPr/>
+          <p:nvPr/>
+        </p:nvSpPr>
+        <p:spPr>
+          <a:xfrm>
+            <a:off x="10134295" y="0"/>
+            <a:ext cx="2057400" cy="256032"/>
+          </a:xfrm>
+          <a:prstGeom prst="rect">
+            <a:avLst/>
+          </a:prstGeom>
+          <a:solidFill>
+            <a:srgbClr val="111111"/>
+          </a:solidFill>
+          <a:ln w="12700">
+            <a:solidFill>
+              <a:srgbClr val="111111">
+                <a:alpha val="0"/>
+              </a:srgbClr>
+            </a:solidFill>
+            <a:prstDash val="solid"/>
+          </a:ln>
+        </p:spPr>
+      </p:sp>
+      <p:sp>
+        <p:nvSpPr>
+          <p:cNvPr id="9" name="Shape 7"/>
           <p:cNvSpPr/>
           <p:nvPr/>
         </p:nvSpPr>
@@ -8900,7 +9500,7 @@
       </p:sp>
       <p:sp>
         <p:nvSpPr>
-          <p:cNvPr id="7" name="Shape 5"/>
+          <p:cNvPr id="10" name="Shape 8"/>
           <p:cNvSpPr/>
           <p:nvPr/>
         </p:nvSpPr>
@@ -8927,7 +9527,7 @@
       </p:sp>
       <p:pic>
         <p:nvPicPr>
-          <p:cNvPr id="8" name="Image 0" descr="preencoded.png">    </p:cNvPr>
+          <p:cNvPr id="11" name="Image 0" descr="preencoded.png">    </p:cNvPr>
           <p:cNvPicPr>
             <a:picLocks noChangeAspect="1"/>
           </p:cNvPicPr>
@@ -8957,7 +9557,7 @@
       </p:pic>
       <p:sp>
         <p:nvSpPr>
-          <p:cNvPr id="9" name="mdpr:2-2-542095:title:__title:2-2-542095"/>
+          <p:cNvPr id="12" name="mdpr:2-2-542095:title:__title:2-2-542095"/>
           <p:cNvSpPr txBox="1"/>
           <p:nvPr/>
         </p:nvSpPr>
@@ -9932,31 +10532,8 @@
         </p:nvSpPr>
         <p:spPr>
           <a:xfrm>
-            <a:off x="475488" y="6364224"/>
-            <a:ext cx="11240719" cy="0"/>
-          </a:xfrm>
-          <a:prstGeom prst="line">
-            <a:avLst/>
-          </a:prstGeom>
-          <a:noFill/>
-          <a:ln w="12700">
-            <a:solidFill>
-              <a:srgbClr val="111111"/>
-            </a:solidFill>
-            <a:prstDash val="solid"/>
-          </a:ln>
-        </p:spPr>
-      </p:sp>
-      <p:sp>
-        <p:nvSpPr>
-          <p:cNvPr id="5" name="Shape 3"/>
-          <p:cNvSpPr/>
-          <p:nvPr/>
-        </p:nvSpPr>
-        <p:spPr>
-          <a:xfrm>
-            <a:off x="10134295" y="0"/>
-            <a:ext cx="2057400" cy="256032"/>
+            <a:off x="10033711" y="310896"/>
+            <a:ext cx="1225296" cy="201168"/>
           </a:xfrm>
           <a:prstGeom prst="rect">
             <a:avLst/>
@@ -9976,7 +10553,105 @@
       </p:sp>
       <p:sp>
         <p:nvSpPr>
+          <p:cNvPr id="5" name="Shape 3"/>
+          <p:cNvSpPr/>
+          <p:nvPr/>
+        </p:nvSpPr>
+        <p:spPr>
+          <a:xfrm>
+            <a:off x="10362895" y="457200"/>
+            <a:ext cx="859536" cy="201168"/>
+          </a:xfrm>
+          <a:prstGeom prst="rect">
+            <a:avLst/>
+          </a:prstGeom>
+          <a:solidFill>
+            <a:srgbClr val="00A6FF"/>
+          </a:solidFill>
+          <a:ln w="12700">
+            <a:solidFill>
+              <a:srgbClr val="111111"/>
+            </a:solidFill>
+            <a:prstDash val="solid"/>
+          </a:ln>
+        </p:spPr>
+      </p:sp>
+      <p:sp>
+        <p:nvSpPr>
           <p:cNvPr id="6" name="Shape 4"/>
+          <p:cNvSpPr/>
+          <p:nvPr/>
+        </p:nvSpPr>
+        <p:spPr>
+          <a:xfrm>
+            <a:off x="475488" y="768096"/>
+            <a:ext cx="1353312" cy="0"/>
+          </a:xfrm>
+          <a:prstGeom prst="line">
+            <a:avLst/>
+          </a:prstGeom>
+          <a:noFill/>
+          <a:ln w="12700">
+            <a:solidFill>
+              <a:srgbClr val="111111"/>
+            </a:solidFill>
+            <a:prstDash val="solid"/>
+          </a:ln>
+        </p:spPr>
+      </p:sp>
+      <p:sp>
+        <p:nvSpPr>
+          <p:cNvPr id="7" name="Shape 5"/>
+          <p:cNvSpPr/>
+          <p:nvPr/>
+        </p:nvSpPr>
+        <p:spPr>
+          <a:xfrm>
+            <a:off x="475488" y="6364224"/>
+            <a:ext cx="11240719" cy="0"/>
+          </a:xfrm>
+          <a:prstGeom prst="line">
+            <a:avLst/>
+          </a:prstGeom>
+          <a:noFill/>
+          <a:ln w="12700">
+            <a:solidFill>
+              <a:srgbClr val="111111"/>
+            </a:solidFill>
+            <a:prstDash val="solid"/>
+          </a:ln>
+        </p:spPr>
+      </p:sp>
+      <p:sp>
+        <p:nvSpPr>
+          <p:cNvPr id="8" name="Shape 6"/>
+          <p:cNvSpPr/>
+          <p:nvPr/>
+        </p:nvSpPr>
+        <p:spPr>
+          <a:xfrm>
+            <a:off x="10134295" y="0"/>
+            <a:ext cx="2057400" cy="256032"/>
+          </a:xfrm>
+          <a:prstGeom prst="rect">
+            <a:avLst/>
+          </a:prstGeom>
+          <a:solidFill>
+            <a:srgbClr val="111111"/>
+          </a:solidFill>
+          <a:ln w="12700">
+            <a:solidFill>
+              <a:srgbClr val="111111">
+                <a:alpha val="0"/>
+              </a:srgbClr>
+            </a:solidFill>
+            <a:prstDash val="solid"/>
+          </a:ln>
+        </p:spPr>
+      </p:sp>
+      <p:sp>
+        <p:nvSpPr>
+          <p:cNvPr id="9" name="Shape 7"/>
           <p:cNvSpPr/>
           <p:nvPr/>
         </p:nvSpPr>
@@ -10003,7 +10678,7 @@
       </p:sp>
       <p:sp>
         <p:nvSpPr>
-          <p:cNvPr id="7" name="Shape 5"/>
+          <p:cNvPr id="10" name="Shape 8"/>
           <p:cNvSpPr/>
           <p:nvPr/>
         </p:nvSpPr>
@@ -10030,7 +10705,7 @@
       </p:sp>
       <p:pic>
         <p:nvPicPr>
-          <p:cNvPr id="8" name="Image 0" descr="preencoded.png">    </p:cNvPr>
+          <p:cNvPr id="11" name="Image 0" descr="preencoded.png">    </p:cNvPr>
           <p:cNvPicPr>
             <a:picLocks noChangeAspect="1"/>
           </p:cNvPicPr>
@@ -10060,7 +10735,7 @@
       </p:pic>
       <p:sp>
         <p:nvSpPr>
-          <p:cNvPr id="9" name="mdpr:1-2-b8955f:title:__title:1-2-b8955f"/>
+          <p:cNvPr id="12" name="mdpr:1-2-b8955f:title:__title:1-2-b8955f"/>
           <p:cNvSpPr txBox="1"/>
           <p:nvPr/>
         </p:nvSpPr>
@@ -10102,7 +10777,7 @@
       </p:sp>
       <p:sp>
         <p:nvSpPr>
-          <p:cNvPr id="10" name="Shape 7"/>
+          <p:cNvPr id="13" name="Shape 10"/>
           <p:cNvSpPr/>
           <p:nvPr/>
         </p:nvSpPr>
@@ -10135,7 +10810,7 @@
       </p:sp>
       <p:sp>
         <p:nvSpPr>
-          <p:cNvPr id="11" name="Shape 8"/>
+          <p:cNvPr id="14" name="Shape 11"/>
           <p:cNvSpPr/>
           <p:nvPr/>
         </p:nvSpPr>
@@ -10166,7 +10841,7 @@
       </p:sp>
       <p:sp>
         <p:nvSpPr>
-          <p:cNvPr id="12" name="Shape 9"/>
+          <p:cNvPr id="15" name="Shape 12"/>
           <p:cNvSpPr/>
           <p:nvPr/>
         </p:nvSpPr>
@@ -10197,7 +10872,7 @@
       </p:sp>
       <p:sp>
         <p:nvSpPr>
-          <p:cNvPr id="13" name="Shape 10"/>
+          <p:cNvPr id="16" name="Shape 13"/>
           <p:cNvSpPr/>
           <p:nvPr/>
         </p:nvSpPr>
@@ -10222,7 +10897,7 @@
       </p:sp>
       <p:sp>
         <p:nvSpPr>
-          <p:cNvPr id="14" name="Shape 11"/>
+          <p:cNvPr id="17" name="Shape 14"/>
           <p:cNvSpPr/>
           <p:nvPr/>
         </p:nvSpPr>
@@ -10249,7 +10924,7 @@
       </p:sp>
       <p:sp>
         <p:nvSpPr>
-          <p:cNvPr id="15" name="Text 12"/>
+          <p:cNvPr id="18" name="Text 15"/>
           <p:cNvSpPr txBox="1"/>
           <p:nvPr/>
         </p:nvSpPr>
@@ -10293,7 +10968,7 @@
       </p:sp>
       <p:sp>
         <p:nvSpPr>
-          <p:cNvPr id="16" name="Text 13"/>
+          <p:cNvPr id="19" name="Text 16"/>
           <p:cNvSpPr txBox="1"/>
           <p:nvPr/>
         </p:nvSpPr>
@@ -10335,7 +11010,7 @@
       </p:sp>
       <p:sp>
         <p:nvSpPr>
-          <p:cNvPr id="17" name="Shape 14"/>
+          <p:cNvPr id="20" name="Shape 17"/>
           <p:cNvSpPr/>
           <p:nvPr/>
         </p:nvSpPr>
@@ -10362,7 +11037,7 @@
       </p:sp>
       <p:sp>
         <p:nvSpPr>
-          <p:cNvPr id="18" name="Text 15"/>
+          <p:cNvPr id="21" name="Text 18"/>
           <p:cNvSpPr txBox="1"/>
           <p:nvPr/>
         </p:nvSpPr>
@@ -10406,7 +11081,7 @@
       </p:sp>
       <p:sp>
         <p:nvSpPr>
-          <p:cNvPr id="19" name="Shape 16"/>
+          <p:cNvPr id="22" name="Shape 19"/>
           <p:cNvSpPr/>
           <p:nvPr/>
         </p:nvSpPr>
@@ -10433,7 +11108,7 @@
       </p:sp>
       <p:sp>
         <p:nvSpPr>
-          <p:cNvPr id="20" name="Text 17"/>
+          <p:cNvPr id="23" name="Text 20"/>
           <p:cNvSpPr txBox="1"/>
           <p:nvPr/>
         </p:nvSpPr>
@@ -10477,7 +11152,7 @@
       </p:sp>
       <p:sp>
         <p:nvSpPr>
-          <p:cNvPr id="21" name="Shape 18"/>
+          <p:cNvPr id="24" name="Shape 21"/>
           <p:cNvSpPr/>
           <p:nvPr/>
         </p:nvSpPr>
@@ -10508,7 +11183,7 @@
       </p:sp>
       <p:sp>
         <p:nvSpPr>
-          <p:cNvPr id="22" name="Shape 19"/>
+          <p:cNvPr id="25" name="Shape 22"/>
           <p:cNvSpPr/>
           <p:nvPr/>
         </p:nvSpPr>
@@ -10537,7 +11212,7 @@
       </p:sp>
       <p:sp>
         <p:nvSpPr>
-          <p:cNvPr id="23" name="Shape 20"/>
+          <p:cNvPr id="26" name="Shape 23"/>
           <p:cNvSpPr/>
           <p:nvPr/>
         </p:nvSpPr>
@@ -10560,7 +11235,7 @@
       </p:sp>
       <p:sp>
         <p:nvSpPr>
-          <p:cNvPr id="24" name="Shape 21"/>
+          <p:cNvPr id="27" name="Shape 24"/>
           <p:cNvSpPr/>
           <p:nvPr/>
         </p:nvSpPr>
@@ -10585,7 +11260,7 @@
       </p:sp>
       <p:sp>
         <p:nvSpPr>
-          <p:cNvPr id="25" name="Shape 22"/>
+          <p:cNvPr id="28" name="Shape 25"/>
           <p:cNvSpPr/>
           <p:nvPr/>
         </p:nvSpPr>
@@ -10610,7 +11285,7 @@
       </p:sp>
       <p:sp>
         <p:nvSpPr>
-          <p:cNvPr id="26" name="Shape 23"/>
+          <p:cNvPr id="29" name="Shape 26"/>
           <p:cNvSpPr/>
           <p:nvPr/>
         </p:nvSpPr>
@@ -10635,7 +11310,7 @@
       </p:sp>
       <p:sp>
         <p:nvSpPr>
-          <p:cNvPr id="27" name="Text 24"/>
+          <p:cNvPr id="30" name="Text 27"/>
           <p:cNvSpPr txBox="1"/>
           <p:nvPr/>
         </p:nvSpPr>
@@ -10679,7 +11354,7 @@
       </p:sp>
       <p:sp>
         <p:nvSpPr>
-          <p:cNvPr id="28" name="Text 25"/>
+          <p:cNvPr id="31" name="Text 28"/>
           <p:cNvSpPr txBox="1"/>
           <p:nvPr/>
         </p:nvSpPr>
@@ -10721,7 +11396,7 @@
       </p:sp>
       <p:sp>
         <p:nvSpPr>
-          <p:cNvPr id="29" name="Text 26"/>
+          <p:cNvPr id="32" name="Text 29"/>
           <p:cNvSpPr txBox="1"/>
           <p:nvPr/>
         </p:nvSpPr>
@@ -10763,7 +11438,7 @@
       </p:sp>
       <p:sp>
         <p:nvSpPr>
-          <p:cNvPr id="30" name="Text 27"/>
+          <p:cNvPr id="33" name="Text 30"/>
           <p:cNvSpPr txBox="1"/>
           <p:nvPr/>
         </p:nvSpPr>
@@ -10895,31 +11570,8 @@
         </p:nvSpPr>
         <p:spPr>
           <a:xfrm>
-            <a:off x="475488" y="6364224"/>
-            <a:ext cx="11240719" cy="0"/>
-          </a:xfrm>
-          <a:prstGeom prst="line">
-            <a:avLst/>
-          </a:prstGeom>
-          <a:noFill/>
-          <a:ln w="12700">
-            <a:solidFill>
-              <a:srgbClr val="111111"/>
-            </a:solidFill>
-            <a:prstDash val="solid"/>
-          </a:ln>
-        </p:spPr>
-      </p:sp>
-      <p:sp>
-        <p:nvSpPr>
-          <p:cNvPr id="5" name="Shape 3"/>
-          <p:cNvSpPr/>
-          <p:nvPr/>
-        </p:nvSpPr>
-        <p:spPr>
-          <a:xfrm>
-            <a:off x="10134295" y="0"/>
-            <a:ext cx="2057400" cy="256032"/>
+            <a:off x="10033711" y="310896"/>
+            <a:ext cx="1225296" cy="201168"/>
           </a:xfrm>
           <a:prstGeom prst="rect">
             <a:avLst/>
@@ -10939,7 +11591,105 @@
       </p:sp>
       <p:sp>
         <p:nvSpPr>
+          <p:cNvPr id="5" name="Shape 3"/>
+          <p:cNvSpPr/>
+          <p:nvPr/>
+        </p:nvSpPr>
+        <p:spPr>
+          <a:xfrm>
+            <a:off x="10362895" y="457200"/>
+            <a:ext cx="859536" cy="201168"/>
+          </a:xfrm>
+          <a:prstGeom prst="rect">
+            <a:avLst/>
+          </a:prstGeom>
+          <a:solidFill>
+            <a:srgbClr val="00A6FF"/>
+          </a:solidFill>
+          <a:ln w="12700">
+            <a:solidFill>
+              <a:srgbClr val="111111"/>
+            </a:solidFill>
+            <a:prstDash val="solid"/>
+          </a:ln>
+        </p:spPr>
+      </p:sp>
+      <p:sp>
+        <p:nvSpPr>
           <p:cNvPr id="6" name="Shape 4"/>
+          <p:cNvSpPr/>
+          <p:nvPr/>
+        </p:nvSpPr>
+        <p:spPr>
+          <a:xfrm>
+            <a:off x="475488" y="768096"/>
+            <a:ext cx="1353312" cy="0"/>
+          </a:xfrm>
+          <a:prstGeom prst="line">
+            <a:avLst/>
+          </a:prstGeom>
+          <a:noFill/>
+          <a:ln w="12700">
+            <a:solidFill>
+              <a:srgbClr val="111111"/>
+            </a:solidFill>
+            <a:prstDash val="solid"/>
+          </a:ln>
+        </p:spPr>
+      </p:sp>
+      <p:sp>
+        <p:nvSpPr>
+          <p:cNvPr id="7" name="Shape 5"/>
+          <p:cNvSpPr/>
+          <p:nvPr/>
+        </p:nvSpPr>
+        <p:spPr>
+          <a:xfrm>
+            <a:off x="475488" y="6364224"/>
+            <a:ext cx="11240719" cy="0"/>
+          </a:xfrm>
+          <a:prstGeom prst="line">
+            <a:avLst/>
+          </a:prstGeom>
+          <a:noFill/>
+          <a:ln w="12700">
+            <a:solidFill>
+              <a:srgbClr val="111111"/>
+            </a:solidFill>
+            <a:prstDash val="solid"/>
+          </a:ln>
+        </p:spPr>
+      </p:sp>
+      <p:sp>
+        <p:nvSpPr>
+          <p:cNvPr id="8" name="Shape 6"/>
+          <p:cNvSpPr/>
+          <p:nvPr/>
+        </p:nvSpPr>
+        <p:spPr>
+          <a:xfrm>
+            <a:off x="10134295" y="0"/>
+            <a:ext cx="2057400" cy="256032"/>
+          </a:xfrm>
+          <a:prstGeom prst="rect">
+            <a:avLst/>
+          </a:prstGeom>
+          <a:solidFill>
+            <a:srgbClr val="111111"/>
+          </a:solidFill>
+          <a:ln w="12700">
+            <a:solidFill>
+              <a:srgbClr val="111111">
+                <a:alpha val="0"/>
+              </a:srgbClr>
+            </a:solidFill>
+            <a:prstDash val="solid"/>
+          </a:ln>
+        </p:spPr>
+      </p:sp>
+      <p:sp>
+        <p:nvSpPr>
+          <p:cNvPr id="9" name="Shape 7"/>
           <p:cNvSpPr/>
           <p:nvPr/>
         </p:nvSpPr>
@@ -10966,7 +11716,7 @@
       </p:sp>
       <p:sp>
         <p:nvSpPr>
-          <p:cNvPr id="7" name="Shape 5"/>
+          <p:cNvPr id="10" name="Shape 8"/>
           <p:cNvSpPr/>
           <p:nvPr/>
         </p:nvSpPr>
@@ -10993,7 +11743,7 @@
       </p:sp>
       <p:pic>
         <p:nvPicPr>
-          <p:cNvPr id="8" name="Image 0" descr="preencoded.png">    </p:cNvPr>
+          <p:cNvPr id="11" name="Image 0" descr="preencoded.png">    </p:cNvPr>
           <p:cNvPicPr>
             <a:picLocks noChangeAspect="1"/>
           </p:cNvPicPr>
@@ -11023,7 +11773,7 @@
       </p:pic>
       <p:sp>
         <p:nvSpPr>
-          <p:cNvPr id="9" name="mdpr:2-2-4dc4c1:title:__title:2-2-4dc4c1"/>
+          <p:cNvPr id="12" name="mdpr:2-2-4dc4c1:title:__title:2-2-4dc4c1"/>
           <p:cNvSpPr txBox="1"/>
           <p:nvPr/>
         </p:nvSpPr>
@@ -11065,7 +11815,7 @@
       </p:sp>
       <p:sp>
         <p:nvSpPr>
-          <p:cNvPr id="10" name="Shape 7"/>
+          <p:cNvPr id="13" name="Shape 10"/>
           <p:cNvSpPr/>
           <p:nvPr/>
         </p:nvSpPr>
@@ -11092,7 +11842,7 @@
       </p:sp>
       <p:sp>
         <p:nvSpPr>
-          <p:cNvPr id="11" name="Shape 8"/>
+          <p:cNvPr id="14" name="Shape 11"/>
           <p:cNvSpPr/>
           <p:nvPr/>
         </p:nvSpPr>
@@ -11119,7 +11869,7 @@
       </p:sp>
       <p:sp>
         <p:nvSpPr>
-          <p:cNvPr id="12" name="Text 9"/>
+          <p:cNvPr id="15" name="Text 12"/>
           <p:cNvSpPr txBox="1"/>
           <p:nvPr/>
         </p:nvSpPr>
@@ -11163,7 +11913,7 @@
       </p:sp>
       <p:sp>
         <p:nvSpPr>
-          <p:cNvPr id="13" name="Text 10"/>
+          <p:cNvPr id="16" name="Text 13"/>
           <p:cNvSpPr txBox="1"/>
           <p:nvPr/>
         </p:nvSpPr>
@@ -11207,7 +11957,7 @@
       </p:sp>
       <p:sp>
         <p:nvSpPr>
-          <p:cNvPr id="14" name="Shape 11"/>
+          <p:cNvPr id="17" name="Shape 14"/>
           <p:cNvSpPr/>
           <p:nvPr/>
         </p:nvSpPr>
@@ -11234,7 +11984,7 @@
       </p:sp>
       <p:sp>
         <p:nvSpPr>
-          <p:cNvPr id="15" name="Shape 12"/>
+          <p:cNvPr id="18" name="Shape 15"/>
           <p:cNvSpPr/>
           <p:nvPr/>
         </p:nvSpPr>
@@ -11261,7 +12011,7 @@
       </p:sp>
       <p:sp>
         <p:nvSpPr>
-          <p:cNvPr id="16" name="Text 13"/>
+          <p:cNvPr id="19" name="Text 16"/>
           <p:cNvSpPr txBox="1"/>
           <p:nvPr/>
         </p:nvSpPr>
@@ -11305,7 +12055,7 @@
       </p:sp>
       <p:sp>
         <p:nvSpPr>
-          <p:cNvPr id="17" name="Text 14"/>
+          <p:cNvPr id="20" name="Text 17"/>
           <p:cNvSpPr txBox="1"/>
           <p:nvPr/>
         </p:nvSpPr>
@@ -11349,7 +12099,7 @@
       </p:sp>
       <p:sp>
         <p:nvSpPr>
-          <p:cNvPr id="18" name="Shape 15"/>
+          <p:cNvPr id="21" name="Shape 18"/>
           <p:cNvSpPr/>
           <p:nvPr/>
         </p:nvSpPr>
@@ -11376,7 +12126,7 @@
       </p:sp>
       <p:sp>
         <p:nvSpPr>
-          <p:cNvPr id="19" name="Shape 16"/>
+          <p:cNvPr id="22" name="Shape 19"/>
           <p:cNvSpPr/>
           <p:nvPr/>
         </p:nvSpPr>
@@ -11403,7 +12153,7 @@
       </p:sp>
       <p:sp>
         <p:nvSpPr>
-          <p:cNvPr id="20" name="Text 17"/>
+          <p:cNvPr id="23" name="Text 20"/>
           <p:cNvSpPr txBox="1"/>
           <p:nvPr/>
         </p:nvSpPr>
@@ -11447,7 +12197,7 @@
       </p:sp>
       <p:sp>
         <p:nvSpPr>
-          <p:cNvPr id="21" name="Text 18"/>
+          <p:cNvPr id="24" name="Text 21"/>
           <p:cNvSpPr txBox="1"/>
           <p:nvPr/>
         </p:nvSpPr>
@@ -11491,7 +12241,7 @@
       </p:sp>
       <p:sp>
         <p:nvSpPr>
-          <p:cNvPr id="22" name="Shape 19"/>
+          <p:cNvPr id="25" name="Shape 22"/>
           <p:cNvSpPr/>
           <p:nvPr/>
         </p:nvSpPr>
@@ -11518,7 +12268,7 @@
       </p:sp>
       <p:sp>
         <p:nvSpPr>
-          <p:cNvPr id="23" name="Shape 20"/>
+          <p:cNvPr id="26" name="Shape 23"/>
           <p:cNvSpPr/>
           <p:nvPr/>
         </p:nvSpPr>
@@ -11545,7 +12295,7 @@
       </p:sp>
       <p:sp>
         <p:nvSpPr>
-          <p:cNvPr id="24" name="Text 21"/>
+          <p:cNvPr id="27" name="Text 24"/>
           <p:cNvSpPr txBox="1"/>
           <p:nvPr/>
         </p:nvSpPr>
@@ -11589,7 +12339,7 @@
       </p:sp>
       <p:sp>
         <p:nvSpPr>
-          <p:cNvPr id="25" name="Text 22"/>
+          <p:cNvPr id="28" name="Text 25"/>
           <p:cNvSpPr txBox="1"/>
           <p:nvPr/>
         </p:nvSpPr>
@@ -11633,7 +12383,7 @@
       </p:sp>
       <p:sp>
         <p:nvSpPr>
-          <p:cNvPr id="26" name="Shape 23"/>
+          <p:cNvPr id="29" name="Shape 26"/>
           <p:cNvSpPr/>
           <p:nvPr/>
         </p:nvSpPr>
@@ -11657,7 +12407,7 @@
       </p:sp>
       <p:sp>
         <p:nvSpPr>
-          <p:cNvPr id="27" name="Shape 24"/>
+          <p:cNvPr id="30" name="Shape 27"/>
           <p:cNvSpPr/>
           <p:nvPr/>
         </p:nvSpPr>
@@ -11681,7 +12431,7 @@
       </p:sp>
       <p:sp>
         <p:nvSpPr>
-          <p:cNvPr id="28" name="Shape 25"/>
+          <p:cNvPr id="31" name="Shape 28"/>
           <p:cNvSpPr/>
           <p:nvPr/>
         </p:nvSpPr>
@@ -11795,31 +12545,8 @@
         </p:nvSpPr>
         <p:spPr>
           <a:xfrm>
-            <a:off x="475488" y="6364224"/>
-            <a:ext cx="11240719" cy="0"/>
-          </a:xfrm>
-          <a:prstGeom prst="line">
-            <a:avLst/>
-          </a:prstGeom>
-          <a:noFill/>
-          <a:ln w="12700">
-            <a:solidFill>
-              <a:srgbClr val="111111"/>
-            </a:solidFill>
-            <a:prstDash val="solid"/>
-          </a:ln>
-        </p:spPr>
-      </p:sp>
-      <p:sp>
-        <p:nvSpPr>
-          <p:cNvPr id="5" name="Shape 3"/>
-          <p:cNvSpPr/>
-          <p:nvPr/>
-        </p:nvSpPr>
-        <p:spPr>
-          <a:xfrm>
-            <a:off x="10134295" y="0"/>
-            <a:ext cx="2057400" cy="256032"/>
+            <a:off x="10033711" y="310896"/>
+            <a:ext cx="1225296" cy="201168"/>
           </a:xfrm>
           <a:prstGeom prst="rect">
             <a:avLst/>
@@ -11839,7 +12566,105 @@
       </p:sp>
       <p:sp>
         <p:nvSpPr>
+          <p:cNvPr id="5" name="Shape 3"/>
+          <p:cNvSpPr/>
+          <p:nvPr/>
+        </p:nvSpPr>
+        <p:spPr>
+          <a:xfrm>
+            <a:off x="10362895" y="457200"/>
+            <a:ext cx="859536" cy="201168"/>
+          </a:xfrm>
+          <a:prstGeom prst="rect">
+            <a:avLst/>
+          </a:prstGeom>
+          <a:solidFill>
+            <a:srgbClr val="00A6FF"/>
+          </a:solidFill>
+          <a:ln w="12700">
+            <a:solidFill>
+              <a:srgbClr val="111111"/>
+            </a:solidFill>
+            <a:prstDash val="solid"/>
+          </a:ln>
+        </p:spPr>
+      </p:sp>
+      <p:sp>
+        <p:nvSpPr>
           <p:cNvPr id="6" name="Shape 4"/>
+          <p:cNvSpPr/>
+          <p:nvPr/>
+        </p:nvSpPr>
+        <p:spPr>
+          <a:xfrm>
+            <a:off x="475488" y="768096"/>
+            <a:ext cx="1353312" cy="0"/>
+          </a:xfrm>
+          <a:prstGeom prst="line">
+            <a:avLst/>
+          </a:prstGeom>
+          <a:noFill/>
+          <a:ln w="12700">
+            <a:solidFill>
+              <a:srgbClr val="111111"/>
+            </a:solidFill>
+            <a:prstDash val="solid"/>
+          </a:ln>
+        </p:spPr>
+      </p:sp>
+      <p:sp>
+        <p:nvSpPr>
+          <p:cNvPr id="7" name="Shape 5"/>
+          <p:cNvSpPr/>
+          <p:nvPr/>
+        </p:nvSpPr>
+        <p:spPr>
+          <a:xfrm>
+            <a:off x="475488" y="6364224"/>
+            <a:ext cx="11240719" cy="0"/>
+          </a:xfrm>
+          <a:prstGeom prst="line">
+            <a:avLst/>
+          </a:prstGeom>
+          <a:noFill/>
+          <a:ln w="12700">
+            <a:solidFill>
+              <a:srgbClr val="111111"/>
+            </a:solidFill>
+            <a:prstDash val="solid"/>
+          </a:ln>
+        </p:spPr>
+      </p:sp>
+      <p:sp>
+        <p:nvSpPr>
+          <p:cNvPr id="8" name="Shape 6"/>
+          <p:cNvSpPr/>
+          <p:nvPr/>
+        </p:nvSpPr>
+        <p:spPr>
+          <a:xfrm>
+            <a:off x="10134295" y="0"/>
+            <a:ext cx="2057400" cy="256032"/>
+          </a:xfrm>
+          <a:prstGeom prst="rect">
+            <a:avLst/>
+          </a:prstGeom>
+          <a:solidFill>
+            <a:srgbClr val="111111"/>
+          </a:solidFill>
+          <a:ln w="12700">
+            <a:solidFill>
+              <a:srgbClr val="111111">
+                <a:alpha val="0"/>
+              </a:srgbClr>
+            </a:solidFill>
+            <a:prstDash val="solid"/>
+          </a:ln>
+        </p:spPr>
+      </p:sp>
+      <p:sp>
+        <p:nvSpPr>
+          <p:cNvPr id="9" name="Shape 7"/>
           <p:cNvSpPr/>
           <p:nvPr/>
         </p:nvSpPr>
@@ -11866,7 +12691,7 @@
       </p:sp>
       <p:sp>
         <p:nvSpPr>
-          <p:cNvPr id="7" name="Shape 5"/>
+          <p:cNvPr id="10" name="Shape 8"/>
           <p:cNvSpPr/>
           <p:nvPr/>
         </p:nvSpPr>
@@ -11893,7 +12718,7 @@
       </p:sp>
       <p:pic>
         <p:nvPicPr>
-          <p:cNvPr id="8" name="Image 0" descr="preencoded.png">    </p:cNvPr>
+          <p:cNvPr id="11" name="Image 0" descr="preencoded.png">    </p:cNvPr>
           <p:cNvPicPr>
             <a:picLocks noChangeAspect="1"/>
           </p:cNvPicPr>
@@ -11923,7 +12748,7 @@
       </p:pic>
       <p:pic>
         <p:nvPicPr>
-          <p:cNvPr id="9" name="Image 1" descr="preencoded.png">    </p:cNvPr>
+          <p:cNvPr id="12" name="Image 1" descr="preencoded.png">    </p:cNvPr>
           <p:cNvPicPr>
             <a:picLocks noChangeAspect="1"/>
           </p:cNvPicPr>
@@ -11953,7 +12778,7 @@
       </p:pic>
       <p:pic>
         <p:nvPicPr>
-          <p:cNvPr id="10" name="Image 2" descr="preencoded.png">    </p:cNvPr>
+          <p:cNvPr id="13" name="Image 2" descr="preencoded.png">    </p:cNvPr>
           <p:cNvPicPr>
             <a:picLocks noChangeAspect="1"/>
           </p:cNvPicPr>
@@ -11983,7 +12808,7 @@
       </p:pic>
       <p:sp>
         <p:nvSpPr>
-          <p:cNvPr id="11" name="Shape 6"/>
+          <p:cNvPr id="14" name="Shape 9"/>
           <p:cNvSpPr/>
           <p:nvPr/>
         </p:nvSpPr>
@@ -12012,7 +12837,7 @@
       </p:sp>
       <p:sp>
         <p:nvSpPr>
-          <p:cNvPr id="12" name="Shape 7"/>
+          <p:cNvPr id="15" name="Shape 10"/>
           <p:cNvSpPr/>
           <p:nvPr/>
         </p:nvSpPr>
@@ -12039,7 +12864,7 @@
       </p:sp>
       <p:sp>
         <p:nvSpPr>
-          <p:cNvPr id="13" name="Shape 8"/>
+          <p:cNvPr id="16" name="Shape 11"/>
           <p:cNvSpPr/>
           <p:nvPr/>
         </p:nvSpPr>
@@ -12066,7 +12891,7 @@
       </p:sp>
       <p:sp>
         <p:nvSpPr>
-          <p:cNvPr id="14" name="Shape 9"/>
+          <p:cNvPr id="17" name="Shape 12"/>
           <p:cNvSpPr/>
           <p:nvPr/>
         </p:nvSpPr>
@@ -12093,7 +12918,7 @@
       </p:sp>
       <p:sp>
         <p:nvSpPr>
-          <p:cNvPr id="15" name="mdpr:1-2-ea42c8:title:__title:1-2-ea42c8"/>
+          <p:cNvPr id="18" name="mdpr:1-2-ea42c8:title:__title:1-2-ea42c8"/>
           <p:cNvSpPr txBox="1"/>
           <p:nvPr/>
         </p:nvSpPr>
@@ -12135,7 +12960,7 @@
       </p:sp>
       <p:sp>
         <p:nvSpPr>
-          <p:cNvPr id="16" name="Shape 11"/>
+          <p:cNvPr id="19" name="Shape 14"/>
           <p:cNvSpPr/>
           <p:nvPr/>
         </p:nvSpPr>
@@ -12162,7 +12987,7 @@
       </p:sp>
       <p:pic>
         <p:nvPicPr>
-          <p:cNvPr id="17" name="Image 3" descr="article icon from tabler-icons (MIT)">    </p:cNvPr>
+          <p:cNvPr id="20" name="Image 3" descr="article icon from tabler-icons (MIT)">    </p:cNvPr>
           <p:cNvPicPr>
             <a:picLocks noChangeAspect="1"/>
           </p:cNvPicPr>
@@ -12192,7 +13017,7 @@
       </p:pic>
       <p:sp>
         <p:nvSpPr>
-          <p:cNvPr id="18" name="mdpr:1-2-ea42c8:item-1:block-27-chunk-1"/>
+          <p:cNvPr id="21" name="mdpr:1-2-ea42c8:item-1:block-27-chunk-1"/>
           <p:cNvSpPr txBox="1"/>
           <p:nvPr/>
         </p:nvSpPr>
@@ -12251,7 +13076,7 @@
       </p:sp>
       <p:sp>
         <p:nvSpPr>
-          <p:cNvPr id="19" name="Shape 13"/>
+          <p:cNvPr id="22" name="Shape 16"/>
           <p:cNvSpPr/>
           <p:nvPr/>
         </p:nvSpPr>
@@ -12278,7 +13103,7 @@
       </p:sp>
       <p:pic>
         <p:nvPicPr>
-          <p:cNvPr id="20" name="Image 4" descr="article icon from tabler-icons (MIT)">    </p:cNvPr>
+          <p:cNvPr id="23" name="Image 4" descr="article icon from tabler-icons (MIT)">    </p:cNvPr>
           <p:cNvPicPr>
             <a:picLocks noChangeAspect="1"/>
           </p:cNvPicPr>
@@ -12308,7 +13133,7 @@
       </p:pic>
       <p:sp>
         <p:nvSpPr>
-          <p:cNvPr id="21" name="mdpr:1-2-ea42c8:item-2:block-27-chunk-1"/>
+          <p:cNvPr id="24" name="mdpr:1-2-ea42c8:item-2:block-27-chunk-1"/>
           <p:cNvSpPr txBox="1"/>
           <p:nvPr/>
         </p:nvSpPr>
@@ -12367,7 +13192,7 @@
       </p:sp>
       <p:sp>
         <p:nvSpPr>
-          <p:cNvPr id="22" name="Shape 15"/>
+          <p:cNvPr id="25" name="Shape 18"/>
           <p:cNvSpPr/>
           <p:nvPr/>
         </p:nvSpPr>
@@ -12394,7 +13219,7 @@
       </p:sp>
       <p:pic>
         <p:nvPicPr>
-          <p:cNvPr id="23" name="Image 5" descr="article icon from tabler-icons (MIT)">    </p:cNvPr>
+          <p:cNvPr id="26" name="Image 5" descr="article icon from tabler-icons (MIT)">    </p:cNvPr>
           <p:cNvPicPr>
             <a:picLocks noChangeAspect="1"/>
           </p:cNvPicPr>
@@ -12424,7 +13249,7 @@
       </p:pic>
       <p:sp>
         <p:nvSpPr>
-          <p:cNvPr id="24" name="mdpr:1-2-ea42c8:item-3:block-27-chunk-1"/>
+          <p:cNvPr id="27" name="mdpr:1-2-ea42c8:item-3:block-27-chunk-1"/>
           <p:cNvSpPr txBox="1"/>
           <p:nvPr/>
         </p:nvSpPr>
@@ -12573,31 +13398,8 @@
         </p:nvSpPr>
         <p:spPr>
           <a:xfrm>
-            <a:off x="475488" y="6364224"/>
-            <a:ext cx="11240719" cy="0"/>
-          </a:xfrm>
-          <a:prstGeom prst="line">
-            <a:avLst/>
-          </a:prstGeom>
-          <a:noFill/>
-          <a:ln w="12700">
-            <a:solidFill>
-              <a:srgbClr val="111111"/>
-            </a:solidFill>
-            <a:prstDash val="solid"/>
-          </a:ln>
-        </p:spPr>
-      </p:sp>
-      <p:sp>
-        <p:nvSpPr>
-          <p:cNvPr id="5" name="Shape 3"/>
-          <p:cNvSpPr/>
-          <p:nvPr/>
-        </p:nvSpPr>
-        <p:spPr>
-          <a:xfrm>
-            <a:off x="10134295" y="0"/>
-            <a:ext cx="2057400" cy="256032"/>
+            <a:off x="10033711" y="310896"/>
+            <a:ext cx="1225296" cy="201168"/>
           </a:xfrm>
           <a:prstGeom prst="rect">
             <a:avLst/>
@@ -12617,7 +13419,105 @@
       </p:sp>
       <p:sp>
         <p:nvSpPr>
+          <p:cNvPr id="5" name="Shape 3"/>
+          <p:cNvSpPr/>
+          <p:nvPr/>
+        </p:nvSpPr>
+        <p:spPr>
+          <a:xfrm>
+            <a:off x="10362895" y="457200"/>
+            <a:ext cx="859536" cy="201168"/>
+          </a:xfrm>
+          <a:prstGeom prst="rect">
+            <a:avLst/>
+          </a:prstGeom>
+          <a:solidFill>
+            <a:srgbClr val="00A6FF"/>
+          </a:solidFill>
+          <a:ln w="12700">
+            <a:solidFill>
+              <a:srgbClr val="111111"/>
+            </a:solidFill>
+            <a:prstDash val="solid"/>
+          </a:ln>
+        </p:spPr>
+      </p:sp>
+      <p:sp>
+        <p:nvSpPr>
           <p:cNvPr id="6" name="Shape 4"/>
+          <p:cNvSpPr/>
+          <p:nvPr/>
+        </p:nvSpPr>
+        <p:spPr>
+          <a:xfrm>
+            <a:off x="475488" y="768096"/>
+            <a:ext cx="1353312" cy="0"/>
+          </a:xfrm>
+          <a:prstGeom prst="line">
+            <a:avLst/>
+          </a:prstGeom>
+          <a:noFill/>
+          <a:ln w="12700">
+            <a:solidFill>
+              <a:srgbClr val="111111"/>
+            </a:solidFill>
+            <a:prstDash val="solid"/>
+          </a:ln>
+        </p:spPr>
+      </p:sp>
+      <p:sp>
+        <p:nvSpPr>
+          <p:cNvPr id="7" name="Shape 5"/>
+          <p:cNvSpPr/>
+          <p:nvPr/>
+        </p:nvSpPr>
+        <p:spPr>
+          <a:xfrm>
+            <a:off x="475488" y="6364224"/>
+            <a:ext cx="11240719" cy="0"/>
+          </a:xfrm>
+          <a:prstGeom prst="line">
+            <a:avLst/>
+          </a:prstGeom>
+          <a:noFill/>
+          <a:ln w="12700">
+            <a:solidFill>
+              <a:srgbClr val="111111"/>
+            </a:solidFill>
+            <a:prstDash val="solid"/>
+          </a:ln>
+        </p:spPr>
+      </p:sp>
+      <p:sp>
+        <p:nvSpPr>
+          <p:cNvPr id="8" name="Shape 6"/>
+          <p:cNvSpPr/>
+          <p:nvPr/>
+        </p:nvSpPr>
+        <p:spPr>
+          <a:xfrm>
+            <a:off x="10134295" y="0"/>
+            <a:ext cx="2057400" cy="256032"/>
+          </a:xfrm>
+          <a:prstGeom prst="rect">
+            <a:avLst/>
+          </a:prstGeom>
+          <a:solidFill>
+            <a:srgbClr val="111111"/>
+          </a:solidFill>
+          <a:ln w="12700">
+            <a:solidFill>
+              <a:srgbClr val="111111">
+                <a:alpha val="0"/>
+              </a:srgbClr>
+            </a:solidFill>
+            <a:prstDash val="solid"/>
+          </a:ln>
+        </p:spPr>
+      </p:sp>
+      <p:sp>
+        <p:nvSpPr>
+          <p:cNvPr id="9" name="Shape 7"/>
           <p:cNvSpPr/>
           <p:nvPr/>
         </p:nvSpPr>
@@ -12644,7 +13544,7 @@
       </p:sp>
       <p:sp>
         <p:nvSpPr>
-          <p:cNvPr id="7" name="Shape 5"/>
+          <p:cNvPr id="10" name="Shape 8"/>
           <p:cNvSpPr/>
           <p:nvPr/>
         </p:nvSpPr>
@@ -12671,7 +13571,7 @@
       </p:sp>
       <p:sp>
         <p:nvSpPr>
-          <p:cNvPr id="8" name="Shape 6"/>
+          <p:cNvPr id="11" name="Shape 9"/>
           <p:cNvSpPr/>
           <p:nvPr/>
         </p:nvSpPr>
@@ -12698,7 +13598,7 @@
       </p:sp>
       <p:sp>
         <p:nvSpPr>
-          <p:cNvPr id="9" name="Shape 7"/>
+          <p:cNvPr id="12" name="Shape 10"/>
           <p:cNvSpPr/>
           <p:nvPr/>
         </p:nvSpPr>
@@ -12725,7 +13625,7 @@
       </p:sp>
       <p:sp>
         <p:nvSpPr>
-          <p:cNvPr id="10" name="Shape 8"/>
+          <p:cNvPr id="13" name="Shape 11"/>
           <p:cNvSpPr/>
           <p:nvPr/>
         </p:nvSpPr>
@@ -12754,7 +13654,7 @@
       </p:sp>
       <p:sp>
         <p:nvSpPr>
-          <p:cNvPr id="11" name="Shape 9"/>
+          <p:cNvPr id="14" name="Shape 12"/>
           <p:cNvSpPr/>
           <p:nvPr/>
         </p:nvSpPr>
@@ -12781,7 +13681,7 @@
       </p:sp>
       <p:sp>
         <p:nvSpPr>
-          <p:cNvPr id="12" name="Shape 10"/>
+          <p:cNvPr id="15" name="Shape 13"/>
           <p:cNvSpPr/>
           <p:nvPr/>
         </p:nvSpPr>
@@ -12808,7 +13708,7 @@
       </p:sp>
       <p:sp>
         <p:nvSpPr>
-          <p:cNvPr id="13" name="Shape 11"/>
+          <p:cNvPr id="16" name="Shape 14"/>
           <p:cNvSpPr/>
           <p:nvPr/>
         </p:nvSpPr>
@@ -12835,7 +13735,7 @@
       </p:sp>
       <p:sp>
         <p:nvSpPr>
-          <p:cNvPr id="14" name="Shape 12"/>
+          <p:cNvPr id="17" name="Shape 15"/>
           <p:cNvSpPr/>
           <p:nvPr/>
         </p:nvSpPr>
@@ -12862,7 +13762,7 @@
       </p:sp>
       <p:sp>
         <p:nvSpPr>
-          <p:cNvPr id="15" name="Shape 13"/>
+          <p:cNvPr id="18" name="Shape 16"/>
           <p:cNvSpPr/>
           <p:nvPr/>
         </p:nvSpPr>
@@ -12889,7 +13789,7 @@
       </p:sp>
       <p:sp>
         <p:nvSpPr>
-          <p:cNvPr id="16" name="Shape 14"/>
+          <p:cNvPr id="19" name="Shape 17"/>
           <p:cNvSpPr/>
           <p:nvPr/>
         </p:nvSpPr>
@@ -12916,7 +13816,7 @@
       </p:sp>
       <p:sp>
         <p:nvSpPr>
-          <p:cNvPr id="17" name="Shape 15"/>
+          <p:cNvPr id="20" name="Shape 18"/>
           <p:cNvSpPr/>
           <p:nvPr/>
         </p:nvSpPr>
@@ -12943,7 +13843,7 @@
       </p:sp>
       <p:sp>
         <p:nvSpPr>
-          <p:cNvPr id="18" name="Shape 16"/>
+          <p:cNvPr id="21" name="Shape 19"/>
           <p:cNvSpPr/>
           <p:nvPr/>
         </p:nvSpPr>
@@ -12970,7 +13870,7 @@
       </p:sp>
       <p:sp>
         <p:nvSpPr>
-          <p:cNvPr id="19" name="Shape 17"/>
+          <p:cNvPr id="22" name="Shape 20"/>
           <p:cNvSpPr/>
           <p:nvPr/>
         </p:nvSpPr>
@@ -12997,7 +13897,7 @@
       </p:sp>
       <p:sp>
         <p:nvSpPr>
-          <p:cNvPr id="20" name="Shape 18"/>
+          <p:cNvPr id="23" name="Shape 21"/>
           <p:cNvSpPr/>
           <p:nvPr/>
         </p:nvSpPr>
@@ -13024,7 +13924,7 @@
       </p:sp>
       <p:sp>
         <p:nvSpPr>
-          <p:cNvPr id="21" name="Shape 19"/>
+          <p:cNvPr id="24" name="Shape 22"/>
           <p:cNvSpPr/>
           <p:nvPr/>
         </p:nvSpPr>
@@ -13051,7 +13951,7 @@
       </p:sp>
       <p:sp>
         <p:nvSpPr>
-          <p:cNvPr id="22" name="Shape 20"/>
+          <p:cNvPr id="25" name="Shape 23"/>
           <p:cNvSpPr/>
           <p:nvPr/>
         </p:nvSpPr>
@@ -13078,7 +13978,7 @@
       </p:sp>
       <p:sp>
         <p:nvSpPr>
-          <p:cNvPr id="23" name="Shape 21"/>
+          <p:cNvPr id="26" name="Shape 24"/>
           <p:cNvSpPr/>
           <p:nvPr/>
         </p:nvSpPr>
@@ -13105,7 +14005,7 @@
       </p:sp>
       <p:sp>
         <p:nvSpPr>
-          <p:cNvPr id="24" name="Shape 22"/>
+          <p:cNvPr id="27" name="Shape 25"/>
           <p:cNvSpPr/>
           <p:nvPr/>
         </p:nvSpPr>
@@ -13132,7 +14032,7 @@
       </p:sp>
       <p:sp>
         <p:nvSpPr>
-          <p:cNvPr id="25" name="mdpr:1-2-0772f8:title:__title:1-2-0772f8"/>
+          <p:cNvPr id="28" name="mdpr:1-2-0772f8:title:__title:1-2-0772f8"/>
           <p:cNvSpPr txBox="1"/>
           <p:nvPr/>
         </p:nvSpPr>
@@ -13174,7 +14074,7 @@
       </p:sp>
       <p:sp>
         <p:nvSpPr>
-          <p:cNvPr id="26" name="mdpr:1-2-0772f8:toc-item-1:toc-item-1"/>
+          <p:cNvPr id="29" name="mdpr:1-2-0772f8:toc-item-1:toc-item-1"/>
           <p:cNvSpPr txBox="1"/>
           <p:nvPr/>
         </p:nvSpPr>
@@ -13216,7 +14116,7 @@
       </p:sp>
       <p:sp>
         <p:nvSpPr>
-          <p:cNvPr id="27" name="mdpr:1-2-0772f8:toc-item-2:toc-item-2"/>
+          <p:cNvPr id="30" name="mdpr:1-2-0772f8:toc-item-2:toc-item-2"/>
           <p:cNvSpPr txBox="1"/>
           <p:nvPr/>
         </p:nvSpPr>
@@ -13258,7 +14158,7 @@
       </p:sp>
       <p:sp>
         <p:nvSpPr>
-          <p:cNvPr id="28" name="mdpr:1-2-0772f8:toc-item-3:toc-item-3"/>
+          <p:cNvPr id="31" name="mdpr:1-2-0772f8:toc-item-3:toc-item-3"/>
           <p:cNvSpPr txBox="1"/>
           <p:nvPr/>
         </p:nvSpPr>
@@ -13300,7 +14200,7 @@
       </p:sp>
       <p:sp>
         <p:nvSpPr>
-          <p:cNvPr id="29" name="mdpr:1-2-0772f8:toc-item-4:toc-item-4"/>
+          <p:cNvPr id="32" name="mdpr:1-2-0772f8:toc-item-4:toc-item-4"/>
           <p:cNvSpPr txBox="1"/>
           <p:nvPr/>
         </p:nvSpPr>
@@ -13342,7 +14242,7 @@
       </p:sp>
       <p:sp>
         <p:nvSpPr>
-          <p:cNvPr id="30" name="mdpr:1-2-0772f8:toc-item-5:toc-item-5"/>
+          <p:cNvPr id="33" name="mdpr:1-2-0772f8:toc-item-5:toc-item-5"/>
           <p:cNvSpPr txBox="1"/>
           <p:nvPr/>
         </p:nvSpPr>
@@ -13384,7 +14284,7 @@
       </p:sp>
       <p:sp>
         <p:nvSpPr>
-          <p:cNvPr id="31" name="mdpr:1-2-0772f8:toc-item-6:toc-item-6"/>
+          <p:cNvPr id="34" name="mdpr:1-2-0772f8:toc-item-6:toc-item-6"/>
           <p:cNvSpPr txBox="1"/>
           <p:nvPr/>
         </p:nvSpPr>
@@ -13426,7 +14326,7 @@
       </p:sp>
       <p:sp>
         <p:nvSpPr>
-          <p:cNvPr id="32" name="mdpr:1-2-0772f8:toc-item-7:toc-item-7"/>
+          <p:cNvPr id="35" name="mdpr:1-2-0772f8:toc-item-7:toc-item-7"/>
           <p:cNvSpPr txBox="1"/>
           <p:nvPr/>
         </p:nvSpPr>
@@ -13468,7 +14368,7 @@
       </p:sp>
       <p:sp>
         <p:nvSpPr>
-          <p:cNvPr id="33" name="mdpr:1-2-0772f8:toc-item-8:toc-item-8"/>
+          <p:cNvPr id="36" name="mdpr:1-2-0772f8:toc-item-8:toc-item-8"/>
           <p:cNvSpPr txBox="1"/>
           <p:nvPr/>
         </p:nvSpPr>
@@ -13510,7 +14410,7 @@
       </p:sp>
       <p:sp>
         <p:nvSpPr>
-          <p:cNvPr id="34" name="mdpr:1-2-0772f8:toc-item-9:toc-item-9"/>
+          <p:cNvPr id="37" name="mdpr:1-2-0772f8:toc-item-9:toc-item-9"/>
           <p:cNvSpPr txBox="1"/>
           <p:nvPr/>
         </p:nvSpPr>
@@ -13552,7 +14452,7 @@
       </p:sp>
       <p:sp>
         <p:nvSpPr>
-          <p:cNvPr id="35" name="mdpr:1-2-0772f8:toc-item-10:toc-item-10"/>
+          <p:cNvPr id="38" name="mdpr:1-2-0772f8:toc-item-10:toc-item-10"/>
           <p:cNvSpPr txBox="1"/>
           <p:nvPr/>
         </p:nvSpPr>
@@ -13594,7 +14494,7 @@
       </p:sp>
       <p:sp>
         <p:nvSpPr>
-          <p:cNvPr id="36" name="mdpr:1-2-0772f8:toc-item-11:toc-item-11"/>
+          <p:cNvPr id="39" name="mdpr:1-2-0772f8:toc-item-11:toc-item-11"/>
           <p:cNvSpPr txBox="1"/>
           <p:nvPr/>
         </p:nvSpPr>
@@ -13636,7 +14536,7 @@
       </p:sp>
       <p:sp>
         <p:nvSpPr>
-          <p:cNvPr id="37" name="mdpr:1-2-0772f8:toc-item-12:toc-item-12"/>
+          <p:cNvPr id="40" name="mdpr:1-2-0772f8:toc-item-12:toc-item-12"/>
           <p:cNvSpPr txBox="1"/>
           <p:nvPr/>
         </p:nvSpPr>
@@ -13678,7 +14578,7 @@
       </p:sp>
       <p:sp>
         <p:nvSpPr>
-          <p:cNvPr id="38" name="mdpr:1-2-0772f8:toc-item-13:toc-item-13"/>
+          <p:cNvPr id="41" name="mdpr:1-2-0772f8:toc-item-13:toc-item-13"/>
           <p:cNvSpPr txBox="1"/>
           <p:nvPr/>
         </p:nvSpPr>
@@ -13720,7 +14620,7 @@
       </p:sp>
       <p:sp>
         <p:nvSpPr>
-          <p:cNvPr id="39" name="mdpr:1-2-0772f8:toc-item-14:toc-item-14"/>
+          <p:cNvPr id="42" name="mdpr:1-2-0772f8:toc-item-14:toc-item-14"/>
           <p:cNvSpPr txBox="1"/>
           <p:nvPr/>
         </p:nvSpPr>
@@ -13852,31 +14752,8 @@
         </p:nvSpPr>
         <p:spPr>
           <a:xfrm>
-            <a:off x="475488" y="6364224"/>
-            <a:ext cx="11240719" cy="0"/>
-          </a:xfrm>
-          <a:prstGeom prst="line">
-            <a:avLst/>
-          </a:prstGeom>
-          <a:noFill/>
-          <a:ln w="12700">
-            <a:solidFill>
-              <a:srgbClr val="111111"/>
-            </a:solidFill>
-            <a:prstDash val="solid"/>
-          </a:ln>
-        </p:spPr>
-      </p:sp>
-      <p:sp>
-        <p:nvSpPr>
-          <p:cNvPr id="5" name="Shape 3"/>
-          <p:cNvSpPr/>
-          <p:nvPr/>
-        </p:nvSpPr>
-        <p:spPr>
-          <a:xfrm>
-            <a:off x="10134295" y="0"/>
-            <a:ext cx="2057400" cy="256032"/>
+            <a:off x="10033711" y="310896"/>
+            <a:ext cx="1225296" cy="201168"/>
           </a:xfrm>
           <a:prstGeom prst="rect">
             <a:avLst/>
@@ -13896,7 +14773,105 @@
       </p:sp>
       <p:sp>
         <p:nvSpPr>
+          <p:cNvPr id="5" name="Shape 3"/>
+          <p:cNvSpPr/>
+          <p:nvPr/>
+        </p:nvSpPr>
+        <p:spPr>
+          <a:xfrm>
+            <a:off x="10362895" y="457200"/>
+            <a:ext cx="859536" cy="201168"/>
+          </a:xfrm>
+          <a:prstGeom prst="rect">
+            <a:avLst/>
+          </a:prstGeom>
+          <a:solidFill>
+            <a:srgbClr val="00A6FF"/>
+          </a:solidFill>
+          <a:ln w="12700">
+            <a:solidFill>
+              <a:srgbClr val="111111"/>
+            </a:solidFill>
+            <a:prstDash val="solid"/>
+          </a:ln>
+        </p:spPr>
+      </p:sp>
+      <p:sp>
+        <p:nvSpPr>
           <p:cNvPr id="6" name="Shape 4"/>
+          <p:cNvSpPr/>
+          <p:nvPr/>
+        </p:nvSpPr>
+        <p:spPr>
+          <a:xfrm>
+            <a:off x="475488" y="768096"/>
+            <a:ext cx="1353312" cy="0"/>
+          </a:xfrm>
+          <a:prstGeom prst="line">
+            <a:avLst/>
+          </a:prstGeom>
+          <a:noFill/>
+          <a:ln w="12700">
+            <a:solidFill>
+              <a:srgbClr val="111111"/>
+            </a:solidFill>
+            <a:prstDash val="solid"/>
+          </a:ln>
+        </p:spPr>
+      </p:sp>
+      <p:sp>
+        <p:nvSpPr>
+          <p:cNvPr id="7" name="Shape 5"/>
+          <p:cNvSpPr/>
+          <p:nvPr/>
+        </p:nvSpPr>
+        <p:spPr>
+          <a:xfrm>
+            <a:off x="475488" y="6364224"/>
+            <a:ext cx="11240719" cy="0"/>
+          </a:xfrm>
+          <a:prstGeom prst="line">
+            <a:avLst/>
+          </a:prstGeom>
+          <a:noFill/>
+          <a:ln w="12700">
+            <a:solidFill>
+              <a:srgbClr val="111111"/>
+            </a:solidFill>
+            <a:prstDash val="solid"/>
+          </a:ln>
+        </p:spPr>
+      </p:sp>
+      <p:sp>
+        <p:nvSpPr>
+          <p:cNvPr id="8" name="Shape 6"/>
+          <p:cNvSpPr/>
+          <p:nvPr/>
+        </p:nvSpPr>
+        <p:spPr>
+          <a:xfrm>
+            <a:off x="10134295" y="0"/>
+            <a:ext cx="2057400" cy="256032"/>
+          </a:xfrm>
+          <a:prstGeom prst="rect">
+            <a:avLst/>
+          </a:prstGeom>
+          <a:solidFill>
+            <a:srgbClr val="111111"/>
+          </a:solidFill>
+          <a:ln w="12700">
+            <a:solidFill>
+              <a:srgbClr val="111111">
+                <a:alpha val="0"/>
+              </a:srgbClr>
+            </a:solidFill>
+            <a:prstDash val="solid"/>
+          </a:ln>
+        </p:spPr>
+      </p:sp>
+      <p:sp>
+        <p:nvSpPr>
+          <p:cNvPr id="9" name="Shape 7"/>
           <p:cNvSpPr/>
           <p:nvPr/>
         </p:nvSpPr>
@@ -13923,7 +14898,7 @@
       </p:sp>
       <p:sp>
         <p:nvSpPr>
-          <p:cNvPr id="7" name="Shape 5"/>
+          <p:cNvPr id="10" name="Shape 8"/>
           <p:cNvSpPr/>
           <p:nvPr/>
         </p:nvSpPr>
@@ -13950,7 +14925,7 @@
       </p:sp>
       <p:sp>
         <p:nvSpPr>
-          <p:cNvPr id="8" name="Shape 6"/>
+          <p:cNvPr id="11" name="Shape 9"/>
           <p:cNvSpPr/>
           <p:nvPr/>
         </p:nvSpPr>
@@ -13977,7 +14952,7 @@
       </p:sp>
       <p:sp>
         <p:nvSpPr>
-          <p:cNvPr id="9" name="Shape 7"/>
+          <p:cNvPr id="12" name="Shape 10"/>
           <p:cNvSpPr/>
           <p:nvPr/>
         </p:nvSpPr>
@@ -14004,7 +14979,7 @@
       </p:sp>
       <p:sp>
         <p:nvSpPr>
-          <p:cNvPr id="10" name="mdpr:2-2-4f71ba:title:__title:2-2-4f71ba"/>
+          <p:cNvPr id="13" name="mdpr:2-2-4f71ba:title:__title:2-2-4f71ba"/>
           <p:cNvSpPr txBox="1"/>
           <p:nvPr/>
         </p:nvSpPr>
@@ -14046,7 +15021,7 @@
       </p:sp>
       <p:sp>
         <p:nvSpPr>
-          <p:cNvPr id="11" name="mdpr:2-2-4f71ba:left:block-27-chunk-2"/>
+          <p:cNvPr id="14" name="mdpr:2-2-4f71ba:left:block-27-chunk-2"/>
           <p:cNvSpPr txBox="1"/>
           <p:nvPr/>
         </p:nvSpPr>
@@ -14105,7 +15080,7 @@
       </p:sp>
       <p:sp>
         <p:nvSpPr>
-          <p:cNvPr id="12" name="mdpr:2-2-4f71ba:right:block-27-chunk-2"/>
+          <p:cNvPr id="15" name="mdpr:2-2-4f71ba:right:block-27-chunk-2"/>
           <p:cNvSpPr txBox="1"/>
           <p:nvPr/>
         </p:nvSpPr>
@@ -14254,31 +15229,8 @@
         </p:nvSpPr>
         <p:spPr>
           <a:xfrm>
-            <a:off x="475488" y="6364224"/>
-            <a:ext cx="11240719" cy="0"/>
-          </a:xfrm>
-          <a:prstGeom prst="line">
-            <a:avLst/>
-          </a:prstGeom>
-          <a:noFill/>
-          <a:ln w="12700">
-            <a:solidFill>
-              <a:srgbClr val="111111"/>
-            </a:solidFill>
-            <a:prstDash val="solid"/>
-          </a:ln>
-        </p:spPr>
-      </p:sp>
-      <p:sp>
-        <p:nvSpPr>
-          <p:cNvPr id="5" name="Shape 3"/>
-          <p:cNvSpPr/>
-          <p:nvPr/>
-        </p:nvSpPr>
-        <p:spPr>
-          <a:xfrm>
-            <a:off x="10134295" y="0"/>
-            <a:ext cx="2057400" cy="256032"/>
+            <a:off x="10033711" y="310896"/>
+            <a:ext cx="1225296" cy="201168"/>
           </a:xfrm>
           <a:prstGeom prst="rect">
             <a:avLst/>
@@ -14298,7 +15250,105 @@
       </p:sp>
       <p:sp>
         <p:nvSpPr>
+          <p:cNvPr id="5" name="Shape 3"/>
+          <p:cNvSpPr/>
+          <p:nvPr/>
+        </p:nvSpPr>
+        <p:spPr>
+          <a:xfrm>
+            <a:off x="10362895" y="457200"/>
+            <a:ext cx="859536" cy="201168"/>
+          </a:xfrm>
+          <a:prstGeom prst="rect">
+            <a:avLst/>
+          </a:prstGeom>
+          <a:solidFill>
+            <a:srgbClr val="00A6FF"/>
+          </a:solidFill>
+          <a:ln w="12700">
+            <a:solidFill>
+              <a:srgbClr val="111111"/>
+            </a:solidFill>
+            <a:prstDash val="solid"/>
+          </a:ln>
+        </p:spPr>
+      </p:sp>
+      <p:sp>
+        <p:nvSpPr>
           <p:cNvPr id="6" name="Shape 4"/>
+          <p:cNvSpPr/>
+          <p:nvPr/>
+        </p:nvSpPr>
+        <p:spPr>
+          <a:xfrm>
+            <a:off x="475488" y="768096"/>
+            <a:ext cx="1353312" cy="0"/>
+          </a:xfrm>
+          <a:prstGeom prst="line">
+            <a:avLst/>
+          </a:prstGeom>
+          <a:noFill/>
+          <a:ln w="12700">
+            <a:solidFill>
+              <a:srgbClr val="111111"/>
+            </a:solidFill>
+            <a:prstDash val="solid"/>
+          </a:ln>
+        </p:spPr>
+      </p:sp>
+      <p:sp>
+        <p:nvSpPr>
+          <p:cNvPr id="7" name="Shape 5"/>
+          <p:cNvSpPr/>
+          <p:nvPr/>
+        </p:nvSpPr>
+        <p:spPr>
+          <a:xfrm>
+            <a:off x="475488" y="6364224"/>
+            <a:ext cx="11240719" cy="0"/>
+          </a:xfrm>
+          <a:prstGeom prst="line">
+            <a:avLst/>
+          </a:prstGeom>
+          <a:noFill/>
+          <a:ln w="12700">
+            <a:solidFill>
+              <a:srgbClr val="111111"/>
+            </a:solidFill>
+            <a:prstDash val="solid"/>
+          </a:ln>
+        </p:spPr>
+      </p:sp>
+      <p:sp>
+        <p:nvSpPr>
+          <p:cNvPr id="8" name="Shape 6"/>
+          <p:cNvSpPr/>
+          <p:nvPr/>
+        </p:nvSpPr>
+        <p:spPr>
+          <a:xfrm>
+            <a:off x="10134295" y="0"/>
+            <a:ext cx="2057400" cy="256032"/>
+          </a:xfrm>
+          <a:prstGeom prst="rect">
+            <a:avLst/>
+          </a:prstGeom>
+          <a:solidFill>
+            <a:srgbClr val="111111"/>
+          </a:solidFill>
+          <a:ln w="12700">
+            <a:solidFill>
+              <a:srgbClr val="111111">
+                <a:alpha val="0"/>
+              </a:srgbClr>
+            </a:solidFill>
+            <a:prstDash val="solid"/>
+          </a:ln>
+        </p:spPr>
+      </p:sp>
+      <p:sp>
+        <p:nvSpPr>
+          <p:cNvPr id="9" name="Shape 7"/>
           <p:cNvSpPr/>
           <p:nvPr/>
         </p:nvSpPr>
@@ -14325,7 +15375,7 @@
       </p:sp>
       <p:sp>
         <p:nvSpPr>
-          <p:cNvPr id="7" name="Shape 5"/>
+          <p:cNvPr id="10" name="Shape 8"/>
           <p:cNvSpPr/>
           <p:nvPr/>
         </p:nvSpPr>
@@ -14352,7 +15402,7 @@
       </p:sp>
       <p:pic>
         <p:nvPicPr>
-          <p:cNvPr id="8" name="Image 0" descr="preencoded.png">    </p:cNvPr>
+          <p:cNvPr id="11" name="Image 0" descr="preencoded.png">    </p:cNvPr>
           <p:cNvPicPr>
             <a:picLocks noChangeAspect="1"/>
           </p:cNvPicPr>
@@ -14382,7 +15432,7 @@
       </p:pic>
       <p:pic>
         <p:nvPicPr>
-          <p:cNvPr id="9" name="Image 1" descr="preencoded.png">    </p:cNvPr>
+          <p:cNvPr id="12" name="Image 1" descr="preencoded.png">    </p:cNvPr>
           <p:cNvPicPr>
             <a:picLocks noChangeAspect="1"/>
           </p:cNvPicPr>
@@ -14412,7 +15462,7 @@
       </p:pic>
       <p:pic>
         <p:nvPicPr>
-          <p:cNvPr id="10" name="Image 2" descr="preencoded.png">    </p:cNvPr>
+          <p:cNvPr id="13" name="Image 2" descr="preencoded.png">    </p:cNvPr>
           <p:cNvPicPr>
             <a:picLocks noChangeAspect="1"/>
           </p:cNvPicPr>
@@ -14442,7 +15492,7 @@
       </p:pic>
       <p:pic>
         <p:nvPicPr>
-          <p:cNvPr id="11" name="Image 3" descr="preencoded.png">    </p:cNvPr>
+          <p:cNvPr id="14" name="Image 3" descr="preencoded.png">    </p:cNvPr>
           <p:cNvPicPr>
             <a:picLocks noChangeAspect="1"/>
           </p:cNvPicPr>
@@ -14472,7 +15522,7 @@
       </p:pic>
       <p:sp>
         <p:nvSpPr>
-          <p:cNvPr id="12" name="Shape 6"/>
+          <p:cNvPr id="15" name="Shape 9"/>
           <p:cNvSpPr/>
           <p:nvPr/>
         </p:nvSpPr>
@@ -14499,7 +15549,7 @@
       </p:sp>
       <p:sp>
         <p:nvSpPr>
-          <p:cNvPr id="13" name="Shape 7"/>
+          <p:cNvPr id="16" name="Shape 10"/>
           <p:cNvSpPr/>
           <p:nvPr/>
         </p:nvSpPr>
@@ -14526,7 +15576,7 @@
       </p:sp>
       <p:sp>
         <p:nvSpPr>
-          <p:cNvPr id="14" name="Shape 8"/>
+          <p:cNvPr id="17" name="Shape 11"/>
           <p:cNvSpPr/>
           <p:nvPr/>
         </p:nvSpPr>
@@ -14553,7 +15603,7 @@
       </p:sp>
       <p:sp>
         <p:nvSpPr>
-          <p:cNvPr id="15" name="Shape 9"/>
+          <p:cNvPr id="18" name="Shape 12"/>
           <p:cNvSpPr/>
           <p:nvPr/>
         </p:nvSpPr>
@@ -14580,7 +15630,7 @@
       </p:sp>
       <p:sp>
         <p:nvSpPr>
-          <p:cNvPr id="16" name="mdpr:icon-and-text-aside-8429fc:title:__title:icon-and-text-aside-8429fc"/>
+          <p:cNvPr id="19" name="mdpr:icon-and-text-aside-8429fc:title:__title:icon-and-text-aside-8429fc"/>
           <p:cNvSpPr txBox="1"/>
           <p:nvPr/>
         </p:nvSpPr>
@@ -14622,7 +15672,7 @@
       </p:sp>
       <p:sp>
         <p:nvSpPr>
-          <p:cNvPr id="17" name="Shape 11"/>
+          <p:cNvPr id="20" name="Shape 14"/>
           <p:cNvSpPr/>
           <p:nvPr/>
         </p:nvSpPr>
@@ -14649,7 +15699,7 @@
       </p:sp>
       <p:pic>
         <p:nvPicPr>
-          <p:cNvPr id="18" name="Image 4" descr="article icon from tabler-icons (MIT)">    </p:cNvPr>
+          <p:cNvPr id="21" name="Image 4" descr="article icon from tabler-icons (MIT)">    </p:cNvPr>
           <p:cNvPicPr>
             <a:picLocks noChangeAspect="1"/>
           </p:cNvPicPr>
@@ -14679,7 +15729,7 @@
       </p:pic>
       <p:sp>
         <p:nvSpPr>
-          <p:cNvPr id="19" name="mdpr:icon-and-text-aside-8429fc:item-1:block-29"/>
+          <p:cNvPr id="22" name="mdpr:icon-and-text-aside-8429fc:item-1:block-29"/>
           <p:cNvSpPr txBox="1"/>
           <p:nvPr/>
         </p:nvSpPr>
@@ -14738,7 +15788,7 @@
       </p:sp>
       <p:sp>
         <p:nvSpPr>
-          <p:cNvPr id="20" name="Shape 13"/>
+          <p:cNvPr id="23" name="Shape 16"/>
           <p:cNvSpPr/>
           <p:nvPr/>
         </p:nvSpPr>
@@ -14765,7 +15815,7 @@
       </p:sp>
       <p:pic>
         <p:nvPicPr>
-          <p:cNvPr id="21" name="Image 5" descr="article icon from tabler-icons (MIT)">    </p:cNvPr>
+          <p:cNvPr id="24" name="Image 5" descr="article icon from tabler-icons (MIT)">    </p:cNvPr>
           <p:cNvPicPr>
             <a:picLocks noChangeAspect="1"/>
           </p:cNvPicPr>
@@ -14795,7 +15845,7 @@
       </p:pic>
       <p:sp>
         <p:nvSpPr>
-          <p:cNvPr id="22" name="mdpr:icon-and-text-aside-8429fc:item-2:block-29"/>
+          <p:cNvPr id="25" name="mdpr:icon-and-text-aside-8429fc:item-2:block-29"/>
           <p:cNvSpPr txBox="1"/>
           <p:nvPr/>
         </p:nvSpPr>
@@ -14854,7 +15904,7 @@
       </p:sp>
       <p:sp>
         <p:nvSpPr>
-          <p:cNvPr id="23" name="Shape 15"/>
+          <p:cNvPr id="26" name="Shape 18"/>
           <p:cNvSpPr/>
           <p:nvPr/>
         </p:nvSpPr>
@@ -14881,7 +15931,7 @@
       </p:sp>
       <p:pic>
         <p:nvPicPr>
-          <p:cNvPr id="24" name="Image 6" descr="article icon from tabler-icons (MIT)">    </p:cNvPr>
+          <p:cNvPr id="27" name="Image 6" descr="article icon from tabler-icons (MIT)">    </p:cNvPr>
           <p:cNvPicPr>
             <a:picLocks noChangeAspect="1"/>
           </p:cNvPicPr>
@@ -14911,7 +15961,7 @@
       </p:pic>
       <p:sp>
         <p:nvSpPr>
-          <p:cNvPr id="25" name="mdpr:icon-and-text-aside-8429fc:item-3:block-29"/>
+          <p:cNvPr id="28" name="mdpr:icon-and-text-aside-8429fc:item-3:block-29"/>
           <p:cNvSpPr txBox="1"/>
           <p:nvPr/>
         </p:nvSpPr>
@@ -14970,7 +16020,7 @@
       </p:sp>
       <p:sp>
         <p:nvSpPr>
-          <p:cNvPr id="26" name="Shape 17"/>
+          <p:cNvPr id="29" name="Shape 20"/>
           <p:cNvSpPr/>
           <p:nvPr/>
         </p:nvSpPr>
@@ -14997,7 +16047,7 @@
       </p:sp>
       <p:pic>
         <p:nvPicPr>
-          <p:cNvPr id="27" name="Image 7" descr="table icon from tabler-icons (MIT)">    </p:cNvPr>
+          <p:cNvPr id="30" name="Image 7" descr="table icon from tabler-icons (MIT)">    </p:cNvPr>
           <p:cNvPicPr>
             <a:picLocks noChangeAspect="1"/>
           </p:cNvPicPr>
@@ -15027,7 +16077,7 @@
       </p:pic>
       <p:sp>
         <p:nvSpPr>
-          <p:cNvPr id="28" name="mdpr:icon-and-text-aside-8429fc:item-4:block-29"/>
+          <p:cNvPr id="31" name="mdpr:icon-and-text-aside-8429fc:item-4:block-29"/>
           <p:cNvSpPr txBox="1"/>
           <p:nvPr/>
         </p:nvSpPr>
@@ -15176,31 +16226,8 @@
         </p:nvSpPr>
         <p:spPr>
           <a:xfrm>
-            <a:off x="475488" y="6364224"/>
-            <a:ext cx="11240719" cy="0"/>
-          </a:xfrm>
-          <a:prstGeom prst="line">
-            <a:avLst/>
-          </a:prstGeom>
-          <a:noFill/>
-          <a:ln w="12700">
-            <a:solidFill>
-              <a:srgbClr val="111111"/>
-            </a:solidFill>
-            <a:prstDash val="solid"/>
-          </a:ln>
-        </p:spPr>
-      </p:sp>
-      <p:sp>
-        <p:nvSpPr>
-          <p:cNvPr id="5" name="Shape 3"/>
-          <p:cNvSpPr/>
-          <p:nvPr/>
-        </p:nvSpPr>
-        <p:spPr>
-          <a:xfrm>
-            <a:off x="10134295" y="0"/>
-            <a:ext cx="2057400" cy="256032"/>
+            <a:off x="10033711" y="310896"/>
+            <a:ext cx="1225296" cy="201168"/>
           </a:xfrm>
           <a:prstGeom prst="rect">
             <a:avLst/>
@@ -15220,7 +16247,105 @@
       </p:sp>
       <p:sp>
         <p:nvSpPr>
+          <p:cNvPr id="5" name="Shape 3"/>
+          <p:cNvSpPr/>
+          <p:nvPr/>
+        </p:nvSpPr>
+        <p:spPr>
+          <a:xfrm>
+            <a:off x="10362895" y="457200"/>
+            <a:ext cx="859536" cy="201168"/>
+          </a:xfrm>
+          <a:prstGeom prst="rect">
+            <a:avLst/>
+          </a:prstGeom>
+          <a:solidFill>
+            <a:srgbClr val="00A6FF"/>
+          </a:solidFill>
+          <a:ln w="12700">
+            <a:solidFill>
+              <a:srgbClr val="111111"/>
+            </a:solidFill>
+            <a:prstDash val="solid"/>
+          </a:ln>
+        </p:spPr>
+      </p:sp>
+      <p:sp>
+        <p:nvSpPr>
           <p:cNvPr id="6" name="Shape 4"/>
+          <p:cNvSpPr/>
+          <p:nvPr/>
+        </p:nvSpPr>
+        <p:spPr>
+          <a:xfrm>
+            <a:off x="475488" y="768096"/>
+            <a:ext cx="1353312" cy="0"/>
+          </a:xfrm>
+          <a:prstGeom prst="line">
+            <a:avLst/>
+          </a:prstGeom>
+          <a:noFill/>
+          <a:ln w="12700">
+            <a:solidFill>
+              <a:srgbClr val="111111"/>
+            </a:solidFill>
+            <a:prstDash val="solid"/>
+          </a:ln>
+        </p:spPr>
+      </p:sp>
+      <p:sp>
+        <p:nvSpPr>
+          <p:cNvPr id="7" name="Shape 5"/>
+          <p:cNvSpPr/>
+          <p:nvPr/>
+        </p:nvSpPr>
+        <p:spPr>
+          <a:xfrm>
+            <a:off x="475488" y="6364224"/>
+            <a:ext cx="11240719" cy="0"/>
+          </a:xfrm>
+          <a:prstGeom prst="line">
+            <a:avLst/>
+          </a:prstGeom>
+          <a:noFill/>
+          <a:ln w="12700">
+            <a:solidFill>
+              <a:srgbClr val="111111"/>
+            </a:solidFill>
+            <a:prstDash val="solid"/>
+          </a:ln>
+        </p:spPr>
+      </p:sp>
+      <p:sp>
+        <p:nvSpPr>
+          <p:cNvPr id="8" name="Shape 6"/>
+          <p:cNvSpPr/>
+          <p:nvPr/>
+        </p:nvSpPr>
+        <p:spPr>
+          <a:xfrm>
+            <a:off x="10134295" y="0"/>
+            <a:ext cx="2057400" cy="256032"/>
+          </a:xfrm>
+          <a:prstGeom prst="rect">
+            <a:avLst/>
+          </a:prstGeom>
+          <a:solidFill>
+            <a:srgbClr val="111111"/>
+          </a:solidFill>
+          <a:ln w="12700">
+            <a:solidFill>
+              <a:srgbClr val="111111">
+                <a:alpha val="0"/>
+              </a:srgbClr>
+            </a:solidFill>
+            <a:prstDash val="solid"/>
+          </a:ln>
+        </p:spPr>
+      </p:sp>
+      <p:sp>
+        <p:nvSpPr>
+          <p:cNvPr id="9" name="Shape 7"/>
           <p:cNvSpPr/>
           <p:nvPr/>
         </p:nvSpPr>
@@ -15247,7 +16372,7 @@
       </p:sp>
       <p:sp>
         <p:nvSpPr>
-          <p:cNvPr id="7" name="Shape 5"/>
+          <p:cNvPr id="10" name="Shape 8"/>
           <p:cNvSpPr/>
           <p:nvPr/>
         </p:nvSpPr>
@@ -15274,7 +16399,7 @@
       </p:sp>
       <p:pic>
         <p:nvPicPr>
-          <p:cNvPr id="8" name="Image 0" descr="preencoded.png">    </p:cNvPr>
+          <p:cNvPr id="11" name="Image 0" descr="preencoded.png">    </p:cNvPr>
           <p:cNvPicPr>
             <a:picLocks noChangeAspect="1"/>
           </p:cNvPicPr>
@@ -15304,7 +16429,7 @@
       </p:pic>
       <p:pic>
         <p:nvPicPr>
-          <p:cNvPr id="9" name="Image 1" descr="preencoded.png">    </p:cNvPr>
+          <p:cNvPr id="12" name="Image 1" descr="preencoded.png">    </p:cNvPr>
           <p:cNvPicPr>
             <a:picLocks noChangeAspect="1"/>
           </p:cNvPicPr>
@@ -15334,7 +16459,7 @@
       </p:pic>
       <p:pic>
         <p:nvPicPr>
-          <p:cNvPr id="10" name="Image 2" descr="preencoded.png">    </p:cNvPr>
+          <p:cNvPr id="13" name="Image 2" descr="preencoded.png">    </p:cNvPr>
           <p:cNvPicPr>
             <a:picLocks noChangeAspect="1"/>
           </p:cNvPicPr>
@@ -15364,7 +16489,7 @@
       </p:pic>
       <p:pic>
         <p:nvPicPr>
-          <p:cNvPr id="11" name="Image 3" descr="preencoded.png">    </p:cNvPr>
+          <p:cNvPr id="14" name="Image 3" descr="preencoded.png">    </p:cNvPr>
           <p:cNvPicPr>
             <a:picLocks noChangeAspect="1"/>
           </p:cNvPicPr>
@@ -15394,7 +16519,7 @@
       </p:pic>
       <p:sp>
         <p:nvSpPr>
-          <p:cNvPr id="12" name="Shape 6"/>
+          <p:cNvPr id="15" name="Shape 9"/>
           <p:cNvSpPr/>
           <p:nvPr/>
         </p:nvSpPr>
@@ -15421,7 +16546,7 @@
       </p:sp>
       <p:sp>
         <p:nvSpPr>
-          <p:cNvPr id="13" name="Shape 7"/>
+          <p:cNvPr id="16" name="Shape 10"/>
           <p:cNvSpPr/>
           <p:nvPr/>
         </p:nvSpPr>
@@ -15448,7 +16573,7 @@
       </p:sp>
       <p:sp>
         <p:nvSpPr>
-          <p:cNvPr id="14" name="Shape 8"/>
+          <p:cNvPr id="17" name="Shape 11"/>
           <p:cNvSpPr/>
           <p:nvPr/>
         </p:nvSpPr>
@@ -15475,7 +16600,7 @@
       </p:sp>
       <p:sp>
         <p:nvSpPr>
-          <p:cNvPr id="15" name="Shape 9"/>
+          <p:cNvPr id="18" name="Shape 12"/>
           <p:cNvSpPr/>
           <p:nvPr/>
         </p:nvSpPr>
@@ -15502,7 +16627,7 @@
       </p:sp>
       <p:sp>
         <p:nvSpPr>
-          <p:cNvPr id="16" name="mdpr:overflow-guard-f8d03e:title:__title:overflow-guard-f8d03e"/>
+          <p:cNvPr id="19" name="mdpr:overflow-guard-f8d03e:title:__title:overflow-guard-f8d03e"/>
           <p:cNvSpPr txBox="1"/>
           <p:nvPr/>
         </p:nvSpPr>
@@ -15544,7 +16669,7 @@
       </p:sp>
       <p:sp>
         <p:nvSpPr>
-          <p:cNvPr id="17" name="Shape 11"/>
+          <p:cNvPr id="20" name="Shape 14"/>
           <p:cNvSpPr/>
           <p:nvPr/>
         </p:nvSpPr>
@@ -15571,7 +16696,7 @@
       </p:sp>
       <p:pic>
         <p:nvPicPr>
-          <p:cNvPr id="18" name="Image 4" descr="verified icon from tabler-icons (MIT)">    </p:cNvPr>
+          <p:cNvPr id="21" name="Image 4" descr="verified icon from tabler-icons (MIT)">    </p:cNvPr>
           <p:cNvPicPr>
             <a:picLocks noChangeAspect="1"/>
           </p:cNvPicPr>
@@ -15601,7 +16726,7 @@
       </p:pic>
       <p:sp>
         <p:nvSpPr>
-          <p:cNvPr id="19" name="mdpr:overflow-guard-f8d03e:item-1:block-31"/>
+          <p:cNvPr id="22" name="mdpr:overflow-guard-f8d03e:item-1:block-31"/>
           <p:cNvSpPr txBox="1"/>
           <p:nvPr/>
         </p:nvSpPr>
@@ -15660,7 +16785,7 @@
       </p:sp>
       <p:sp>
         <p:nvSpPr>
-          <p:cNvPr id="20" name="Shape 13"/>
+          <p:cNvPr id="23" name="Shape 16"/>
           <p:cNvSpPr/>
           <p:nvPr/>
         </p:nvSpPr>
@@ -15687,7 +16812,7 @@
       </p:sp>
       <p:pic>
         <p:nvPicPr>
-          <p:cNvPr id="21" name="Image 5" descr="table icon from tabler-icons (MIT)">    </p:cNvPr>
+          <p:cNvPr id="24" name="Image 5" descr="table icon from tabler-icons (MIT)">    </p:cNvPr>
           <p:cNvPicPr>
             <a:picLocks noChangeAspect="1"/>
           </p:cNvPicPr>
@@ -15717,7 +16842,7 @@
       </p:pic>
       <p:sp>
         <p:nvSpPr>
-          <p:cNvPr id="22" name="mdpr:overflow-guard-f8d03e:item-2:block-31"/>
+          <p:cNvPr id="25" name="mdpr:overflow-guard-f8d03e:item-2:block-31"/>
           <p:cNvSpPr txBox="1"/>
           <p:nvPr/>
         </p:nvSpPr>
@@ -15776,7 +16901,7 @@
       </p:sp>
       <p:sp>
         <p:nvSpPr>
-          <p:cNvPr id="23" name="Shape 15"/>
+          <p:cNvPr id="26" name="Shape 18"/>
           <p:cNvSpPr/>
           <p:nvPr/>
         </p:nvSpPr>
@@ -15803,7 +16928,7 @@
       </p:sp>
       <p:pic>
         <p:nvPicPr>
-          <p:cNvPr id="24" name="Image 6" descr="article icon from tabler-icons (MIT)">    </p:cNvPr>
+          <p:cNvPr id="27" name="Image 6" descr="article icon from tabler-icons (MIT)">    </p:cNvPr>
           <p:cNvPicPr>
             <a:picLocks noChangeAspect="1"/>
           </p:cNvPicPr>
@@ -15833,7 +16958,7 @@
       </p:pic>
       <p:sp>
         <p:nvSpPr>
-          <p:cNvPr id="25" name="mdpr:overflow-guard-f8d03e:item-3:block-31"/>
+          <p:cNvPr id="28" name="mdpr:overflow-guard-f8d03e:item-3:block-31"/>
           <p:cNvSpPr txBox="1"/>
           <p:nvPr/>
         </p:nvSpPr>
@@ -15892,7 +17017,7 @@
       </p:sp>
       <p:sp>
         <p:nvSpPr>
-          <p:cNvPr id="26" name="Shape 17"/>
+          <p:cNvPr id="29" name="Shape 20"/>
           <p:cNvSpPr/>
           <p:nvPr/>
         </p:nvSpPr>
@@ -15919,7 +17044,7 @@
       </p:sp>
       <p:pic>
         <p:nvPicPr>
-          <p:cNvPr id="27" name="Image 7" descr="article icon from tabler-icons (MIT)">    </p:cNvPr>
+          <p:cNvPr id="30" name="Image 7" descr="article icon from tabler-icons (MIT)">    </p:cNvPr>
           <p:cNvPicPr>
             <a:picLocks noChangeAspect="1"/>
           </p:cNvPicPr>
@@ -15949,7 +17074,7 @@
       </p:pic>
       <p:sp>
         <p:nvSpPr>
-          <p:cNvPr id="28" name="mdpr:overflow-guard-f8d03e:item-4:block-31"/>
+          <p:cNvPr id="31" name="mdpr:overflow-guard-f8d03e:item-4:block-31"/>
           <p:cNvSpPr txBox="1"/>
           <p:nvPr/>
         </p:nvSpPr>
@@ -16098,31 +17223,8 @@
         </p:nvSpPr>
         <p:spPr>
           <a:xfrm>
-            <a:off x="475488" y="6364224"/>
-            <a:ext cx="11240719" cy="0"/>
-          </a:xfrm>
-          <a:prstGeom prst="line">
-            <a:avLst/>
-          </a:prstGeom>
-          <a:noFill/>
-          <a:ln w="12700">
-            <a:solidFill>
-              <a:srgbClr val="111111"/>
-            </a:solidFill>
-            <a:prstDash val="solid"/>
-          </a:ln>
-        </p:spPr>
-      </p:sp>
-      <p:sp>
-        <p:nvSpPr>
-          <p:cNvPr id="5" name="Shape 3"/>
-          <p:cNvSpPr/>
-          <p:nvPr/>
-        </p:nvSpPr>
-        <p:spPr>
-          <a:xfrm>
-            <a:off x="10134295" y="0"/>
-            <a:ext cx="2057400" cy="256032"/>
+            <a:off x="10033711" y="310896"/>
+            <a:ext cx="1225296" cy="201168"/>
           </a:xfrm>
           <a:prstGeom prst="rect">
             <a:avLst/>
@@ -16142,7 +17244,105 @@
       </p:sp>
       <p:sp>
         <p:nvSpPr>
+          <p:cNvPr id="5" name="Shape 3"/>
+          <p:cNvSpPr/>
+          <p:nvPr/>
+        </p:nvSpPr>
+        <p:spPr>
+          <a:xfrm>
+            <a:off x="10362895" y="457200"/>
+            <a:ext cx="859536" cy="201168"/>
+          </a:xfrm>
+          <a:prstGeom prst="rect">
+            <a:avLst/>
+          </a:prstGeom>
+          <a:solidFill>
+            <a:srgbClr val="00A6FF"/>
+          </a:solidFill>
+          <a:ln w="12700">
+            <a:solidFill>
+              <a:srgbClr val="111111"/>
+            </a:solidFill>
+            <a:prstDash val="solid"/>
+          </a:ln>
+        </p:spPr>
+      </p:sp>
+      <p:sp>
+        <p:nvSpPr>
           <p:cNvPr id="6" name="Shape 4"/>
+          <p:cNvSpPr/>
+          <p:nvPr/>
+        </p:nvSpPr>
+        <p:spPr>
+          <a:xfrm>
+            <a:off x="475488" y="768096"/>
+            <a:ext cx="1353312" cy="0"/>
+          </a:xfrm>
+          <a:prstGeom prst="line">
+            <a:avLst/>
+          </a:prstGeom>
+          <a:noFill/>
+          <a:ln w="12700">
+            <a:solidFill>
+              <a:srgbClr val="111111"/>
+            </a:solidFill>
+            <a:prstDash val="solid"/>
+          </a:ln>
+        </p:spPr>
+      </p:sp>
+      <p:sp>
+        <p:nvSpPr>
+          <p:cNvPr id="7" name="Shape 5"/>
+          <p:cNvSpPr/>
+          <p:nvPr/>
+        </p:nvSpPr>
+        <p:spPr>
+          <a:xfrm>
+            <a:off x="475488" y="6364224"/>
+            <a:ext cx="11240719" cy="0"/>
+          </a:xfrm>
+          <a:prstGeom prst="line">
+            <a:avLst/>
+          </a:prstGeom>
+          <a:noFill/>
+          <a:ln w="12700">
+            <a:solidFill>
+              <a:srgbClr val="111111"/>
+            </a:solidFill>
+            <a:prstDash val="solid"/>
+          </a:ln>
+        </p:spPr>
+      </p:sp>
+      <p:sp>
+        <p:nvSpPr>
+          <p:cNvPr id="8" name="Shape 6"/>
+          <p:cNvSpPr/>
+          <p:nvPr/>
+        </p:nvSpPr>
+        <p:spPr>
+          <a:xfrm>
+            <a:off x="10134295" y="0"/>
+            <a:ext cx="2057400" cy="256032"/>
+          </a:xfrm>
+          <a:prstGeom prst="rect">
+            <a:avLst/>
+          </a:prstGeom>
+          <a:solidFill>
+            <a:srgbClr val="111111"/>
+          </a:solidFill>
+          <a:ln w="12700">
+            <a:solidFill>
+              <a:srgbClr val="111111">
+                <a:alpha val="0"/>
+              </a:srgbClr>
+            </a:solidFill>
+            <a:prstDash val="solid"/>
+          </a:ln>
+        </p:spPr>
+      </p:sp>
+      <p:sp>
+        <p:nvSpPr>
+          <p:cNvPr id="9" name="Shape 7"/>
           <p:cNvSpPr/>
           <p:nvPr/>
         </p:nvSpPr>
@@ -16169,7 +17369,7 @@
       </p:sp>
       <p:sp>
         <p:nvSpPr>
-          <p:cNvPr id="7" name="Shape 5"/>
+          <p:cNvPr id="10" name="Shape 8"/>
           <p:cNvSpPr/>
           <p:nvPr/>
         </p:nvSpPr>
@@ -16196,7 +17396,7 @@
       </p:sp>
       <p:pic>
         <p:nvPicPr>
-          <p:cNvPr id="8" name="Image 0" descr="preencoded.png">    </p:cNvPr>
+          <p:cNvPr id="11" name="Image 0" descr="preencoded.png">    </p:cNvPr>
           <p:cNvPicPr>
             <a:picLocks noChangeAspect="1"/>
           </p:cNvPicPr>
@@ -16226,7 +17426,7 @@
       </p:pic>
       <p:sp>
         <p:nvSpPr>
-          <p:cNvPr id="9" name="Shape 6"/>
+          <p:cNvPr id="12" name="Shape 9"/>
           <p:cNvSpPr/>
           <p:nvPr/>
         </p:nvSpPr>
@@ -16253,7 +17453,7 @@
       </p:sp>
       <p:sp>
         <p:nvSpPr>
-          <p:cNvPr id="10" name="mdpr:image-safe-frame-d4d6a4:title:__title:image-safe-frame-d4d6a4"/>
+          <p:cNvPr id="13" name="mdpr:image-safe-frame-d4d6a4:title:__title:image-safe-frame-d4d6a4"/>
           <p:cNvSpPr txBox="1"/>
           <p:nvPr/>
         </p:nvSpPr>
@@ -16295,7 +17495,7 @@
       </p:sp>
       <p:sp>
         <p:nvSpPr>
-          <p:cNvPr id="11" name="mdpr:image-safe-frame-d4d6a4:body:block-33-block-33-block-33"/>
+          <p:cNvPr id="14" name="mdpr:image-safe-frame-d4d6a4:body:block-33-block-33-block-33"/>
           <p:cNvSpPr txBox="1"/>
           <p:nvPr/>
         </p:nvSpPr>
@@ -16434,7 +17634,7 @@
       </p:sp>
       <p:pic>
         <p:nvPicPr>
-          <p:cNvPr id="12" name="mdpr:image-safe-frame-d4d6a4:image-1:block-34" descr="{&quot;mdpr&quot;:{&quot;slideId&quot;:&quot;image-safe-frame-d4d6a4&quot;,&quot;layoutSlideId&quot;:&quot;layout-image-safe-frame-d4d6a4&quot;,&quot;regionId&quot;:&quot;image-1&quot;,&quot;blockIds&quot;:[&quot;block-34&quot;],&quot;objectKind&quot;:&quot;native-image&quot;,&quot;role&quot;:&quot;image&quot;,&quot;editable&quot;:false}}">    </p:cNvPr>
+          <p:cNvPr id="15" name="mdpr:image-safe-frame-d4d6a4:image-1:block-34" descr="{&quot;mdpr&quot;:{&quot;slideId&quot;:&quot;image-safe-frame-d4d6a4&quot;,&quot;layoutSlideId&quot;:&quot;layout-image-safe-frame-d4d6a4&quot;,&quot;regionId&quot;:&quot;image-1&quot;,&quot;blockIds&quot;:[&quot;block-34&quot;],&quot;objectKind&quot;:&quot;native-image&quot;,&quot;role&quot;:&quot;image&quot;,&quot;editable&quot;:false}}">    </p:cNvPr>
           <p:cNvPicPr>
             <a:picLocks noChangeAspect="1"/>
           </p:cNvPicPr>
@@ -16554,31 +17754,8 @@
         </p:nvSpPr>
         <p:spPr>
           <a:xfrm>
-            <a:off x="475488" y="6364224"/>
-            <a:ext cx="11240719" cy="0"/>
-          </a:xfrm>
-          <a:prstGeom prst="line">
-            <a:avLst/>
-          </a:prstGeom>
-          <a:noFill/>
-          <a:ln w="12700">
-            <a:solidFill>
-              <a:srgbClr val="111111"/>
-            </a:solidFill>
-            <a:prstDash val="solid"/>
-          </a:ln>
-        </p:spPr>
-      </p:sp>
-      <p:sp>
-        <p:nvSpPr>
-          <p:cNvPr id="5" name="Shape 3"/>
-          <p:cNvSpPr/>
-          <p:nvPr/>
-        </p:nvSpPr>
-        <p:spPr>
-          <a:xfrm>
-            <a:off x="10134295" y="0"/>
-            <a:ext cx="2057400" cy="256032"/>
+            <a:off x="10033711" y="310896"/>
+            <a:ext cx="1225296" cy="201168"/>
           </a:xfrm>
           <a:prstGeom prst="rect">
             <a:avLst/>
@@ -16598,7 +17775,105 @@
       </p:sp>
       <p:sp>
         <p:nvSpPr>
+          <p:cNvPr id="5" name="Shape 3"/>
+          <p:cNvSpPr/>
+          <p:nvPr/>
+        </p:nvSpPr>
+        <p:spPr>
+          <a:xfrm>
+            <a:off x="10362895" y="457200"/>
+            <a:ext cx="859536" cy="201168"/>
+          </a:xfrm>
+          <a:prstGeom prst="rect">
+            <a:avLst/>
+          </a:prstGeom>
+          <a:solidFill>
+            <a:srgbClr val="00A6FF"/>
+          </a:solidFill>
+          <a:ln w="12700">
+            <a:solidFill>
+              <a:srgbClr val="111111"/>
+            </a:solidFill>
+            <a:prstDash val="solid"/>
+          </a:ln>
+        </p:spPr>
+      </p:sp>
+      <p:sp>
+        <p:nvSpPr>
           <p:cNvPr id="6" name="Shape 4"/>
+          <p:cNvSpPr/>
+          <p:nvPr/>
+        </p:nvSpPr>
+        <p:spPr>
+          <a:xfrm>
+            <a:off x="475488" y="768096"/>
+            <a:ext cx="1353312" cy="0"/>
+          </a:xfrm>
+          <a:prstGeom prst="line">
+            <a:avLst/>
+          </a:prstGeom>
+          <a:noFill/>
+          <a:ln w="12700">
+            <a:solidFill>
+              <a:srgbClr val="111111"/>
+            </a:solidFill>
+            <a:prstDash val="solid"/>
+          </a:ln>
+        </p:spPr>
+      </p:sp>
+      <p:sp>
+        <p:nvSpPr>
+          <p:cNvPr id="7" name="Shape 5"/>
+          <p:cNvSpPr/>
+          <p:nvPr/>
+        </p:nvSpPr>
+        <p:spPr>
+          <a:xfrm>
+            <a:off x="475488" y="6364224"/>
+            <a:ext cx="11240719" cy="0"/>
+          </a:xfrm>
+          <a:prstGeom prst="line">
+            <a:avLst/>
+          </a:prstGeom>
+          <a:noFill/>
+          <a:ln w="12700">
+            <a:solidFill>
+              <a:srgbClr val="111111"/>
+            </a:solidFill>
+            <a:prstDash val="solid"/>
+          </a:ln>
+        </p:spPr>
+      </p:sp>
+      <p:sp>
+        <p:nvSpPr>
+          <p:cNvPr id="8" name="Shape 6"/>
+          <p:cNvSpPr/>
+          <p:nvPr/>
+        </p:nvSpPr>
+        <p:spPr>
+          <a:xfrm>
+            <a:off x="10134295" y="0"/>
+            <a:ext cx="2057400" cy="256032"/>
+          </a:xfrm>
+          <a:prstGeom prst="rect">
+            <a:avLst/>
+          </a:prstGeom>
+          <a:solidFill>
+            <a:srgbClr val="111111"/>
+          </a:solidFill>
+          <a:ln w="12700">
+            <a:solidFill>
+              <a:srgbClr val="111111">
+                <a:alpha val="0"/>
+              </a:srgbClr>
+            </a:solidFill>
+            <a:prstDash val="solid"/>
+          </a:ln>
+        </p:spPr>
+      </p:sp>
+      <p:sp>
+        <p:nvSpPr>
+          <p:cNvPr id="9" name="Shape 7"/>
           <p:cNvSpPr/>
           <p:nvPr/>
         </p:nvSpPr>
@@ -16625,7 +17900,7 @@
       </p:sp>
       <p:sp>
         <p:nvSpPr>
-          <p:cNvPr id="7" name="Shape 5"/>
+          <p:cNvPr id="10" name="Shape 8"/>
           <p:cNvSpPr/>
           <p:nvPr/>
         </p:nvSpPr>
@@ -16652,7 +17927,7 @@
       </p:sp>
       <p:pic>
         <p:nvPicPr>
-          <p:cNvPr id="8" name="Image 0" descr="preencoded.png">    </p:cNvPr>
+          <p:cNvPr id="11" name="Image 0" descr="preencoded.png">    </p:cNvPr>
           <p:cNvPicPr>
             <a:picLocks noChangeAspect="1"/>
           </p:cNvPicPr>
@@ -16682,7 +17957,7 @@
       </p:pic>
       <p:pic>
         <p:nvPicPr>
-          <p:cNvPr id="9" name="Image 1" descr="preencoded.png">    </p:cNvPr>
+          <p:cNvPr id="12" name="Image 1" descr="preencoded.png">    </p:cNvPr>
           <p:cNvPicPr>
             <a:picLocks noChangeAspect="1"/>
           </p:cNvPicPr>
@@ -16712,7 +17987,7 @@
       </p:pic>
       <p:pic>
         <p:nvPicPr>
-          <p:cNvPr id="10" name="Image 2" descr="preencoded.png">    </p:cNvPr>
+          <p:cNvPr id="13" name="Image 2" descr="preencoded.png">    </p:cNvPr>
           <p:cNvPicPr>
             <a:picLocks noChangeAspect="1"/>
           </p:cNvPicPr>
@@ -16742,7 +18017,7 @@
       </p:pic>
       <p:sp>
         <p:nvSpPr>
-          <p:cNvPr id="11" name="Shape 6"/>
+          <p:cNvPr id="14" name="Shape 9"/>
           <p:cNvSpPr/>
           <p:nvPr/>
         </p:nvSpPr>
@@ -16769,7 +18044,7 @@
       </p:sp>
       <p:sp>
         <p:nvSpPr>
-          <p:cNvPr id="12" name="mdpr:mixed-object-packing-438299:title:__title:mixed-object-packing-438299"/>
+          <p:cNvPr id="15" name="mdpr:mixed-object-packing-438299:title:__title:mixed-object-packing-438299"/>
           <p:cNvSpPr txBox="1"/>
           <p:nvPr/>
         </p:nvSpPr>
@@ -16811,7 +18086,7 @@
       </p:sp>
       <p:graphicFrame>
         <p:nvGraphicFramePr>
-          <p:cNvPr id="13" name="Chart 0" descr=""/>
+          <p:cNvPr id="16" name="Chart 0" descr=""/>
           <p:cNvGraphicFramePr/>
           <p:nvPr/>
         </p:nvGraphicFramePr>
@@ -17269,7 +18544,7 @@
       </p:graphicFrame>
       <p:sp>
         <p:nvSpPr>
-          <p:cNvPr id="15" name="mdpr:mixed-object-packing-438299:body:block-36"/>
+          <p:cNvPr id="18" name="mdpr:mixed-object-packing-438299:body:block-36"/>
           <p:cNvSpPr txBox="1"/>
           <p:nvPr/>
         </p:nvSpPr>
@@ -17368,7 +18643,7 @@
       </p:sp>
       <p:pic>
         <p:nvPicPr>
-          <p:cNvPr id="16" name="mdpr:mixed-object-packing-438299:image-1:block-39" descr="{&quot;mdpr&quot;:{&quot;slideId&quot;:&quot;mixed-object-packing-438299&quot;,&quot;layoutSlideId&quot;:&quot;layout-mixed-object-packing-438299&quot;,&quot;regionId&quot;:&quot;image-1&quot;,&quot;blockIds&quot;:[&quot;block-39&quot;],&quot;objectKind&quot;:&quot;native-image&quot;,&quot;role&quot;:&quot;image&quot;,&quot;editable&quot;:false}}">    </p:cNvPr>
+          <p:cNvPr id="19" name="mdpr:mixed-object-packing-438299:image-1:block-39" descr="{&quot;mdpr&quot;:{&quot;slideId&quot;:&quot;mixed-object-packing-438299&quot;,&quot;layoutSlideId&quot;:&quot;layout-mixed-object-packing-438299&quot;,&quot;regionId&quot;:&quot;image-1&quot;,&quot;blockIds&quot;:[&quot;block-39&quot;],&quot;objectKind&quot;:&quot;native-image&quot;,&quot;role&quot;:&quot;image&quot;,&quot;editable&quot;:false}}">    </p:cNvPr>
           <p:cNvPicPr>
             <a:picLocks noChangeAspect="1"/>
           </p:cNvPicPr>
@@ -17488,31 +18763,8 @@
         </p:nvSpPr>
         <p:spPr>
           <a:xfrm>
-            <a:off x="475488" y="6364224"/>
-            <a:ext cx="11240719" cy="0"/>
-          </a:xfrm>
-          <a:prstGeom prst="line">
-            <a:avLst/>
-          </a:prstGeom>
-          <a:noFill/>
-          <a:ln w="12700">
-            <a:solidFill>
-              <a:srgbClr val="111111"/>
-            </a:solidFill>
-            <a:prstDash val="solid"/>
-          </a:ln>
-        </p:spPr>
-      </p:sp>
-      <p:sp>
-        <p:nvSpPr>
-          <p:cNvPr id="5" name="Shape 3"/>
-          <p:cNvSpPr/>
-          <p:nvPr/>
-        </p:nvSpPr>
-        <p:spPr>
-          <a:xfrm>
-            <a:off x="10134295" y="0"/>
-            <a:ext cx="2057400" cy="256032"/>
+            <a:off x="10033711" y="310896"/>
+            <a:ext cx="1225296" cy="201168"/>
           </a:xfrm>
           <a:prstGeom prst="rect">
             <a:avLst/>
@@ -17532,7 +18784,105 @@
       </p:sp>
       <p:sp>
         <p:nvSpPr>
+          <p:cNvPr id="5" name="Shape 3"/>
+          <p:cNvSpPr/>
+          <p:nvPr/>
+        </p:nvSpPr>
+        <p:spPr>
+          <a:xfrm>
+            <a:off x="10362895" y="457200"/>
+            <a:ext cx="859536" cy="201168"/>
+          </a:xfrm>
+          <a:prstGeom prst="rect">
+            <a:avLst/>
+          </a:prstGeom>
+          <a:solidFill>
+            <a:srgbClr val="00A6FF"/>
+          </a:solidFill>
+          <a:ln w="12700">
+            <a:solidFill>
+              <a:srgbClr val="111111"/>
+            </a:solidFill>
+            <a:prstDash val="solid"/>
+          </a:ln>
+        </p:spPr>
+      </p:sp>
+      <p:sp>
+        <p:nvSpPr>
           <p:cNvPr id="6" name="Shape 4"/>
+          <p:cNvSpPr/>
+          <p:nvPr/>
+        </p:nvSpPr>
+        <p:spPr>
+          <a:xfrm>
+            <a:off x="475488" y="768096"/>
+            <a:ext cx="1353312" cy="0"/>
+          </a:xfrm>
+          <a:prstGeom prst="line">
+            <a:avLst/>
+          </a:prstGeom>
+          <a:noFill/>
+          <a:ln w="12700">
+            <a:solidFill>
+              <a:srgbClr val="111111"/>
+            </a:solidFill>
+            <a:prstDash val="solid"/>
+          </a:ln>
+        </p:spPr>
+      </p:sp>
+      <p:sp>
+        <p:nvSpPr>
+          <p:cNvPr id="7" name="Shape 5"/>
+          <p:cNvSpPr/>
+          <p:nvPr/>
+        </p:nvSpPr>
+        <p:spPr>
+          <a:xfrm>
+            <a:off x="475488" y="6364224"/>
+            <a:ext cx="11240719" cy="0"/>
+          </a:xfrm>
+          <a:prstGeom prst="line">
+            <a:avLst/>
+          </a:prstGeom>
+          <a:noFill/>
+          <a:ln w="12700">
+            <a:solidFill>
+              <a:srgbClr val="111111"/>
+            </a:solidFill>
+            <a:prstDash val="solid"/>
+          </a:ln>
+        </p:spPr>
+      </p:sp>
+      <p:sp>
+        <p:nvSpPr>
+          <p:cNvPr id="8" name="Shape 6"/>
+          <p:cNvSpPr/>
+          <p:nvPr/>
+        </p:nvSpPr>
+        <p:spPr>
+          <a:xfrm>
+            <a:off x="10134295" y="0"/>
+            <a:ext cx="2057400" cy="256032"/>
+          </a:xfrm>
+          <a:prstGeom prst="rect">
+            <a:avLst/>
+          </a:prstGeom>
+          <a:solidFill>
+            <a:srgbClr val="111111"/>
+          </a:solidFill>
+          <a:ln w="12700">
+            <a:solidFill>
+              <a:srgbClr val="111111">
+                <a:alpha val="0"/>
+              </a:srgbClr>
+            </a:solidFill>
+            <a:prstDash val="solid"/>
+          </a:ln>
+        </p:spPr>
+      </p:sp>
+      <p:sp>
+        <p:nvSpPr>
+          <p:cNvPr id="9" name="Shape 7"/>
           <p:cNvSpPr/>
           <p:nvPr/>
         </p:nvSpPr>
@@ -17559,7 +18909,7 @@
       </p:sp>
       <p:sp>
         <p:nvSpPr>
-          <p:cNvPr id="7" name="Shape 5"/>
+          <p:cNvPr id="10" name="Shape 8"/>
           <p:cNvSpPr/>
           <p:nvPr/>
         </p:nvSpPr>
@@ -17586,7 +18936,7 @@
       </p:sp>
       <p:pic>
         <p:nvPicPr>
-          <p:cNvPr id="8" name="Image 0" descr="preencoded.png">    </p:cNvPr>
+          <p:cNvPr id="11" name="Image 0" descr="preencoded.png">    </p:cNvPr>
           <p:cNvPicPr>
             <a:picLocks noChangeAspect="1"/>
           </p:cNvPicPr>
@@ -17616,7 +18966,7 @@
       </p:pic>
       <p:pic>
         <p:nvPicPr>
-          <p:cNvPr id="9" name="Image 1" descr="preencoded.png">    </p:cNvPr>
+          <p:cNvPr id="12" name="Image 1" descr="preencoded.png">    </p:cNvPr>
           <p:cNvPicPr>
             <a:picLocks noChangeAspect="1"/>
           </p:cNvPicPr>
@@ -17646,7 +18996,7 @@
       </p:pic>
       <p:pic>
         <p:nvPicPr>
-          <p:cNvPr id="10" name="Image 2" descr="preencoded.png">    </p:cNvPr>
+          <p:cNvPr id="13" name="Image 2" descr="preencoded.png">    </p:cNvPr>
           <p:cNvPicPr>
             <a:picLocks noChangeAspect="1"/>
           </p:cNvPicPr>
@@ -17676,7 +19026,7 @@
       </p:pic>
       <p:sp>
         <p:nvSpPr>
-          <p:cNvPr id="11" name="Shape 6"/>
+          <p:cNvPr id="14" name="Shape 9"/>
           <p:cNvSpPr/>
           <p:nvPr/>
         </p:nvSpPr>
@@ -17705,7 +19055,7 @@
       </p:sp>
       <p:sp>
         <p:nvSpPr>
-          <p:cNvPr id="12" name="Shape 7"/>
+          <p:cNvPr id="15" name="Shape 10"/>
           <p:cNvSpPr/>
           <p:nvPr/>
         </p:nvSpPr>
@@ -17732,7 +19082,7 @@
       </p:sp>
       <p:sp>
         <p:nvSpPr>
-          <p:cNvPr id="13" name="Shape 8"/>
+          <p:cNvPr id="16" name="Shape 11"/>
           <p:cNvSpPr/>
           <p:nvPr/>
         </p:nvSpPr>
@@ -17759,7 +19109,7 @@
       </p:sp>
       <p:sp>
         <p:nvSpPr>
-          <p:cNvPr id="14" name="Shape 9"/>
+          <p:cNvPr id="17" name="Shape 12"/>
           <p:cNvSpPr/>
           <p:nvPr/>
         </p:nvSpPr>
@@ -17786,7 +19136,7 @@
       </p:sp>
       <p:sp>
         <p:nvSpPr>
-          <p:cNvPr id="15" name="mdpr:actions-output-review-326e07:title:__title:actions-output-review-326e07"/>
+          <p:cNvPr id="18" name="mdpr:actions-output-review-326e07:title:__title:actions-output-review-326e07"/>
           <p:cNvSpPr txBox="1"/>
           <p:nvPr/>
         </p:nvSpPr>
@@ -17828,7 +19178,7 @@
       </p:sp>
       <p:sp>
         <p:nvSpPr>
-          <p:cNvPr id="16" name="Shape 11"/>
+          <p:cNvPr id="19" name="Shape 14"/>
           <p:cNvSpPr/>
           <p:nvPr/>
         </p:nvSpPr>
@@ -17855,7 +19205,7 @@
       </p:sp>
       <p:pic>
         <p:nvPicPr>
-          <p:cNvPr id="17" name="Image 3" descr="flow icon from tabler-icons (MIT)">    </p:cNvPr>
+          <p:cNvPr id="20" name="Image 3" descr="flow icon from tabler-icons (MIT)">    </p:cNvPr>
           <p:cNvPicPr>
             <a:picLocks noChangeAspect="1"/>
           </p:cNvPicPr>
@@ -17885,7 +19235,7 @@
       </p:pic>
       <p:sp>
         <p:nvSpPr>
-          <p:cNvPr id="18" name="mdpr:actions-output-review-326e07:item-1:block-41"/>
+          <p:cNvPr id="21" name="mdpr:actions-output-review-326e07:item-1:block-41"/>
           <p:cNvSpPr txBox="1"/>
           <p:nvPr/>
         </p:nvSpPr>
@@ -17944,7 +19294,7 @@
       </p:sp>
       <p:sp>
         <p:nvSpPr>
-          <p:cNvPr id="19" name="Shape 13"/>
+          <p:cNvPr id="22" name="Shape 16"/>
           <p:cNvSpPr/>
           <p:nvPr/>
         </p:nvSpPr>
@@ -17971,7 +19321,7 @@
       </p:sp>
       <p:pic>
         <p:nvPicPr>
-          <p:cNvPr id="20" name="Image 4" descr="verified icon from tabler-icons (MIT)">    </p:cNvPr>
+          <p:cNvPr id="23" name="Image 4" descr="verified icon from tabler-icons (MIT)">    </p:cNvPr>
           <p:cNvPicPr>
             <a:picLocks noChangeAspect="1"/>
           </p:cNvPicPr>
@@ -18001,7 +19351,7 @@
       </p:pic>
       <p:sp>
         <p:nvSpPr>
-          <p:cNvPr id="21" name="mdpr:actions-output-review-326e07:item-2:block-41"/>
+          <p:cNvPr id="24" name="mdpr:actions-output-review-326e07:item-2:block-41"/>
           <p:cNvSpPr txBox="1"/>
           <p:nvPr/>
         </p:nvSpPr>
@@ -18060,7 +19410,7 @@
       </p:sp>
       <p:sp>
         <p:nvSpPr>
-          <p:cNvPr id="22" name="Shape 15"/>
+          <p:cNvPr id="25" name="Shape 18"/>
           <p:cNvSpPr/>
           <p:nvPr/>
         </p:nvSpPr>
@@ -18087,7 +19437,7 @@
       </p:sp>
       <p:pic>
         <p:nvPicPr>
-          <p:cNvPr id="23" name="Image 5" descr="spark icon from tabler-icons (MIT)">    </p:cNvPr>
+          <p:cNvPr id="26" name="Image 5" descr="spark icon from tabler-icons (MIT)">    </p:cNvPr>
           <p:cNvPicPr>
             <a:picLocks noChangeAspect="1"/>
           </p:cNvPicPr>
@@ -18117,7 +19467,7 @@
       </p:pic>
       <p:sp>
         <p:nvSpPr>
-          <p:cNvPr id="24" name="mdpr:actions-output-review-326e07:item-3:block-41"/>
+          <p:cNvPr id="27" name="mdpr:actions-output-review-326e07:item-3:block-41"/>
           <p:cNvSpPr txBox="1"/>
           <p:nvPr/>
         </p:nvSpPr>
@@ -18266,31 +19616,8 @@
         </p:nvSpPr>
         <p:spPr>
           <a:xfrm>
-            <a:off x="475488" y="6364224"/>
-            <a:ext cx="11240719" cy="0"/>
-          </a:xfrm>
-          <a:prstGeom prst="line">
-            <a:avLst/>
-          </a:prstGeom>
-          <a:noFill/>
-          <a:ln w="12700">
-            <a:solidFill>
-              <a:srgbClr val="111111"/>
-            </a:solidFill>
-            <a:prstDash val="solid"/>
-          </a:ln>
-        </p:spPr>
-      </p:sp>
-      <p:sp>
-        <p:nvSpPr>
-          <p:cNvPr id="5" name="Shape 3"/>
-          <p:cNvSpPr/>
-          <p:nvPr/>
-        </p:nvSpPr>
-        <p:spPr>
-          <a:xfrm>
-            <a:off x="10134295" y="0"/>
-            <a:ext cx="2057400" cy="256032"/>
+            <a:off x="10033711" y="310896"/>
+            <a:ext cx="1225296" cy="201168"/>
           </a:xfrm>
           <a:prstGeom prst="rect">
             <a:avLst/>
@@ -18310,7 +19637,105 @@
       </p:sp>
       <p:sp>
         <p:nvSpPr>
+          <p:cNvPr id="5" name="Shape 3"/>
+          <p:cNvSpPr/>
+          <p:nvPr/>
+        </p:nvSpPr>
+        <p:spPr>
+          <a:xfrm>
+            <a:off x="10362895" y="457200"/>
+            <a:ext cx="859536" cy="201168"/>
+          </a:xfrm>
+          <a:prstGeom prst="rect">
+            <a:avLst/>
+          </a:prstGeom>
+          <a:solidFill>
+            <a:srgbClr val="00A6FF"/>
+          </a:solidFill>
+          <a:ln w="12700">
+            <a:solidFill>
+              <a:srgbClr val="111111"/>
+            </a:solidFill>
+            <a:prstDash val="solid"/>
+          </a:ln>
+        </p:spPr>
+      </p:sp>
+      <p:sp>
+        <p:nvSpPr>
           <p:cNvPr id="6" name="Shape 4"/>
+          <p:cNvSpPr/>
+          <p:nvPr/>
+        </p:nvSpPr>
+        <p:spPr>
+          <a:xfrm>
+            <a:off x="475488" y="768096"/>
+            <a:ext cx="1353312" cy="0"/>
+          </a:xfrm>
+          <a:prstGeom prst="line">
+            <a:avLst/>
+          </a:prstGeom>
+          <a:noFill/>
+          <a:ln w="12700">
+            <a:solidFill>
+              <a:srgbClr val="111111"/>
+            </a:solidFill>
+            <a:prstDash val="solid"/>
+          </a:ln>
+        </p:spPr>
+      </p:sp>
+      <p:sp>
+        <p:nvSpPr>
+          <p:cNvPr id="7" name="Shape 5"/>
+          <p:cNvSpPr/>
+          <p:nvPr/>
+        </p:nvSpPr>
+        <p:spPr>
+          <a:xfrm>
+            <a:off x="475488" y="6364224"/>
+            <a:ext cx="11240719" cy="0"/>
+          </a:xfrm>
+          <a:prstGeom prst="line">
+            <a:avLst/>
+          </a:prstGeom>
+          <a:noFill/>
+          <a:ln w="12700">
+            <a:solidFill>
+              <a:srgbClr val="111111"/>
+            </a:solidFill>
+            <a:prstDash val="solid"/>
+          </a:ln>
+        </p:spPr>
+      </p:sp>
+      <p:sp>
+        <p:nvSpPr>
+          <p:cNvPr id="8" name="Shape 6"/>
+          <p:cNvSpPr/>
+          <p:nvPr/>
+        </p:nvSpPr>
+        <p:spPr>
+          <a:xfrm>
+            <a:off x="10134295" y="0"/>
+            <a:ext cx="2057400" cy="256032"/>
+          </a:xfrm>
+          <a:prstGeom prst="rect">
+            <a:avLst/>
+          </a:prstGeom>
+          <a:solidFill>
+            <a:srgbClr val="111111"/>
+          </a:solidFill>
+          <a:ln w="12700">
+            <a:solidFill>
+              <a:srgbClr val="111111">
+                <a:alpha val="0"/>
+              </a:srgbClr>
+            </a:solidFill>
+            <a:prstDash val="solid"/>
+          </a:ln>
+        </p:spPr>
+      </p:sp>
+      <p:sp>
+        <p:nvSpPr>
+          <p:cNvPr id="9" name="Shape 7"/>
           <p:cNvSpPr/>
           <p:nvPr/>
         </p:nvSpPr>
@@ -18337,7 +19762,7 @@
       </p:sp>
       <p:sp>
         <p:nvSpPr>
-          <p:cNvPr id="7" name="Shape 5"/>
+          <p:cNvPr id="10" name="Shape 8"/>
           <p:cNvSpPr/>
           <p:nvPr/>
         </p:nvSpPr>
@@ -18364,7 +19789,7 @@
       </p:sp>
       <p:sp>
         <p:nvSpPr>
-          <p:cNvPr id="8" name="Shape 6"/>
+          <p:cNvPr id="11" name="Shape 9"/>
           <p:cNvSpPr/>
           <p:nvPr/>
         </p:nvSpPr>
@@ -18391,7 +19816,7 @@
       </p:sp>
       <p:sp>
         <p:nvSpPr>
-          <p:cNvPr id="9" name="Shape 7"/>
+          <p:cNvPr id="12" name="Shape 10"/>
           <p:cNvSpPr/>
           <p:nvPr/>
         </p:nvSpPr>
@@ -18418,7 +19843,7 @@
       </p:sp>
       <p:sp>
         <p:nvSpPr>
-          <p:cNvPr id="10" name="Shape 8"/>
+          <p:cNvPr id="13" name="Shape 11"/>
           <p:cNvSpPr/>
           <p:nvPr/>
         </p:nvSpPr>
@@ -18445,7 +19870,7 @@
       </p:sp>
       <p:sp>
         <p:nvSpPr>
-          <p:cNvPr id="11" name="mdpr:2-2-7bfb60:title:__title:2-2-7bfb60"/>
+          <p:cNvPr id="14" name="mdpr:2-2-7bfb60:title:__title:2-2-7bfb60"/>
           <p:cNvSpPr txBox="1"/>
           <p:nvPr/>
         </p:nvSpPr>
@@ -18487,7 +19912,7 @@
       </p:sp>
       <p:sp>
         <p:nvSpPr>
-          <p:cNvPr id="12" name="mdpr:2-2-7bfb60:toc-item-1:toc-item-15"/>
+          <p:cNvPr id="15" name="mdpr:2-2-7bfb60:toc-item-1:toc-item-15"/>
           <p:cNvSpPr txBox="1"/>
           <p:nvPr/>
         </p:nvSpPr>
@@ -18619,31 +20044,8 @@
         </p:nvSpPr>
         <p:spPr>
           <a:xfrm>
-            <a:off x="475488" y="6364224"/>
-            <a:ext cx="11240719" cy="0"/>
-          </a:xfrm>
-          <a:prstGeom prst="line">
-            <a:avLst/>
-          </a:prstGeom>
-          <a:noFill/>
-          <a:ln w="12700">
-            <a:solidFill>
-              <a:srgbClr val="111111"/>
-            </a:solidFill>
-            <a:prstDash val="solid"/>
-          </a:ln>
-        </p:spPr>
-      </p:sp>
-      <p:sp>
-        <p:nvSpPr>
-          <p:cNvPr id="5" name="Shape 3"/>
-          <p:cNvSpPr/>
-          <p:nvPr/>
-        </p:nvSpPr>
-        <p:spPr>
-          <a:xfrm>
-            <a:off x="10134295" y="0"/>
-            <a:ext cx="2057400" cy="256032"/>
+            <a:off x="10033711" y="310896"/>
+            <a:ext cx="1225296" cy="201168"/>
           </a:xfrm>
           <a:prstGeom prst="rect">
             <a:avLst/>
@@ -18663,7 +20065,105 @@
       </p:sp>
       <p:sp>
         <p:nvSpPr>
+          <p:cNvPr id="5" name="Shape 3"/>
+          <p:cNvSpPr/>
+          <p:nvPr/>
+        </p:nvSpPr>
+        <p:spPr>
+          <a:xfrm>
+            <a:off x="10362895" y="457200"/>
+            <a:ext cx="859536" cy="201168"/>
+          </a:xfrm>
+          <a:prstGeom prst="rect">
+            <a:avLst/>
+          </a:prstGeom>
+          <a:solidFill>
+            <a:srgbClr val="00A6FF"/>
+          </a:solidFill>
+          <a:ln w="12700">
+            <a:solidFill>
+              <a:srgbClr val="111111"/>
+            </a:solidFill>
+            <a:prstDash val="solid"/>
+          </a:ln>
+        </p:spPr>
+      </p:sp>
+      <p:sp>
+        <p:nvSpPr>
           <p:cNvPr id="6" name="Shape 4"/>
+          <p:cNvSpPr/>
+          <p:nvPr/>
+        </p:nvSpPr>
+        <p:spPr>
+          <a:xfrm>
+            <a:off x="475488" y="768096"/>
+            <a:ext cx="1353312" cy="0"/>
+          </a:xfrm>
+          <a:prstGeom prst="line">
+            <a:avLst/>
+          </a:prstGeom>
+          <a:noFill/>
+          <a:ln w="12700">
+            <a:solidFill>
+              <a:srgbClr val="111111"/>
+            </a:solidFill>
+            <a:prstDash val="solid"/>
+          </a:ln>
+        </p:spPr>
+      </p:sp>
+      <p:sp>
+        <p:nvSpPr>
+          <p:cNvPr id="7" name="Shape 5"/>
+          <p:cNvSpPr/>
+          <p:nvPr/>
+        </p:nvSpPr>
+        <p:spPr>
+          <a:xfrm>
+            <a:off x="475488" y="6364224"/>
+            <a:ext cx="11240719" cy="0"/>
+          </a:xfrm>
+          <a:prstGeom prst="line">
+            <a:avLst/>
+          </a:prstGeom>
+          <a:noFill/>
+          <a:ln w="12700">
+            <a:solidFill>
+              <a:srgbClr val="111111"/>
+            </a:solidFill>
+            <a:prstDash val="solid"/>
+          </a:ln>
+        </p:spPr>
+      </p:sp>
+      <p:sp>
+        <p:nvSpPr>
+          <p:cNvPr id="8" name="Shape 6"/>
+          <p:cNvSpPr/>
+          <p:nvPr/>
+        </p:nvSpPr>
+        <p:spPr>
+          <a:xfrm>
+            <a:off x="10134295" y="0"/>
+            <a:ext cx="2057400" cy="256032"/>
+          </a:xfrm>
+          <a:prstGeom prst="rect">
+            <a:avLst/>
+          </a:prstGeom>
+          <a:solidFill>
+            <a:srgbClr val="111111"/>
+          </a:solidFill>
+          <a:ln w="12700">
+            <a:solidFill>
+              <a:srgbClr val="111111">
+                <a:alpha val="0"/>
+              </a:srgbClr>
+            </a:solidFill>
+            <a:prstDash val="solid"/>
+          </a:ln>
+        </p:spPr>
+      </p:sp>
+      <p:sp>
+        <p:nvSpPr>
+          <p:cNvPr id="9" name="Shape 7"/>
           <p:cNvSpPr/>
           <p:nvPr/>
         </p:nvSpPr>
@@ -18690,7 +20190,7 @@
       </p:sp>
       <p:sp>
         <p:nvSpPr>
-          <p:cNvPr id="7" name="Shape 5"/>
+          <p:cNvPr id="10" name="Shape 8"/>
           <p:cNvSpPr/>
           <p:nvPr/>
         </p:nvSpPr>
@@ -18717,7 +20217,7 @@
       </p:sp>
       <p:pic>
         <p:nvPicPr>
-          <p:cNvPr id="8" name="Image 0" descr="preencoded.png">    </p:cNvPr>
+          <p:cNvPr id="11" name="Image 0" descr="preencoded.png">    </p:cNvPr>
           <p:cNvPicPr>
             <a:picLocks noChangeAspect="1"/>
           </p:cNvPicPr>
@@ -18747,7 +20247,7 @@
       </p:pic>
       <p:sp>
         <p:nvSpPr>
-          <p:cNvPr id="9" name="Shape 6"/>
+          <p:cNvPr id="12" name="Shape 9"/>
           <p:cNvSpPr/>
           <p:nvPr/>
         </p:nvSpPr>
@@ -18776,7 +20276,7 @@
       </p:sp>
       <p:sp>
         <p:nvSpPr>
-          <p:cNvPr id="10" name="Shape 7"/>
+          <p:cNvPr id="13" name="Shape 10"/>
           <p:cNvSpPr/>
           <p:nvPr/>
         </p:nvSpPr>
@@ -18803,7 +20303,7 @@
       </p:sp>
       <p:sp>
         <p:nvSpPr>
-          <p:cNvPr id="11" name="mdpr:teaser-summary-7731dc:title:__title:teaser-summary-7731dc"/>
+          <p:cNvPr id="14" name="mdpr:teaser-summary-7731dc:title:__title:teaser-summary-7731dc"/>
           <p:cNvSpPr txBox="1"/>
           <p:nvPr/>
         </p:nvSpPr>
@@ -18845,7 +20345,7 @@
       </p:sp>
       <p:sp>
         <p:nvSpPr>
-          <p:cNvPr id="12" name="mdpr:teaser-summary-7731dc:key-message:block-3"/>
+          <p:cNvPr id="15" name="mdpr:teaser-summary-7731dc:key-message:block-3"/>
           <p:cNvSpPr txBox="1"/>
           <p:nvPr/>
         </p:nvSpPr>
@@ -18887,7 +20387,7 @@
       </p:sp>
       <p:sp>
         <p:nvSpPr>
-          <p:cNvPr id="13" name="mdpr:teaser-summary-7731dc:body:block-4"/>
+          <p:cNvPr id="16" name="mdpr:teaser-summary-7731dc:body:block-4"/>
           <p:cNvSpPr txBox="1"/>
           <p:nvPr/>
         </p:nvSpPr>
@@ -19156,31 +20656,8 @@
         </p:nvSpPr>
         <p:spPr>
           <a:xfrm>
-            <a:off x="475488" y="6364224"/>
-            <a:ext cx="11240719" cy="0"/>
-          </a:xfrm>
-          <a:prstGeom prst="line">
-            <a:avLst/>
-          </a:prstGeom>
-          <a:noFill/>
-          <a:ln w="12700">
-            <a:solidFill>
-              <a:srgbClr val="111111"/>
-            </a:solidFill>
-            <a:prstDash val="solid"/>
-          </a:ln>
-        </p:spPr>
-      </p:sp>
-      <p:sp>
-        <p:nvSpPr>
-          <p:cNvPr id="5" name="Shape 3"/>
-          <p:cNvSpPr/>
-          <p:nvPr/>
-        </p:nvSpPr>
-        <p:spPr>
-          <a:xfrm>
-            <a:off x="10134295" y="0"/>
-            <a:ext cx="2057400" cy="256032"/>
+            <a:off x="10033711" y="310896"/>
+            <a:ext cx="1225296" cy="201168"/>
           </a:xfrm>
           <a:prstGeom prst="rect">
             <a:avLst/>
@@ -19200,7 +20677,105 @@
       </p:sp>
       <p:sp>
         <p:nvSpPr>
+          <p:cNvPr id="5" name="Shape 3"/>
+          <p:cNvSpPr/>
+          <p:nvPr/>
+        </p:nvSpPr>
+        <p:spPr>
+          <a:xfrm>
+            <a:off x="10362895" y="457200"/>
+            <a:ext cx="859536" cy="201168"/>
+          </a:xfrm>
+          <a:prstGeom prst="rect">
+            <a:avLst/>
+          </a:prstGeom>
+          <a:solidFill>
+            <a:srgbClr val="00A6FF"/>
+          </a:solidFill>
+          <a:ln w="12700">
+            <a:solidFill>
+              <a:srgbClr val="111111"/>
+            </a:solidFill>
+            <a:prstDash val="solid"/>
+          </a:ln>
+        </p:spPr>
+      </p:sp>
+      <p:sp>
+        <p:nvSpPr>
           <p:cNvPr id="6" name="Shape 4"/>
+          <p:cNvSpPr/>
+          <p:nvPr/>
+        </p:nvSpPr>
+        <p:spPr>
+          <a:xfrm>
+            <a:off x="475488" y="768096"/>
+            <a:ext cx="1353312" cy="0"/>
+          </a:xfrm>
+          <a:prstGeom prst="line">
+            <a:avLst/>
+          </a:prstGeom>
+          <a:noFill/>
+          <a:ln w="12700">
+            <a:solidFill>
+              <a:srgbClr val="111111"/>
+            </a:solidFill>
+            <a:prstDash val="solid"/>
+          </a:ln>
+        </p:spPr>
+      </p:sp>
+      <p:sp>
+        <p:nvSpPr>
+          <p:cNvPr id="7" name="Shape 5"/>
+          <p:cNvSpPr/>
+          <p:nvPr/>
+        </p:nvSpPr>
+        <p:spPr>
+          <a:xfrm>
+            <a:off x="475488" y="6364224"/>
+            <a:ext cx="11240719" cy="0"/>
+          </a:xfrm>
+          <a:prstGeom prst="line">
+            <a:avLst/>
+          </a:prstGeom>
+          <a:noFill/>
+          <a:ln w="12700">
+            <a:solidFill>
+              <a:srgbClr val="111111"/>
+            </a:solidFill>
+            <a:prstDash val="solid"/>
+          </a:ln>
+        </p:spPr>
+      </p:sp>
+      <p:sp>
+        <p:nvSpPr>
+          <p:cNvPr id="8" name="Shape 6"/>
+          <p:cNvSpPr/>
+          <p:nvPr/>
+        </p:nvSpPr>
+        <p:spPr>
+          <a:xfrm>
+            <a:off x="10134295" y="0"/>
+            <a:ext cx="2057400" cy="256032"/>
+          </a:xfrm>
+          <a:prstGeom prst="rect">
+            <a:avLst/>
+          </a:prstGeom>
+          <a:solidFill>
+            <a:srgbClr val="111111"/>
+          </a:solidFill>
+          <a:ln w="12700">
+            <a:solidFill>
+              <a:srgbClr val="111111">
+                <a:alpha val="0"/>
+              </a:srgbClr>
+            </a:solidFill>
+            <a:prstDash val="solid"/>
+          </a:ln>
+        </p:spPr>
+      </p:sp>
+      <p:sp>
+        <p:nvSpPr>
+          <p:cNvPr id="9" name="Shape 7"/>
           <p:cNvSpPr/>
           <p:nvPr/>
         </p:nvSpPr>
@@ -19227,7 +20802,7 @@
       </p:sp>
       <p:sp>
         <p:nvSpPr>
-          <p:cNvPr id="7" name="Shape 5"/>
+          <p:cNvPr id="10" name="Shape 8"/>
           <p:cNvSpPr/>
           <p:nvPr/>
         </p:nvSpPr>
@@ -19254,7 +20829,7 @@
       </p:sp>
       <p:pic>
         <p:nvPicPr>
-          <p:cNvPr id="8" name="Image 0" descr="preencoded.png">    </p:cNvPr>
+          <p:cNvPr id="11" name="Image 0" descr="preencoded.png">    </p:cNvPr>
           <p:cNvPicPr>
             <a:picLocks noChangeAspect="1"/>
           </p:cNvPicPr>
@@ -19284,7 +20859,7 @@
       </p:pic>
       <p:pic>
         <p:nvPicPr>
-          <p:cNvPr id="9" name="Image 1" descr="preencoded.png">    </p:cNvPr>
+          <p:cNvPr id="12" name="Image 1" descr="preencoded.png">    </p:cNvPr>
           <p:cNvPicPr>
             <a:picLocks noChangeAspect="1"/>
           </p:cNvPicPr>
@@ -19314,7 +20889,7 @@
       </p:pic>
       <p:pic>
         <p:nvPicPr>
-          <p:cNvPr id="10" name="Image 2" descr="preencoded.png">    </p:cNvPr>
+          <p:cNvPr id="13" name="Image 2" descr="preencoded.png">    </p:cNvPr>
           <p:cNvPicPr>
             <a:picLocks noChangeAspect="1"/>
           </p:cNvPicPr>
@@ -19344,7 +20919,7 @@
       </p:pic>
       <p:sp>
         <p:nvSpPr>
-          <p:cNvPr id="11" name="Shape 6"/>
+          <p:cNvPr id="14" name="Shape 9"/>
           <p:cNvSpPr/>
           <p:nvPr/>
         </p:nvSpPr>
@@ -19373,7 +20948,7 @@
       </p:sp>
       <p:sp>
         <p:nvSpPr>
-          <p:cNvPr id="12" name="Shape 7"/>
+          <p:cNvPr id="15" name="Shape 10"/>
           <p:cNvSpPr/>
           <p:nvPr/>
         </p:nvSpPr>
@@ -19400,7 +20975,7 @@
       </p:sp>
       <p:sp>
         <p:nvSpPr>
-          <p:cNvPr id="13" name="Shape 8"/>
+          <p:cNvPr id="16" name="Shape 11"/>
           <p:cNvSpPr/>
           <p:nvPr/>
         </p:nvSpPr>
@@ -19427,7 +21002,7 @@
       </p:sp>
       <p:sp>
         <p:nvSpPr>
-          <p:cNvPr id="14" name="Shape 9"/>
+          <p:cNvPr id="17" name="Shape 12"/>
           <p:cNvSpPr/>
           <p:nvPr/>
         </p:nvSpPr>
@@ -19454,7 +21029,7 @@
       </p:sp>
       <p:sp>
         <p:nvSpPr>
-          <p:cNvPr id="15" name="mdpr:1-2-32ac08:title:__title:1-2-32ac08"/>
+          <p:cNvPr id="18" name="mdpr:1-2-32ac08:title:__title:1-2-32ac08"/>
           <p:cNvSpPr txBox="1"/>
           <p:nvPr/>
         </p:nvSpPr>
@@ -19496,7 +21071,7 @@
       </p:sp>
       <p:sp>
         <p:nvSpPr>
-          <p:cNvPr id="16" name="Shape 11"/>
+          <p:cNvPr id="19" name="Shape 14"/>
           <p:cNvSpPr/>
           <p:nvPr/>
         </p:nvSpPr>
@@ -19523,7 +21098,7 @@
       </p:sp>
       <p:pic>
         <p:nvPicPr>
-          <p:cNvPr id="17" name="Image 3" descr="article icon from tabler-icons (MIT)">    </p:cNvPr>
+          <p:cNvPr id="20" name="Image 3" descr="article icon from tabler-icons (MIT)">    </p:cNvPr>
           <p:cNvPicPr>
             <a:picLocks noChangeAspect="1"/>
           </p:cNvPicPr>
@@ -19553,7 +21128,7 @@
       </p:pic>
       <p:sp>
         <p:nvSpPr>
-          <p:cNvPr id="18" name="mdpr:1-2-32ac08:item-1:block-6-chunk-1"/>
+          <p:cNvPr id="21" name="mdpr:1-2-32ac08:item-1:block-6-chunk-1"/>
           <p:cNvSpPr txBox="1"/>
           <p:nvPr/>
         </p:nvSpPr>
@@ -19612,7 +21187,7 @@
       </p:sp>
       <p:sp>
         <p:nvSpPr>
-          <p:cNvPr id="19" name="Shape 13"/>
+          <p:cNvPr id="22" name="Shape 16"/>
           <p:cNvSpPr/>
           <p:nvPr/>
         </p:nvSpPr>
@@ -19639,7 +21214,7 @@
       </p:sp>
       <p:pic>
         <p:nvPicPr>
-          <p:cNvPr id="20" name="Image 4" descr="chart icon from tabler-icons (MIT)">    </p:cNvPr>
+          <p:cNvPr id="23" name="Image 4" descr="chart icon from tabler-icons (MIT)">    </p:cNvPr>
           <p:cNvPicPr>
             <a:picLocks noChangeAspect="1"/>
           </p:cNvPicPr>
@@ -19669,7 +21244,7 @@
       </p:pic>
       <p:sp>
         <p:nvSpPr>
-          <p:cNvPr id="21" name="mdpr:1-2-32ac08:item-2:block-6-chunk-1"/>
+          <p:cNvPr id="24" name="mdpr:1-2-32ac08:item-2:block-6-chunk-1"/>
           <p:cNvSpPr txBox="1"/>
           <p:nvPr/>
         </p:nvSpPr>
@@ -19728,7 +21303,7 @@
       </p:sp>
       <p:sp>
         <p:nvSpPr>
-          <p:cNvPr id="22" name="Shape 15"/>
+          <p:cNvPr id="25" name="Shape 18"/>
           <p:cNvSpPr/>
           <p:nvPr/>
         </p:nvSpPr>
@@ -19755,7 +21330,7 @@
       </p:sp>
       <p:pic>
         <p:nvPicPr>
-          <p:cNvPr id="23" name="Image 5" descr="article icon from tabler-icons (MIT)">    </p:cNvPr>
+          <p:cNvPr id="26" name="Image 5" descr="article icon from tabler-icons (MIT)">    </p:cNvPr>
           <p:cNvPicPr>
             <a:picLocks noChangeAspect="1"/>
           </p:cNvPicPr>
@@ -19785,7 +21360,7 @@
       </p:pic>
       <p:sp>
         <p:nvSpPr>
-          <p:cNvPr id="24" name="mdpr:1-2-32ac08:item-3:block-6-chunk-1"/>
+          <p:cNvPr id="27" name="mdpr:1-2-32ac08:item-3:block-6-chunk-1"/>
           <p:cNvSpPr txBox="1"/>
           <p:nvPr/>
         </p:nvSpPr>
@@ -19934,31 +21509,8 @@
         </p:nvSpPr>
         <p:spPr>
           <a:xfrm>
-            <a:off x="475488" y="6364224"/>
-            <a:ext cx="11240719" cy="0"/>
-          </a:xfrm>
-          <a:prstGeom prst="line">
-            <a:avLst/>
-          </a:prstGeom>
-          <a:noFill/>
-          <a:ln w="12700">
-            <a:solidFill>
-              <a:srgbClr val="111111"/>
-            </a:solidFill>
-            <a:prstDash val="solid"/>
-          </a:ln>
-        </p:spPr>
-      </p:sp>
-      <p:sp>
-        <p:nvSpPr>
-          <p:cNvPr id="5" name="Shape 3"/>
-          <p:cNvSpPr/>
-          <p:nvPr/>
-        </p:nvSpPr>
-        <p:spPr>
-          <a:xfrm>
-            <a:off x="10134295" y="0"/>
-            <a:ext cx="2057400" cy="256032"/>
+            <a:off x="10033711" y="310896"/>
+            <a:ext cx="1225296" cy="201168"/>
           </a:xfrm>
           <a:prstGeom prst="rect">
             <a:avLst/>
@@ -19978,7 +21530,105 @@
       </p:sp>
       <p:sp>
         <p:nvSpPr>
+          <p:cNvPr id="5" name="Shape 3"/>
+          <p:cNvSpPr/>
+          <p:nvPr/>
+        </p:nvSpPr>
+        <p:spPr>
+          <a:xfrm>
+            <a:off x="10362895" y="457200"/>
+            <a:ext cx="859536" cy="201168"/>
+          </a:xfrm>
+          <a:prstGeom prst="rect">
+            <a:avLst/>
+          </a:prstGeom>
+          <a:solidFill>
+            <a:srgbClr val="00A6FF"/>
+          </a:solidFill>
+          <a:ln w="12700">
+            <a:solidFill>
+              <a:srgbClr val="111111"/>
+            </a:solidFill>
+            <a:prstDash val="solid"/>
+          </a:ln>
+        </p:spPr>
+      </p:sp>
+      <p:sp>
+        <p:nvSpPr>
           <p:cNvPr id="6" name="Shape 4"/>
+          <p:cNvSpPr/>
+          <p:nvPr/>
+        </p:nvSpPr>
+        <p:spPr>
+          <a:xfrm>
+            <a:off x="475488" y="768096"/>
+            <a:ext cx="1353312" cy="0"/>
+          </a:xfrm>
+          <a:prstGeom prst="line">
+            <a:avLst/>
+          </a:prstGeom>
+          <a:noFill/>
+          <a:ln w="12700">
+            <a:solidFill>
+              <a:srgbClr val="111111"/>
+            </a:solidFill>
+            <a:prstDash val="solid"/>
+          </a:ln>
+        </p:spPr>
+      </p:sp>
+      <p:sp>
+        <p:nvSpPr>
+          <p:cNvPr id="7" name="Shape 5"/>
+          <p:cNvSpPr/>
+          <p:nvPr/>
+        </p:nvSpPr>
+        <p:spPr>
+          <a:xfrm>
+            <a:off x="475488" y="6364224"/>
+            <a:ext cx="11240719" cy="0"/>
+          </a:xfrm>
+          <a:prstGeom prst="line">
+            <a:avLst/>
+          </a:prstGeom>
+          <a:noFill/>
+          <a:ln w="12700">
+            <a:solidFill>
+              <a:srgbClr val="111111"/>
+            </a:solidFill>
+            <a:prstDash val="solid"/>
+          </a:ln>
+        </p:spPr>
+      </p:sp>
+      <p:sp>
+        <p:nvSpPr>
+          <p:cNvPr id="8" name="Shape 6"/>
+          <p:cNvSpPr/>
+          <p:nvPr/>
+        </p:nvSpPr>
+        <p:spPr>
+          <a:xfrm>
+            <a:off x="10134295" y="0"/>
+            <a:ext cx="2057400" cy="256032"/>
+          </a:xfrm>
+          <a:prstGeom prst="rect">
+            <a:avLst/>
+          </a:prstGeom>
+          <a:solidFill>
+            <a:srgbClr val="111111"/>
+          </a:solidFill>
+          <a:ln w="12700">
+            <a:solidFill>
+              <a:srgbClr val="111111">
+                <a:alpha val="0"/>
+              </a:srgbClr>
+            </a:solidFill>
+            <a:prstDash val="solid"/>
+          </a:ln>
+        </p:spPr>
+      </p:sp>
+      <p:sp>
+        <p:nvSpPr>
+          <p:cNvPr id="9" name="Shape 7"/>
           <p:cNvSpPr/>
           <p:nvPr/>
         </p:nvSpPr>
@@ -20005,7 +21655,7 @@
       </p:sp>
       <p:sp>
         <p:nvSpPr>
-          <p:cNvPr id="7" name="Shape 5"/>
+          <p:cNvPr id="10" name="Shape 8"/>
           <p:cNvSpPr/>
           <p:nvPr/>
         </p:nvSpPr>
@@ -20032,7 +21682,7 @@
       </p:sp>
       <p:sp>
         <p:nvSpPr>
-          <p:cNvPr id="8" name="Shape 6"/>
+          <p:cNvPr id="11" name="Shape 9"/>
           <p:cNvSpPr/>
           <p:nvPr/>
         </p:nvSpPr>
@@ -20059,7 +21709,7 @@
       </p:sp>
       <p:sp>
         <p:nvSpPr>
-          <p:cNvPr id="9" name="Shape 7"/>
+          <p:cNvPr id="12" name="Shape 10"/>
           <p:cNvSpPr/>
           <p:nvPr/>
         </p:nvSpPr>
@@ -20086,7 +21736,7 @@
       </p:sp>
       <p:sp>
         <p:nvSpPr>
-          <p:cNvPr id="10" name="mdpr:2-2-14f8eb:title:__title:2-2-14f8eb"/>
+          <p:cNvPr id="13" name="mdpr:2-2-14f8eb:title:__title:2-2-14f8eb"/>
           <p:cNvSpPr txBox="1"/>
           <p:nvPr/>
         </p:nvSpPr>
@@ -20128,7 +21778,7 @@
       </p:sp>
       <p:sp>
         <p:nvSpPr>
-          <p:cNvPr id="11" name="mdpr:2-2-14f8eb:left:block-6-chunk-2"/>
+          <p:cNvPr id="14" name="mdpr:2-2-14f8eb:left:block-6-chunk-2"/>
           <p:cNvSpPr txBox="1"/>
           <p:nvPr/>
         </p:nvSpPr>
@@ -20187,7 +21837,7 @@
       </p:sp>
       <p:sp>
         <p:nvSpPr>
-          <p:cNvPr id="12" name="mdpr:2-2-14f8eb:right:block-6-chunk-2"/>
+          <p:cNvPr id="15" name="mdpr:2-2-14f8eb:right:block-6-chunk-2"/>
           <p:cNvSpPr txBox="1"/>
           <p:nvPr/>
         </p:nvSpPr>
@@ -20336,31 +21986,8 @@
         </p:nvSpPr>
         <p:spPr>
           <a:xfrm>
-            <a:off x="475488" y="6364224"/>
-            <a:ext cx="11240719" cy="0"/>
-          </a:xfrm>
-          <a:prstGeom prst="line">
-            <a:avLst/>
-          </a:prstGeom>
-          <a:noFill/>
-          <a:ln w="12700">
-            <a:solidFill>
-              <a:srgbClr val="111111"/>
-            </a:solidFill>
-            <a:prstDash val="solid"/>
-          </a:ln>
-        </p:spPr>
-      </p:sp>
-      <p:sp>
-        <p:nvSpPr>
-          <p:cNvPr id="5" name="Shape 3"/>
-          <p:cNvSpPr/>
-          <p:nvPr/>
-        </p:nvSpPr>
-        <p:spPr>
-          <a:xfrm>
-            <a:off x="10134295" y="0"/>
-            <a:ext cx="2057400" cy="256032"/>
+            <a:off x="10033711" y="310896"/>
+            <a:ext cx="1225296" cy="201168"/>
           </a:xfrm>
           <a:prstGeom prst="rect">
             <a:avLst/>
@@ -20380,7 +22007,105 @@
       </p:sp>
       <p:sp>
         <p:nvSpPr>
+          <p:cNvPr id="5" name="Shape 3"/>
+          <p:cNvSpPr/>
+          <p:nvPr/>
+        </p:nvSpPr>
+        <p:spPr>
+          <a:xfrm>
+            <a:off x="10362895" y="457200"/>
+            <a:ext cx="859536" cy="201168"/>
+          </a:xfrm>
+          <a:prstGeom prst="rect">
+            <a:avLst/>
+          </a:prstGeom>
+          <a:solidFill>
+            <a:srgbClr val="00A6FF"/>
+          </a:solidFill>
+          <a:ln w="12700">
+            <a:solidFill>
+              <a:srgbClr val="111111"/>
+            </a:solidFill>
+            <a:prstDash val="solid"/>
+          </a:ln>
+        </p:spPr>
+      </p:sp>
+      <p:sp>
+        <p:nvSpPr>
           <p:cNvPr id="6" name="Shape 4"/>
+          <p:cNvSpPr/>
+          <p:nvPr/>
+        </p:nvSpPr>
+        <p:spPr>
+          <a:xfrm>
+            <a:off x="475488" y="768096"/>
+            <a:ext cx="1353312" cy="0"/>
+          </a:xfrm>
+          <a:prstGeom prst="line">
+            <a:avLst/>
+          </a:prstGeom>
+          <a:noFill/>
+          <a:ln w="12700">
+            <a:solidFill>
+              <a:srgbClr val="111111"/>
+            </a:solidFill>
+            <a:prstDash val="solid"/>
+          </a:ln>
+        </p:spPr>
+      </p:sp>
+      <p:sp>
+        <p:nvSpPr>
+          <p:cNvPr id="7" name="Shape 5"/>
+          <p:cNvSpPr/>
+          <p:nvPr/>
+        </p:nvSpPr>
+        <p:spPr>
+          <a:xfrm>
+            <a:off x="475488" y="6364224"/>
+            <a:ext cx="11240719" cy="0"/>
+          </a:xfrm>
+          <a:prstGeom prst="line">
+            <a:avLst/>
+          </a:prstGeom>
+          <a:noFill/>
+          <a:ln w="12700">
+            <a:solidFill>
+              <a:srgbClr val="111111"/>
+            </a:solidFill>
+            <a:prstDash val="solid"/>
+          </a:ln>
+        </p:spPr>
+      </p:sp>
+      <p:sp>
+        <p:nvSpPr>
+          <p:cNvPr id="8" name="Shape 6"/>
+          <p:cNvSpPr/>
+          <p:nvPr/>
+        </p:nvSpPr>
+        <p:spPr>
+          <a:xfrm>
+            <a:off x="10134295" y="0"/>
+            <a:ext cx="2057400" cy="256032"/>
+          </a:xfrm>
+          <a:prstGeom prst="rect">
+            <a:avLst/>
+          </a:prstGeom>
+          <a:solidFill>
+            <a:srgbClr val="111111"/>
+          </a:solidFill>
+          <a:ln w="12700">
+            <a:solidFill>
+              <a:srgbClr val="111111">
+                <a:alpha val="0"/>
+              </a:srgbClr>
+            </a:solidFill>
+            <a:prstDash val="solid"/>
+          </a:ln>
+        </p:spPr>
+      </p:sp>
+      <p:sp>
+        <p:nvSpPr>
+          <p:cNvPr id="9" name="Shape 7"/>
           <p:cNvSpPr/>
           <p:nvPr/>
         </p:nvSpPr>
@@ -20407,7 +22132,7 @@
       </p:sp>
       <p:sp>
         <p:nvSpPr>
-          <p:cNvPr id="7" name="Shape 5"/>
+          <p:cNvPr id="10" name="Shape 8"/>
           <p:cNvSpPr/>
           <p:nvPr/>
         </p:nvSpPr>
@@ -20434,7 +22159,7 @@
       </p:sp>
       <p:pic>
         <p:nvPicPr>
-          <p:cNvPr id="8" name="Image 0" descr="preencoded.png">    </p:cNvPr>
+          <p:cNvPr id="11" name="Image 0" descr="preencoded.png">    </p:cNvPr>
           <p:cNvPicPr>
             <a:picLocks noChangeAspect="1"/>
           </p:cNvPicPr>
@@ -20464,7 +22189,7 @@
       </p:pic>
       <p:pic>
         <p:nvPicPr>
-          <p:cNvPr id="9" name="Image 1" descr="preencoded.png">    </p:cNvPr>
+          <p:cNvPr id="12" name="Image 1" descr="preencoded.png">    </p:cNvPr>
           <p:cNvPicPr>
             <a:picLocks noChangeAspect="1"/>
           </p:cNvPicPr>
@@ -20494,7 +22219,7 @@
       </p:pic>
       <p:pic>
         <p:nvPicPr>
-          <p:cNvPr id="10" name="Image 2" descr="preencoded.png">    </p:cNvPr>
+          <p:cNvPr id="13" name="Image 2" descr="preencoded.png">    </p:cNvPr>
           <p:cNvPicPr>
             <a:picLocks noChangeAspect="1"/>
           </p:cNvPicPr>
@@ -20524,7 +22249,7 @@
       </p:pic>
       <p:sp>
         <p:nvSpPr>
-          <p:cNvPr id="11" name="Shape 6"/>
+          <p:cNvPr id="14" name="Shape 9"/>
           <p:cNvSpPr/>
           <p:nvPr/>
         </p:nvSpPr>
@@ -20553,7 +22278,7 @@
       </p:sp>
       <p:sp>
         <p:nvSpPr>
-          <p:cNvPr id="12" name="Shape 7"/>
+          <p:cNvPr id="15" name="Shape 10"/>
           <p:cNvSpPr/>
           <p:nvPr/>
         </p:nvSpPr>
@@ -20580,7 +22305,7 @@
       </p:sp>
       <p:sp>
         <p:nvSpPr>
-          <p:cNvPr id="13" name="Shape 8"/>
+          <p:cNvPr id="16" name="Shape 11"/>
           <p:cNvSpPr/>
           <p:nvPr/>
         </p:nvSpPr>
@@ -20607,7 +22332,7 @@
       </p:sp>
       <p:sp>
         <p:nvSpPr>
-          <p:cNvPr id="14" name="Shape 9"/>
+          <p:cNvPr id="17" name="Shape 12"/>
           <p:cNvSpPr/>
           <p:nvPr/>
         </p:nvSpPr>
@@ -20634,7 +22359,7 @@
       </p:sp>
       <p:sp>
         <p:nvSpPr>
-          <p:cNvPr id="15" name="mdpr:1-2-dfa474:title:__title:1-2-dfa474"/>
+          <p:cNvPr id="18" name="mdpr:1-2-dfa474:title:__title:1-2-dfa474"/>
           <p:cNvSpPr txBox="1"/>
           <p:nvPr/>
         </p:nvSpPr>
@@ -20676,7 +22401,7 @@
       </p:sp>
       <p:sp>
         <p:nvSpPr>
-          <p:cNvPr id="16" name="Shape 11"/>
+          <p:cNvPr id="19" name="Shape 14"/>
           <p:cNvSpPr/>
           <p:nvPr/>
         </p:nvSpPr>
@@ -20703,7 +22428,7 @@
       </p:sp>
       <p:pic>
         <p:nvPicPr>
-          <p:cNvPr id="17" name="Image 3" descr="article icon from tabler-icons (MIT)">    </p:cNvPr>
+          <p:cNvPr id="20" name="Image 3" descr="article icon from tabler-icons (MIT)">    </p:cNvPr>
           <p:cNvPicPr>
             <a:picLocks noChangeAspect="1"/>
           </p:cNvPicPr>
@@ -20733,7 +22458,7 @@
       </p:pic>
       <p:sp>
         <p:nvSpPr>
-          <p:cNvPr id="18" name="mdpr:1-2-dfa474:item-1:block-8-chunk-1"/>
+          <p:cNvPr id="21" name="mdpr:1-2-dfa474:item-1:block-8-chunk-1"/>
           <p:cNvSpPr txBox="1"/>
           <p:nvPr/>
         </p:nvSpPr>
@@ -20792,7 +22517,7 @@
       </p:sp>
       <p:sp>
         <p:nvSpPr>
-          <p:cNvPr id="19" name="Shape 13"/>
+          <p:cNvPr id="22" name="Shape 16"/>
           <p:cNvSpPr/>
           <p:nvPr/>
         </p:nvSpPr>
@@ -20819,7 +22544,7 @@
       </p:sp>
       <p:pic>
         <p:nvPicPr>
-          <p:cNvPr id="20" name="Image 4" descr="article icon from tabler-icons (MIT)">    </p:cNvPr>
+          <p:cNvPr id="23" name="Image 4" descr="article icon from tabler-icons (MIT)">    </p:cNvPr>
           <p:cNvPicPr>
             <a:picLocks noChangeAspect="1"/>
           </p:cNvPicPr>
@@ -20849,7 +22574,7 @@
       </p:pic>
       <p:sp>
         <p:nvSpPr>
-          <p:cNvPr id="21" name="mdpr:1-2-dfa474:item-2:block-8-chunk-1"/>
+          <p:cNvPr id="24" name="mdpr:1-2-dfa474:item-2:block-8-chunk-1"/>
           <p:cNvSpPr txBox="1"/>
           <p:nvPr/>
         </p:nvSpPr>
@@ -20908,7 +22633,7 @@
       </p:sp>
       <p:sp>
         <p:nvSpPr>
-          <p:cNvPr id="22" name="Shape 15"/>
+          <p:cNvPr id="25" name="Shape 18"/>
           <p:cNvSpPr/>
           <p:nvPr/>
         </p:nvSpPr>
@@ -20935,7 +22660,7 @@
       </p:sp>
       <p:pic>
         <p:nvPicPr>
-          <p:cNvPr id="23" name="Image 5" descr="article icon from tabler-icons (MIT)">    </p:cNvPr>
+          <p:cNvPr id="26" name="Image 5" descr="article icon from tabler-icons (MIT)">    </p:cNvPr>
           <p:cNvPicPr>
             <a:picLocks noChangeAspect="1"/>
           </p:cNvPicPr>
@@ -20965,7 +22690,7 @@
       </p:pic>
       <p:sp>
         <p:nvSpPr>
-          <p:cNvPr id="24" name="mdpr:1-2-dfa474:item-3:block-8-chunk-1"/>
+          <p:cNvPr id="27" name="mdpr:1-2-dfa474:item-3:block-8-chunk-1"/>
           <p:cNvSpPr txBox="1"/>
           <p:nvPr/>
         </p:nvSpPr>
@@ -21114,31 +22839,8 @@
         </p:nvSpPr>
         <p:spPr>
           <a:xfrm>
-            <a:off x="475488" y="6364224"/>
-            <a:ext cx="11240719" cy="0"/>
-          </a:xfrm>
-          <a:prstGeom prst="line">
-            <a:avLst/>
-          </a:prstGeom>
-          <a:noFill/>
-          <a:ln w="12700">
-            <a:solidFill>
-              <a:srgbClr val="111111"/>
-            </a:solidFill>
-            <a:prstDash val="solid"/>
-          </a:ln>
-        </p:spPr>
-      </p:sp>
-      <p:sp>
-        <p:nvSpPr>
-          <p:cNvPr id="5" name="Shape 3"/>
-          <p:cNvSpPr/>
-          <p:nvPr/>
-        </p:nvSpPr>
-        <p:spPr>
-          <a:xfrm>
-            <a:off x="10134295" y="0"/>
-            <a:ext cx="2057400" cy="256032"/>
+            <a:off x="10033711" y="310896"/>
+            <a:ext cx="1225296" cy="201168"/>
           </a:xfrm>
           <a:prstGeom prst="rect">
             <a:avLst/>
@@ -21158,7 +22860,105 @@
       </p:sp>
       <p:sp>
         <p:nvSpPr>
+          <p:cNvPr id="5" name="Shape 3"/>
+          <p:cNvSpPr/>
+          <p:nvPr/>
+        </p:nvSpPr>
+        <p:spPr>
+          <a:xfrm>
+            <a:off x="10362895" y="457200"/>
+            <a:ext cx="859536" cy="201168"/>
+          </a:xfrm>
+          <a:prstGeom prst="rect">
+            <a:avLst/>
+          </a:prstGeom>
+          <a:solidFill>
+            <a:srgbClr val="00A6FF"/>
+          </a:solidFill>
+          <a:ln w="12700">
+            <a:solidFill>
+              <a:srgbClr val="111111"/>
+            </a:solidFill>
+            <a:prstDash val="solid"/>
+          </a:ln>
+        </p:spPr>
+      </p:sp>
+      <p:sp>
+        <p:nvSpPr>
           <p:cNvPr id="6" name="Shape 4"/>
+          <p:cNvSpPr/>
+          <p:nvPr/>
+        </p:nvSpPr>
+        <p:spPr>
+          <a:xfrm>
+            <a:off x="475488" y="768096"/>
+            <a:ext cx="1353312" cy="0"/>
+          </a:xfrm>
+          <a:prstGeom prst="line">
+            <a:avLst/>
+          </a:prstGeom>
+          <a:noFill/>
+          <a:ln w="12700">
+            <a:solidFill>
+              <a:srgbClr val="111111"/>
+            </a:solidFill>
+            <a:prstDash val="solid"/>
+          </a:ln>
+        </p:spPr>
+      </p:sp>
+      <p:sp>
+        <p:nvSpPr>
+          <p:cNvPr id="7" name="Shape 5"/>
+          <p:cNvSpPr/>
+          <p:nvPr/>
+        </p:nvSpPr>
+        <p:spPr>
+          <a:xfrm>
+            <a:off x="475488" y="6364224"/>
+            <a:ext cx="11240719" cy="0"/>
+          </a:xfrm>
+          <a:prstGeom prst="line">
+            <a:avLst/>
+          </a:prstGeom>
+          <a:noFill/>
+          <a:ln w="12700">
+            <a:solidFill>
+              <a:srgbClr val="111111"/>
+            </a:solidFill>
+            <a:prstDash val="solid"/>
+          </a:ln>
+        </p:spPr>
+      </p:sp>
+      <p:sp>
+        <p:nvSpPr>
+          <p:cNvPr id="8" name="Shape 6"/>
+          <p:cNvSpPr/>
+          <p:nvPr/>
+        </p:nvSpPr>
+        <p:spPr>
+          <a:xfrm>
+            <a:off x="10134295" y="0"/>
+            <a:ext cx="2057400" cy="256032"/>
+          </a:xfrm>
+          <a:prstGeom prst="rect">
+            <a:avLst/>
+          </a:prstGeom>
+          <a:solidFill>
+            <a:srgbClr val="111111"/>
+          </a:solidFill>
+          <a:ln w="12700">
+            <a:solidFill>
+              <a:srgbClr val="111111">
+                <a:alpha val="0"/>
+              </a:srgbClr>
+            </a:solidFill>
+            <a:prstDash val="solid"/>
+          </a:ln>
+        </p:spPr>
+      </p:sp>
+      <p:sp>
+        <p:nvSpPr>
+          <p:cNvPr id="9" name="Shape 7"/>
           <p:cNvSpPr/>
           <p:nvPr/>
         </p:nvSpPr>
@@ -21185,7 +22985,7 @@
       </p:sp>
       <p:sp>
         <p:nvSpPr>
-          <p:cNvPr id="7" name="Shape 5"/>
+          <p:cNvPr id="10" name="Shape 8"/>
           <p:cNvSpPr/>
           <p:nvPr/>
         </p:nvSpPr>
@@ -21212,7 +23012,7 @@
       </p:sp>
       <p:sp>
         <p:nvSpPr>
-          <p:cNvPr id="8" name="Shape 6"/>
+          <p:cNvPr id="11" name="Shape 9"/>
           <p:cNvSpPr/>
           <p:nvPr/>
         </p:nvSpPr>
@@ -21239,7 +23039,7 @@
       </p:sp>
       <p:sp>
         <p:nvSpPr>
-          <p:cNvPr id="9" name="Shape 7"/>
+          <p:cNvPr id="12" name="Shape 10"/>
           <p:cNvSpPr/>
           <p:nvPr/>
         </p:nvSpPr>
@@ -21266,7 +23066,7 @@
       </p:sp>
       <p:sp>
         <p:nvSpPr>
-          <p:cNvPr id="10" name="mdpr:2-2-149bde:title:__title:2-2-149bde"/>
+          <p:cNvPr id="13" name="mdpr:2-2-149bde:title:__title:2-2-149bde"/>
           <p:cNvSpPr txBox="1"/>
           <p:nvPr/>
         </p:nvSpPr>
@@ -21308,7 +23108,7 @@
       </p:sp>
       <p:sp>
         <p:nvSpPr>
-          <p:cNvPr id="11" name="mdpr:2-2-149bde:left:block-8-chunk-2"/>
+          <p:cNvPr id="14" name="mdpr:2-2-149bde:left:block-8-chunk-2"/>
           <p:cNvSpPr txBox="1"/>
           <p:nvPr/>
         </p:nvSpPr>
@@ -21367,7 +23167,7 @@
       </p:sp>
       <p:sp>
         <p:nvSpPr>
-          <p:cNvPr id="12" name="mdpr:2-2-149bde:right:block-8-chunk-2"/>
+          <p:cNvPr id="15" name="mdpr:2-2-149bde:right:block-8-chunk-2"/>
           <p:cNvSpPr txBox="1"/>
           <p:nvPr/>
         </p:nvSpPr>
@@ -21516,31 +23316,8 @@
         </p:nvSpPr>
         <p:spPr>
           <a:xfrm>
-            <a:off x="475488" y="6364224"/>
-            <a:ext cx="11240719" cy="0"/>
-          </a:xfrm>
-          <a:prstGeom prst="line">
-            <a:avLst/>
-          </a:prstGeom>
-          <a:noFill/>
-          <a:ln w="12700">
-            <a:solidFill>
-              <a:srgbClr val="111111"/>
-            </a:solidFill>
-            <a:prstDash val="solid"/>
-          </a:ln>
-        </p:spPr>
-      </p:sp>
-      <p:sp>
-        <p:nvSpPr>
-          <p:cNvPr id="5" name="Shape 3"/>
-          <p:cNvSpPr/>
-          <p:nvPr/>
-        </p:nvSpPr>
-        <p:spPr>
-          <a:xfrm>
-            <a:off x="10134295" y="0"/>
-            <a:ext cx="2057400" cy="256032"/>
+            <a:off x="10033711" y="310896"/>
+            <a:ext cx="1225296" cy="201168"/>
           </a:xfrm>
           <a:prstGeom prst="rect">
             <a:avLst/>
@@ -21560,7 +23337,105 @@
       </p:sp>
       <p:sp>
         <p:nvSpPr>
+          <p:cNvPr id="5" name="Shape 3"/>
+          <p:cNvSpPr/>
+          <p:nvPr/>
+        </p:nvSpPr>
+        <p:spPr>
+          <a:xfrm>
+            <a:off x="10362895" y="457200"/>
+            <a:ext cx="859536" cy="201168"/>
+          </a:xfrm>
+          <a:prstGeom prst="rect">
+            <a:avLst/>
+          </a:prstGeom>
+          <a:solidFill>
+            <a:srgbClr val="00A6FF"/>
+          </a:solidFill>
+          <a:ln w="12700">
+            <a:solidFill>
+              <a:srgbClr val="111111"/>
+            </a:solidFill>
+            <a:prstDash val="solid"/>
+          </a:ln>
+        </p:spPr>
+      </p:sp>
+      <p:sp>
+        <p:nvSpPr>
           <p:cNvPr id="6" name="Shape 4"/>
+          <p:cNvSpPr/>
+          <p:nvPr/>
+        </p:nvSpPr>
+        <p:spPr>
+          <a:xfrm>
+            <a:off x="475488" y="768096"/>
+            <a:ext cx="1353312" cy="0"/>
+          </a:xfrm>
+          <a:prstGeom prst="line">
+            <a:avLst/>
+          </a:prstGeom>
+          <a:noFill/>
+          <a:ln w="12700">
+            <a:solidFill>
+              <a:srgbClr val="111111"/>
+            </a:solidFill>
+            <a:prstDash val="solid"/>
+          </a:ln>
+        </p:spPr>
+      </p:sp>
+      <p:sp>
+        <p:nvSpPr>
+          <p:cNvPr id="7" name="Shape 5"/>
+          <p:cNvSpPr/>
+          <p:nvPr/>
+        </p:nvSpPr>
+        <p:spPr>
+          <a:xfrm>
+            <a:off x="475488" y="6364224"/>
+            <a:ext cx="11240719" cy="0"/>
+          </a:xfrm>
+          <a:prstGeom prst="line">
+            <a:avLst/>
+          </a:prstGeom>
+          <a:noFill/>
+          <a:ln w="12700">
+            <a:solidFill>
+              <a:srgbClr val="111111"/>
+            </a:solidFill>
+            <a:prstDash val="solid"/>
+          </a:ln>
+        </p:spPr>
+      </p:sp>
+      <p:sp>
+        <p:nvSpPr>
+          <p:cNvPr id="8" name="Shape 6"/>
+          <p:cNvSpPr/>
+          <p:nvPr/>
+        </p:nvSpPr>
+        <p:spPr>
+          <a:xfrm>
+            <a:off x="10134295" y="0"/>
+            <a:ext cx="2057400" cy="256032"/>
+          </a:xfrm>
+          <a:prstGeom prst="rect">
+            <a:avLst/>
+          </a:prstGeom>
+          <a:solidFill>
+            <a:srgbClr val="111111"/>
+          </a:solidFill>
+          <a:ln w="12700">
+            <a:solidFill>
+              <a:srgbClr val="111111">
+                <a:alpha val="0"/>
+              </a:srgbClr>
+            </a:solidFill>
+            <a:prstDash val="solid"/>
+          </a:ln>
+        </p:spPr>
+      </p:sp>
+      <p:sp>
+        <p:nvSpPr>
+          <p:cNvPr id="9" name="Shape 7"/>
           <p:cNvSpPr/>
           <p:nvPr/>
         </p:nvSpPr>
@@ -21587,7 +23462,7 @@
       </p:sp>
       <p:sp>
         <p:nvSpPr>
-          <p:cNvPr id="7" name="Shape 5"/>
+          <p:cNvPr id="10" name="Shape 8"/>
           <p:cNvSpPr/>
           <p:nvPr/>
         </p:nvSpPr>
@@ -21614,7 +23489,7 @@
       </p:sp>
       <p:sp>
         <p:nvSpPr>
-          <p:cNvPr id="8" name="Shape 6"/>
+          <p:cNvPr id="11" name="Shape 9"/>
           <p:cNvSpPr/>
           <p:nvPr/>
         </p:nvSpPr>
@@ -21641,7 +23516,7 @@
       </p:sp>
       <p:sp>
         <p:nvSpPr>
-          <p:cNvPr id="9" name="Shape 7"/>
+          <p:cNvPr id="12" name="Shape 10"/>
           <p:cNvSpPr/>
           <p:nvPr/>
         </p:nvSpPr>
@@ -21668,7 +23543,7 @@
       </p:sp>
       <p:sp>
         <p:nvSpPr>
-          <p:cNvPr id="10" name="mdpr:1-2-5a84f1:title:__title:1-2-5a84f1"/>
+          <p:cNvPr id="13" name="mdpr:1-2-5a84f1:title:__title:1-2-5a84f1"/>
           <p:cNvSpPr txBox="1"/>
           <p:nvPr/>
         </p:nvSpPr>
@@ -21710,7 +23585,7 @@
       </p:sp>
       <p:sp>
         <p:nvSpPr>
-          <p:cNvPr id="11" name="mdpr:1-2-5a84f1:left:block-10-chunk-1"/>
+          <p:cNvPr id="14" name="mdpr:1-2-5a84f1:left:block-10-chunk-1"/>
           <p:cNvSpPr txBox="1"/>
           <p:nvPr/>
         </p:nvSpPr>
@@ -21769,7 +23644,7 @@
       </p:sp>
       <p:sp>
         <p:nvSpPr>
-          <p:cNvPr id="12" name="mdpr:1-2-5a84f1:right:block-10-chunk-1"/>
+          <p:cNvPr id="15" name="mdpr:1-2-5a84f1:right:block-10-chunk-1"/>
           <p:cNvSpPr txBox="1"/>
           <p:nvPr/>
         </p:nvSpPr>

--- a/docs/theme-preview/pptx/brutalism.pptx
+++ b/docs/theme-preview/pptx/brutalism.pptx
@@ -6144,136 +6144,16 @@
           </a:ln>
         </p:spPr>
       </p:sp>
-      <p:pic>
-        <p:nvPicPr>
-          <p:cNvPr id="11" name="Image 0" descr="preencoded.png">    </p:cNvPr>
-          <p:cNvPicPr>
-            <a:picLocks noChangeAspect="1"/>
-          </p:cNvPicPr>
-          <p:nvPr/>
-        </p:nvPicPr>
-        <p:blipFill>
-          <a:blip r:embed="rId1">
-            <a:extLst>
-              <a:ext uri="{96DAC541-7B7A-43D3-8B79-37D633B846F1}">
-                <asvg:svgBlip xmlns:asvg="http://schemas.microsoft.com/office/drawing/2016/SVG/main" r:embed="rId2"/>
-              </a:ext>
-            </a:extLst>
-          </a:blip>
-          <a:stretch>
-            <a:fillRect/>
-          </a:stretch>
-        </p:blipFill>
-        <p:spPr>
-          <a:xfrm>
-            <a:off x="822960" y="1463040"/>
-            <a:ext cx="5029200" cy="1920240"/>
-          </a:xfrm>
-          <a:prstGeom prst="rect">
-            <a:avLst/>
-          </a:prstGeom>
-        </p:spPr>
-      </p:pic>
-      <p:pic>
-        <p:nvPicPr>
-          <p:cNvPr id="12" name="Image 1" descr="preencoded.png">    </p:cNvPr>
-          <p:cNvPicPr>
-            <a:picLocks noChangeAspect="1"/>
-          </p:cNvPicPr>
-          <p:nvPr/>
-        </p:nvPicPr>
-        <p:blipFill>
-          <a:blip r:embed="rId3">
-            <a:extLst>
-              <a:ext uri="{96DAC541-7B7A-43D3-8B79-37D633B846F1}">
-                <asvg:svgBlip xmlns:asvg="http://schemas.microsoft.com/office/drawing/2016/SVG/main" r:embed="rId4"/>
-              </a:ext>
-            </a:extLst>
-          </a:blip>
-          <a:stretch>
-            <a:fillRect/>
-          </a:stretch>
-        </p:blipFill>
-        <p:spPr>
-          <a:xfrm>
-            <a:off x="6309360" y="1463040"/>
-            <a:ext cx="5029200" cy="1920240"/>
-          </a:xfrm>
-          <a:prstGeom prst="rect">
-            <a:avLst/>
-          </a:prstGeom>
-        </p:spPr>
-      </p:pic>
-      <p:pic>
-        <p:nvPicPr>
-          <p:cNvPr id="13" name="Image 2" descr="preencoded.png">    </p:cNvPr>
-          <p:cNvPicPr>
-            <a:picLocks noChangeAspect="1"/>
-          </p:cNvPicPr>
-          <p:nvPr/>
-        </p:nvPicPr>
-        <p:blipFill>
-          <a:blip r:embed="rId5">
-            <a:extLst>
-              <a:ext uri="{96DAC541-7B7A-43D3-8B79-37D633B846F1}">
-                <asvg:svgBlip xmlns:asvg="http://schemas.microsoft.com/office/drawing/2016/SVG/main" r:embed="rId6"/>
-              </a:ext>
-            </a:extLst>
-          </a:blip>
-          <a:stretch>
-            <a:fillRect/>
-          </a:stretch>
-        </p:blipFill>
-        <p:spPr>
-          <a:xfrm>
-            <a:off x="822960" y="3749040"/>
-            <a:ext cx="5029200" cy="1920240"/>
-          </a:xfrm>
-          <a:prstGeom prst="rect">
-            <a:avLst/>
-          </a:prstGeom>
-        </p:spPr>
-      </p:pic>
-      <p:pic>
-        <p:nvPicPr>
-          <p:cNvPr id="14" name="Image 3" descr="preencoded.png">    </p:cNvPr>
-          <p:cNvPicPr>
-            <a:picLocks noChangeAspect="1"/>
-          </p:cNvPicPr>
-          <p:nvPr/>
-        </p:nvPicPr>
-        <p:blipFill>
-          <a:blip r:embed="rId7">
-            <a:extLst>
-              <a:ext uri="{96DAC541-7B7A-43D3-8B79-37D633B846F1}">
-                <asvg:svgBlip xmlns:asvg="http://schemas.microsoft.com/office/drawing/2016/SVG/main" r:embed="rId8"/>
-              </a:ext>
-            </a:extLst>
-          </a:blip>
-          <a:stretch>
-            <a:fillRect/>
-          </a:stretch>
-        </p:blipFill>
-        <p:spPr>
-          <a:xfrm>
-            <a:off x="6309360" y="3749040"/>
-            <a:ext cx="5029200" cy="1920240"/>
-          </a:xfrm>
-          <a:prstGeom prst="rect">
-            <a:avLst/>
-          </a:prstGeom>
-        </p:spPr>
-      </p:pic>
-      <p:sp>
-        <p:nvSpPr>
-          <p:cNvPr id="15" name="Shape 9"/>
-          <p:cNvSpPr/>
-          <p:nvPr/>
-        </p:nvSpPr>
-        <p:spPr>
-          <a:xfrm>
-            <a:off x="822960" y="1463040"/>
-            <a:ext cx="73152" cy="1920240"/>
+      <p:sp>
+        <p:nvSpPr>
+          <p:cNvPr id="11" name="Shape 9"/>
+          <p:cNvSpPr/>
+          <p:nvPr/>
+        </p:nvSpPr>
+        <p:spPr>
+          <a:xfrm>
+            <a:off x="822960" y="1389888"/>
+            <a:ext cx="4937760" cy="73152"/>
           </a:xfrm>
           <a:prstGeom prst="rect">
             <a:avLst/>
@@ -6293,41 +6173,14 @@
       </p:sp>
       <p:sp>
         <p:nvSpPr>
-          <p:cNvPr id="16" name="Shape 10"/>
-          <p:cNvSpPr/>
-          <p:nvPr/>
-        </p:nvSpPr>
-        <p:spPr>
-          <a:xfrm>
-            <a:off x="6309360" y="1463040"/>
-            <a:ext cx="73152" cy="1920240"/>
-          </a:xfrm>
-          <a:prstGeom prst="rect">
-            <a:avLst/>
-          </a:prstGeom>
-          <a:solidFill>
-            <a:srgbClr val="00A6FF"/>
-          </a:solidFill>
-          <a:ln w="12700">
-            <a:solidFill>
-              <a:srgbClr val="00A6FF">
-                <a:alpha val="0"/>
-              </a:srgbClr>
-            </a:solidFill>
-            <a:prstDash val="solid"/>
-          </a:ln>
-        </p:spPr>
-      </p:sp>
-      <p:sp>
-        <p:nvSpPr>
-          <p:cNvPr id="17" name="Shape 11"/>
-          <p:cNvSpPr/>
-          <p:nvPr/>
-        </p:nvSpPr>
-        <p:spPr>
-          <a:xfrm>
-            <a:off x="822960" y="3749040"/>
-            <a:ext cx="73152" cy="1920240"/>
+          <p:cNvPr id="12" name="Shape 10"/>
+          <p:cNvSpPr/>
+          <p:nvPr/>
+        </p:nvSpPr>
+        <p:spPr>
+          <a:xfrm>
+            <a:off x="6400800" y="1389888"/>
+            <a:ext cx="4937760" cy="73152"/>
           </a:xfrm>
           <a:prstGeom prst="rect">
             <a:avLst/>
@@ -6347,34 +6200,7 @@
       </p:sp>
       <p:sp>
         <p:nvSpPr>
-          <p:cNvPr id="18" name="Shape 12"/>
-          <p:cNvSpPr/>
-          <p:nvPr/>
-        </p:nvSpPr>
-        <p:spPr>
-          <a:xfrm>
-            <a:off x="6309360" y="3749040"/>
-            <a:ext cx="73152" cy="1920240"/>
-          </a:xfrm>
-          <a:prstGeom prst="rect">
-            <a:avLst/>
-          </a:prstGeom>
-          <a:solidFill>
-            <a:srgbClr val="00A6FF"/>
-          </a:solidFill>
-          <a:ln w="12700">
-            <a:solidFill>
-              <a:srgbClr val="00A6FF">
-                <a:alpha val="0"/>
-              </a:srgbClr>
-            </a:solidFill>
-            <a:prstDash val="solid"/>
-          </a:ln>
-        </p:spPr>
-      </p:sp>
-      <p:sp>
-        <p:nvSpPr>
-          <p:cNvPr id="19" name="mdpr:1-2-e3669a:title:__title:1-2-e3669a"/>
+          <p:cNvPr id="13" name="mdpr:1-2-e3669a:title:__title:1-2-e3669a"/>
           <p:cNvSpPr txBox="1"/>
           <p:nvPr/>
         </p:nvSpPr>
@@ -6416,71 +6242,14 @@
       </p:sp>
       <p:sp>
         <p:nvSpPr>
-          <p:cNvPr id="20" name="Shape 14"/>
-          <p:cNvSpPr/>
-          <p:nvPr/>
-        </p:nvSpPr>
-        <p:spPr>
-          <a:xfrm>
-            <a:off x="976122" y="2130552"/>
-            <a:ext cx="585216" cy="585216"/>
-          </a:xfrm>
-          <a:prstGeom prst="roundRect">
-            <a:avLst>
-              <a:gd name="adj" fmla="val 6250"/>
-            </a:avLst>
-          </a:prstGeom>
-          <a:solidFill>
-            <a:srgbClr val="FFF200"/>
-          </a:solidFill>
-          <a:ln w="12700">
-            <a:solidFill>
-              <a:srgbClr val="111111"/>
-            </a:solidFill>
-            <a:prstDash val="solid"/>
-          </a:ln>
-        </p:spPr>
-      </p:sp>
-      <p:pic>
-        <p:nvPicPr>
-          <p:cNvPr id="21" name="Image 4" descr="article icon from tabler-icons (MIT)">    </p:cNvPr>
-          <p:cNvPicPr>
-            <a:picLocks noChangeAspect="1"/>
-          </p:cNvPicPr>
-          <p:nvPr/>
-        </p:nvPicPr>
-        <p:blipFill>
-          <a:blip r:embed="rId9">
-            <a:extLst>
-              <a:ext uri="{96DAC541-7B7A-43D3-8B79-37D633B846F1}">
-                <asvg:svgBlip xmlns:asvg="http://schemas.microsoft.com/office/drawing/2016/SVG/main" r:embed="rId10"/>
-              </a:ext>
-            </a:extLst>
-          </a:blip>
-          <a:stretch>
-            <a:fillRect/>
-          </a:stretch>
-        </p:blipFill>
-        <p:spPr>
-          <a:xfrm>
-            <a:off x="1049274" y="2203704"/>
-            <a:ext cx="438912" cy="438912"/>
-          </a:xfrm>
-          <a:prstGeom prst="rect">
-            <a:avLst/>
-          </a:prstGeom>
-        </p:spPr>
-      </p:pic>
-      <p:sp>
-        <p:nvSpPr>
-          <p:cNvPr id="22" name="mdpr:1-2-e3669a:item-1:block-15-chunk-1"/>
+          <p:cNvPr id="14" name="mdpr:1-2-e3669a:left:block-15-chunk-1-block-15-chunk-1"/>
           <p:cNvSpPr txBox="1"/>
           <p:nvPr/>
         </p:nvSpPr>
         <p:spPr>
           <a:xfrm>
-            <a:off x="1689354" y="1627632"/>
-            <a:ext cx="3961638" cy="1591056"/>
+            <a:off x="896112" y="1499616"/>
+            <a:ext cx="4791456" cy="4398264"/>
           </a:xfrm>
           <a:prstGeom prst="rect">
             <a:avLst/>
@@ -6489,7 +6258,7 @@
           <a:ln/>
         </p:spPr>
         <p:txBody>
-          <a:bodyPr wrap="square" lIns="0" tIns="25400" rIns="25400" bIns="0" rtlCol="0" anchor="ctr"/>
+          <a:bodyPr wrap="square" lIns="0" tIns="25400" rIns="25400" bIns="0" rtlCol="0" anchor="t"/>
           <a:lstStyle/>
           <a:p>
             <a:pPr algn="l" indent="0" marL="0">
@@ -6499,7 +6268,7 @@
               <a:buNone/>
             </a:pPr>
             <a:r>
-              <a:rPr lang="en-US" sz="2200" b="1" dirty="0">
+              <a:rPr lang="en-US" sz="1800" b="1" dirty="0">
                 <a:solidFill>
                   <a:srgbClr val="111111"/>
                 </a:solidFill>
@@ -6507,7 +6276,7 @@
                 <a:ea typeface="Pretendard" pitchFamily="34" charset="-122"/>
                 <a:cs typeface="Pretendard" pitchFamily="34" charset="-120"/>
               </a:rPr>
-              <a:t>Surfaces</a:t>
+              <a:t>- Surfaces</a:t>
             </a:r>
             <a:pPr algn="l" indent="0" marL="0">
               <a:lnSpc>
@@ -6516,7 +6285,7 @@
               <a:buNone/>
             </a:pPr>
             <a:r>
-              <a:rPr lang="en-US" sz="2200" dirty="0">
+              <a:rPr lang="en-US" sz="1800" dirty="0">
                 <a:solidFill>
                   <a:srgbClr val="111111"/>
                 </a:solidFill>
@@ -6526,77 +6295,60 @@
               </a:rPr>
               <a:t>  rounded-card, two-corner-card, flag-drop, ticket-panel, notched-panel, circle-vine.</a:t>
             </a:r>
-            <a:endParaRPr lang="en-US" sz="2200" dirty="0"/>
+            <a:endParaRPr lang="en-US" sz="1800" dirty="0"/>
+          </a:p>
+          <a:p>
+            <a:pPr algn="l" indent="0" marL="0">
+              <a:lnSpc>
+                <a:spcPct val="120000"/>
+              </a:lnSpc>
+              <a:buNone/>
+            </a:pPr>
+            <a:r>
+              <a:rPr lang="en-US" sz="1800" b="1" dirty="0">
+                <a:solidFill>
+                  <a:srgbClr val="111111"/>
+                </a:solidFill>
+                <a:latin typeface="Pretendard" pitchFamily="34" charset="0"/>
+                <a:ea typeface="Pretendard" pitchFamily="34" charset="-122"/>
+                <a:cs typeface="Pretendard" pitchFamily="34" charset="-120"/>
+              </a:rPr>
+              <a:t>- Layouts</a:t>
+            </a:r>
+            <a:endParaRPr lang="en-US" sz="1800" dirty="0"/>
+          </a:p>
+          <a:p>
+            <a:pPr algn="l" indent="0" marL="0">
+              <a:lnSpc>
+                <a:spcPct val="120000"/>
+              </a:lnSpc>
+              <a:buNone/>
+            </a:pPr>
+            <a:r>
+              <a:rPr lang="en-US" sz="1800" dirty="0">
+                <a:solidFill>
+                  <a:srgbClr val="111111"/>
+                </a:solidFill>
+                <a:latin typeface="Pretendard" pitchFamily="34" charset="0"/>
+                <a:ea typeface="Pretendard" pitchFamily="34" charset="-122"/>
+                <a:cs typeface="Pretendard" pitchFamily="34" charset="-120"/>
+              </a:rPr>
+              <a:t>  toc-strips, two-column-compare, three-card-grid, six-tile-grid, timeline-rail, pipeline-chain.</a:t>
+            </a:r>
+            <a:endParaRPr lang="en-US" sz="1800" dirty="0"/>
           </a:p>
         </p:txBody>
       </p:sp>
       <p:sp>
         <p:nvSpPr>
-          <p:cNvPr id="23" name="Shape 16"/>
-          <p:cNvSpPr/>
-          <p:nvPr/>
-        </p:nvSpPr>
-        <p:spPr>
-          <a:xfrm>
-            <a:off x="6462522" y="2130552"/>
-            <a:ext cx="585216" cy="585216"/>
-          </a:xfrm>
-          <a:prstGeom prst="roundRect">
-            <a:avLst>
-              <a:gd name="adj" fmla="val 6250"/>
-            </a:avLst>
-          </a:prstGeom>
-          <a:solidFill>
-            <a:srgbClr val="FFF200"/>
-          </a:solidFill>
-          <a:ln w="12700">
-            <a:solidFill>
-              <a:srgbClr val="111111"/>
-            </a:solidFill>
-            <a:prstDash val="solid"/>
-          </a:ln>
-        </p:spPr>
-      </p:sp>
-      <p:pic>
-        <p:nvPicPr>
-          <p:cNvPr id="24" name="Image 5" descr="table icon from tabler-icons (MIT)">    </p:cNvPr>
-          <p:cNvPicPr>
-            <a:picLocks noChangeAspect="1"/>
-          </p:cNvPicPr>
-          <p:nvPr/>
-        </p:nvPicPr>
-        <p:blipFill>
-          <a:blip r:embed="rId11">
-            <a:extLst>
-              <a:ext uri="{96DAC541-7B7A-43D3-8B79-37D633B846F1}">
-                <asvg:svgBlip xmlns:asvg="http://schemas.microsoft.com/office/drawing/2016/SVG/main" r:embed="rId12"/>
-              </a:ext>
-            </a:extLst>
-          </a:blip>
-          <a:stretch>
-            <a:fillRect/>
-          </a:stretch>
-        </p:blipFill>
-        <p:spPr>
-          <a:xfrm>
-            <a:off x="6535674" y="2203704"/>
-            <a:ext cx="438912" cy="438912"/>
-          </a:xfrm>
-          <a:prstGeom prst="rect">
-            <a:avLst/>
-          </a:prstGeom>
-        </p:spPr>
-      </p:pic>
-      <p:sp>
-        <p:nvSpPr>
-          <p:cNvPr id="25" name="mdpr:1-2-e3669a:item-2:block-15-chunk-1"/>
+          <p:cNvPr id="15" name="mdpr:1-2-e3669a:right:block-15-chunk-1-block-15-chunk-1"/>
           <p:cNvSpPr txBox="1"/>
           <p:nvPr/>
         </p:nvSpPr>
         <p:spPr>
           <a:xfrm>
-            <a:off x="7175754" y="1627632"/>
-            <a:ext cx="3961638" cy="1591056"/>
+            <a:off x="6473952" y="1499616"/>
+            <a:ext cx="4791456" cy="4398264"/>
           </a:xfrm>
           <a:prstGeom prst="rect">
             <a:avLst/>
@@ -6605,7 +6357,7 @@
           <a:ln/>
         </p:spPr>
         <p:txBody>
-          <a:bodyPr wrap="square" lIns="0" tIns="25400" rIns="25400" bIns="0" rtlCol="0" anchor="ctr"/>
+          <a:bodyPr wrap="square" lIns="0" tIns="25400" rIns="25400" bIns="0" rtlCol="0" anchor="t"/>
           <a:lstStyle/>
           <a:p>
             <a:pPr algn="l" indent="0" marL="0">
@@ -6615,7 +6367,7 @@
               <a:buNone/>
             </a:pPr>
             <a:r>
-              <a:rPr lang="en-US" sz="2200" b="1" dirty="0">
+              <a:rPr lang="en-US" sz="1800" b="1" dirty="0">
                 <a:solidFill>
                   <a:srgbClr val="111111"/>
                 </a:solidFill>
@@ -6623,7 +6375,7 @@
                 <a:ea typeface="Pretendard" pitchFamily="34" charset="-122"/>
                 <a:cs typeface="Pretendard" pitchFamily="34" charset="-120"/>
               </a:rPr>
-              <a:t>Layouts</a:t>
+              <a:t>- Evidence</a:t>
             </a:r>
             <a:pPr algn="l" indent="0" marL="0">
               <a:lnSpc>
@@ -6632,123 +6384,7 @@
               <a:buNone/>
             </a:pPr>
             <a:r>
-              <a:rPr lang="en-US" sz="2200" dirty="0">
-                <a:solidFill>
-                  <a:srgbClr val="111111"/>
-                </a:solidFill>
-                <a:latin typeface="Pretendard" pitchFamily="34" charset="0"/>
-                <a:ea typeface="Pretendard" pitchFamily="34" charset="-122"/>
-                <a:cs typeface="Pretendard" pitchFamily="34" charset="-120"/>
-              </a:rPr>
-              <a:t>  toc-strips, two-column-compare, three-card-grid, six-tile-grid, timeline-rail, pipeline-chain.</a:t>
-            </a:r>
-            <a:endParaRPr lang="en-US" sz="2200" dirty="0"/>
-          </a:p>
-        </p:txBody>
-      </p:sp>
-      <p:sp>
-        <p:nvSpPr>
-          <p:cNvPr id="26" name="Shape 18"/>
-          <p:cNvSpPr/>
-          <p:nvPr/>
-        </p:nvSpPr>
-        <p:spPr>
-          <a:xfrm>
-            <a:off x="976122" y="4416552"/>
-            <a:ext cx="585216" cy="585216"/>
-          </a:xfrm>
-          <a:prstGeom prst="roundRect">
-            <a:avLst>
-              <a:gd name="adj" fmla="val 6250"/>
-            </a:avLst>
-          </a:prstGeom>
-          <a:solidFill>
-            <a:srgbClr val="FFF200"/>
-          </a:solidFill>
-          <a:ln w="12700">
-            <a:solidFill>
-              <a:srgbClr val="111111"/>
-            </a:solidFill>
-            <a:prstDash val="solid"/>
-          </a:ln>
-        </p:spPr>
-      </p:sp>
-      <p:pic>
-        <p:nvPicPr>
-          <p:cNvPr id="27" name="Image 6" descr="chart icon from tabler-icons (MIT)">    </p:cNvPr>
-          <p:cNvPicPr>
-            <a:picLocks noChangeAspect="1"/>
-          </p:cNvPicPr>
-          <p:nvPr/>
-        </p:nvPicPr>
-        <p:blipFill>
-          <a:blip r:embed="rId13">
-            <a:extLst>
-              <a:ext uri="{96DAC541-7B7A-43D3-8B79-37D633B846F1}">
-                <asvg:svgBlip xmlns:asvg="http://schemas.microsoft.com/office/drawing/2016/SVG/main" r:embed="rId14"/>
-              </a:ext>
-            </a:extLst>
-          </a:blip>
-          <a:stretch>
-            <a:fillRect/>
-          </a:stretch>
-        </p:blipFill>
-        <p:spPr>
-          <a:xfrm>
-            <a:off x="1049274" y="4489704"/>
-            <a:ext cx="438912" cy="438912"/>
-          </a:xfrm>
-          <a:prstGeom prst="rect">
-            <a:avLst/>
-          </a:prstGeom>
-        </p:spPr>
-      </p:pic>
-      <p:sp>
-        <p:nvSpPr>
-          <p:cNvPr id="28" name="mdpr:1-2-e3669a:item-3:block-15-chunk-1"/>
-          <p:cNvSpPr txBox="1"/>
-          <p:nvPr/>
-        </p:nvSpPr>
-        <p:spPr>
-          <a:xfrm>
-            <a:off x="1689354" y="3913632"/>
-            <a:ext cx="3961638" cy="1591056"/>
-          </a:xfrm>
-          <a:prstGeom prst="rect">
-            <a:avLst/>
-          </a:prstGeom>
-          <a:noFill/>
-          <a:ln/>
-        </p:spPr>
-        <p:txBody>
-          <a:bodyPr wrap="square" lIns="0" tIns="25400" rIns="25400" bIns="0" rtlCol="0" anchor="ctr"/>
-          <a:lstStyle/>
-          <a:p>
-            <a:pPr algn="l" indent="0" marL="0">
-              <a:lnSpc>
-                <a:spcPct val="120000"/>
-              </a:lnSpc>
-              <a:buNone/>
-            </a:pPr>
-            <a:r>
-              <a:rPr lang="en-US" sz="2200" b="1" dirty="0">
-                <a:solidFill>
-                  <a:srgbClr val="111111"/>
-                </a:solidFill>
-                <a:latin typeface="Pretendard" pitchFamily="34" charset="0"/>
-                <a:ea typeface="Pretendard" pitchFamily="34" charset="-122"/>
-                <a:cs typeface="Pretendard" pitchFamily="34" charset="-120"/>
-              </a:rPr>
-              <a:t>Evidence</a:t>
-            </a:r>
-            <a:pPr algn="l" indent="0" marL="0">
-              <a:lnSpc>
-                <a:spcPct val="120000"/>
-              </a:lnSpc>
-              <a:buNone/>
-            </a:pPr>
-            <a:r>
-              <a:rPr lang="en-US" sz="2200" dirty="0">
+              <a:rPr lang="en-US" sz="1800" dirty="0">
                 <a:solidFill>
                   <a:srgbClr val="111111"/>
                 </a:solidFill>
@@ -6758,87 +6394,8 @@
               </a:rPr>
               <a:t>  chart-table-pair, metric-proof, arc-ring-proof, gauge-proof, connected-strip, mixed-object-pack.</a:t>
             </a:r>
-            <a:endParaRPr lang="en-US" sz="2200" dirty="0"/>
+            <a:endParaRPr lang="en-US" sz="1800" dirty="0"/>
           </a:p>
-        </p:txBody>
-      </p:sp>
-      <p:sp>
-        <p:nvSpPr>
-          <p:cNvPr id="29" name="Shape 20"/>
-          <p:cNvSpPr/>
-          <p:nvPr/>
-        </p:nvSpPr>
-        <p:spPr>
-          <a:xfrm>
-            <a:off x="6462522" y="4416552"/>
-            <a:ext cx="585216" cy="585216"/>
-          </a:xfrm>
-          <a:prstGeom prst="roundRect">
-            <a:avLst>
-              <a:gd name="adj" fmla="val 6250"/>
-            </a:avLst>
-          </a:prstGeom>
-          <a:solidFill>
-            <a:srgbClr val="FFF200"/>
-          </a:solidFill>
-          <a:ln w="12700">
-            <a:solidFill>
-              <a:srgbClr val="111111"/>
-            </a:solidFill>
-            <a:prstDash val="solid"/>
-          </a:ln>
-        </p:spPr>
-      </p:sp>
-      <p:pic>
-        <p:nvPicPr>
-          <p:cNvPr id="30" name="Image 7" descr="flow icon from tabler-icons (MIT)">    </p:cNvPr>
-          <p:cNvPicPr>
-            <a:picLocks noChangeAspect="1"/>
-          </p:cNvPicPr>
-          <p:nvPr/>
-        </p:nvPicPr>
-        <p:blipFill>
-          <a:blip r:embed="rId15">
-            <a:extLst>
-              <a:ext uri="{96DAC541-7B7A-43D3-8B79-37D633B846F1}">
-                <asvg:svgBlip xmlns:asvg="http://schemas.microsoft.com/office/drawing/2016/SVG/main" r:embed="rId16"/>
-              </a:ext>
-            </a:extLst>
-          </a:blip>
-          <a:stretch>
-            <a:fillRect/>
-          </a:stretch>
-        </p:blipFill>
-        <p:spPr>
-          <a:xfrm>
-            <a:off x="6535674" y="4489704"/>
-            <a:ext cx="438912" cy="438912"/>
-          </a:xfrm>
-          <a:prstGeom prst="rect">
-            <a:avLst/>
-          </a:prstGeom>
-        </p:spPr>
-      </p:pic>
-      <p:sp>
-        <p:nvSpPr>
-          <p:cNvPr id="31" name="mdpr:1-2-e3669a:item-4:block-15-chunk-1"/>
-          <p:cNvSpPr txBox="1"/>
-          <p:nvPr/>
-        </p:nvSpPr>
-        <p:spPr>
-          <a:xfrm>
-            <a:off x="7175754" y="3913632"/>
-            <a:ext cx="3961638" cy="1591056"/>
-          </a:xfrm>
-          <a:prstGeom prst="rect">
-            <a:avLst/>
-          </a:prstGeom>
-          <a:noFill/>
-          <a:ln/>
-        </p:spPr>
-        <p:txBody>
-          <a:bodyPr wrap="square" lIns="0" tIns="25400" rIns="25400" bIns="0" rtlCol="0" anchor="ctr"/>
-          <a:lstStyle/>
           <a:p>
             <a:pPr algn="l" indent="0" marL="0">
               <a:lnSpc>
@@ -6847,7 +6404,7 @@
               <a:buNone/>
             </a:pPr>
             <a:r>
-              <a:rPr lang="en-US" sz="2200" b="1" dirty="0">
+              <a:rPr lang="en-US" sz="1800" b="1" dirty="0">
                 <a:solidFill>
                   <a:srgbClr val="111111"/>
                 </a:solidFill>
@@ -6855,8 +6412,11 @@
                 <a:ea typeface="Pretendard" pitchFamily="34" charset="-122"/>
                 <a:cs typeface="Pretendard" pitchFamily="34" charset="-120"/>
               </a:rPr>
-              <a:t>Connectors</a:t>
+              <a:t>- Connectors</a:t>
             </a:r>
+            <a:endParaRPr lang="en-US" sz="1800" dirty="0"/>
+          </a:p>
+          <a:p>
             <a:pPr algn="l" indent="0" marL="0">
               <a:lnSpc>
                 <a:spcPct val="120000"/>
@@ -6864,7 +6424,7 @@
               <a:buNone/>
             </a:pPr>
             <a:r>
-              <a:rPr lang="en-US" sz="2200" dirty="0">
+              <a:rPr lang="en-US" sz="1800" dirty="0">
                 <a:solidFill>
                   <a:srgbClr val="111111"/>
                 </a:solidFill>
@@ -6874,7 +6434,7 @@
               </a:rPr>
               <a:t>  straight-arrow, elbow-arrow, boundary-attach, overlap-joint, parallel-flow, contrast-flow.</a:t>
             </a:r>
-            <a:endParaRPr lang="en-US" sz="2200" dirty="0"/>
+            <a:endParaRPr lang="en-US" sz="1800" dirty="0"/>
           </a:p>
         </p:txBody>
       </p:sp>
@@ -12960,71 +12520,14 @@
       </p:sp>
       <p:sp>
         <p:nvSpPr>
-          <p:cNvPr id="19" name="Shape 14"/>
-          <p:cNvSpPr/>
-          <p:nvPr/>
-        </p:nvSpPr>
-        <p:spPr>
-          <a:xfrm>
-            <a:off x="1097280" y="2140428"/>
-            <a:ext cx="474025" cy="474025"/>
-          </a:xfrm>
-          <a:prstGeom prst="roundRect">
-            <a:avLst>
-              <a:gd name="adj" fmla="val 7716"/>
-            </a:avLst>
-          </a:prstGeom>
-          <a:solidFill>
-            <a:srgbClr val="FFF200"/>
-          </a:solidFill>
-          <a:ln w="12700">
-            <a:solidFill>
-              <a:srgbClr val="111111"/>
-            </a:solidFill>
-            <a:prstDash val="solid"/>
-          </a:ln>
-        </p:spPr>
-      </p:sp>
-      <p:pic>
-        <p:nvPicPr>
-          <p:cNvPr id="20" name="Image 3" descr="article icon from tabler-icons (MIT)">    </p:cNvPr>
-          <p:cNvPicPr>
-            <a:picLocks noChangeAspect="1"/>
-          </p:cNvPicPr>
-          <p:nvPr/>
-        </p:nvPicPr>
-        <p:blipFill>
-          <a:blip r:embed="rId7">
-            <a:extLst>
-              <a:ext uri="{96DAC541-7B7A-43D3-8B79-37D633B846F1}">
-                <asvg:svgBlip xmlns:asvg="http://schemas.microsoft.com/office/drawing/2016/SVG/main" r:embed="rId8"/>
-              </a:ext>
-            </a:extLst>
-          </a:blip>
-          <a:stretch>
-            <a:fillRect/>
-          </a:stretch>
-        </p:blipFill>
-        <p:spPr>
-          <a:xfrm>
-            <a:off x="1170432" y="2213580"/>
-            <a:ext cx="327721" cy="327721"/>
-          </a:xfrm>
-          <a:prstGeom prst="rect">
-            <a:avLst/>
-          </a:prstGeom>
-        </p:spPr>
-      </p:pic>
-      <p:sp>
-        <p:nvSpPr>
-          <p:cNvPr id="21" name="mdpr:1-2-ea42c8:item-1:block-27-chunk-1"/>
+          <p:cNvPr id="19" name="mdpr:1-2-ea42c8:item-1:block-27-chunk-1"/>
           <p:cNvSpPr txBox="1"/>
           <p:nvPr/>
         </p:nvSpPr>
         <p:spPr>
           <a:xfrm>
-            <a:off x="1699321" y="1987296"/>
-            <a:ext cx="9255191" cy="780288"/>
+            <a:off x="1133856" y="1957548"/>
+            <a:ext cx="9820656" cy="839785"/>
           </a:xfrm>
           <a:prstGeom prst="rect">
             <a:avLst/>
@@ -13076,71 +12579,14 @@
       </p:sp>
       <p:sp>
         <p:nvSpPr>
-          <p:cNvPr id="22" name="Shape 16"/>
-          <p:cNvSpPr/>
-          <p:nvPr/>
-        </p:nvSpPr>
-        <p:spPr>
-          <a:xfrm>
-            <a:off x="1097280" y="3466308"/>
-            <a:ext cx="474025" cy="474025"/>
-          </a:xfrm>
-          <a:prstGeom prst="roundRect">
-            <a:avLst>
-              <a:gd name="adj" fmla="val 7716"/>
-            </a:avLst>
-          </a:prstGeom>
-          <a:solidFill>
-            <a:srgbClr val="FFF200"/>
-          </a:solidFill>
-          <a:ln w="12700">
-            <a:solidFill>
-              <a:srgbClr val="111111"/>
-            </a:solidFill>
-            <a:prstDash val="solid"/>
-          </a:ln>
-        </p:spPr>
-      </p:sp>
-      <p:pic>
-        <p:nvPicPr>
-          <p:cNvPr id="23" name="Image 4" descr="article icon from tabler-icons (MIT)">    </p:cNvPr>
-          <p:cNvPicPr>
-            <a:picLocks noChangeAspect="1"/>
-          </p:cNvPicPr>
-          <p:nvPr/>
-        </p:nvPicPr>
-        <p:blipFill>
-          <a:blip r:embed="rId9">
-            <a:extLst>
-              <a:ext uri="{96DAC541-7B7A-43D3-8B79-37D633B846F1}">
-                <asvg:svgBlip xmlns:asvg="http://schemas.microsoft.com/office/drawing/2016/SVG/main" r:embed="rId10"/>
-              </a:ext>
-            </a:extLst>
-          </a:blip>
-          <a:stretch>
-            <a:fillRect/>
-          </a:stretch>
-        </p:blipFill>
-        <p:spPr>
-          <a:xfrm>
-            <a:off x="1170432" y="3539460"/>
-            <a:ext cx="327721" cy="327721"/>
-          </a:xfrm>
-          <a:prstGeom prst="rect">
-            <a:avLst/>
-          </a:prstGeom>
-        </p:spPr>
-      </p:pic>
-      <p:sp>
-        <p:nvSpPr>
-          <p:cNvPr id="24" name="mdpr:1-2-ea42c8:item-2:block-27-chunk-1"/>
+          <p:cNvPr id="20" name="mdpr:1-2-ea42c8:item-2:block-27-chunk-1"/>
           <p:cNvSpPr txBox="1"/>
           <p:nvPr/>
         </p:nvSpPr>
         <p:spPr>
           <a:xfrm>
-            <a:off x="1699321" y="3313176"/>
-            <a:ext cx="9255191" cy="780288"/>
+            <a:off x="1133856" y="3283428"/>
+            <a:ext cx="9820656" cy="839785"/>
           </a:xfrm>
           <a:prstGeom prst="rect">
             <a:avLst/>
@@ -13192,71 +12638,14 @@
       </p:sp>
       <p:sp>
         <p:nvSpPr>
-          <p:cNvPr id="25" name="Shape 18"/>
-          <p:cNvSpPr/>
-          <p:nvPr/>
-        </p:nvSpPr>
-        <p:spPr>
-          <a:xfrm>
-            <a:off x="1097280" y="4783044"/>
-            <a:ext cx="474025" cy="474025"/>
-          </a:xfrm>
-          <a:prstGeom prst="roundRect">
-            <a:avLst>
-              <a:gd name="adj" fmla="val 7716"/>
-            </a:avLst>
-          </a:prstGeom>
-          <a:solidFill>
-            <a:srgbClr val="FFF200"/>
-          </a:solidFill>
-          <a:ln w="12700">
-            <a:solidFill>
-              <a:srgbClr val="111111"/>
-            </a:solidFill>
-            <a:prstDash val="solid"/>
-          </a:ln>
-        </p:spPr>
-      </p:sp>
-      <p:pic>
-        <p:nvPicPr>
-          <p:cNvPr id="26" name="Image 5" descr="article icon from tabler-icons (MIT)">    </p:cNvPr>
-          <p:cNvPicPr>
-            <a:picLocks noChangeAspect="1"/>
-          </p:cNvPicPr>
-          <p:nvPr/>
-        </p:nvPicPr>
-        <p:blipFill>
-          <a:blip r:embed="rId11">
-            <a:extLst>
-              <a:ext uri="{96DAC541-7B7A-43D3-8B79-37D633B846F1}">
-                <asvg:svgBlip xmlns:asvg="http://schemas.microsoft.com/office/drawing/2016/SVG/main" r:embed="rId12"/>
-              </a:ext>
-            </a:extLst>
-          </a:blip>
-          <a:stretch>
-            <a:fillRect/>
-          </a:stretch>
-        </p:blipFill>
-        <p:spPr>
-          <a:xfrm>
-            <a:off x="1170432" y="4856196"/>
-            <a:ext cx="327721" cy="327721"/>
-          </a:xfrm>
-          <a:prstGeom prst="rect">
-            <a:avLst/>
-          </a:prstGeom>
-        </p:spPr>
-      </p:pic>
-      <p:sp>
-        <p:nvSpPr>
-          <p:cNvPr id="27" name="mdpr:1-2-ea42c8:item-3:block-27-chunk-1"/>
+          <p:cNvPr id="21" name="mdpr:1-2-ea42c8:item-3:block-27-chunk-1"/>
           <p:cNvSpPr txBox="1"/>
           <p:nvPr/>
         </p:nvSpPr>
         <p:spPr>
           <a:xfrm>
-            <a:off x="1699321" y="4629912"/>
-            <a:ext cx="9255191" cy="780288"/>
+            <a:off x="1133856" y="4600164"/>
+            <a:ext cx="9820656" cy="839785"/>
           </a:xfrm>
           <a:prstGeom prst="rect">
             <a:avLst/>
@@ -15672,71 +15061,14 @@
       </p:sp>
       <p:sp>
         <p:nvSpPr>
-          <p:cNvPr id="20" name="Shape 14"/>
-          <p:cNvSpPr/>
-          <p:nvPr/>
-        </p:nvSpPr>
-        <p:spPr>
-          <a:xfrm>
-            <a:off x="976122" y="2130552"/>
-            <a:ext cx="585216" cy="585216"/>
-          </a:xfrm>
-          <a:prstGeom prst="roundRect">
-            <a:avLst>
-              <a:gd name="adj" fmla="val 6250"/>
-            </a:avLst>
-          </a:prstGeom>
-          <a:solidFill>
-            <a:srgbClr val="FFF200"/>
-          </a:solidFill>
-          <a:ln w="12700">
-            <a:solidFill>
-              <a:srgbClr val="111111"/>
-            </a:solidFill>
-            <a:prstDash val="solid"/>
-          </a:ln>
-        </p:spPr>
-      </p:sp>
-      <p:pic>
-        <p:nvPicPr>
-          <p:cNvPr id="21" name="Image 4" descr="article icon from tabler-icons (MIT)">    </p:cNvPr>
-          <p:cNvPicPr>
-            <a:picLocks noChangeAspect="1"/>
-          </p:cNvPicPr>
-          <p:nvPr/>
-        </p:nvPicPr>
-        <p:blipFill>
-          <a:blip r:embed="rId9">
-            <a:extLst>
-              <a:ext uri="{96DAC541-7B7A-43D3-8B79-37D633B846F1}">
-                <asvg:svgBlip xmlns:asvg="http://schemas.microsoft.com/office/drawing/2016/SVG/main" r:embed="rId10"/>
-              </a:ext>
-            </a:extLst>
-          </a:blip>
-          <a:stretch>
-            <a:fillRect/>
-          </a:stretch>
-        </p:blipFill>
-        <p:spPr>
-          <a:xfrm>
-            <a:off x="1049274" y="2203704"/>
-            <a:ext cx="438912" cy="438912"/>
-          </a:xfrm>
-          <a:prstGeom prst="rect">
-            <a:avLst/>
-          </a:prstGeom>
-        </p:spPr>
-      </p:pic>
-      <p:sp>
-        <p:nvSpPr>
-          <p:cNvPr id="22" name="mdpr:icon-and-text-aside-8429fc:item-1:block-29"/>
+          <p:cNvPr id="20" name="mdpr:icon-and-text-aside-8429fc:item-1:block-29"/>
           <p:cNvSpPr txBox="1"/>
           <p:nvPr/>
         </p:nvSpPr>
         <p:spPr>
           <a:xfrm>
-            <a:off x="1689354" y="2033016"/>
-            <a:ext cx="3961638" cy="780288"/>
+            <a:off x="1042416" y="1627632"/>
+            <a:ext cx="4608576" cy="1591056"/>
           </a:xfrm>
           <a:prstGeom prst="rect">
             <a:avLst/>
@@ -15788,71 +15120,14 @@
       </p:sp>
       <p:sp>
         <p:nvSpPr>
-          <p:cNvPr id="23" name="Shape 16"/>
-          <p:cNvSpPr/>
-          <p:nvPr/>
-        </p:nvSpPr>
-        <p:spPr>
-          <a:xfrm>
-            <a:off x="6462522" y="2130552"/>
-            <a:ext cx="585216" cy="585216"/>
-          </a:xfrm>
-          <a:prstGeom prst="roundRect">
-            <a:avLst>
-              <a:gd name="adj" fmla="val 6250"/>
-            </a:avLst>
-          </a:prstGeom>
-          <a:solidFill>
-            <a:srgbClr val="FFF200"/>
-          </a:solidFill>
-          <a:ln w="12700">
-            <a:solidFill>
-              <a:srgbClr val="111111"/>
-            </a:solidFill>
-            <a:prstDash val="solid"/>
-          </a:ln>
-        </p:spPr>
-      </p:sp>
-      <p:pic>
-        <p:nvPicPr>
-          <p:cNvPr id="24" name="Image 5" descr="article icon from tabler-icons (MIT)">    </p:cNvPr>
-          <p:cNvPicPr>
-            <a:picLocks noChangeAspect="1"/>
-          </p:cNvPicPr>
-          <p:nvPr/>
-        </p:nvPicPr>
-        <p:blipFill>
-          <a:blip r:embed="rId11">
-            <a:extLst>
-              <a:ext uri="{96DAC541-7B7A-43D3-8B79-37D633B846F1}">
-                <asvg:svgBlip xmlns:asvg="http://schemas.microsoft.com/office/drawing/2016/SVG/main" r:embed="rId12"/>
-              </a:ext>
-            </a:extLst>
-          </a:blip>
-          <a:stretch>
-            <a:fillRect/>
-          </a:stretch>
-        </p:blipFill>
-        <p:spPr>
-          <a:xfrm>
-            <a:off x="6535674" y="2203704"/>
-            <a:ext cx="438912" cy="438912"/>
-          </a:xfrm>
-          <a:prstGeom prst="rect">
-            <a:avLst/>
-          </a:prstGeom>
-        </p:spPr>
-      </p:pic>
-      <p:sp>
-        <p:nvSpPr>
-          <p:cNvPr id="25" name="mdpr:icon-and-text-aside-8429fc:item-2:block-29"/>
+          <p:cNvPr id="21" name="mdpr:icon-and-text-aside-8429fc:item-2:block-29"/>
           <p:cNvSpPr txBox="1"/>
           <p:nvPr/>
         </p:nvSpPr>
         <p:spPr>
           <a:xfrm>
-            <a:off x="7175754" y="1865376"/>
-            <a:ext cx="3961638" cy="1115568"/>
+            <a:off x="6528816" y="1627632"/>
+            <a:ext cx="4608576" cy="1591056"/>
           </a:xfrm>
           <a:prstGeom prst="rect">
             <a:avLst/>
@@ -15904,71 +15179,14 @@
       </p:sp>
       <p:sp>
         <p:nvSpPr>
-          <p:cNvPr id="26" name="Shape 18"/>
-          <p:cNvSpPr/>
-          <p:nvPr/>
-        </p:nvSpPr>
-        <p:spPr>
-          <a:xfrm>
-            <a:off x="976122" y="4416552"/>
-            <a:ext cx="585216" cy="585216"/>
-          </a:xfrm>
-          <a:prstGeom prst="roundRect">
-            <a:avLst>
-              <a:gd name="adj" fmla="val 6250"/>
-            </a:avLst>
-          </a:prstGeom>
-          <a:solidFill>
-            <a:srgbClr val="FFF200"/>
-          </a:solidFill>
-          <a:ln w="12700">
-            <a:solidFill>
-              <a:srgbClr val="111111"/>
-            </a:solidFill>
-            <a:prstDash val="solid"/>
-          </a:ln>
-        </p:spPr>
-      </p:sp>
-      <p:pic>
-        <p:nvPicPr>
-          <p:cNvPr id="27" name="Image 6" descr="article icon from tabler-icons (MIT)">    </p:cNvPr>
-          <p:cNvPicPr>
-            <a:picLocks noChangeAspect="1"/>
-          </p:cNvPicPr>
-          <p:nvPr/>
-        </p:nvPicPr>
-        <p:blipFill>
-          <a:blip r:embed="rId13">
-            <a:extLst>
-              <a:ext uri="{96DAC541-7B7A-43D3-8B79-37D633B846F1}">
-                <asvg:svgBlip xmlns:asvg="http://schemas.microsoft.com/office/drawing/2016/SVG/main" r:embed="rId14"/>
-              </a:ext>
-            </a:extLst>
-          </a:blip>
-          <a:stretch>
-            <a:fillRect/>
-          </a:stretch>
-        </p:blipFill>
-        <p:spPr>
-          <a:xfrm>
-            <a:off x="1049274" y="4489704"/>
-            <a:ext cx="438912" cy="438912"/>
-          </a:xfrm>
-          <a:prstGeom prst="rect">
-            <a:avLst/>
-          </a:prstGeom>
-        </p:spPr>
-      </p:pic>
-      <p:sp>
-        <p:nvSpPr>
-          <p:cNvPr id="28" name="mdpr:icon-and-text-aside-8429fc:item-3:block-29"/>
+          <p:cNvPr id="22" name="mdpr:icon-and-text-aside-8429fc:item-3:block-29"/>
           <p:cNvSpPr txBox="1"/>
           <p:nvPr/>
         </p:nvSpPr>
         <p:spPr>
           <a:xfrm>
-            <a:off x="1689354" y="4151376"/>
-            <a:ext cx="3961638" cy="1115568"/>
+            <a:off x="1042416" y="3913632"/>
+            <a:ext cx="4608576" cy="1591056"/>
           </a:xfrm>
           <a:prstGeom prst="rect">
             <a:avLst/>
@@ -16020,71 +15238,14 @@
       </p:sp>
       <p:sp>
         <p:nvSpPr>
-          <p:cNvPr id="29" name="Shape 20"/>
-          <p:cNvSpPr/>
-          <p:nvPr/>
-        </p:nvSpPr>
-        <p:spPr>
-          <a:xfrm>
-            <a:off x="6462522" y="4416552"/>
-            <a:ext cx="585216" cy="585216"/>
-          </a:xfrm>
-          <a:prstGeom prst="roundRect">
-            <a:avLst>
-              <a:gd name="adj" fmla="val 6250"/>
-            </a:avLst>
-          </a:prstGeom>
-          <a:solidFill>
-            <a:srgbClr val="FFF200"/>
-          </a:solidFill>
-          <a:ln w="12700">
-            <a:solidFill>
-              <a:srgbClr val="111111"/>
-            </a:solidFill>
-            <a:prstDash val="solid"/>
-          </a:ln>
-        </p:spPr>
-      </p:sp>
-      <p:pic>
-        <p:nvPicPr>
-          <p:cNvPr id="30" name="Image 7" descr="table icon from tabler-icons (MIT)">    </p:cNvPr>
-          <p:cNvPicPr>
-            <a:picLocks noChangeAspect="1"/>
-          </p:cNvPicPr>
-          <p:nvPr/>
-        </p:nvPicPr>
-        <p:blipFill>
-          <a:blip r:embed="rId15">
-            <a:extLst>
-              <a:ext uri="{96DAC541-7B7A-43D3-8B79-37D633B846F1}">
-                <asvg:svgBlip xmlns:asvg="http://schemas.microsoft.com/office/drawing/2016/SVG/main" r:embed="rId16"/>
-              </a:ext>
-            </a:extLst>
-          </a:blip>
-          <a:stretch>
-            <a:fillRect/>
-          </a:stretch>
-        </p:blipFill>
-        <p:spPr>
-          <a:xfrm>
-            <a:off x="6535674" y="4489704"/>
-            <a:ext cx="438912" cy="438912"/>
-          </a:xfrm>
-          <a:prstGeom prst="rect">
-            <a:avLst/>
-          </a:prstGeom>
-        </p:spPr>
-      </p:pic>
-      <p:sp>
-        <p:nvSpPr>
-          <p:cNvPr id="31" name="mdpr:icon-and-text-aside-8429fc:item-4:block-29"/>
+          <p:cNvPr id="23" name="mdpr:icon-and-text-aside-8429fc:item-4:block-29"/>
           <p:cNvSpPr txBox="1"/>
           <p:nvPr/>
         </p:nvSpPr>
         <p:spPr>
           <a:xfrm>
-            <a:off x="7175754" y="4151376"/>
-            <a:ext cx="3961638" cy="1115568"/>
+            <a:off x="6528816" y="3913632"/>
+            <a:ext cx="4608576" cy="1591056"/>
           </a:xfrm>
           <a:prstGeom prst="rect">
             <a:avLst/>
@@ -16669,71 +15830,14 @@
       </p:sp>
       <p:sp>
         <p:nvSpPr>
-          <p:cNvPr id="20" name="Shape 14"/>
-          <p:cNvSpPr/>
-          <p:nvPr/>
-        </p:nvSpPr>
-        <p:spPr>
-          <a:xfrm>
-            <a:off x="976122" y="2130552"/>
-            <a:ext cx="585216" cy="585216"/>
-          </a:xfrm>
-          <a:prstGeom prst="roundRect">
-            <a:avLst>
-              <a:gd name="adj" fmla="val 6250"/>
-            </a:avLst>
-          </a:prstGeom>
-          <a:solidFill>
-            <a:srgbClr val="FFF200"/>
-          </a:solidFill>
-          <a:ln w="12700">
-            <a:solidFill>
-              <a:srgbClr val="111111"/>
-            </a:solidFill>
-            <a:prstDash val="solid"/>
-          </a:ln>
-        </p:spPr>
-      </p:sp>
-      <p:pic>
-        <p:nvPicPr>
-          <p:cNvPr id="21" name="Image 4" descr="verified icon from tabler-icons (MIT)">    </p:cNvPr>
-          <p:cNvPicPr>
-            <a:picLocks noChangeAspect="1"/>
-          </p:cNvPicPr>
-          <p:nvPr/>
-        </p:nvPicPr>
-        <p:blipFill>
-          <a:blip r:embed="rId9">
-            <a:extLst>
-              <a:ext uri="{96DAC541-7B7A-43D3-8B79-37D633B846F1}">
-                <asvg:svgBlip xmlns:asvg="http://schemas.microsoft.com/office/drawing/2016/SVG/main" r:embed="rId10"/>
-              </a:ext>
-            </a:extLst>
-          </a:blip>
-          <a:stretch>
-            <a:fillRect/>
-          </a:stretch>
-        </p:blipFill>
-        <p:spPr>
-          <a:xfrm>
-            <a:off x="1049274" y="2203704"/>
-            <a:ext cx="438912" cy="438912"/>
-          </a:xfrm>
-          <a:prstGeom prst="rect">
-            <a:avLst/>
-          </a:prstGeom>
-        </p:spPr>
-      </p:pic>
-      <p:sp>
-        <p:nvSpPr>
-          <p:cNvPr id="22" name="mdpr:overflow-guard-f8d03e:item-1:block-31"/>
+          <p:cNvPr id="20" name="mdpr:overflow-guard-f8d03e:item-1:block-31"/>
           <p:cNvSpPr txBox="1"/>
           <p:nvPr/>
         </p:nvSpPr>
         <p:spPr>
           <a:xfrm>
-            <a:off x="1689354" y="1865376"/>
-            <a:ext cx="3961638" cy="1115568"/>
+            <a:off x="1042416" y="1627632"/>
+            <a:ext cx="4608576" cy="1591056"/>
           </a:xfrm>
           <a:prstGeom prst="rect">
             <a:avLst/>
@@ -16785,71 +15889,14 @@
       </p:sp>
       <p:sp>
         <p:nvSpPr>
-          <p:cNvPr id="23" name="Shape 16"/>
-          <p:cNvSpPr/>
-          <p:nvPr/>
-        </p:nvSpPr>
-        <p:spPr>
-          <a:xfrm>
-            <a:off x="6462522" y="2130552"/>
-            <a:ext cx="585216" cy="585216"/>
-          </a:xfrm>
-          <a:prstGeom prst="roundRect">
-            <a:avLst>
-              <a:gd name="adj" fmla="val 6250"/>
-            </a:avLst>
-          </a:prstGeom>
-          <a:solidFill>
-            <a:srgbClr val="FFF200"/>
-          </a:solidFill>
-          <a:ln w="12700">
-            <a:solidFill>
-              <a:srgbClr val="111111"/>
-            </a:solidFill>
-            <a:prstDash val="solid"/>
-          </a:ln>
-        </p:spPr>
-      </p:sp>
-      <p:pic>
-        <p:nvPicPr>
-          <p:cNvPr id="24" name="Image 5" descr="table icon from tabler-icons (MIT)">    </p:cNvPr>
-          <p:cNvPicPr>
-            <a:picLocks noChangeAspect="1"/>
-          </p:cNvPicPr>
-          <p:nvPr/>
-        </p:nvPicPr>
-        <p:blipFill>
-          <a:blip r:embed="rId11">
-            <a:extLst>
-              <a:ext uri="{96DAC541-7B7A-43D3-8B79-37D633B846F1}">
-                <asvg:svgBlip xmlns:asvg="http://schemas.microsoft.com/office/drawing/2016/SVG/main" r:embed="rId12"/>
-              </a:ext>
-            </a:extLst>
-          </a:blip>
-          <a:stretch>
-            <a:fillRect/>
-          </a:stretch>
-        </p:blipFill>
-        <p:spPr>
-          <a:xfrm>
-            <a:off x="6535674" y="2203704"/>
-            <a:ext cx="438912" cy="438912"/>
-          </a:xfrm>
-          <a:prstGeom prst="rect">
-            <a:avLst/>
-          </a:prstGeom>
-        </p:spPr>
-      </p:pic>
-      <p:sp>
-        <p:nvSpPr>
-          <p:cNvPr id="25" name="mdpr:overflow-guard-f8d03e:item-2:block-31"/>
+          <p:cNvPr id="21" name="mdpr:overflow-guard-f8d03e:item-2:block-31"/>
           <p:cNvSpPr txBox="1"/>
           <p:nvPr/>
         </p:nvSpPr>
         <p:spPr>
           <a:xfrm>
-            <a:off x="7175754" y="1697736"/>
-            <a:ext cx="3961638" cy="1450848"/>
+            <a:off x="6528816" y="1627632"/>
+            <a:ext cx="4608576" cy="1591056"/>
           </a:xfrm>
           <a:prstGeom prst="rect">
             <a:avLst/>
@@ -16901,71 +15948,14 @@
       </p:sp>
       <p:sp>
         <p:nvSpPr>
-          <p:cNvPr id="26" name="Shape 18"/>
-          <p:cNvSpPr/>
-          <p:nvPr/>
-        </p:nvSpPr>
-        <p:spPr>
-          <a:xfrm>
-            <a:off x="976122" y="4416552"/>
-            <a:ext cx="585216" cy="585216"/>
-          </a:xfrm>
-          <a:prstGeom prst="roundRect">
-            <a:avLst>
-              <a:gd name="adj" fmla="val 6250"/>
-            </a:avLst>
-          </a:prstGeom>
-          <a:solidFill>
-            <a:srgbClr val="FFF200"/>
-          </a:solidFill>
-          <a:ln w="12700">
-            <a:solidFill>
-              <a:srgbClr val="111111"/>
-            </a:solidFill>
-            <a:prstDash val="solid"/>
-          </a:ln>
-        </p:spPr>
-      </p:sp>
-      <p:pic>
-        <p:nvPicPr>
-          <p:cNvPr id="27" name="Image 6" descr="article icon from tabler-icons (MIT)">    </p:cNvPr>
-          <p:cNvPicPr>
-            <a:picLocks noChangeAspect="1"/>
-          </p:cNvPicPr>
-          <p:nvPr/>
-        </p:nvPicPr>
-        <p:blipFill>
-          <a:blip r:embed="rId13">
-            <a:extLst>
-              <a:ext uri="{96DAC541-7B7A-43D3-8B79-37D633B846F1}">
-                <asvg:svgBlip xmlns:asvg="http://schemas.microsoft.com/office/drawing/2016/SVG/main" r:embed="rId14"/>
-              </a:ext>
-            </a:extLst>
-          </a:blip>
-          <a:stretch>
-            <a:fillRect/>
-          </a:stretch>
-        </p:blipFill>
-        <p:spPr>
-          <a:xfrm>
-            <a:off x="1049274" y="4489704"/>
-            <a:ext cx="438912" cy="438912"/>
-          </a:xfrm>
-          <a:prstGeom prst="rect">
-            <a:avLst/>
-          </a:prstGeom>
-        </p:spPr>
-      </p:pic>
-      <p:sp>
-        <p:nvSpPr>
-          <p:cNvPr id="28" name="mdpr:overflow-guard-f8d03e:item-3:block-31"/>
+          <p:cNvPr id="22" name="mdpr:overflow-guard-f8d03e:item-3:block-31"/>
           <p:cNvSpPr txBox="1"/>
           <p:nvPr/>
         </p:nvSpPr>
         <p:spPr>
           <a:xfrm>
-            <a:off x="1689354" y="4151376"/>
-            <a:ext cx="3961638" cy="1115568"/>
+            <a:off x="1042416" y="3913632"/>
+            <a:ext cx="4608576" cy="1591056"/>
           </a:xfrm>
           <a:prstGeom prst="rect">
             <a:avLst/>
@@ -17017,71 +16007,14 @@
       </p:sp>
       <p:sp>
         <p:nvSpPr>
-          <p:cNvPr id="29" name="Shape 20"/>
-          <p:cNvSpPr/>
-          <p:nvPr/>
-        </p:nvSpPr>
-        <p:spPr>
-          <a:xfrm>
-            <a:off x="6462522" y="4416552"/>
-            <a:ext cx="585216" cy="585216"/>
-          </a:xfrm>
-          <a:prstGeom prst="roundRect">
-            <a:avLst>
-              <a:gd name="adj" fmla="val 6250"/>
-            </a:avLst>
-          </a:prstGeom>
-          <a:solidFill>
-            <a:srgbClr val="FFF200"/>
-          </a:solidFill>
-          <a:ln w="12700">
-            <a:solidFill>
-              <a:srgbClr val="111111"/>
-            </a:solidFill>
-            <a:prstDash val="solid"/>
-          </a:ln>
-        </p:spPr>
-      </p:sp>
-      <p:pic>
-        <p:nvPicPr>
-          <p:cNvPr id="30" name="Image 7" descr="article icon from tabler-icons (MIT)">    </p:cNvPr>
-          <p:cNvPicPr>
-            <a:picLocks noChangeAspect="1"/>
-          </p:cNvPicPr>
-          <p:nvPr/>
-        </p:nvPicPr>
-        <p:blipFill>
-          <a:blip r:embed="rId15">
-            <a:extLst>
-              <a:ext uri="{96DAC541-7B7A-43D3-8B79-37D633B846F1}">
-                <asvg:svgBlip xmlns:asvg="http://schemas.microsoft.com/office/drawing/2016/SVG/main" r:embed="rId16"/>
-              </a:ext>
-            </a:extLst>
-          </a:blip>
-          <a:stretch>
-            <a:fillRect/>
-          </a:stretch>
-        </p:blipFill>
-        <p:spPr>
-          <a:xfrm>
-            <a:off x="6535674" y="4489704"/>
-            <a:ext cx="438912" cy="438912"/>
-          </a:xfrm>
-          <a:prstGeom prst="rect">
-            <a:avLst/>
-          </a:prstGeom>
-        </p:spPr>
-      </p:pic>
-      <p:sp>
-        <p:nvSpPr>
-          <p:cNvPr id="31" name="mdpr:overflow-guard-f8d03e:item-4:block-31"/>
+          <p:cNvPr id="23" name="mdpr:overflow-guard-f8d03e:item-4:block-31"/>
           <p:cNvSpPr txBox="1"/>
           <p:nvPr/>
         </p:nvSpPr>
         <p:spPr>
           <a:xfrm>
-            <a:off x="7175754" y="4151376"/>
-            <a:ext cx="3961638" cy="1115568"/>
+            <a:off x="6528816" y="3913632"/>
+            <a:ext cx="4608576" cy="1591056"/>
           </a:xfrm>
           <a:prstGeom prst="rect">
             <a:avLst/>
@@ -19178,71 +18111,14 @@
       </p:sp>
       <p:sp>
         <p:nvSpPr>
-          <p:cNvPr id="19" name="Shape 14"/>
-          <p:cNvSpPr/>
-          <p:nvPr/>
-        </p:nvSpPr>
-        <p:spPr>
-          <a:xfrm>
-            <a:off x="1097280" y="2140428"/>
-            <a:ext cx="474025" cy="474025"/>
-          </a:xfrm>
-          <a:prstGeom prst="roundRect">
-            <a:avLst>
-              <a:gd name="adj" fmla="val 7716"/>
-            </a:avLst>
-          </a:prstGeom>
-          <a:solidFill>
-            <a:srgbClr val="FFF200"/>
-          </a:solidFill>
-          <a:ln w="12700">
-            <a:solidFill>
-              <a:srgbClr val="111111"/>
-            </a:solidFill>
-            <a:prstDash val="solid"/>
-          </a:ln>
-        </p:spPr>
-      </p:sp>
-      <p:pic>
-        <p:nvPicPr>
-          <p:cNvPr id="20" name="Image 3" descr="flow icon from tabler-icons (MIT)">    </p:cNvPr>
-          <p:cNvPicPr>
-            <a:picLocks noChangeAspect="1"/>
-          </p:cNvPicPr>
-          <p:nvPr/>
-        </p:nvPicPr>
-        <p:blipFill>
-          <a:blip r:embed="rId7">
-            <a:extLst>
-              <a:ext uri="{96DAC541-7B7A-43D3-8B79-37D633B846F1}">
-                <asvg:svgBlip xmlns:asvg="http://schemas.microsoft.com/office/drawing/2016/SVG/main" r:embed="rId8"/>
-              </a:ext>
-            </a:extLst>
-          </a:blip>
-          <a:stretch>
-            <a:fillRect/>
-          </a:stretch>
-        </p:blipFill>
-        <p:spPr>
-          <a:xfrm>
-            <a:off x="1170432" y="2213580"/>
-            <a:ext cx="327721" cy="327721"/>
-          </a:xfrm>
-          <a:prstGeom prst="rect">
-            <a:avLst/>
-          </a:prstGeom>
-        </p:spPr>
-      </p:pic>
-      <p:sp>
-        <p:nvSpPr>
-          <p:cNvPr id="21" name="mdpr:actions-output-review-326e07:item-1:block-41"/>
+          <p:cNvPr id="19" name="mdpr:actions-output-review-326e07:item-1:block-41"/>
           <p:cNvSpPr txBox="1"/>
           <p:nvPr/>
         </p:nvSpPr>
         <p:spPr>
           <a:xfrm>
-            <a:off x="1699321" y="1987296"/>
-            <a:ext cx="9255191" cy="780288"/>
+            <a:off x="1133856" y="1957548"/>
+            <a:ext cx="9820656" cy="839785"/>
           </a:xfrm>
           <a:prstGeom prst="rect">
             <a:avLst/>
@@ -19294,71 +18170,14 @@
       </p:sp>
       <p:sp>
         <p:nvSpPr>
-          <p:cNvPr id="22" name="Shape 16"/>
-          <p:cNvSpPr/>
-          <p:nvPr/>
-        </p:nvSpPr>
-        <p:spPr>
-          <a:xfrm>
-            <a:off x="1097280" y="3466308"/>
-            <a:ext cx="474025" cy="474025"/>
-          </a:xfrm>
-          <a:prstGeom prst="roundRect">
-            <a:avLst>
-              <a:gd name="adj" fmla="val 7716"/>
-            </a:avLst>
-          </a:prstGeom>
-          <a:solidFill>
-            <a:srgbClr val="FFF200"/>
-          </a:solidFill>
-          <a:ln w="12700">
-            <a:solidFill>
-              <a:srgbClr val="111111"/>
-            </a:solidFill>
-            <a:prstDash val="solid"/>
-          </a:ln>
-        </p:spPr>
-      </p:sp>
-      <p:pic>
-        <p:nvPicPr>
-          <p:cNvPr id="23" name="Image 4" descr="verified icon from tabler-icons (MIT)">    </p:cNvPr>
-          <p:cNvPicPr>
-            <a:picLocks noChangeAspect="1"/>
-          </p:cNvPicPr>
-          <p:nvPr/>
-        </p:nvPicPr>
-        <p:blipFill>
-          <a:blip r:embed="rId9">
-            <a:extLst>
-              <a:ext uri="{96DAC541-7B7A-43D3-8B79-37D633B846F1}">
-                <asvg:svgBlip xmlns:asvg="http://schemas.microsoft.com/office/drawing/2016/SVG/main" r:embed="rId10"/>
-              </a:ext>
-            </a:extLst>
-          </a:blip>
-          <a:stretch>
-            <a:fillRect/>
-          </a:stretch>
-        </p:blipFill>
-        <p:spPr>
-          <a:xfrm>
-            <a:off x="1170432" y="3539460"/>
-            <a:ext cx="327721" cy="327721"/>
-          </a:xfrm>
-          <a:prstGeom prst="rect">
-            <a:avLst/>
-          </a:prstGeom>
-        </p:spPr>
-      </p:pic>
-      <p:sp>
-        <p:nvSpPr>
-          <p:cNvPr id="24" name="mdpr:actions-output-review-326e07:item-2:block-41"/>
+          <p:cNvPr id="20" name="mdpr:actions-output-review-326e07:item-2:block-41"/>
           <p:cNvSpPr txBox="1"/>
           <p:nvPr/>
         </p:nvSpPr>
         <p:spPr>
           <a:xfrm>
-            <a:off x="1699321" y="3313176"/>
-            <a:ext cx="9255191" cy="780288"/>
+            <a:off x="1133856" y="3283428"/>
+            <a:ext cx="9820656" cy="839785"/>
           </a:xfrm>
           <a:prstGeom prst="rect">
             <a:avLst/>
@@ -19410,71 +18229,14 @@
       </p:sp>
       <p:sp>
         <p:nvSpPr>
-          <p:cNvPr id="25" name="Shape 18"/>
-          <p:cNvSpPr/>
-          <p:nvPr/>
-        </p:nvSpPr>
-        <p:spPr>
-          <a:xfrm>
-            <a:off x="1097280" y="4783044"/>
-            <a:ext cx="474025" cy="474025"/>
-          </a:xfrm>
-          <a:prstGeom prst="roundRect">
-            <a:avLst>
-              <a:gd name="adj" fmla="val 7716"/>
-            </a:avLst>
-          </a:prstGeom>
-          <a:solidFill>
-            <a:srgbClr val="FFF200"/>
-          </a:solidFill>
-          <a:ln w="12700">
-            <a:solidFill>
-              <a:srgbClr val="111111"/>
-            </a:solidFill>
-            <a:prstDash val="solid"/>
-          </a:ln>
-        </p:spPr>
-      </p:sp>
-      <p:pic>
-        <p:nvPicPr>
-          <p:cNvPr id="26" name="Image 5" descr="spark icon from tabler-icons (MIT)">    </p:cNvPr>
-          <p:cNvPicPr>
-            <a:picLocks noChangeAspect="1"/>
-          </p:cNvPicPr>
-          <p:nvPr/>
-        </p:nvPicPr>
-        <p:blipFill>
-          <a:blip r:embed="rId11">
-            <a:extLst>
-              <a:ext uri="{96DAC541-7B7A-43D3-8B79-37D633B846F1}">
-                <asvg:svgBlip xmlns:asvg="http://schemas.microsoft.com/office/drawing/2016/SVG/main" r:embed="rId12"/>
-              </a:ext>
-            </a:extLst>
-          </a:blip>
-          <a:stretch>
-            <a:fillRect/>
-          </a:stretch>
-        </p:blipFill>
-        <p:spPr>
-          <a:xfrm>
-            <a:off x="1170432" y="4856196"/>
-            <a:ext cx="327721" cy="327721"/>
-          </a:xfrm>
-          <a:prstGeom prst="rect">
-            <a:avLst/>
-          </a:prstGeom>
-        </p:spPr>
-      </p:pic>
-      <p:sp>
-        <p:nvSpPr>
-          <p:cNvPr id="27" name="mdpr:actions-output-review-326e07:item-3:block-41"/>
+          <p:cNvPr id="21" name="mdpr:actions-output-review-326e07:item-3:block-41"/>
           <p:cNvSpPr txBox="1"/>
           <p:nvPr/>
         </p:nvSpPr>
         <p:spPr>
           <a:xfrm>
-            <a:off x="1699321" y="4629912"/>
-            <a:ext cx="9255191" cy="780288"/>
+            <a:off x="1133856" y="4600164"/>
+            <a:ext cx="9820656" cy="839785"/>
           </a:xfrm>
           <a:prstGeom prst="rect">
             <a:avLst/>
@@ -21071,71 +19833,14 @@
       </p:sp>
       <p:sp>
         <p:nvSpPr>
-          <p:cNvPr id="19" name="Shape 14"/>
-          <p:cNvSpPr/>
-          <p:nvPr/>
-        </p:nvSpPr>
-        <p:spPr>
-          <a:xfrm>
-            <a:off x="1097280" y="2140428"/>
-            <a:ext cx="474025" cy="474025"/>
-          </a:xfrm>
-          <a:prstGeom prst="roundRect">
-            <a:avLst>
-              <a:gd name="adj" fmla="val 7716"/>
-            </a:avLst>
-          </a:prstGeom>
-          <a:solidFill>
-            <a:srgbClr val="FFF200"/>
-          </a:solidFill>
-          <a:ln w="12700">
-            <a:solidFill>
-              <a:srgbClr val="111111"/>
-            </a:solidFill>
-            <a:prstDash val="solid"/>
-          </a:ln>
-        </p:spPr>
-      </p:sp>
-      <p:pic>
-        <p:nvPicPr>
-          <p:cNvPr id="20" name="Image 3" descr="article icon from tabler-icons (MIT)">    </p:cNvPr>
-          <p:cNvPicPr>
-            <a:picLocks noChangeAspect="1"/>
-          </p:cNvPicPr>
-          <p:nvPr/>
-        </p:nvPicPr>
-        <p:blipFill>
-          <a:blip r:embed="rId7">
-            <a:extLst>
-              <a:ext uri="{96DAC541-7B7A-43D3-8B79-37D633B846F1}">
-                <asvg:svgBlip xmlns:asvg="http://schemas.microsoft.com/office/drawing/2016/SVG/main" r:embed="rId8"/>
-              </a:ext>
-            </a:extLst>
-          </a:blip>
-          <a:stretch>
-            <a:fillRect/>
-          </a:stretch>
-        </p:blipFill>
-        <p:spPr>
-          <a:xfrm>
-            <a:off x="1170432" y="2213580"/>
-            <a:ext cx="327721" cy="327721"/>
-          </a:xfrm>
-          <a:prstGeom prst="rect">
-            <a:avLst/>
-          </a:prstGeom>
-        </p:spPr>
-      </p:pic>
-      <p:sp>
-        <p:nvSpPr>
-          <p:cNvPr id="21" name="mdpr:1-2-32ac08:item-1:block-6-chunk-1"/>
+          <p:cNvPr id="19" name="mdpr:1-2-32ac08:item-1:block-6-chunk-1"/>
           <p:cNvSpPr txBox="1"/>
           <p:nvPr/>
         </p:nvSpPr>
         <p:spPr>
           <a:xfrm>
-            <a:off x="1699321" y="1987296"/>
-            <a:ext cx="9255191" cy="780288"/>
+            <a:off x="1133856" y="1957548"/>
+            <a:ext cx="9820656" cy="839785"/>
           </a:xfrm>
           <a:prstGeom prst="rect">
             <a:avLst/>
@@ -21187,71 +19892,14 @@
       </p:sp>
       <p:sp>
         <p:nvSpPr>
-          <p:cNvPr id="22" name="Shape 16"/>
-          <p:cNvSpPr/>
-          <p:nvPr/>
-        </p:nvSpPr>
-        <p:spPr>
-          <a:xfrm>
-            <a:off x="1097280" y="3466308"/>
-            <a:ext cx="474025" cy="474025"/>
-          </a:xfrm>
-          <a:prstGeom prst="roundRect">
-            <a:avLst>
-              <a:gd name="adj" fmla="val 7716"/>
-            </a:avLst>
-          </a:prstGeom>
-          <a:solidFill>
-            <a:srgbClr val="FFF200"/>
-          </a:solidFill>
-          <a:ln w="12700">
-            <a:solidFill>
-              <a:srgbClr val="111111"/>
-            </a:solidFill>
-            <a:prstDash val="solid"/>
-          </a:ln>
-        </p:spPr>
-      </p:sp>
-      <p:pic>
-        <p:nvPicPr>
-          <p:cNvPr id="23" name="Image 4" descr="chart icon from tabler-icons (MIT)">    </p:cNvPr>
-          <p:cNvPicPr>
-            <a:picLocks noChangeAspect="1"/>
-          </p:cNvPicPr>
-          <p:nvPr/>
-        </p:nvPicPr>
-        <p:blipFill>
-          <a:blip r:embed="rId9">
-            <a:extLst>
-              <a:ext uri="{96DAC541-7B7A-43D3-8B79-37D633B846F1}">
-                <asvg:svgBlip xmlns:asvg="http://schemas.microsoft.com/office/drawing/2016/SVG/main" r:embed="rId10"/>
-              </a:ext>
-            </a:extLst>
-          </a:blip>
-          <a:stretch>
-            <a:fillRect/>
-          </a:stretch>
-        </p:blipFill>
-        <p:spPr>
-          <a:xfrm>
-            <a:off x="1170432" y="3539460"/>
-            <a:ext cx="327721" cy="327721"/>
-          </a:xfrm>
-          <a:prstGeom prst="rect">
-            <a:avLst/>
-          </a:prstGeom>
-        </p:spPr>
-      </p:pic>
-      <p:sp>
-        <p:nvSpPr>
-          <p:cNvPr id="24" name="mdpr:1-2-32ac08:item-2:block-6-chunk-1"/>
+          <p:cNvPr id="20" name="mdpr:1-2-32ac08:item-2:block-6-chunk-1"/>
           <p:cNvSpPr txBox="1"/>
           <p:nvPr/>
         </p:nvSpPr>
         <p:spPr>
           <a:xfrm>
-            <a:off x="1699321" y="3313176"/>
-            <a:ext cx="9255191" cy="780288"/>
+            <a:off x="1133856" y="3283428"/>
+            <a:ext cx="9820656" cy="839785"/>
           </a:xfrm>
           <a:prstGeom prst="rect">
             <a:avLst/>
@@ -21303,71 +19951,14 @@
       </p:sp>
       <p:sp>
         <p:nvSpPr>
-          <p:cNvPr id="25" name="Shape 18"/>
-          <p:cNvSpPr/>
-          <p:nvPr/>
-        </p:nvSpPr>
-        <p:spPr>
-          <a:xfrm>
-            <a:off x="1097280" y="4783044"/>
-            <a:ext cx="474025" cy="474025"/>
-          </a:xfrm>
-          <a:prstGeom prst="roundRect">
-            <a:avLst>
-              <a:gd name="adj" fmla="val 7716"/>
-            </a:avLst>
-          </a:prstGeom>
-          <a:solidFill>
-            <a:srgbClr val="FFF200"/>
-          </a:solidFill>
-          <a:ln w="12700">
-            <a:solidFill>
-              <a:srgbClr val="111111"/>
-            </a:solidFill>
-            <a:prstDash val="solid"/>
-          </a:ln>
-        </p:spPr>
-      </p:sp>
-      <p:pic>
-        <p:nvPicPr>
-          <p:cNvPr id="26" name="Image 5" descr="article icon from tabler-icons (MIT)">    </p:cNvPr>
-          <p:cNvPicPr>
-            <a:picLocks noChangeAspect="1"/>
-          </p:cNvPicPr>
-          <p:nvPr/>
-        </p:nvPicPr>
-        <p:blipFill>
-          <a:blip r:embed="rId11">
-            <a:extLst>
-              <a:ext uri="{96DAC541-7B7A-43D3-8B79-37D633B846F1}">
-                <asvg:svgBlip xmlns:asvg="http://schemas.microsoft.com/office/drawing/2016/SVG/main" r:embed="rId12"/>
-              </a:ext>
-            </a:extLst>
-          </a:blip>
-          <a:stretch>
-            <a:fillRect/>
-          </a:stretch>
-        </p:blipFill>
-        <p:spPr>
-          <a:xfrm>
-            <a:off x="1170432" y="4856196"/>
-            <a:ext cx="327721" cy="327721"/>
-          </a:xfrm>
-          <a:prstGeom prst="rect">
-            <a:avLst/>
-          </a:prstGeom>
-        </p:spPr>
-      </p:pic>
-      <p:sp>
-        <p:nvSpPr>
-          <p:cNvPr id="27" name="mdpr:1-2-32ac08:item-3:block-6-chunk-1"/>
+          <p:cNvPr id="21" name="mdpr:1-2-32ac08:item-3:block-6-chunk-1"/>
           <p:cNvSpPr txBox="1"/>
           <p:nvPr/>
         </p:nvSpPr>
         <p:spPr>
           <a:xfrm>
-            <a:off x="1699321" y="4629912"/>
-            <a:ext cx="9255191" cy="780288"/>
+            <a:off x="1133856" y="4600164"/>
+            <a:ext cx="9820656" cy="839785"/>
           </a:xfrm>
           <a:prstGeom prst="rect">
             <a:avLst/>
@@ -22401,71 +20992,14 @@
       </p:sp>
       <p:sp>
         <p:nvSpPr>
-          <p:cNvPr id="19" name="Shape 14"/>
-          <p:cNvSpPr/>
-          <p:nvPr/>
-        </p:nvSpPr>
-        <p:spPr>
-          <a:xfrm>
-            <a:off x="1097280" y="2140428"/>
-            <a:ext cx="474025" cy="474025"/>
-          </a:xfrm>
-          <a:prstGeom prst="roundRect">
-            <a:avLst>
-              <a:gd name="adj" fmla="val 7716"/>
-            </a:avLst>
-          </a:prstGeom>
-          <a:solidFill>
-            <a:srgbClr val="FFF200"/>
-          </a:solidFill>
-          <a:ln w="12700">
-            <a:solidFill>
-              <a:srgbClr val="111111"/>
-            </a:solidFill>
-            <a:prstDash val="solid"/>
-          </a:ln>
-        </p:spPr>
-      </p:sp>
-      <p:pic>
-        <p:nvPicPr>
-          <p:cNvPr id="20" name="Image 3" descr="article icon from tabler-icons (MIT)">    </p:cNvPr>
-          <p:cNvPicPr>
-            <a:picLocks noChangeAspect="1"/>
-          </p:cNvPicPr>
-          <p:nvPr/>
-        </p:nvPicPr>
-        <p:blipFill>
-          <a:blip r:embed="rId7">
-            <a:extLst>
-              <a:ext uri="{96DAC541-7B7A-43D3-8B79-37D633B846F1}">
-                <asvg:svgBlip xmlns:asvg="http://schemas.microsoft.com/office/drawing/2016/SVG/main" r:embed="rId8"/>
-              </a:ext>
-            </a:extLst>
-          </a:blip>
-          <a:stretch>
-            <a:fillRect/>
-          </a:stretch>
-        </p:blipFill>
-        <p:spPr>
-          <a:xfrm>
-            <a:off x="1170432" y="2213580"/>
-            <a:ext cx="327721" cy="327721"/>
-          </a:xfrm>
-          <a:prstGeom prst="rect">
-            <a:avLst/>
-          </a:prstGeom>
-        </p:spPr>
-      </p:pic>
-      <p:sp>
-        <p:nvSpPr>
-          <p:cNvPr id="21" name="mdpr:1-2-dfa474:item-1:block-8-chunk-1"/>
+          <p:cNvPr id="19" name="mdpr:1-2-dfa474:item-1:block-8-chunk-1"/>
           <p:cNvSpPr txBox="1"/>
           <p:nvPr/>
         </p:nvSpPr>
         <p:spPr>
           <a:xfrm>
-            <a:off x="1699321" y="1987296"/>
-            <a:ext cx="9255191" cy="780288"/>
+            <a:off x="1133856" y="1957548"/>
+            <a:ext cx="9820656" cy="839785"/>
           </a:xfrm>
           <a:prstGeom prst="rect">
             <a:avLst/>
@@ -22517,71 +21051,14 @@
       </p:sp>
       <p:sp>
         <p:nvSpPr>
-          <p:cNvPr id="22" name="Shape 16"/>
-          <p:cNvSpPr/>
-          <p:nvPr/>
-        </p:nvSpPr>
-        <p:spPr>
-          <a:xfrm>
-            <a:off x="1097280" y="3466308"/>
-            <a:ext cx="474025" cy="474025"/>
-          </a:xfrm>
-          <a:prstGeom prst="roundRect">
-            <a:avLst>
-              <a:gd name="adj" fmla="val 7716"/>
-            </a:avLst>
-          </a:prstGeom>
-          <a:solidFill>
-            <a:srgbClr val="FFF200"/>
-          </a:solidFill>
-          <a:ln w="12700">
-            <a:solidFill>
-              <a:srgbClr val="111111"/>
-            </a:solidFill>
-            <a:prstDash val="solid"/>
-          </a:ln>
-        </p:spPr>
-      </p:sp>
-      <p:pic>
-        <p:nvPicPr>
-          <p:cNvPr id="23" name="Image 4" descr="article icon from tabler-icons (MIT)">    </p:cNvPr>
-          <p:cNvPicPr>
-            <a:picLocks noChangeAspect="1"/>
-          </p:cNvPicPr>
-          <p:nvPr/>
-        </p:nvPicPr>
-        <p:blipFill>
-          <a:blip r:embed="rId9">
-            <a:extLst>
-              <a:ext uri="{96DAC541-7B7A-43D3-8B79-37D633B846F1}">
-                <asvg:svgBlip xmlns:asvg="http://schemas.microsoft.com/office/drawing/2016/SVG/main" r:embed="rId10"/>
-              </a:ext>
-            </a:extLst>
-          </a:blip>
-          <a:stretch>
-            <a:fillRect/>
-          </a:stretch>
-        </p:blipFill>
-        <p:spPr>
-          <a:xfrm>
-            <a:off x="1170432" y="3539460"/>
-            <a:ext cx="327721" cy="327721"/>
-          </a:xfrm>
-          <a:prstGeom prst="rect">
-            <a:avLst/>
-          </a:prstGeom>
-        </p:spPr>
-      </p:pic>
-      <p:sp>
-        <p:nvSpPr>
-          <p:cNvPr id="24" name="mdpr:1-2-dfa474:item-2:block-8-chunk-1"/>
+          <p:cNvPr id="20" name="mdpr:1-2-dfa474:item-2:block-8-chunk-1"/>
           <p:cNvSpPr txBox="1"/>
           <p:nvPr/>
         </p:nvSpPr>
         <p:spPr>
           <a:xfrm>
-            <a:off x="1699321" y="3313176"/>
-            <a:ext cx="9255191" cy="780288"/>
+            <a:off x="1133856" y="3283428"/>
+            <a:ext cx="9820656" cy="839785"/>
           </a:xfrm>
           <a:prstGeom prst="rect">
             <a:avLst/>
@@ -22633,71 +21110,14 @@
       </p:sp>
       <p:sp>
         <p:nvSpPr>
-          <p:cNvPr id="25" name="Shape 18"/>
-          <p:cNvSpPr/>
-          <p:nvPr/>
-        </p:nvSpPr>
-        <p:spPr>
-          <a:xfrm>
-            <a:off x="1097280" y="4783044"/>
-            <a:ext cx="474025" cy="474025"/>
-          </a:xfrm>
-          <a:prstGeom prst="roundRect">
-            <a:avLst>
-              <a:gd name="adj" fmla="val 7716"/>
-            </a:avLst>
-          </a:prstGeom>
-          <a:solidFill>
-            <a:srgbClr val="FFF200"/>
-          </a:solidFill>
-          <a:ln w="12700">
-            <a:solidFill>
-              <a:srgbClr val="111111"/>
-            </a:solidFill>
-            <a:prstDash val="solid"/>
-          </a:ln>
-        </p:spPr>
-      </p:sp>
-      <p:pic>
-        <p:nvPicPr>
-          <p:cNvPr id="26" name="Image 5" descr="article icon from tabler-icons (MIT)">    </p:cNvPr>
-          <p:cNvPicPr>
-            <a:picLocks noChangeAspect="1"/>
-          </p:cNvPicPr>
-          <p:nvPr/>
-        </p:nvPicPr>
-        <p:blipFill>
-          <a:blip r:embed="rId11">
-            <a:extLst>
-              <a:ext uri="{96DAC541-7B7A-43D3-8B79-37D633B846F1}">
-                <asvg:svgBlip xmlns:asvg="http://schemas.microsoft.com/office/drawing/2016/SVG/main" r:embed="rId12"/>
-              </a:ext>
-            </a:extLst>
-          </a:blip>
-          <a:stretch>
-            <a:fillRect/>
-          </a:stretch>
-        </p:blipFill>
-        <p:spPr>
-          <a:xfrm>
-            <a:off x="1170432" y="4856196"/>
-            <a:ext cx="327721" cy="327721"/>
-          </a:xfrm>
-          <a:prstGeom prst="rect">
-            <a:avLst/>
-          </a:prstGeom>
-        </p:spPr>
-      </p:pic>
-      <p:sp>
-        <p:nvSpPr>
-          <p:cNvPr id="27" name="mdpr:1-2-dfa474:item-3:block-8-chunk-1"/>
+          <p:cNvPr id="21" name="mdpr:1-2-dfa474:item-3:block-8-chunk-1"/>
           <p:cNvSpPr txBox="1"/>
           <p:nvPr/>
         </p:nvSpPr>
         <p:spPr>
           <a:xfrm>
-            <a:off x="1699321" y="4629912"/>
-            <a:ext cx="9255191" cy="780288"/>
+            <a:off x="1133856" y="4600164"/>
+            <a:ext cx="9820656" cy="839785"/>
           </a:xfrm>
           <a:prstGeom prst="rect">
             <a:avLst/>

--- a/docs/theme-preview/pptx/brutalism.pptx
+++ b/docs/theme-preview/pptx/brutalism.pptx
@@ -3806,33 +3806,6 @@
         </p:nvSpPr>
         <p:spPr>
           <a:xfrm>
-            <a:off x="731520" y="1207008"/>
-            <a:ext cx="1325880" cy="54864"/>
-          </a:xfrm>
-          <a:prstGeom prst="rect">
-            <a:avLst/>
-          </a:prstGeom>
-          <a:solidFill>
-            <a:srgbClr val="111111"/>
-          </a:solidFill>
-          <a:ln w="12700">
-            <a:solidFill>
-              <a:srgbClr val="111111">
-                <a:alpha val="0"/>
-              </a:srgbClr>
-            </a:solidFill>
-            <a:prstDash val="solid"/>
-          </a:ln>
-        </p:spPr>
-      </p:sp>
-      <p:sp>
-        <p:nvSpPr>
-          <p:cNvPr id="11" name="Shape 9"/>
-          <p:cNvSpPr/>
-          <p:nvPr/>
-        </p:nvSpPr>
-        <p:spPr>
-          <a:xfrm>
             <a:off x="0" y="0"/>
             <a:ext cx="12191695" cy="201168"/>
           </a:xfrm>
@@ -3854,36 +3827,7 @@
       </p:sp>
       <p:sp>
         <p:nvSpPr>
-          <p:cNvPr id="12" name="Shape 10"/>
-          <p:cNvSpPr/>
-          <p:nvPr/>
-        </p:nvSpPr>
-        <p:spPr>
-          <a:xfrm>
-            <a:off x="9357055" y="6528816"/>
-            <a:ext cx="2148840" cy="73152"/>
-          </a:xfrm>
-          <a:prstGeom prst="rect">
-            <a:avLst/>
-          </a:prstGeom>
-          <a:solidFill>
-            <a:srgbClr val="FFFFFF">
-              <a:alpha val="90000"/>
-            </a:srgbClr>
-          </a:solidFill>
-          <a:ln w="12700">
-            <a:solidFill>
-              <a:srgbClr val="FFFFFF">
-                <a:alpha val="0"/>
-              </a:srgbClr>
-            </a:solidFill>
-            <a:prstDash val="solid"/>
-          </a:ln>
-        </p:spPr>
-      </p:sp>
-      <p:sp>
-        <p:nvSpPr>
-          <p:cNvPr id="13" name="mdpr:mdpr-design-grammar-b3a462:title:__title:mdpr-design-grammar-b3a462"/>
+          <p:cNvPr id="11" name="mdpr:mdpr-design-grammar-b3a462:title:__title:mdpr-design-grammar-b3a462"/>
           <p:cNvSpPr txBox="1"/>
           <p:nvPr/>
         </p:nvSpPr>
@@ -4159,16 +4103,76 @@
           </a:ln>
         </p:spPr>
       </p:sp>
-      <p:sp>
-        <p:nvSpPr>
-          <p:cNvPr id="10" name="Shape 8"/>
-          <p:cNvSpPr/>
-          <p:nvPr/>
-        </p:nvSpPr>
-        <p:spPr>
-          <a:xfrm>
-            <a:off x="731520" y="1207008"/>
-            <a:ext cx="1325880" cy="54864"/>
+      <p:pic>
+        <p:nvPicPr>
+          <p:cNvPr id="10" name="Image 0" descr="preencoded.png">    </p:cNvPr>
+          <p:cNvPicPr>
+            <a:picLocks noChangeAspect="1"/>
+          </p:cNvPicPr>
+          <p:nvPr/>
+        </p:nvPicPr>
+        <p:blipFill>
+          <a:blip r:embed="rId1">
+            <a:extLst>
+              <a:ext uri="{96DAC541-7B7A-43D3-8B79-37D633B846F1}">
+                <asvg:svgBlip xmlns:asvg="http://schemas.microsoft.com/office/drawing/2016/SVG/main" r:embed="rId2"/>
+              </a:ext>
+            </a:extLst>
+          </a:blip>
+          <a:stretch>
+            <a:fillRect/>
+          </a:stretch>
+        </p:blipFill>
+        <p:spPr>
+          <a:xfrm>
+            <a:off x="914400" y="2523744"/>
+            <a:ext cx="10241280" cy="1024128"/>
+          </a:xfrm>
+          <a:prstGeom prst="rect">
+            <a:avLst/>
+          </a:prstGeom>
+        </p:spPr>
+      </p:pic>
+      <p:pic>
+        <p:nvPicPr>
+          <p:cNvPr id="11" name="Image 1" descr="preencoded.png">    </p:cNvPr>
+          <p:cNvPicPr>
+            <a:picLocks noChangeAspect="1"/>
+          </p:cNvPicPr>
+          <p:nvPr/>
+        </p:nvPicPr>
+        <p:blipFill>
+          <a:blip r:embed="rId3">
+            <a:extLst>
+              <a:ext uri="{96DAC541-7B7A-43D3-8B79-37D633B846F1}">
+                <asvg:svgBlip xmlns:asvg="http://schemas.microsoft.com/office/drawing/2016/SVG/main" r:embed="rId4"/>
+              </a:ext>
+            </a:extLst>
+          </a:blip>
+          <a:stretch>
+            <a:fillRect/>
+          </a:stretch>
+        </p:blipFill>
+        <p:spPr>
+          <a:xfrm>
+            <a:off x="914400" y="3849624"/>
+            <a:ext cx="10241280" cy="1024128"/>
+          </a:xfrm>
+          <a:prstGeom prst="rect">
+            <a:avLst/>
+          </a:prstGeom>
+        </p:spPr>
+      </p:pic>
+      <p:sp>
+        <p:nvSpPr>
+          <p:cNvPr id="12" name="Shape 8"/>
+          <p:cNvSpPr/>
+          <p:nvPr/>
+        </p:nvSpPr>
+        <p:spPr>
+          <a:xfrm>
+            <a:off x="914400" y="2523744"/>
+            <a:ext cx="73152" cy="1024128"/>
           </a:xfrm>
           <a:prstGeom prst="rect">
             <a:avLst/>
@@ -4188,24 +4192,24 @@
       </p:sp>
       <p:sp>
         <p:nvSpPr>
-          <p:cNvPr id="11" name="Shape 9"/>
-          <p:cNvSpPr/>
-          <p:nvPr/>
-        </p:nvSpPr>
-        <p:spPr>
-          <a:xfrm>
-            <a:off x="822960" y="1554480"/>
-            <a:ext cx="4937760" cy="73152"/>
-          </a:xfrm>
-          <a:prstGeom prst="rect">
-            <a:avLst/>
-          </a:prstGeom>
-          <a:solidFill>
-            <a:srgbClr val="111111"/>
-          </a:solidFill>
-          <a:ln w="12700">
-            <a:solidFill>
-              <a:srgbClr val="111111">
+          <p:cNvPr id="13" name="Shape 9"/>
+          <p:cNvSpPr/>
+          <p:nvPr/>
+        </p:nvSpPr>
+        <p:spPr>
+          <a:xfrm>
+            <a:off x="914400" y="3849624"/>
+            <a:ext cx="73152" cy="1024128"/>
+          </a:xfrm>
+          <a:prstGeom prst="rect">
+            <a:avLst/>
+          </a:prstGeom>
+          <a:solidFill>
+            <a:srgbClr val="00A6FF"/>
+          </a:solidFill>
+          <a:ln w="12700">
+            <a:solidFill>
+              <a:srgbClr val="00A6FF">
                 <a:alpha val="0"/>
               </a:srgbClr>
             </a:solidFill>
@@ -4215,34 +4219,7 @@
       </p:sp>
       <p:sp>
         <p:nvSpPr>
-          <p:cNvPr id="12" name="Shape 10"/>
-          <p:cNvSpPr/>
-          <p:nvPr/>
-        </p:nvSpPr>
-        <p:spPr>
-          <a:xfrm>
-            <a:off x="6400800" y="1554480"/>
-            <a:ext cx="4937760" cy="73152"/>
-          </a:xfrm>
-          <a:prstGeom prst="rect">
-            <a:avLst/>
-          </a:prstGeom>
-          <a:solidFill>
-            <a:srgbClr val="111111"/>
-          </a:solidFill>
-          <a:ln w="12700">
-            <a:solidFill>
-              <a:srgbClr val="111111">
-                <a:alpha val="0"/>
-              </a:srgbClr>
-            </a:solidFill>
-            <a:prstDash val="solid"/>
-          </a:ln>
-        </p:spPr>
-      </p:sp>
-      <p:sp>
-        <p:nvSpPr>
-          <p:cNvPr id="13" name="mdpr:2-2-a9df10:title:__title:2-2-a9df10"/>
+          <p:cNvPr id="14" name="mdpr:2-2-a9df10:title:__title:2-2-a9df10"/>
           <p:cNvSpPr txBox="1"/>
           <p:nvPr/>
         </p:nvSpPr>
@@ -4276,7 +4253,24 @@
                 <a:ea typeface="Pretendard" pitchFamily="34" charset="-122"/>
                 <a:cs typeface="Pretendard" pitchFamily="34" charset="-120"/>
               </a:rPr>
-              <a:t>Semantic Blocks (Cont. 2/2)</a:t>
+              <a:t>Semantic Blocks</a:t>
+            </a:r>
+            <a:pPr algn="ctr" indent="0" marL="0">
+              <a:lnSpc>
+                <a:spcPct val="120000"/>
+              </a:lnSpc>
+              <a:buNone/>
+            </a:pPr>
+            <a:r>
+              <a:rPr lang="en-US" sz="2000" dirty="0">
+                <a:solidFill>
+                  <a:srgbClr val="888888"/>
+                </a:solidFill>
+                <a:latin typeface="Pretendard" pitchFamily="34" charset="0"/>
+                <a:ea typeface="Pretendard" pitchFamily="34" charset="-122"/>
+                <a:cs typeface="Pretendard" pitchFamily="34" charset="-120"/>
+              </a:rPr>
+              <a:t> (Cont. 2/2)</a:t>
             </a:r>
             <a:endParaRPr lang="en-US" sz="3400" dirty="0"/>
           </a:p>
@@ -4284,14 +4278,14 @@
       </p:sp>
       <p:sp>
         <p:nvSpPr>
-          <p:cNvPr id="14" name="mdpr:2-2-a9df10:left:block-10-chunk-2"/>
+          <p:cNvPr id="15" name="mdpr:2-2-a9df10:item-1:block-10-chunk-2"/>
           <p:cNvSpPr txBox="1"/>
           <p:nvPr/>
         </p:nvSpPr>
         <p:spPr>
           <a:xfrm>
-            <a:off x="896112" y="1664208"/>
-            <a:ext cx="4791456" cy="4169664"/>
+            <a:off x="1133856" y="2615916"/>
+            <a:ext cx="9820656" cy="839785"/>
           </a:xfrm>
           <a:prstGeom prst="rect">
             <a:avLst/>
@@ -4300,7 +4294,7 @@
           <a:ln/>
         </p:spPr>
         <p:txBody>
-          <a:bodyPr wrap="square" lIns="0" tIns="25400" rIns="25400" bIns="0" rtlCol="0" anchor="t"/>
+          <a:bodyPr wrap="square" lIns="0" tIns="25400" rIns="25400" bIns="0" rtlCol="0" anchor="ctr"/>
           <a:lstStyle/>
           <a:p>
             <a:pPr algn="l" indent="0" marL="0">
@@ -4318,7 +4312,7 @@
                 <a:ea typeface="Pretendard" pitchFamily="34" charset="-122"/>
                 <a:cs typeface="Pretendard" pitchFamily="34" charset="-120"/>
               </a:rPr>
-              <a:t>- Constraint:</a:t>
+              <a:t>Constraint:</a:t>
             </a:r>
             <a:pPr algn="l" indent="0" marL="0">
               <a:lnSpc>
@@ -4343,14 +4337,14 @@
       </p:sp>
       <p:sp>
         <p:nvSpPr>
-          <p:cNvPr id="15" name="mdpr:2-2-a9df10:right:block-10-chunk-2"/>
+          <p:cNvPr id="16" name="mdpr:2-2-a9df10:item-2:block-10-chunk-2"/>
           <p:cNvSpPr txBox="1"/>
           <p:nvPr/>
         </p:nvSpPr>
         <p:spPr>
           <a:xfrm>
-            <a:off x="6473952" y="1664208"/>
-            <a:ext cx="4791456" cy="4169664"/>
+            <a:off x="1133856" y="3941796"/>
+            <a:ext cx="9820656" cy="839785"/>
           </a:xfrm>
           <a:prstGeom prst="rect">
             <a:avLst/>
@@ -4359,7 +4353,7 @@
           <a:ln/>
         </p:spPr>
         <p:txBody>
-          <a:bodyPr wrap="square" lIns="0" tIns="25400" rIns="25400" bIns="0" rtlCol="0" anchor="t"/>
+          <a:bodyPr wrap="square" lIns="0" tIns="25400" rIns="25400" bIns="0" rtlCol="0" anchor="ctr"/>
           <a:lstStyle/>
           <a:p>
             <a:pPr algn="l" indent="0" marL="0">
@@ -4377,7 +4371,7 @@
                 <a:ea typeface="Pretendard" pitchFamily="34" charset="-122"/>
                 <a:cs typeface="Pretendard" pitchFamily="34" charset="-120"/>
               </a:rPr>
-              <a:t>- Emphasis</a:t>
+              <a:t>Emphasis</a:t>
             </a:r>
             <a:pPr algn="l" indent="0" marL="0">
               <a:lnSpc>
@@ -4638,34 +4632,7 @@
       </p:sp>
       <p:sp>
         <p:nvSpPr>
-          <p:cNvPr id="10" name="Shape 8"/>
-          <p:cNvSpPr/>
-          <p:nvPr/>
-        </p:nvSpPr>
-        <p:spPr>
-          <a:xfrm>
-            <a:off x="731520" y="1207008"/>
-            <a:ext cx="1325880" cy="54864"/>
-          </a:xfrm>
-          <a:prstGeom prst="rect">
-            <a:avLst/>
-          </a:prstGeom>
-          <a:solidFill>
-            <a:srgbClr val="111111"/>
-          </a:solidFill>
-          <a:ln w="12700">
-            <a:solidFill>
-              <a:srgbClr val="111111">
-                <a:alpha val="0"/>
-              </a:srgbClr>
-            </a:solidFill>
-            <a:prstDash val="solid"/>
-          </a:ln>
-        </p:spPr>
-      </p:sp>
-      <p:sp>
-        <p:nvSpPr>
-          <p:cNvPr id="11" name="mdpr:pipeline-diagram-51792c:title:__title:pipeline-diagram-51792c"/>
+          <p:cNvPr id="10" name="mdpr:pipeline-diagram-51792c:title:__title:pipeline-diagram-51792c"/>
           <p:cNvSpPr txBox="1"/>
           <p:nvPr/>
         </p:nvSpPr>
@@ -4707,7 +4674,7 @@
       </p:sp>
       <p:sp>
         <p:nvSpPr>
-          <p:cNvPr id="12" name="Shape 10"/>
+          <p:cNvPr id="11" name="Shape 9"/>
           <p:cNvSpPr/>
           <p:nvPr/>
         </p:nvSpPr>
@@ -4731,7 +4698,7 @@
       </p:sp>
       <p:sp>
         <p:nvSpPr>
-          <p:cNvPr id="13" name="Shape 11"/>
+          <p:cNvPr id="12" name="Shape 10"/>
           <p:cNvSpPr/>
           <p:nvPr/>
         </p:nvSpPr>
@@ -4755,7 +4722,7 @@
       </p:sp>
       <p:sp>
         <p:nvSpPr>
-          <p:cNvPr id="14" name="Shape 12"/>
+          <p:cNvPr id="13" name="Shape 11"/>
           <p:cNvSpPr/>
           <p:nvPr/>
         </p:nvSpPr>
@@ -4779,7 +4746,7 @@
       </p:sp>
       <p:sp>
         <p:nvSpPr>
-          <p:cNvPr id="15" name="Shape 13"/>
+          <p:cNvPr id="14" name="Shape 12"/>
           <p:cNvSpPr/>
           <p:nvPr/>
         </p:nvSpPr>
@@ -4803,7 +4770,7 @@
       </p:sp>
       <p:sp>
         <p:nvSpPr>
-          <p:cNvPr id="16" name="Shape 14"/>
+          <p:cNvPr id="15" name="Shape 13"/>
           <p:cNvSpPr/>
           <p:nvPr/>
         </p:nvSpPr>
@@ -4827,7 +4794,7 @@
       </p:sp>
       <p:sp>
         <p:nvSpPr>
-          <p:cNvPr id="17" name="Shape 15"/>
+          <p:cNvPr id="16" name="Shape 14"/>
           <p:cNvSpPr/>
           <p:nvPr/>
         </p:nvSpPr>
@@ -4861,7 +4828,7 @@
       </p:sp>
       <p:sp>
         <p:nvSpPr>
-          <p:cNvPr id="18" name="Shape 16"/>
+          <p:cNvPr id="17" name="Shape 15"/>
           <p:cNvSpPr/>
           <p:nvPr/>
         </p:nvSpPr>
@@ -4888,7 +4855,7 @@
       </p:sp>
       <p:sp>
         <p:nvSpPr>
-          <p:cNvPr id="19" name="Shape 17"/>
+          <p:cNvPr id="18" name="Shape 16"/>
           <p:cNvSpPr/>
           <p:nvPr/>
         </p:nvSpPr>
@@ -4915,7 +4882,7 @@
       </p:sp>
       <p:sp>
         <p:nvSpPr>
-          <p:cNvPr id="20" name="Text 18"/>
+          <p:cNvPr id="19" name="Text 17"/>
           <p:cNvSpPr txBox="1"/>
           <p:nvPr/>
         </p:nvSpPr>
@@ -4943,7 +4910,7 @@
               <a:buNone/>
             </a:pPr>
             <a:r>
-              <a:rPr lang="en-US" sz="1500" b="1" dirty="0">
+              <a:rPr lang="en-US" sz="1600" b="1" dirty="0">
                 <a:solidFill>
                   <a:srgbClr val="FFF200"/>
                 </a:solidFill>
@@ -4953,13 +4920,13 @@
               </a:rPr>
               <a:t>1</a:t>
             </a:r>
-            <a:endParaRPr lang="en-US" sz="1500" dirty="0"/>
+            <a:endParaRPr lang="en-US" sz="1600" dirty="0"/>
           </a:p>
         </p:txBody>
       </p:sp>
       <p:sp>
         <p:nvSpPr>
-          <p:cNvPr id="21" name="Text 19"/>
+          <p:cNvPr id="20" name="Text 18"/>
           <p:cNvSpPr txBox="1"/>
           <p:nvPr/>
         </p:nvSpPr>
@@ -5003,7 +4970,7 @@
       </p:sp>
       <p:sp>
         <p:nvSpPr>
-          <p:cNvPr id="22" name="Shape 20"/>
+          <p:cNvPr id="21" name="Shape 19"/>
           <p:cNvSpPr/>
           <p:nvPr/>
         </p:nvSpPr>
@@ -5037,7 +5004,7 @@
       </p:sp>
       <p:sp>
         <p:nvSpPr>
-          <p:cNvPr id="23" name="Shape 21"/>
+          <p:cNvPr id="22" name="Shape 20"/>
           <p:cNvSpPr/>
           <p:nvPr/>
         </p:nvSpPr>
@@ -5064,7 +5031,7 @@
       </p:sp>
       <p:sp>
         <p:nvSpPr>
-          <p:cNvPr id="24" name="Shape 22"/>
+          <p:cNvPr id="23" name="Shape 21"/>
           <p:cNvSpPr/>
           <p:nvPr/>
         </p:nvSpPr>
@@ -5091,7 +5058,7 @@
       </p:sp>
       <p:sp>
         <p:nvSpPr>
-          <p:cNvPr id="25" name="Text 23"/>
+          <p:cNvPr id="24" name="Text 22"/>
           <p:cNvSpPr txBox="1"/>
           <p:nvPr/>
         </p:nvSpPr>
@@ -5119,7 +5086,7 @@
               <a:buNone/>
             </a:pPr>
             <a:r>
-              <a:rPr lang="en-US" sz="1500" b="1" dirty="0">
+              <a:rPr lang="en-US" sz="1600" b="1" dirty="0">
                 <a:solidFill>
                   <a:srgbClr val="FFF200"/>
                 </a:solidFill>
@@ -5129,13 +5096,13 @@
               </a:rPr>
               <a:t>2</a:t>
             </a:r>
-            <a:endParaRPr lang="en-US" sz="1500" dirty="0"/>
+            <a:endParaRPr lang="en-US" sz="1600" dirty="0"/>
           </a:p>
         </p:txBody>
       </p:sp>
       <p:sp>
         <p:nvSpPr>
-          <p:cNvPr id="26" name="Text 24"/>
+          <p:cNvPr id="25" name="Text 23"/>
           <p:cNvSpPr txBox="1"/>
           <p:nvPr/>
         </p:nvSpPr>
@@ -5179,7 +5146,7 @@
       </p:sp>
       <p:sp>
         <p:nvSpPr>
-          <p:cNvPr id="27" name="Shape 25"/>
+          <p:cNvPr id="26" name="Shape 24"/>
           <p:cNvSpPr/>
           <p:nvPr/>
         </p:nvSpPr>
@@ -5213,7 +5180,7 @@
       </p:sp>
       <p:sp>
         <p:nvSpPr>
-          <p:cNvPr id="28" name="Shape 26"/>
+          <p:cNvPr id="27" name="Shape 25"/>
           <p:cNvSpPr/>
           <p:nvPr/>
         </p:nvSpPr>
@@ -5240,7 +5207,7 @@
       </p:sp>
       <p:sp>
         <p:nvSpPr>
-          <p:cNvPr id="29" name="Shape 27"/>
+          <p:cNvPr id="28" name="Shape 26"/>
           <p:cNvSpPr/>
           <p:nvPr/>
         </p:nvSpPr>
@@ -5267,7 +5234,7 @@
       </p:sp>
       <p:sp>
         <p:nvSpPr>
-          <p:cNvPr id="30" name="Text 28"/>
+          <p:cNvPr id="29" name="Text 27"/>
           <p:cNvSpPr txBox="1"/>
           <p:nvPr/>
         </p:nvSpPr>
@@ -5295,7 +5262,7 @@
               <a:buNone/>
             </a:pPr>
             <a:r>
-              <a:rPr lang="en-US" sz="1500" b="1" dirty="0">
+              <a:rPr lang="en-US" sz="1600" b="1" dirty="0">
                 <a:solidFill>
                   <a:srgbClr val="FFF200"/>
                 </a:solidFill>
@@ -5305,13 +5272,13 @@
               </a:rPr>
               <a:t>3</a:t>
             </a:r>
-            <a:endParaRPr lang="en-US" sz="1500" dirty="0"/>
+            <a:endParaRPr lang="en-US" sz="1600" dirty="0"/>
           </a:p>
         </p:txBody>
       </p:sp>
       <p:sp>
         <p:nvSpPr>
-          <p:cNvPr id="31" name="Text 29"/>
+          <p:cNvPr id="30" name="Text 28"/>
           <p:cNvSpPr txBox="1"/>
           <p:nvPr/>
         </p:nvSpPr>
@@ -5355,7 +5322,7 @@
       </p:sp>
       <p:sp>
         <p:nvSpPr>
-          <p:cNvPr id="32" name="Shape 30"/>
+          <p:cNvPr id="31" name="Shape 29"/>
           <p:cNvSpPr/>
           <p:nvPr/>
         </p:nvSpPr>
@@ -5389,7 +5356,7 @@
       </p:sp>
       <p:sp>
         <p:nvSpPr>
-          <p:cNvPr id="33" name="Shape 31"/>
+          <p:cNvPr id="32" name="Shape 30"/>
           <p:cNvSpPr/>
           <p:nvPr/>
         </p:nvSpPr>
@@ -5416,7 +5383,7 @@
       </p:sp>
       <p:sp>
         <p:nvSpPr>
-          <p:cNvPr id="34" name="Shape 32"/>
+          <p:cNvPr id="33" name="Shape 31"/>
           <p:cNvSpPr/>
           <p:nvPr/>
         </p:nvSpPr>
@@ -5443,7 +5410,7 @@
       </p:sp>
       <p:sp>
         <p:nvSpPr>
-          <p:cNvPr id="35" name="Text 33"/>
+          <p:cNvPr id="34" name="Text 32"/>
           <p:cNvSpPr txBox="1"/>
           <p:nvPr/>
         </p:nvSpPr>
@@ -5471,7 +5438,7 @@
               <a:buNone/>
             </a:pPr>
             <a:r>
-              <a:rPr lang="en-US" sz="1500" b="1" dirty="0">
+              <a:rPr lang="en-US" sz="1600" b="1" dirty="0">
                 <a:solidFill>
                   <a:srgbClr val="FFF200"/>
                 </a:solidFill>
@@ -5481,13 +5448,13 @@
               </a:rPr>
               <a:t>4</a:t>
             </a:r>
-            <a:endParaRPr lang="en-US" sz="1500" dirty="0"/>
+            <a:endParaRPr lang="en-US" sz="1600" dirty="0"/>
           </a:p>
         </p:txBody>
       </p:sp>
       <p:sp>
         <p:nvSpPr>
-          <p:cNvPr id="36" name="Text 34"/>
+          <p:cNvPr id="35" name="Text 33"/>
           <p:cNvSpPr txBox="1"/>
           <p:nvPr/>
         </p:nvSpPr>
@@ -5531,7 +5498,7 @@
       </p:sp>
       <p:sp>
         <p:nvSpPr>
-          <p:cNvPr id="37" name="Shape 35"/>
+          <p:cNvPr id="36" name="Shape 34"/>
           <p:cNvSpPr/>
           <p:nvPr/>
         </p:nvSpPr>
@@ -5565,7 +5532,7 @@
       </p:sp>
       <p:sp>
         <p:nvSpPr>
-          <p:cNvPr id="38" name="Shape 36"/>
+          <p:cNvPr id="37" name="Shape 35"/>
           <p:cNvSpPr/>
           <p:nvPr/>
         </p:nvSpPr>
@@ -5592,7 +5559,7 @@
       </p:sp>
       <p:sp>
         <p:nvSpPr>
-          <p:cNvPr id="39" name="Shape 37"/>
+          <p:cNvPr id="38" name="Shape 36"/>
           <p:cNvSpPr/>
           <p:nvPr/>
         </p:nvSpPr>
@@ -5619,7 +5586,7 @@
       </p:sp>
       <p:sp>
         <p:nvSpPr>
-          <p:cNvPr id="40" name="Text 38"/>
+          <p:cNvPr id="39" name="Text 37"/>
           <p:cNvSpPr txBox="1"/>
           <p:nvPr/>
         </p:nvSpPr>
@@ -5647,7 +5614,7 @@
               <a:buNone/>
             </a:pPr>
             <a:r>
-              <a:rPr lang="en-US" sz="1500" b="1" dirty="0">
+              <a:rPr lang="en-US" sz="1600" b="1" dirty="0">
                 <a:solidFill>
                   <a:srgbClr val="FFF200"/>
                 </a:solidFill>
@@ -5657,13 +5624,13 @@
               </a:rPr>
               <a:t>5</a:t>
             </a:r>
-            <a:endParaRPr lang="en-US" sz="1500" dirty="0"/>
+            <a:endParaRPr lang="en-US" sz="1600" dirty="0"/>
           </a:p>
         </p:txBody>
       </p:sp>
       <p:sp>
         <p:nvSpPr>
-          <p:cNvPr id="41" name="Text 39"/>
+          <p:cNvPr id="40" name="Text 38"/>
           <p:cNvSpPr txBox="1"/>
           <p:nvPr/>
         </p:nvSpPr>
@@ -5707,7 +5674,7 @@
       </p:sp>
       <p:sp>
         <p:nvSpPr>
-          <p:cNvPr id="42" name="Shape 40"/>
+          <p:cNvPr id="41" name="Shape 39"/>
           <p:cNvSpPr/>
           <p:nvPr/>
         </p:nvSpPr>
@@ -5741,7 +5708,7 @@
       </p:sp>
       <p:sp>
         <p:nvSpPr>
-          <p:cNvPr id="43" name="Shape 41"/>
+          <p:cNvPr id="42" name="Shape 40"/>
           <p:cNvSpPr/>
           <p:nvPr/>
         </p:nvSpPr>
@@ -5768,7 +5735,7 @@
       </p:sp>
       <p:sp>
         <p:nvSpPr>
-          <p:cNvPr id="44" name="Shape 42"/>
+          <p:cNvPr id="43" name="Shape 41"/>
           <p:cNvSpPr/>
           <p:nvPr/>
         </p:nvSpPr>
@@ -5795,7 +5762,7 @@
       </p:sp>
       <p:sp>
         <p:nvSpPr>
-          <p:cNvPr id="45" name="Text 43"/>
+          <p:cNvPr id="44" name="Text 42"/>
           <p:cNvSpPr txBox="1"/>
           <p:nvPr/>
         </p:nvSpPr>
@@ -5823,7 +5790,7 @@
               <a:buNone/>
             </a:pPr>
             <a:r>
-              <a:rPr lang="en-US" sz="1500" b="1" dirty="0">
+              <a:rPr lang="en-US" sz="1600" b="1" dirty="0">
                 <a:solidFill>
                   <a:srgbClr val="FFF200"/>
                 </a:solidFill>
@@ -5833,13 +5800,13 @@
               </a:rPr>
               <a:t>6</a:t>
             </a:r>
-            <a:endParaRPr lang="en-US" sz="1500" dirty="0"/>
+            <a:endParaRPr lang="en-US" sz="1600" dirty="0"/>
           </a:p>
         </p:txBody>
       </p:sp>
       <p:sp>
         <p:nvSpPr>
-          <p:cNvPr id="46" name="Text 44"/>
+          <p:cNvPr id="45" name="Text 43"/>
           <p:cNvSpPr txBox="1"/>
           <p:nvPr/>
         </p:nvSpPr>
@@ -6119,88 +6086,7 @@
       </p:sp>
       <p:sp>
         <p:nvSpPr>
-          <p:cNvPr id="10" name="Shape 8"/>
-          <p:cNvSpPr/>
-          <p:nvPr/>
-        </p:nvSpPr>
-        <p:spPr>
-          <a:xfrm>
-            <a:off x="731520" y="1207008"/>
-            <a:ext cx="1325880" cy="54864"/>
-          </a:xfrm>
-          <a:prstGeom prst="rect">
-            <a:avLst/>
-          </a:prstGeom>
-          <a:solidFill>
-            <a:srgbClr val="111111"/>
-          </a:solidFill>
-          <a:ln w="12700">
-            <a:solidFill>
-              <a:srgbClr val="111111">
-                <a:alpha val="0"/>
-              </a:srgbClr>
-            </a:solidFill>
-            <a:prstDash val="solid"/>
-          </a:ln>
-        </p:spPr>
-      </p:sp>
-      <p:sp>
-        <p:nvSpPr>
-          <p:cNvPr id="11" name="Shape 9"/>
-          <p:cNvSpPr/>
-          <p:nvPr/>
-        </p:nvSpPr>
-        <p:spPr>
-          <a:xfrm>
-            <a:off x="822960" y="1389888"/>
-            <a:ext cx="4937760" cy="73152"/>
-          </a:xfrm>
-          <a:prstGeom prst="rect">
-            <a:avLst/>
-          </a:prstGeom>
-          <a:solidFill>
-            <a:srgbClr val="111111"/>
-          </a:solidFill>
-          <a:ln w="12700">
-            <a:solidFill>
-              <a:srgbClr val="111111">
-                <a:alpha val="0"/>
-              </a:srgbClr>
-            </a:solidFill>
-            <a:prstDash val="solid"/>
-          </a:ln>
-        </p:spPr>
-      </p:sp>
-      <p:sp>
-        <p:nvSpPr>
-          <p:cNvPr id="12" name="Shape 10"/>
-          <p:cNvSpPr/>
-          <p:nvPr/>
-        </p:nvSpPr>
-        <p:spPr>
-          <a:xfrm>
-            <a:off x="6400800" y="1389888"/>
-            <a:ext cx="4937760" cy="73152"/>
-          </a:xfrm>
-          <a:prstGeom prst="rect">
-            <a:avLst/>
-          </a:prstGeom>
-          <a:solidFill>
-            <a:srgbClr val="111111"/>
-          </a:solidFill>
-          <a:ln w="12700">
-            <a:solidFill>
-              <a:srgbClr val="111111">
-                <a:alpha val="0"/>
-              </a:srgbClr>
-            </a:solidFill>
-            <a:prstDash val="solid"/>
-          </a:ln>
-        </p:spPr>
-      </p:sp>
-      <p:sp>
-        <p:nvSpPr>
-          <p:cNvPr id="13" name="mdpr:1-2-e3669a:title:__title:1-2-e3669a"/>
+          <p:cNvPr id="10" name="mdpr:1-2-e3669a:title:__title:1-2-e3669a"/>
           <p:cNvSpPr txBox="1"/>
           <p:nvPr/>
         </p:nvSpPr>
@@ -6242,14 +6128,14 @@
       </p:sp>
       <p:sp>
         <p:nvSpPr>
-          <p:cNvPr id="14" name="mdpr:1-2-e3669a:left:block-15-chunk-1-block-15-chunk-1"/>
+          <p:cNvPr id="11" name="mdpr:1-2-e3669a:left:block-15-chunk-1-block-15-chunk-1"/>
           <p:cNvSpPr txBox="1"/>
           <p:nvPr/>
         </p:nvSpPr>
         <p:spPr>
           <a:xfrm>
-            <a:off x="896112" y="1499616"/>
-            <a:ext cx="4791456" cy="4398264"/>
+            <a:off x="896112" y="1463040"/>
+            <a:ext cx="4791456" cy="4261104"/>
           </a:xfrm>
           <a:prstGeom prst="rect">
             <a:avLst/>
@@ -6341,14 +6227,14 @@
       </p:sp>
       <p:sp>
         <p:nvSpPr>
-          <p:cNvPr id="15" name="mdpr:1-2-e3669a:right:block-15-chunk-1-block-15-chunk-1"/>
+          <p:cNvPr id="12" name="mdpr:1-2-e3669a:right:block-15-chunk-1"/>
           <p:cNvSpPr txBox="1"/>
           <p:nvPr/>
         </p:nvSpPr>
         <p:spPr>
           <a:xfrm>
-            <a:off x="6473952" y="1499616"/>
-            <a:ext cx="4791456" cy="4398264"/>
+            <a:off x="6473952" y="1463040"/>
+            <a:ext cx="4791456" cy="4261104"/>
           </a:xfrm>
           <a:prstGeom prst="rect">
             <a:avLst/>
@@ -6396,46 +6282,6 @@
             </a:r>
             <a:endParaRPr lang="en-US" sz="1800" dirty="0"/>
           </a:p>
-          <a:p>
-            <a:pPr algn="l" indent="0" marL="0">
-              <a:lnSpc>
-                <a:spcPct val="120000"/>
-              </a:lnSpc>
-              <a:buNone/>
-            </a:pPr>
-            <a:r>
-              <a:rPr lang="en-US" sz="1800" b="1" dirty="0">
-                <a:solidFill>
-                  <a:srgbClr val="111111"/>
-                </a:solidFill>
-                <a:latin typeface="Pretendard" pitchFamily="34" charset="0"/>
-                <a:ea typeface="Pretendard" pitchFamily="34" charset="-122"/>
-                <a:cs typeface="Pretendard" pitchFamily="34" charset="-120"/>
-              </a:rPr>
-              <a:t>- Connectors</a:t>
-            </a:r>
-            <a:endParaRPr lang="en-US" sz="1800" dirty="0"/>
-          </a:p>
-          <a:p>
-            <a:pPr algn="l" indent="0" marL="0">
-              <a:lnSpc>
-                <a:spcPct val="120000"/>
-              </a:lnSpc>
-              <a:buNone/>
-            </a:pPr>
-            <a:r>
-              <a:rPr lang="en-US" sz="1800" dirty="0">
-                <a:solidFill>
-                  <a:srgbClr val="111111"/>
-                </a:solidFill>
-                <a:latin typeface="Pretendard" pitchFamily="34" charset="0"/>
-                <a:ea typeface="Pretendard" pitchFamily="34" charset="-122"/>
-                <a:cs typeface="Pretendard" pitchFamily="34" charset="-120"/>
-              </a:rPr>
-              <a:t>  straight-arrow, elbow-arrow, boundary-attach, overlap-joint, parallel-flow, contrast-flow.</a:t>
-            </a:r>
-            <a:endParaRPr lang="en-US" sz="1800" dirty="0"/>
-          </a:p>
         </p:txBody>
       </p:sp>
     </p:spTree>
@@ -6676,88 +6522,7 @@
       </p:sp>
       <p:sp>
         <p:nvSpPr>
-          <p:cNvPr id="10" name="Shape 8"/>
-          <p:cNvSpPr/>
-          <p:nvPr/>
-        </p:nvSpPr>
-        <p:spPr>
-          <a:xfrm>
-            <a:off x="731520" y="1207008"/>
-            <a:ext cx="1325880" cy="54864"/>
-          </a:xfrm>
-          <a:prstGeom prst="rect">
-            <a:avLst/>
-          </a:prstGeom>
-          <a:solidFill>
-            <a:srgbClr val="111111"/>
-          </a:solidFill>
-          <a:ln w="12700">
-            <a:solidFill>
-              <a:srgbClr val="111111">
-                <a:alpha val="0"/>
-              </a:srgbClr>
-            </a:solidFill>
-            <a:prstDash val="solid"/>
-          </a:ln>
-        </p:spPr>
-      </p:sp>
-      <p:sp>
-        <p:nvSpPr>
-          <p:cNvPr id="11" name="Shape 9"/>
-          <p:cNvSpPr/>
-          <p:nvPr/>
-        </p:nvSpPr>
-        <p:spPr>
-          <a:xfrm>
-            <a:off x="822960" y="1554480"/>
-            <a:ext cx="4937760" cy="73152"/>
-          </a:xfrm>
-          <a:prstGeom prst="rect">
-            <a:avLst/>
-          </a:prstGeom>
-          <a:solidFill>
-            <a:srgbClr val="111111"/>
-          </a:solidFill>
-          <a:ln w="12700">
-            <a:solidFill>
-              <a:srgbClr val="111111">
-                <a:alpha val="0"/>
-              </a:srgbClr>
-            </a:solidFill>
-            <a:prstDash val="solid"/>
-          </a:ln>
-        </p:spPr>
-      </p:sp>
-      <p:sp>
-        <p:nvSpPr>
-          <p:cNvPr id="12" name="Shape 10"/>
-          <p:cNvSpPr/>
-          <p:nvPr/>
-        </p:nvSpPr>
-        <p:spPr>
-          <a:xfrm>
-            <a:off x="6400800" y="1554480"/>
-            <a:ext cx="4937760" cy="73152"/>
-          </a:xfrm>
-          <a:prstGeom prst="rect">
-            <a:avLst/>
-          </a:prstGeom>
-          <a:solidFill>
-            <a:srgbClr val="111111"/>
-          </a:solidFill>
-          <a:ln w="12700">
-            <a:solidFill>
-              <a:srgbClr val="111111">
-                <a:alpha val="0"/>
-              </a:srgbClr>
-            </a:solidFill>
-            <a:prstDash val="solid"/>
-          </a:ln>
-        </p:spPr>
-      </p:sp>
-      <p:sp>
-        <p:nvSpPr>
-          <p:cNvPr id="13" name="mdpr:2-2-c23e9b:title:__title:2-2-c23e9b"/>
+          <p:cNvPr id="10" name="mdpr:2-2-c23e9b:title:__title:2-2-c23e9b"/>
           <p:cNvSpPr txBox="1"/>
           <p:nvPr/>
         </p:nvSpPr>
@@ -6791,7 +6556,24 @@
                 <a:ea typeface="Pretendard" pitchFamily="34" charset="-122"/>
                 <a:cs typeface="Pretendard" pitchFamily="34" charset="-120"/>
               </a:rPr>
-              <a:t>Decoration Pattern Catalog (Cont. 2/2)</a:t>
+              <a:t>Decoration Pattern Catalog</a:t>
+            </a:r>
+            <a:pPr algn="ctr" indent="0" marL="0">
+              <a:lnSpc>
+                <a:spcPct val="120000"/>
+              </a:lnSpc>
+              <a:buNone/>
+            </a:pPr>
+            <a:r>
+              <a:rPr lang="en-US" sz="2000" dirty="0">
+                <a:solidFill>
+                  <a:srgbClr val="888888"/>
+                </a:solidFill>
+                <a:latin typeface="Pretendard" pitchFamily="34" charset="0"/>
+                <a:ea typeface="Pretendard" pitchFamily="34" charset="-122"/>
+                <a:cs typeface="Pretendard" pitchFamily="34" charset="-120"/>
+              </a:rPr>
+              <a:t> (Cont. 2/2)</a:t>
             </a:r>
             <a:endParaRPr lang="en-US" sz="3400" dirty="0"/>
           </a:p>
@@ -6799,14 +6581,14 @@
       </p:sp>
       <p:sp>
         <p:nvSpPr>
-          <p:cNvPr id="14" name="mdpr:2-2-c23e9b:left:block-15-chunk-2"/>
+          <p:cNvPr id="11" name="mdpr:2-2-c23e9b:left:block-15-chunk-2-block-15-chunk-2"/>
           <p:cNvSpPr txBox="1"/>
           <p:nvPr/>
         </p:nvSpPr>
         <p:spPr>
           <a:xfrm>
-            <a:off x="896112" y="1664208"/>
-            <a:ext cx="4791456" cy="4169664"/>
+            <a:off x="896112" y="1463040"/>
+            <a:ext cx="4791456" cy="4261104"/>
           </a:xfrm>
           <a:prstGeom prst="rect">
             <a:avLst/>
@@ -6825,7 +6607,44 @@
               <a:buNone/>
             </a:pPr>
             <a:r>
-              <a:rPr lang="en-US" sz="2200" b="1" dirty="0">
+              <a:rPr lang="en-US" sz="1800" b="1" dirty="0">
+                <a:solidFill>
+                  <a:srgbClr val="111111"/>
+                </a:solidFill>
+                <a:latin typeface="Pretendard" pitchFamily="34" charset="0"/>
+                <a:ea typeface="Pretendard" pitchFamily="34" charset="-122"/>
+                <a:cs typeface="Pretendard" pitchFamily="34" charset="-120"/>
+              </a:rPr>
+              <a:t>- Connectors</a:t>
+            </a:r>
+            <a:pPr algn="l" indent="0" marL="0">
+              <a:lnSpc>
+                <a:spcPct val="120000"/>
+              </a:lnSpc>
+              <a:buNone/>
+            </a:pPr>
+            <a:r>
+              <a:rPr lang="en-US" sz="1800" dirty="0">
+                <a:solidFill>
+                  <a:srgbClr val="111111"/>
+                </a:solidFill>
+                <a:latin typeface="Pretendard" pitchFamily="34" charset="0"/>
+                <a:ea typeface="Pretendard" pitchFamily="34" charset="-122"/>
+                <a:cs typeface="Pretendard" pitchFamily="34" charset="-120"/>
+              </a:rPr>
+              <a:t>  straight-arrow, elbow-arrow, boundary-attach, overlap-joint, parallel-flow, contrast-flow.</a:t>
+            </a:r>
+            <a:endParaRPr lang="en-US" sz="1800" dirty="0"/>
+          </a:p>
+          <a:p>
+            <a:pPr algn="l" indent="0" marL="0">
+              <a:lnSpc>
+                <a:spcPct val="120000"/>
+              </a:lnSpc>
+              <a:buNone/>
+            </a:pPr>
+            <a:r>
+              <a:rPr lang="en-US" sz="1800" b="1" dirty="0">
                 <a:solidFill>
                   <a:srgbClr val="111111"/>
                 </a:solidFill>
@@ -6835,6 +6654,9 @@
               </a:rPr>
               <a:t>- Icons</a:t>
             </a:r>
+            <a:endParaRPr lang="en-US" sz="1800" dirty="0"/>
+          </a:p>
+          <a:p>
             <a:pPr algn="l" indent="0" marL="0">
               <a:lnSpc>
                 <a:spcPct val="120000"/>
@@ -6842,7 +6664,7 @@
               <a:buNone/>
             </a:pPr>
             <a:r>
-              <a:rPr lang="en-US" sz="2200" dirty="0">
+              <a:rPr lang="en-US" sz="1800" dirty="0">
                 <a:solidFill>
                   <a:srgbClr val="111111"/>
                 </a:solidFill>
@@ -6852,20 +6674,20 @@
               </a:rPr>
               <a:t>  number-badge, mono-icon-slot, letter-disc, quiet-aside, image-safe-frame, brand-glyph.</a:t>
             </a:r>
-            <a:endParaRPr lang="en-US" sz="2200" dirty="0"/>
+            <a:endParaRPr lang="en-US" sz="1800" dirty="0"/>
           </a:p>
         </p:txBody>
       </p:sp>
       <p:sp>
         <p:nvSpPr>
-          <p:cNvPr id="15" name="mdpr:2-2-c23e9b:right:block-15-chunk-2"/>
+          <p:cNvPr id="12" name="mdpr:2-2-c23e9b:right:block-15-chunk-2"/>
           <p:cNvSpPr txBox="1"/>
           <p:nvPr/>
         </p:nvSpPr>
         <p:spPr>
           <a:xfrm>
-            <a:off x="6473952" y="1664208"/>
-            <a:ext cx="4791456" cy="4169664"/>
+            <a:off x="6473952" y="1463040"/>
+            <a:ext cx="4791456" cy="4261104"/>
           </a:xfrm>
           <a:prstGeom prst="rect">
             <a:avLst/>
@@ -6884,7 +6706,7 @@
               <a:buNone/>
             </a:pPr>
             <a:r>
-              <a:rPr lang="en-US" sz="2200" b="1" dirty="0">
+              <a:rPr lang="en-US" sz="1800" b="1" dirty="0">
                 <a:solidFill>
                   <a:srgbClr val="111111"/>
                 </a:solidFill>
@@ -6901,7 +6723,7 @@
               <a:buNone/>
             </a:pPr>
             <a:r>
-              <a:rPr lang="en-US" sz="2200" dirty="0">
+              <a:rPr lang="en-US" sz="1800" dirty="0">
                 <a:solidFill>
                   <a:srgbClr val="111111"/>
                 </a:solidFill>
@@ -6911,7 +6733,7 @@
               </a:rPr>
               <a:t>  skeuomorphic-bevel, glassmorphism-surface, newmorphic-panel, clay-blob, bento-tile, liquid-lens.</a:t>
             </a:r>
-            <a:endParaRPr lang="en-US" sz="2200" dirty="0"/>
+            <a:endParaRPr lang="en-US" sz="1800" dirty="0"/>
           </a:p>
         </p:txBody>
       </p:sp>
@@ -7151,36 +6973,9 @@
           </a:ln>
         </p:spPr>
       </p:sp>
-      <p:sp>
-        <p:nvSpPr>
-          <p:cNvPr id="10" name="Shape 8"/>
-          <p:cNvSpPr/>
-          <p:nvPr/>
-        </p:nvSpPr>
-        <p:spPr>
-          <a:xfrm>
-            <a:off x="731520" y="1207008"/>
-            <a:ext cx="1325880" cy="54864"/>
-          </a:xfrm>
-          <a:prstGeom prst="rect">
-            <a:avLst/>
-          </a:prstGeom>
-          <a:solidFill>
-            <a:srgbClr val="111111"/>
-          </a:solidFill>
-          <a:ln w="12700">
-            <a:solidFill>
-              <a:srgbClr val="111111">
-                <a:alpha val="0"/>
-              </a:srgbClr>
-            </a:solidFill>
-            <a:prstDash val="solid"/>
-          </a:ln>
-        </p:spPr>
-      </p:sp>
       <p:pic>
         <p:nvPicPr>
-          <p:cNvPr id="11" name="Image 0" descr="preencoded.png">    </p:cNvPr>
+          <p:cNvPr id="10" name="Image 0" descr="preencoded.png">    </p:cNvPr>
           <p:cNvPicPr>
             <a:picLocks noChangeAspect="1"/>
           </p:cNvPicPr>
@@ -7210,7 +7005,7 @@
       </p:pic>
       <p:sp>
         <p:nvSpPr>
-          <p:cNvPr id="12" name="mdpr:table-coherence-2f9a7b:title:__title:table-coherence-2f9a7b"/>
+          <p:cNvPr id="11" name="mdpr:table-coherence-2f9a7b:title:__title:table-coherence-2f9a7b"/>
           <p:cNvSpPr txBox="1"/>
           <p:nvPr/>
         </p:nvSpPr>
@@ -8541,36 +8336,9 @@
           </a:ln>
         </p:spPr>
       </p:sp>
-      <p:sp>
-        <p:nvSpPr>
-          <p:cNvPr id="10" name="Shape 8"/>
-          <p:cNvSpPr/>
-          <p:nvPr/>
-        </p:nvSpPr>
-        <p:spPr>
-          <a:xfrm>
-            <a:off x="731520" y="1207008"/>
-            <a:ext cx="1325880" cy="54864"/>
-          </a:xfrm>
-          <a:prstGeom prst="rect">
-            <a:avLst/>
-          </a:prstGeom>
-          <a:solidFill>
-            <a:srgbClr val="111111"/>
-          </a:solidFill>
-          <a:ln w="12700">
-            <a:solidFill>
-              <a:srgbClr val="111111">
-                <a:alpha val="0"/>
-              </a:srgbClr>
-            </a:solidFill>
-            <a:prstDash val="solid"/>
-          </a:ln>
-        </p:spPr>
-      </p:sp>
       <p:pic>
         <p:nvPicPr>
-          <p:cNvPr id="11" name="Image 0" descr="preencoded.png">    </p:cNvPr>
+          <p:cNvPr id="10" name="Image 0" descr="preencoded.png">    </p:cNvPr>
           <p:cNvPicPr>
             <a:picLocks noChangeAspect="1"/>
           </p:cNvPicPr>
@@ -8600,7 +8368,7 @@
       </p:pic>
       <p:sp>
         <p:nvSpPr>
-          <p:cNvPr id="12" name="Shape 9"/>
+          <p:cNvPr id="11" name="Shape 8"/>
           <p:cNvSpPr/>
           <p:nvPr/>
         </p:nvSpPr>
@@ -8627,7 +8395,7 @@
       </p:sp>
       <p:sp>
         <p:nvSpPr>
-          <p:cNvPr id="13" name="mdpr:1-2-2ff3f0:title:__title:1-2-2ff3f0"/>
+          <p:cNvPr id="12" name="mdpr:1-2-2ff3f0:title:__title:1-2-2ff3f0"/>
           <p:cNvSpPr txBox="1"/>
           <p:nvPr/>
         </p:nvSpPr>
@@ -8669,7 +8437,7 @@
       </p:sp>
       <p:sp>
         <p:nvSpPr>
-          <p:cNvPr id="14" name="mdpr:1-2-2ff3f0:body:block-19"/>
+          <p:cNvPr id="13" name="mdpr:1-2-2ff3f0:body:block-19"/>
           <p:cNvSpPr txBox="1"/>
           <p:nvPr/>
         </p:nvSpPr>
@@ -8808,7 +8576,7 @@
       </p:sp>
       <p:graphicFrame>
         <p:nvGraphicFramePr>
-          <p:cNvPr id="15" name="Chart 0" descr=""/>
+          <p:cNvPr id="14" name="Chart 0" descr=""/>
           <p:cNvGraphicFramePr/>
           <p:nvPr/>
         </p:nvGraphicFramePr>
@@ -9058,36 +8826,9 @@
           </a:ln>
         </p:spPr>
       </p:sp>
-      <p:sp>
-        <p:nvSpPr>
-          <p:cNvPr id="10" name="Shape 8"/>
-          <p:cNvSpPr/>
-          <p:nvPr/>
-        </p:nvSpPr>
-        <p:spPr>
-          <a:xfrm>
-            <a:off x="731520" y="1207008"/>
-            <a:ext cx="1325880" cy="54864"/>
-          </a:xfrm>
-          <a:prstGeom prst="rect">
-            <a:avLst/>
-          </a:prstGeom>
-          <a:solidFill>
-            <a:srgbClr val="111111"/>
-          </a:solidFill>
-          <a:ln w="12700">
-            <a:solidFill>
-              <a:srgbClr val="111111">
-                <a:alpha val="0"/>
-              </a:srgbClr>
-            </a:solidFill>
-            <a:prstDash val="solid"/>
-          </a:ln>
-        </p:spPr>
-      </p:sp>
       <p:pic>
         <p:nvPicPr>
-          <p:cNvPr id="11" name="Image 0" descr="preencoded.png">    </p:cNvPr>
+          <p:cNvPr id="10" name="Image 0" descr="preencoded.png">    </p:cNvPr>
           <p:cNvPicPr>
             <a:picLocks noChangeAspect="1"/>
           </p:cNvPicPr>
@@ -9117,7 +8858,7 @@
       </p:pic>
       <p:sp>
         <p:nvSpPr>
-          <p:cNvPr id="12" name="mdpr:2-2-542095:title:__title:2-2-542095"/>
+          <p:cNvPr id="11" name="mdpr:2-2-542095:title:__title:2-2-542095"/>
           <p:cNvSpPr txBox="1"/>
           <p:nvPr/>
         </p:nvSpPr>
@@ -9151,7 +8892,24 @@
                 <a:ea typeface="Pretendard" pitchFamily="34" charset="-122"/>
                 <a:cs typeface="Pretendard" pitchFamily="34" charset="-120"/>
               </a:rPr>
-              <a:t>Chart and Table Pair (Cont. 2/2)</a:t>
+              <a:t>Chart and Table Pair</a:t>
+            </a:r>
+            <a:pPr algn="ctr" indent="0" marL="0">
+              <a:lnSpc>
+                <a:spcPct val="120000"/>
+              </a:lnSpc>
+              <a:buNone/>
+            </a:pPr>
+            <a:r>
+              <a:rPr lang="en-US" sz="2000" dirty="0">
+                <a:solidFill>
+                  <a:srgbClr val="888888"/>
+                </a:solidFill>
+                <a:latin typeface="Pretendard" pitchFamily="34" charset="0"/>
+                <a:ea typeface="Pretendard" pitchFamily="34" charset="-122"/>
+                <a:cs typeface="Pretendard" pitchFamily="34" charset="-120"/>
+              </a:rPr>
+              <a:t> (Cont. 2/2)</a:t>
             </a:r>
             <a:endParaRPr lang="en-US" sz="3400" dirty="0"/>
           </a:p>
@@ -10236,36 +9994,9 @@
           </a:ln>
         </p:spPr>
       </p:sp>
-      <p:sp>
-        <p:nvSpPr>
-          <p:cNvPr id="10" name="Shape 8"/>
-          <p:cNvSpPr/>
-          <p:nvPr/>
-        </p:nvSpPr>
-        <p:spPr>
-          <a:xfrm>
-            <a:off x="731520" y="1207008"/>
-            <a:ext cx="1325880" cy="54864"/>
-          </a:xfrm>
-          <a:prstGeom prst="rect">
-            <a:avLst/>
-          </a:prstGeom>
-          <a:solidFill>
-            <a:srgbClr val="111111"/>
-          </a:solidFill>
-          <a:ln w="12700">
-            <a:solidFill>
-              <a:srgbClr val="111111">
-                <a:alpha val="0"/>
-              </a:srgbClr>
-            </a:solidFill>
-            <a:prstDash val="solid"/>
-          </a:ln>
-        </p:spPr>
-      </p:sp>
       <p:pic>
         <p:nvPicPr>
-          <p:cNvPr id="11" name="Image 0" descr="preencoded.png">    </p:cNvPr>
+          <p:cNvPr id="10" name="Image 0" descr="preencoded.png">    </p:cNvPr>
           <p:cNvPicPr>
             <a:picLocks noChangeAspect="1"/>
           </p:cNvPicPr>
@@ -10295,7 +10026,7 @@
       </p:pic>
       <p:sp>
         <p:nvSpPr>
-          <p:cNvPr id="12" name="mdpr:1-2-b8955f:title:__title:1-2-b8955f"/>
+          <p:cNvPr id="11" name="mdpr:1-2-b8955f:title:__title:1-2-b8955f"/>
           <p:cNvSpPr txBox="1"/>
           <p:nvPr/>
         </p:nvSpPr>
@@ -10337,7 +10068,7 @@
       </p:sp>
       <p:sp>
         <p:nvSpPr>
-          <p:cNvPr id="13" name="Shape 10"/>
+          <p:cNvPr id="12" name="Shape 9"/>
           <p:cNvSpPr/>
           <p:nvPr/>
         </p:nvSpPr>
@@ -10370,7 +10101,7 @@
       </p:sp>
       <p:sp>
         <p:nvSpPr>
-          <p:cNvPr id="14" name="Shape 11"/>
+          <p:cNvPr id="13" name="Shape 10"/>
           <p:cNvSpPr/>
           <p:nvPr/>
         </p:nvSpPr>
@@ -10401,7 +10132,7 @@
       </p:sp>
       <p:sp>
         <p:nvSpPr>
-          <p:cNvPr id="15" name="Shape 12"/>
+          <p:cNvPr id="14" name="Shape 11"/>
           <p:cNvSpPr/>
           <p:nvPr/>
         </p:nvSpPr>
@@ -10432,7 +10163,7 @@
       </p:sp>
       <p:sp>
         <p:nvSpPr>
-          <p:cNvPr id="16" name="Shape 13"/>
+          <p:cNvPr id="15" name="Shape 12"/>
           <p:cNvSpPr/>
           <p:nvPr/>
         </p:nvSpPr>
@@ -10457,7 +10188,7 @@
       </p:sp>
       <p:sp>
         <p:nvSpPr>
-          <p:cNvPr id="17" name="Shape 14"/>
+          <p:cNvPr id="16" name="Shape 13"/>
           <p:cNvSpPr/>
           <p:nvPr/>
         </p:nvSpPr>
@@ -10484,7 +10215,7 @@
       </p:sp>
       <p:sp>
         <p:nvSpPr>
-          <p:cNvPr id="18" name="Text 15"/>
+          <p:cNvPr id="17" name="Text 14"/>
           <p:cNvSpPr txBox="1"/>
           <p:nvPr/>
         </p:nvSpPr>
@@ -10528,7 +10259,7 @@
       </p:sp>
       <p:sp>
         <p:nvSpPr>
-          <p:cNvPr id="19" name="Text 16"/>
+          <p:cNvPr id="18" name="Text 15"/>
           <p:cNvSpPr txBox="1"/>
           <p:nvPr/>
         </p:nvSpPr>
@@ -10570,7 +10301,7 @@
       </p:sp>
       <p:sp>
         <p:nvSpPr>
-          <p:cNvPr id="20" name="Shape 17"/>
+          <p:cNvPr id="19" name="Shape 16"/>
           <p:cNvSpPr/>
           <p:nvPr/>
         </p:nvSpPr>
@@ -10597,7 +10328,7 @@
       </p:sp>
       <p:sp>
         <p:nvSpPr>
-          <p:cNvPr id="21" name="Text 18"/>
+          <p:cNvPr id="20" name="Text 17"/>
           <p:cNvSpPr txBox="1"/>
           <p:nvPr/>
         </p:nvSpPr>
@@ -10641,7 +10372,7 @@
       </p:sp>
       <p:sp>
         <p:nvSpPr>
-          <p:cNvPr id="22" name="Shape 19"/>
+          <p:cNvPr id="21" name="Shape 18"/>
           <p:cNvSpPr/>
           <p:nvPr/>
         </p:nvSpPr>
@@ -10668,7 +10399,7 @@
       </p:sp>
       <p:sp>
         <p:nvSpPr>
-          <p:cNvPr id="23" name="Text 20"/>
+          <p:cNvPr id="22" name="Text 19"/>
           <p:cNvSpPr txBox="1"/>
           <p:nvPr/>
         </p:nvSpPr>
@@ -10712,7 +10443,7 @@
       </p:sp>
       <p:sp>
         <p:nvSpPr>
-          <p:cNvPr id="24" name="Shape 21"/>
+          <p:cNvPr id="23" name="Shape 20"/>
           <p:cNvSpPr/>
           <p:nvPr/>
         </p:nvSpPr>
@@ -10743,7 +10474,7 @@
       </p:sp>
       <p:sp>
         <p:nvSpPr>
-          <p:cNvPr id="25" name="Shape 22"/>
+          <p:cNvPr id="24" name="Shape 21"/>
           <p:cNvSpPr/>
           <p:nvPr/>
         </p:nvSpPr>
@@ -10772,7 +10503,7 @@
       </p:sp>
       <p:sp>
         <p:nvSpPr>
-          <p:cNvPr id="26" name="Shape 23"/>
+          <p:cNvPr id="25" name="Shape 22"/>
           <p:cNvSpPr/>
           <p:nvPr/>
         </p:nvSpPr>
@@ -10795,7 +10526,7 @@
       </p:sp>
       <p:sp>
         <p:nvSpPr>
-          <p:cNvPr id="27" name="Shape 24"/>
+          <p:cNvPr id="26" name="Shape 23"/>
           <p:cNvSpPr/>
           <p:nvPr/>
         </p:nvSpPr>
@@ -10820,7 +10551,7 @@
       </p:sp>
       <p:sp>
         <p:nvSpPr>
-          <p:cNvPr id="28" name="Shape 25"/>
+          <p:cNvPr id="27" name="Shape 24"/>
           <p:cNvSpPr/>
           <p:nvPr/>
         </p:nvSpPr>
@@ -10845,7 +10576,7 @@
       </p:sp>
       <p:sp>
         <p:nvSpPr>
-          <p:cNvPr id="29" name="Shape 26"/>
+          <p:cNvPr id="28" name="Shape 25"/>
           <p:cNvSpPr/>
           <p:nvPr/>
         </p:nvSpPr>
@@ -10870,7 +10601,7 @@
       </p:sp>
       <p:sp>
         <p:nvSpPr>
-          <p:cNvPr id="30" name="Text 27"/>
+          <p:cNvPr id="29" name="Text 26"/>
           <p:cNvSpPr txBox="1"/>
           <p:nvPr/>
         </p:nvSpPr>
@@ -10914,7 +10645,7 @@
       </p:sp>
       <p:sp>
         <p:nvSpPr>
-          <p:cNvPr id="31" name="Text 28"/>
+          <p:cNvPr id="30" name="Text 27"/>
           <p:cNvSpPr txBox="1"/>
           <p:nvPr/>
         </p:nvSpPr>
@@ -10956,7 +10687,7 @@
       </p:sp>
       <p:sp>
         <p:nvSpPr>
-          <p:cNvPr id="32" name="Text 29"/>
+          <p:cNvPr id="31" name="Text 28"/>
           <p:cNvSpPr txBox="1"/>
           <p:nvPr/>
         </p:nvSpPr>
@@ -10998,7 +10729,7 @@
       </p:sp>
       <p:sp>
         <p:nvSpPr>
-          <p:cNvPr id="33" name="Text 30"/>
+          <p:cNvPr id="32" name="Text 29"/>
           <p:cNvSpPr txBox="1"/>
           <p:nvPr/>
         </p:nvSpPr>
@@ -11274,36 +11005,9 @@
           </a:ln>
         </p:spPr>
       </p:sp>
-      <p:sp>
-        <p:nvSpPr>
-          <p:cNvPr id="10" name="Shape 8"/>
-          <p:cNvSpPr/>
-          <p:nvPr/>
-        </p:nvSpPr>
-        <p:spPr>
-          <a:xfrm>
-            <a:off x="731520" y="1207008"/>
-            <a:ext cx="1325880" cy="54864"/>
-          </a:xfrm>
-          <a:prstGeom prst="rect">
-            <a:avLst/>
-          </a:prstGeom>
-          <a:solidFill>
-            <a:srgbClr val="111111"/>
-          </a:solidFill>
-          <a:ln w="12700">
-            <a:solidFill>
-              <a:srgbClr val="111111">
-                <a:alpha val="0"/>
-              </a:srgbClr>
-            </a:solidFill>
-            <a:prstDash val="solid"/>
-          </a:ln>
-        </p:spPr>
-      </p:sp>
       <p:pic>
         <p:nvPicPr>
-          <p:cNvPr id="11" name="Image 0" descr="preencoded.png">    </p:cNvPr>
+          <p:cNvPr id="10" name="Image 0" descr="preencoded.png">    </p:cNvPr>
           <p:cNvPicPr>
             <a:picLocks noChangeAspect="1"/>
           </p:cNvPicPr>
@@ -11333,7 +11037,7 @@
       </p:pic>
       <p:sp>
         <p:nvSpPr>
-          <p:cNvPr id="12" name="mdpr:2-2-4dc4c1:title:__title:2-2-4dc4c1"/>
+          <p:cNvPr id="11" name="mdpr:2-2-4dc4c1:title:__title:2-2-4dc4c1"/>
           <p:cNvSpPr txBox="1"/>
           <p:nvPr/>
         </p:nvSpPr>
@@ -11367,7 +11071,24 @@
                 <a:ea typeface="Pretendard" pitchFamily="34" charset="-122"/>
                 <a:cs typeface="Pretendard" pitchFamily="34" charset="-120"/>
               </a:rPr>
-              <a:t>Editable Proof Objects (Cont. 2/2)</a:t>
+              <a:t>Editable Proof Objects</a:t>
+            </a:r>
+            <a:pPr algn="ctr" indent="0" marL="0">
+              <a:lnSpc>
+                <a:spcPct val="120000"/>
+              </a:lnSpc>
+              <a:buNone/>
+            </a:pPr>
+            <a:r>
+              <a:rPr lang="en-US" sz="2000" dirty="0">
+                <a:solidFill>
+                  <a:srgbClr val="888888"/>
+                </a:solidFill>
+                <a:latin typeface="Pretendard" pitchFamily="34" charset="0"/>
+                <a:ea typeface="Pretendard" pitchFamily="34" charset="-122"/>
+                <a:cs typeface="Pretendard" pitchFamily="34" charset="-120"/>
+              </a:rPr>
+              <a:t> (Cont. 2/2)</a:t>
             </a:r>
             <a:endParaRPr lang="en-US" sz="3400" dirty="0"/>
           </a:p>
@@ -11375,7 +11096,7 @@
       </p:sp>
       <p:sp>
         <p:nvSpPr>
-          <p:cNvPr id="13" name="Shape 10"/>
+          <p:cNvPr id="12" name="Shape 9"/>
           <p:cNvSpPr/>
           <p:nvPr/>
         </p:nvSpPr>
@@ -11402,7 +11123,7 @@
       </p:sp>
       <p:sp>
         <p:nvSpPr>
-          <p:cNvPr id="14" name="Shape 11"/>
+          <p:cNvPr id="13" name="Shape 10"/>
           <p:cNvSpPr/>
           <p:nvPr/>
         </p:nvSpPr>
@@ -11429,7 +11150,7 @@
       </p:sp>
       <p:sp>
         <p:nvSpPr>
-          <p:cNvPr id="15" name="Text 12"/>
+          <p:cNvPr id="14" name="Text 11"/>
           <p:cNvSpPr txBox="1"/>
           <p:nvPr/>
         </p:nvSpPr>
@@ -11473,7 +11194,7 @@
       </p:sp>
       <p:sp>
         <p:nvSpPr>
-          <p:cNvPr id="16" name="Text 13"/>
+          <p:cNvPr id="15" name="Text 12"/>
           <p:cNvSpPr txBox="1"/>
           <p:nvPr/>
         </p:nvSpPr>
@@ -11517,7 +11238,7 @@
       </p:sp>
       <p:sp>
         <p:nvSpPr>
-          <p:cNvPr id="17" name="Shape 14"/>
+          <p:cNvPr id="16" name="Shape 13"/>
           <p:cNvSpPr/>
           <p:nvPr/>
         </p:nvSpPr>
@@ -11544,7 +11265,7 @@
       </p:sp>
       <p:sp>
         <p:nvSpPr>
-          <p:cNvPr id="18" name="Shape 15"/>
+          <p:cNvPr id="17" name="Shape 14"/>
           <p:cNvSpPr/>
           <p:nvPr/>
         </p:nvSpPr>
@@ -11571,7 +11292,7 @@
       </p:sp>
       <p:sp>
         <p:nvSpPr>
-          <p:cNvPr id="19" name="Text 16"/>
+          <p:cNvPr id="18" name="Text 15"/>
           <p:cNvSpPr txBox="1"/>
           <p:nvPr/>
         </p:nvSpPr>
@@ -11615,7 +11336,7 @@
       </p:sp>
       <p:sp>
         <p:nvSpPr>
-          <p:cNvPr id="20" name="Text 17"/>
+          <p:cNvPr id="19" name="Text 16"/>
           <p:cNvSpPr txBox="1"/>
           <p:nvPr/>
         </p:nvSpPr>
@@ -11659,7 +11380,7 @@
       </p:sp>
       <p:sp>
         <p:nvSpPr>
-          <p:cNvPr id="21" name="Shape 18"/>
+          <p:cNvPr id="20" name="Shape 17"/>
           <p:cNvSpPr/>
           <p:nvPr/>
         </p:nvSpPr>
@@ -11686,7 +11407,7 @@
       </p:sp>
       <p:sp>
         <p:nvSpPr>
-          <p:cNvPr id="22" name="Shape 19"/>
+          <p:cNvPr id="21" name="Shape 18"/>
           <p:cNvSpPr/>
           <p:nvPr/>
         </p:nvSpPr>
@@ -11713,7 +11434,7 @@
       </p:sp>
       <p:sp>
         <p:nvSpPr>
-          <p:cNvPr id="23" name="Text 20"/>
+          <p:cNvPr id="22" name="Text 19"/>
           <p:cNvSpPr txBox="1"/>
           <p:nvPr/>
         </p:nvSpPr>
@@ -11757,7 +11478,7 @@
       </p:sp>
       <p:sp>
         <p:nvSpPr>
-          <p:cNvPr id="24" name="Text 21"/>
+          <p:cNvPr id="23" name="Text 20"/>
           <p:cNvSpPr txBox="1"/>
           <p:nvPr/>
         </p:nvSpPr>
@@ -11801,7 +11522,7 @@
       </p:sp>
       <p:sp>
         <p:nvSpPr>
-          <p:cNvPr id="25" name="Shape 22"/>
+          <p:cNvPr id="24" name="Shape 21"/>
           <p:cNvSpPr/>
           <p:nvPr/>
         </p:nvSpPr>
@@ -11828,7 +11549,7 @@
       </p:sp>
       <p:sp>
         <p:nvSpPr>
-          <p:cNvPr id="26" name="Shape 23"/>
+          <p:cNvPr id="25" name="Shape 22"/>
           <p:cNvSpPr/>
           <p:nvPr/>
         </p:nvSpPr>
@@ -11855,7 +11576,7 @@
       </p:sp>
       <p:sp>
         <p:nvSpPr>
-          <p:cNvPr id="27" name="Text 24"/>
+          <p:cNvPr id="26" name="Text 23"/>
           <p:cNvSpPr txBox="1"/>
           <p:nvPr/>
         </p:nvSpPr>
@@ -11899,7 +11620,7 @@
       </p:sp>
       <p:sp>
         <p:nvSpPr>
-          <p:cNvPr id="28" name="Text 25"/>
+          <p:cNvPr id="27" name="Text 24"/>
           <p:cNvSpPr txBox="1"/>
           <p:nvPr/>
         </p:nvSpPr>
@@ -11943,7 +11664,7 @@
       </p:sp>
       <p:sp>
         <p:nvSpPr>
-          <p:cNvPr id="29" name="Shape 26"/>
+          <p:cNvPr id="28" name="Shape 25"/>
           <p:cNvSpPr/>
           <p:nvPr/>
         </p:nvSpPr>
@@ -11967,7 +11688,7 @@
       </p:sp>
       <p:sp>
         <p:nvSpPr>
-          <p:cNvPr id="30" name="Shape 27"/>
+          <p:cNvPr id="29" name="Shape 26"/>
           <p:cNvSpPr/>
           <p:nvPr/>
         </p:nvSpPr>
@@ -11991,7 +11712,7 @@
       </p:sp>
       <p:sp>
         <p:nvSpPr>
-          <p:cNvPr id="31" name="Shape 28"/>
+          <p:cNvPr id="30" name="Shape 27"/>
           <p:cNvSpPr/>
           <p:nvPr/>
         </p:nvSpPr>
@@ -12257,8 +11978,8 @@
         </p:nvSpPr>
         <p:spPr>
           <a:xfrm>
-            <a:off x="731520" y="1207008"/>
-            <a:ext cx="1325880" cy="54864"/>
+            <a:off x="822960" y="1938528"/>
+            <a:ext cx="73152" cy="2514600"/>
           </a:xfrm>
           <a:prstGeom prst="rect">
             <a:avLst/>
@@ -12276,114 +11997,22 @@
           </a:ln>
         </p:spPr>
       </p:sp>
-      <p:pic>
-        <p:nvPicPr>
-          <p:cNvPr id="11" name="Image 0" descr="preencoded.png">    </p:cNvPr>
-          <p:cNvPicPr>
-            <a:picLocks noChangeAspect="1"/>
-          </p:cNvPicPr>
-          <p:nvPr/>
-        </p:nvPicPr>
-        <p:blipFill>
-          <a:blip r:embed="rId1">
-            <a:extLst>
-              <a:ext uri="{96DAC541-7B7A-43D3-8B79-37D633B846F1}">
-                <asvg:svgBlip xmlns:asvg="http://schemas.microsoft.com/office/drawing/2016/SVG/main" r:embed="rId2"/>
-              </a:ext>
-            </a:extLst>
-          </a:blip>
-          <a:stretch>
-            <a:fillRect/>
-          </a:stretch>
-        </p:blipFill>
-        <p:spPr>
-          <a:xfrm>
-            <a:off x="914400" y="1865376"/>
-            <a:ext cx="10241280" cy="1024128"/>
-          </a:xfrm>
-          <a:prstGeom prst="rect">
-            <a:avLst/>
-          </a:prstGeom>
-        </p:spPr>
-      </p:pic>
-      <p:pic>
-        <p:nvPicPr>
-          <p:cNvPr id="12" name="Image 1" descr="preencoded.png">    </p:cNvPr>
-          <p:cNvPicPr>
-            <a:picLocks noChangeAspect="1"/>
-          </p:cNvPicPr>
-          <p:nvPr/>
-        </p:nvPicPr>
-        <p:blipFill>
-          <a:blip r:embed="rId3">
-            <a:extLst>
-              <a:ext uri="{96DAC541-7B7A-43D3-8B79-37D633B846F1}">
-                <asvg:svgBlip xmlns:asvg="http://schemas.microsoft.com/office/drawing/2016/SVG/main" r:embed="rId4"/>
-              </a:ext>
-            </a:extLst>
-          </a:blip>
-          <a:stretch>
-            <a:fillRect/>
-          </a:stretch>
-        </p:blipFill>
-        <p:spPr>
-          <a:xfrm>
-            <a:off x="914400" y="3191256"/>
-            <a:ext cx="10241280" cy="1024128"/>
-          </a:xfrm>
-          <a:prstGeom prst="rect">
-            <a:avLst/>
-          </a:prstGeom>
-        </p:spPr>
-      </p:pic>
-      <p:pic>
-        <p:nvPicPr>
-          <p:cNvPr id="13" name="Image 2" descr="preencoded.png">    </p:cNvPr>
-          <p:cNvPicPr>
-            <a:picLocks noChangeAspect="1"/>
-          </p:cNvPicPr>
-          <p:nvPr/>
-        </p:nvPicPr>
-        <p:blipFill>
-          <a:blip r:embed="rId5">
-            <a:extLst>
-              <a:ext uri="{96DAC541-7B7A-43D3-8B79-37D633B846F1}">
-                <asvg:svgBlip xmlns:asvg="http://schemas.microsoft.com/office/drawing/2016/SVG/main" r:embed="rId6"/>
-              </a:ext>
-            </a:extLst>
-          </a:blip>
-          <a:stretch>
-            <a:fillRect/>
-          </a:stretch>
-        </p:blipFill>
-        <p:spPr>
-          <a:xfrm>
-            <a:off x="914400" y="4507992"/>
-            <a:ext cx="10241280" cy="1024128"/>
-          </a:xfrm>
-          <a:prstGeom prst="rect">
-            <a:avLst/>
-          </a:prstGeom>
-        </p:spPr>
-      </p:pic>
-      <p:sp>
-        <p:nvSpPr>
-          <p:cNvPr id="14" name="Shape 9"/>
-          <p:cNvSpPr/>
-          <p:nvPr/>
-        </p:nvSpPr>
-        <p:spPr>
-          <a:xfrm>
-            <a:off x="786384" y="1956816"/>
-            <a:ext cx="32004" cy="3483864"/>
-          </a:xfrm>
-          <a:prstGeom prst="rect">
-            <a:avLst/>
-          </a:prstGeom>
-          <a:solidFill>
-            <a:srgbClr val="00A6FF">
-              <a:alpha val="80000"/>
-            </a:srgbClr>
+      <p:sp>
+        <p:nvSpPr>
+          <p:cNvPr id="11" name="Shape 9"/>
+          <p:cNvSpPr/>
+          <p:nvPr/>
+        </p:nvSpPr>
+        <p:spPr>
+          <a:xfrm>
+            <a:off x="4343400" y="1938528"/>
+            <a:ext cx="73152" cy="2514600"/>
+          </a:xfrm>
+          <a:prstGeom prst="rect">
+            <a:avLst/>
+          </a:prstGeom>
+          <a:solidFill>
+            <a:srgbClr val="00A6FF"/>
           </a:solidFill>
           <a:ln w="12700">
             <a:solidFill>
@@ -12397,14 +12026,14 @@
       </p:sp>
       <p:sp>
         <p:nvSpPr>
-          <p:cNvPr id="15" name="Shape 10"/>
-          <p:cNvSpPr/>
-          <p:nvPr/>
-        </p:nvSpPr>
-        <p:spPr>
-          <a:xfrm>
-            <a:off x="914400" y="1865376"/>
-            <a:ext cx="73152" cy="1024128"/>
+          <p:cNvPr id="12" name="Shape 10"/>
+          <p:cNvSpPr/>
+          <p:nvPr/>
+        </p:nvSpPr>
+        <p:spPr>
+          <a:xfrm>
+            <a:off x="7863840" y="1938528"/>
+            <a:ext cx="73152" cy="2514600"/>
           </a:xfrm>
           <a:prstGeom prst="rect">
             <a:avLst/>
@@ -12424,61 +12053,7 @@
       </p:sp>
       <p:sp>
         <p:nvSpPr>
-          <p:cNvPr id="16" name="Shape 11"/>
-          <p:cNvSpPr/>
-          <p:nvPr/>
-        </p:nvSpPr>
-        <p:spPr>
-          <a:xfrm>
-            <a:off x="914400" y="3191256"/>
-            <a:ext cx="73152" cy="1024128"/>
-          </a:xfrm>
-          <a:prstGeom prst="rect">
-            <a:avLst/>
-          </a:prstGeom>
-          <a:solidFill>
-            <a:srgbClr val="00A6FF"/>
-          </a:solidFill>
-          <a:ln w="12700">
-            <a:solidFill>
-              <a:srgbClr val="00A6FF">
-                <a:alpha val="0"/>
-              </a:srgbClr>
-            </a:solidFill>
-            <a:prstDash val="solid"/>
-          </a:ln>
-        </p:spPr>
-      </p:sp>
-      <p:sp>
-        <p:nvSpPr>
-          <p:cNvPr id="17" name="Shape 12"/>
-          <p:cNvSpPr/>
-          <p:nvPr/>
-        </p:nvSpPr>
-        <p:spPr>
-          <a:xfrm>
-            <a:off x="914400" y="4507992"/>
-            <a:ext cx="73152" cy="1024128"/>
-          </a:xfrm>
-          <a:prstGeom prst="rect">
-            <a:avLst/>
-          </a:prstGeom>
-          <a:solidFill>
-            <a:srgbClr val="111111"/>
-          </a:solidFill>
-          <a:ln w="12700">
-            <a:solidFill>
-              <a:srgbClr val="111111">
-                <a:alpha val="0"/>
-              </a:srgbClr>
-            </a:solidFill>
-            <a:prstDash val="solid"/>
-          </a:ln>
-        </p:spPr>
-      </p:sp>
-      <p:sp>
-        <p:nvSpPr>
-          <p:cNvPr id="18" name="mdpr:1-2-ea42c8:title:__title:1-2-ea42c8"/>
+          <p:cNvPr id="13" name="mdpr:1-2-ea42c8:title:__title:1-2-ea42c8"/>
           <p:cNvSpPr txBox="1"/>
           <p:nvPr/>
         </p:nvSpPr>
@@ -12520,14 +12095,14 @@
       </p:sp>
       <p:sp>
         <p:nvSpPr>
-          <p:cNvPr id="19" name="mdpr:1-2-ea42c8:item-1:block-27-chunk-1"/>
+          <p:cNvPr id="14" name="mdpr:1-2-ea42c8:item-1:block-27-chunk-1"/>
           <p:cNvSpPr txBox="1"/>
           <p:nvPr/>
         </p:nvSpPr>
         <p:spPr>
           <a:xfrm>
-            <a:off x="1133856" y="1957548"/>
-            <a:ext cx="9820656" cy="839785"/>
+            <a:off x="1042416" y="2103120"/>
+            <a:ext cx="2825496" cy="2185416"/>
           </a:xfrm>
           <a:prstGeom prst="rect">
             <a:avLst/>
@@ -12579,14 +12154,14 @@
       </p:sp>
       <p:sp>
         <p:nvSpPr>
-          <p:cNvPr id="20" name="mdpr:1-2-ea42c8:item-2:block-27-chunk-1"/>
+          <p:cNvPr id="15" name="mdpr:1-2-ea42c8:item-2:block-27-chunk-1"/>
           <p:cNvSpPr txBox="1"/>
           <p:nvPr/>
         </p:nvSpPr>
         <p:spPr>
           <a:xfrm>
-            <a:off x="1133856" y="3283428"/>
-            <a:ext cx="9820656" cy="839785"/>
+            <a:off x="4562856" y="2103120"/>
+            <a:ext cx="2825496" cy="2185416"/>
           </a:xfrm>
           <a:prstGeom prst="rect">
             <a:avLst/>
@@ -12638,14 +12213,14 @@
       </p:sp>
       <p:sp>
         <p:nvSpPr>
-          <p:cNvPr id="21" name="mdpr:1-2-ea42c8:item-3:block-27-chunk-1"/>
+          <p:cNvPr id="16" name="mdpr:1-2-ea42c8:item-3:block-27-chunk-1"/>
           <p:cNvSpPr txBox="1"/>
           <p:nvPr/>
         </p:nvSpPr>
         <p:spPr>
           <a:xfrm>
-            <a:off x="1133856" y="4600164"/>
-            <a:ext cx="9820656" cy="839785"/>
+            <a:off x="8083296" y="2103120"/>
+            <a:ext cx="2825496" cy="2185416"/>
           </a:xfrm>
           <a:prstGeom prst="rect">
             <a:avLst/>
@@ -12939,8 +12514,8 @@
         </p:nvSpPr>
         <p:spPr>
           <a:xfrm>
-            <a:off x="731520" y="1207008"/>
-            <a:ext cx="1325880" cy="54864"/>
+            <a:off x="822960" y="1737360"/>
+            <a:ext cx="73152" cy="841248"/>
           </a:xfrm>
           <a:prstGeom prst="rect">
             <a:avLst/>
@@ -12966,8 +12541,35 @@
         </p:nvSpPr>
         <p:spPr>
           <a:xfrm>
-            <a:off x="822960" y="1188720"/>
-            <a:ext cx="10515600" cy="45720"/>
+            <a:off x="822960" y="2779776"/>
+            <a:ext cx="73152" cy="841248"/>
+          </a:xfrm>
+          <a:prstGeom prst="rect">
+            <a:avLst/>
+          </a:prstGeom>
+          <a:solidFill>
+            <a:srgbClr val="00A6FF"/>
+          </a:solidFill>
+          <a:ln w="12700">
+            <a:solidFill>
+              <a:srgbClr val="00A6FF">
+                <a:alpha val="0"/>
+              </a:srgbClr>
+            </a:solidFill>
+            <a:prstDash val="solid"/>
+          </a:ln>
+        </p:spPr>
+      </p:sp>
+      <p:sp>
+        <p:nvSpPr>
+          <p:cNvPr id="12" name="Shape 10"/>
+          <p:cNvSpPr/>
+          <p:nvPr/>
+        </p:nvSpPr>
+        <p:spPr>
+          <a:xfrm>
+            <a:off x="822960" y="3822192"/>
+            <a:ext cx="73152" cy="841248"/>
           </a:xfrm>
           <a:prstGeom prst="rect">
             <a:avLst/>
@@ -12987,14 +12589,14 @@
       </p:sp>
       <p:sp>
         <p:nvSpPr>
-          <p:cNvPr id="12" name="Shape 10"/>
-          <p:cNvSpPr/>
-          <p:nvPr/>
-        </p:nvSpPr>
-        <p:spPr>
-          <a:xfrm>
-            <a:off x="822960" y="6382512"/>
-            <a:ext cx="2011680" cy="45720"/>
+          <p:cNvPr id="13" name="Shape 11"/>
+          <p:cNvSpPr/>
+          <p:nvPr/>
+        </p:nvSpPr>
+        <p:spPr>
+          <a:xfrm>
+            <a:off x="822960" y="4864608"/>
+            <a:ext cx="73152" cy="841248"/>
           </a:xfrm>
           <a:prstGeom prst="rect">
             <a:avLst/>
@@ -13014,22 +12616,20 @@
       </p:sp>
       <p:sp>
         <p:nvSpPr>
-          <p:cNvPr id="13" name="Shape 11"/>
-          <p:cNvSpPr/>
-          <p:nvPr/>
-        </p:nvSpPr>
-        <p:spPr>
-          <a:xfrm>
-            <a:off x="6080760" y="1389888"/>
-            <a:ext cx="22860" cy="4846320"/>
-          </a:xfrm>
-          <a:prstGeom prst="rect">
-            <a:avLst/>
-          </a:prstGeom>
-          <a:solidFill>
-            <a:srgbClr val="111111">
-              <a:alpha val="90000"/>
-            </a:srgbClr>
+          <p:cNvPr id="14" name="Shape 12"/>
+          <p:cNvSpPr/>
+          <p:nvPr/>
+        </p:nvSpPr>
+        <p:spPr>
+          <a:xfrm>
+            <a:off x="6272784" y="1737360"/>
+            <a:ext cx="73152" cy="841248"/>
+          </a:xfrm>
+          <a:prstGeom prst="rect">
+            <a:avLst/>
+          </a:prstGeom>
+          <a:solidFill>
+            <a:srgbClr val="111111"/>
           </a:solidFill>
           <a:ln w="12700">
             <a:solidFill>
@@ -13043,14 +12643,41 @@
       </p:sp>
       <p:sp>
         <p:nvSpPr>
-          <p:cNvPr id="14" name="Shape 12"/>
-          <p:cNvSpPr/>
-          <p:nvPr/>
-        </p:nvSpPr>
-        <p:spPr>
-          <a:xfrm>
-            <a:off x="822960" y="1389888"/>
-            <a:ext cx="73152" cy="566928"/>
+          <p:cNvPr id="15" name="Shape 13"/>
+          <p:cNvSpPr/>
+          <p:nvPr/>
+        </p:nvSpPr>
+        <p:spPr>
+          <a:xfrm>
+            <a:off x="6272784" y="2779776"/>
+            <a:ext cx="73152" cy="841248"/>
+          </a:xfrm>
+          <a:prstGeom prst="rect">
+            <a:avLst/>
+          </a:prstGeom>
+          <a:solidFill>
+            <a:srgbClr val="00A6FF"/>
+          </a:solidFill>
+          <a:ln w="12700">
+            <a:solidFill>
+              <a:srgbClr val="00A6FF">
+                <a:alpha val="0"/>
+              </a:srgbClr>
+            </a:solidFill>
+            <a:prstDash val="solid"/>
+          </a:ln>
+        </p:spPr>
+      </p:sp>
+      <p:sp>
+        <p:nvSpPr>
+          <p:cNvPr id="16" name="Shape 14"/>
+          <p:cNvSpPr/>
+          <p:nvPr/>
+        </p:nvSpPr>
+        <p:spPr>
+          <a:xfrm>
+            <a:off x="6272784" y="3822192"/>
+            <a:ext cx="73152" cy="841248"/>
           </a:xfrm>
           <a:prstGeom prst="rect">
             <a:avLst/>
@@ -13070,14 +12697,14 @@
       </p:sp>
       <p:sp>
         <p:nvSpPr>
-          <p:cNvPr id="15" name="Shape 13"/>
-          <p:cNvSpPr/>
-          <p:nvPr/>
-        </p:nvSpPr>
-        <p:spPr>
-          <a:xfrm>
-            <a:off x="822960" y="2103120"/>
-            <a:ext cx="73152" cy="566928"/>
+          <p:cNvPr id="17" name="Shape 15"/>
+          <p:cNvSpPr/>
+          <p:nvPr/>
+        </p:nvSpPr>
+        <p:spPr>
+          <a:xfrm>
+            <a:off x="6272784" y="4864608"/>
+            <a:ext cx="73152" cy="841248"/>
           </a:xfrm>
           <a:prstGeom prst="rect">
             <a:avLst/>
@@ -13097,331 +12724,7 @@
       </p:sp>
       <p:sp>
         <p:nvSpPr>
-          <p:cNvPr id="16" name="Shape 14"/>
-          <p:cNvSpPr/>
-          <p:nvPr/>
-        </p:nvSpPr>
-        <p:spPr>
-          <a:xfrm>
-            <a:off x="822960" y="2816352"/>
-            <a:ext cx="73152" cy="566928"/>
-          </a:xfrm>
-          <a:prstGeom prst="rect">
-            <a:avLst/>
-          </a:prstGeom>
-          <a:solidFill>
-            <a:srgbClr val="111111"/>
-          </a:solidFill>
-          <a:ln w="12700">
-            <a:solidFill>
-              <a:srgbClr val="111111">
-                <a:alpha val="0"/>
-              </a:srgbClr>
-            </a:solidFill>
-            <a:prstDash val="solid"/>
-          </a:ln>
-        </p:spPr>
-      </p:sp>
-      <p:sp>
-        <p:nvSpPr>
-          <p:cNvPr id="17" name="Shape 15"/>
-          <p:cNvSpPr/>
-          <p:nvPr/>
-        </p:nvSpPr>
-        <p:spPr>
-          <a:xfrm>
-            <a:off x="822960" y="3529584"/>
-            <a:ext cx="73152" cy="566928"/>
-          </a:xfrm>
-          <a:prstGeom prst="rect">
-            <a:avLst/>
-          </a:prstGeom>
-          <a:solidFill>
-            <a:srgbClr val="00A6FF"/>
-          </a:solidFill>
-          <a:ln w="12700">
-            <a:solidFill>
-              <a:srgbClr val="00A6FF">
-                <a:alpha val="0"/>
-              </a:srgbClr>
-            </a:solidFill>
-            <a:prstDash val="solid"/>
-          </a:ln>
-        </p:spPr>
-      </p:sp>
-      <p:sp>
-        <p:nvSpPr>
-          <p:cNvPr id="18" name="Shape 16"/>
-          <p:cNvSpPr/>
-          <p:nvPr/>
-        </p:nvSpPr>
-        <p:spPr>
-          <a:xfrm>
-            <a:off x="822960" y="4242816"/>
-            <a:ext cx="73152" cy="566928"/>
-          </a:xfrm>
-          <a:prstGeom prst="rect">
-            <a:avLst/>
-          </a:prstGeom>
-          <a:solidFill>
-            <a:srgbClr val="111111"/>
-          </a:solidFill>
-          <a:ln w="12700">
-            <a:solidFill>
-              <a:srgbClr val="111111">
-                <a:alpha val="0"/>
-              </a:srgbClr>
-            </a:solidFill>
-            <a:prstDash val="solid"/>
-          </a:ln>
-        </p:spPr>
-      </p:sp>
-      <p:sp>
-        <p:nvSpPr>
-          <p:cNvPr id="19" name="Shape 17"/>
-          <p:cNvSpPr/>
-          <p:nvPr/>
-        </p:nvSpPr>
-        <p:spPr>
-          <a:xfrm>
-            <a:off x="822960" y="4956048"/>
-            <a:ext cx="73152" cy="566928"/>
-          </a:xfrm>
-          <a:prstGeom prst="rect">
-            <a:avLst/>
-          </a:prstGeom>
-          <a:solidFill>
-            <a:srgbClr val="00A6FF"/>
-          </a:solidFill>
-          <a:ln w="12700">
-            <a:solidFill>
-              <a:srgbClr val="00A6FF">
-                <a:alpha val="0"/>
-              </a:srgbClr>
-            </a:solidFill>
-            <a:prstDash val="solid"/>
-          </a:ln>
-        </p:spPr>
-      </p:sp>
-      <p:sp>
-        <p:nvSpPr>
-          <p:cNvPr id="20" name="Shape 18"/>
-          <p:cNvSpPr/>
-          <p:nvPr/>
-        </p:nvSpPr>
-        <p:spPr>
-          <a:xfrm>
-            <a:off x="822960" y="5669280"/>
-            <a:ext cx="73152" cy="566928"/>
-          </a:xfrm>
-          <a:prstGeom prst="rect">
-            <a:avLst/>
-          </a:prstGeom>
-          <a:solidFill>
-            <a:srgbClr val="111111"/>
-          </a:solidFill>
-          <a:ln w="12700">
-            <a:solidFill>
-              <a:srgbClr val="111111">
-                <a:alpha val="0"/>
-              </a:srgbClr>
-            </a:solidFill>
-            <a:prstDash val="solid"/>
-          </a:ln>
-        </p:spPr>
-      </p:sp>
-      <p:sp>
-        <p:nvSpPr>
-          <p:cNvPr id="21" name="Shape 19"/>
-          <p:cNvSpPr/>
-          <p:nvPr/>
-        </p:nvSpPr>
-        <p:spPr>
-          <a:xfrm>
-            <a:off x="6272784" y="1389888"/>
-            <a:ext cx="73152" cy="566928"/>
-          </a:xfrm>
-          <a:prstGeom prst="rect">
-            <a:avLst/>
-          </a:prstGeom>
-          <a:solidFill>
-            <a:srgbClr val="00A6FF"/>
-          </a:solidFill>
-          <a:ln w="12700">
-            <a:solidFill>
-              <a:srgbClr val="00A6FF">
-                <a:alpha val="0"/>
-              </a:srgbClr>
-            </a:solidFill>
-            <a:prstDash val="solid"/>
-          </a:ln>
-        </p:spPr>
-      </p:sp>
-      <p:sp>
-        <p:nvSpPr>
-          <p:cNvPr id="22" name="Shape 20"/>
-          <p:cNvSpPr/>
-          <p:nvPr/>
-        </p:nvSpPr>
-        <p:spPr>
-          <a:xfrm>
-            <a:off x="6272784" y="2103120"/>
-            <a:ext cx="73152" cy="566928"/>
-          </a:xfrm>
-          <a:prstGeom prst="rect">
-            <a:avLst/>
-          </a:prstGeom>
-          <a:solidFill>
-            <a:srgbClr val="111111"/>
-          </a:solidFill>
-          <a:ln w="12700">
-            <a:solidFill>
-              <a:srgbClr val="111111">
-                <a:alpha val="0"/>
-              </a:srgbClr>
-            </a:solidFill>
-            <a:prstDash val="solid"/>
-          </a:ln>
-        </p:spPr>
-      </p:sp>
-      <p:sp>
-        <p:nvSpPr>
-          <p:cNvPr id="23" name="Shape 21"/>
-          <p:cNvSpPr/>
-          <p:nvPr/>
-        </p:nvSpPr>
-        <p:spPr>
-          <a:xfrm>
-            <a:off x="6272784" y="2816352"/>
-            <a:ext cx="73152" cy="566928"/>
-          </a:xfrm>
-          <a:prstGeom prst="rect">
-            <a:avLst/>
-          </a:prstGeom>
-          <a:solidFill>
-            <a:srgbClr val="00A6FF"/>
-          </a:solidFill>
-          <a:ln w="12700">
-            <a:solidFill>
-              <a:srgbClr val="00A6FF">
-                <a:alpha val="0"/>
-              </a:srgbClr>
-            </a:solidFill>
-            <a:prstDash val="solid"/>
-          </a:ln>
-        </p:spPr>
-      </p:sp>
-      <p:sp>
-        <p:nvSpPr>
-          <p:cNvPr id="24" name="Shape 22"/>
-          <p:cNvSpPr/>
-          <p:nvPr/>
-        </p:nvSpPr>
-        <p:spPr>
-          <a:xfrm>
-            <a:off x="6272784" y="3529584"/>
-            <a:ext cx="73152" cy="566928"/>
-          </a:xfrm>
-          <a:prstGeom prst="rect">
-            <a:avLst/>
-          </a:prstGeom>
-          <a:solidFill>
-            <a:srgbClr val="111111"/>
-          </a:solidFill>
-          <a:ln w="12700">
-            <a:solidFill>
-              <a:srgbClr val="111111">
-                <a:alpha val="0"/>
-              </a:srgbClr>
-            </a:solidFill>
-            <a:prstDash val="solid"/>
-          </a:ln>
-        </p:spPr>
-      </p:sp>
-      <p:sp>
-        <p:nvSpPr>
-          <p:cNvPr id="25" name="Shape 23"/>
-          <p:cNvSpPr/>
-          <p:nvPr/>
-        </p:nvSpPr>
-        <p:spPr>
-          <a:xfrm>
-            <a:off x="6272784" y="4242816"/>
-            <a:ext cx="73152" cy="566928"/>
-          </a:xfrm>
-          <a:prstGeom prst="rect">
-            <a:avLst/>
-          </a:prstGeom>
-          <a:solidFill>
-            <a:srgbClr val="00A6FF"/>
-          </a:solidFill>
-          <a:ln w="12700">
-            <a:solidFill>
-              <a:srgbClr val="00A6FF">
-                <a:alpha val="0"/>
-              </a:srgbClr>
-            </a:solidFill>
-            <a:prstDash val="solid"/>
-          </a:ln>
-        </p:spPr>
-      </p:sp>
-      <p:sp>
-        <p:nvSpPr>
-          <p:cNvPr id="26" name="Shape 24"/>
-          <p:cNvSpPr/>
-          <p:nvPr/>
-        </p:nvSpPr>
-        <p:spPr>
-          <a:xfrm>
-            <a:off x="6272784" y="4956048"/>
-            <a:ext cx="73152" cy="566928"/>
-          </a:xfrm>
-          <a:prstGeom prst="rect">
-            <a:avLst/>
-          </a:prstGeom>
-          <a:solidFill>
-            <a:srgbClr val="111111"/>
-          </a:solidFill>
-          <a:ln w="12700">
-            <a:solidFill>
-              <a:srgbClr val="111111">
-                <a:alpha val="0"/>
-              </a:srgbClr>
-            </a:solidFill>
-            <a:prstDash val="solid"/>
-          </a:ln>
-        </p:spPr>
-      </p:sp>
-      <p:sp>
-        <p:nvSpPr>
-          <p:cNvPr id="27" name="Shape 25"/>
-          <p:cNvSpPr/>
-          <p:nvPr/>
-        </p:nvSpPr>
-        <p:spPr>
-          <a:xfrm>
-            <a:off x="6272784" y="5669280"/>
-            <a:ext cx="73152" cy="566928"/>
-          </a:xfrm>
-          <a:prstGeom prst="rect">
-            <a:avLst/>
-          </a:prstGeom>
-          <a:solidFill>
-            <a:srgbClr val="00A6FF"/>
-          </a:solidFill>
-          <a:ln w="12700">
-            <a:solidFill>
-              <a:srgbClr val="00A6FF">
-                <a:alpha val="0"/>
-              </a:srgbClr>
-            </a:solidFill>
-            <a:prstDash val="solid"/>
-          </a:ln>
-        </p:spPr>
-      </p:sp>
-      <p:sp>
-        <p:nvSpPr>
-          <p:cNvPr id="28" name="mdpr:1-2-0772f8:title:__title:1-2-0772f8"/>
+          <p:cNvPr id="18" name="mdpr:1-2-0772f8:title:__title:1-2-0772f8"/>
           <p:cNvSpPr txBox="1"/>
           <p:nvPr/>
         </p:nvSpPr>
@@ -13463,14 +12766,14 @@
       </p:sp>
       <p:sp>
         <p:nvSpPr>
-          <p:cNvPr id="29" name="mdpr:1-2-0772f8:toc-item-1:toc-item-1"/>
+          <p:cNvPr id="19" name="mdpr:1-2-0772f8:toc-item-1:toc-item-1"/>
           <p:cNvSpPr txBox="1"/>
           <p:nvPr/>
         </p:nvSpPr>
         <p:spPr>
           <a:xfrm>
-            <a:off x="1042416" y="1481328"/>
-            <a:ext cx="4645152" cy="384048"/>
+            <a:off x="1042416" y="1828800"/>
+            <a:ext cx="4645152" cy="658368"/>
           </a:xfrm>
           <a:prstGeom prst="rect">
             <a:avLst/>
@@ -13505,14 +12808,14 @@
       </p:sp>
       <p:sp>
         <p:nvSpPr>
-          <p:cNvPr id="30" name="mdpr:1-2-0772f8:toc-item-2:toc-item-2"/>
+          <p:cNvPr id="20" name="mdpr:1-2-0772f8:toc-item-2:toc-item-2"/>
           <p:cNvSpPr txBox="1"/>
           <p:nvPr/>
         </p:nvSpPr>
         <p:spPr>
           <a:xfrm>
-            <a:off x="1042416" y="2194560"/>
-            <a:ext cx="4645152" cy="384048"/>
+            <a:off x="1042416" y="2871216"/>
+            <a:ext cx="4645152" cy="658368"/>
           </a:xfrm>
           <a:prstGeom prst="rect">
             <a:avLst/>
@@ -13547,14 +12850,14 @@
       </p:sp>
       <p:sp>
         <p:nvSpPr>
-          <p:cNvPr id="31" name="mdpr:1-2-0772f8:toc-item-3:toc-item-3"/>
+          <p:cNvPr id="21" name="mdpr:1-2-0772f8:toc-item-3:toc-item-3"/>
           <p:cNvSpPr txBox="1"/>
           <p:nvPr/>
         </p:nvSpPr>
         <p:spPr>
           <a:xfrm>
-            <a:off x="1042416" y="2907792"/>
-            <a:ext cx="4645152" cy="384048"/>
+            <a:off x="1042416" y="3913632"/>
+            <a:ext cx="4645152" cy="658368"/>
           </a:xfrm>
           <a:prstGeom prst="rect">
             <a:avLst/>
@@ -13589,14 +12892,14 @@
       </p:sp>
       <p:sp>
         <p:nvSpPr>
-          <p:cNvPr id="32" name="mdpr:1-2-0772f8:toc-item-4:toc-item-4"/>
+          <p:cNvPr id="22" name="mdpr:1-2-0772f8:toc-item-4:toc-item-4"/>
           <p:cNvSpPr txBox="1"/>
           <p:nvPr/>
         </p:nvSpPr>
         <p:spPr>
           <a:xfrm>
-            <a:off x="1042416" y="3621024"/>
-            <a:ext cx="4645152" cy="384048"/>
+            <a:off x="1042416" y="4956048"/>
+            <a:ext cx="4645152" cy="658368"/>
           </a:xfrm>
           <a:prstGeom prst="rect">
             <a:avLst/>
@@ -13631,14 +12934,14 @@
       </p:sp>
       <p:sp>
         <p:nvSpPr>
-          <p:cNvPr id="33" name="mdpr:1-2-0772f8:toc-item-5:toc-item-5"/>
+          <p:cNvPr id="23" name="mdpr:1-2-0772f8:toc-item-5:toc-item-5"/>
           <p:cNvSpPr txBox="1"/>
           <p:nvPr/>
         </p:nvSpPr>
         <p:spPr>
           <a:xfrm>
-            <a:off x="1042416" y="4334256"/>
-            <a:ext cx="4645152" cy="384048"/>
+            <a:off x="6492240" y="1828800"/>
+            <a:ext cx="4645152" cy="658368"/>
           </a:xfrm>
           <a:prstGeom prst="rect">
             <a:avLst/>
@@ -13673,14 +12976,14 @@
       </p:sp>
       <p:sp>
         <p:nvSpPr>
-          <p:cNvPr id="34" name="mdpr:1-2-0772f8:toc-item-6:toc-item-6"/>
+          <p:cNvPr id="24" name="mdpr:1-2-0772f8:toc-item-6:toc-item-6"/>
           <p:cNvSpPr txBox="1"/>
           <p:nvPr/>
         </p:nvSpPr>
         <p:spPr>
           <a:xfrm>
-            <a:off x="1042416" y="5047488"/>
-            <a:ext cx="4645152" cy="384048"/>
+            <a:off x="6492240" y="2871216"/>
+            <a:ext cx="4645152" cy="658368"/>
           </a:xfrm>
           <a:prstGeom prst="rect">
             <a:avLst/>
@@ -13715,14 +13018,14 @@
       </p:sp>
       <p:sp>
         <p:nvSpPr>
-          <p:cNvPr id="35" name="mdpr:1-2-0772f8:toc-item-7:toc-item-7"/>
+          <p:cNvPr id="25" name="mdpr:1-2-0772f8:toc-item-7:toc-item-7"/>
           <p:cNvSpPr txBox="1"/>
           <p:nvPr/>
         </p:nvSpPr>
         <p:spPr>
           <a:xfrm>
-            <a:off x="1042416" y="5760720"/>
-            <a:ext cx="4645152" cy="384048"/>
+            <a:off x="6492240" y="3913632"/>
+            <a:ext cx="4645152" cy="658368"/>
           </a:xfrm>
           <a:prstGeom prst="rect">
             <a:avLst/>
@@ -13757,14 +13060,14 @@
       </p:sp>
       <p:sp>
         <p:nvSpPr>
-          <p:cNvPr id="36" name="mdpr:1-2-0772f8:toc-item-8:toc-item-8"/>
+          <p:cNvPr id="26" name="mdpr:1-2-0772f8:toc-item-8:toc-item-8"/>
           <p:cNvSpPr txBox="1"/>
           <p:nvPr/>
         </p:nvSpPr>
         <p:spPr>
           <a:xfrm>
-            <a:off x="6492240" y="1481328"/>
-            <a:ext cx="4645152" cy="384048"/>
+            <a:off x="6492240" y="4956048"/>
+            <a:ext cx="4645152" cy="658368"/>
           </a:xfrm>
           <a:prstGeom prst="rect">
             <a:avLst/>
@@ -13792,258 +13095,6 @@
                 <a:cs typeface="Pretendard" pitchFamily="34" charset="-120"/>
               </a:rPr>
               <a:t>08  Chart and Table Pair</a:t>
-            </a:r>
-            <a:endParaRPr lang="en-US" sz="1800" dirty="0"/>
-          </a:p>
-        </p:txBody>
-      </p:sp>
-      <p:sp>
-        <p:nvSpPr>
-          <p:cNvPr id="37" name="mdpr:1-2-0772f8:toc-item-9:toc-item-9"/>
-          <p:cNvSpPr txBox="1"/>
-          <p:nvPr/>
-        </p:nvSpPr>
-        <p:spPr>
-          <a:xfrm>
-            <a:off x="6492240" y="2194560"/>
-            <a:ext cx="4645152" cy="384048"/>
-          </a:xfrm>
-          <a:prstGeom prst="rect">
-            <a:avLst/>
-          </a:prstGeom>
-          <a:noFill/>
-          <a:ln/>
-        </p:spPr>
-        <p:txBody>
-          <a:bodyPr wrap="square" lIns="0" tIns="25400" rIns="25400" bIns="0" rtlCol="0" anchor="ctr"/>
-          <a:lstStyle/>
-          <a:p>
-            <a:pPr algn="ctr" indent="0" marL="0">
-              <a:lnSpc>
-                <a:spcPct val="120000"/>
-              </a:lnSpc>
-              <a:buNone/>
-            </a:pPr>
-            <a:r>
-              <a:rPr lang="en-US" sz="1800" dirty="0">
-                <a:solidFill>
-                  <a:srgbClr val="111111"/>
-                </a:solidFill>
-                <a:latin typeface="Pretendard" pitchFamily="34" charset="0"/>
-                <a:ea typeface="Pretendard" pitchFamily="34" charset="-122"/>
-                <a:cs typeface="Pretendard" pitchFamily="34" charset="-120"/>
-              </a:rPr>
-              <a:t>09  Editable Proof Objects</a:t>
-            </a:r>
-            <a:endParaRPr lang="en-US" sz="1800" dirty="0"/>
-          </a:p>
-        </p:txBody>
-      </p:sp>
-      <p:sp>
-        <p:nvSpPr>
-          <p:cNvPr id="38" name="mdpr:1-2-0772f8:toc-item-10:toc-item-10"/>
-          <p:cNvSpPr txBox="1"/>
-          <p:nvPr/>
-        </p:nvSpPr>
-        <p:spPr>
-          <a:xfrm>
-            <a:off x="6492240" y="2907792"/>
-            <a:ext cx="4645152" cy="384048"/>
-          </a:xfrm>
-          <a:prstGeom prst="rect">
-            <a:avLst/>
-          </a:prstGeom>
-          <a:noFill/>
-          <a:ln/>
-        </p:spPr>
-        <p:txBody>
-          <a:bodyPr wrap="square" lIns="0" tIns="25400" rIns="25400" bIns="0" rtlCol="0" anchor="ctr"/>
-          <a:lstStyle/>
-          <a:p>
-            <a:pPr algn="ctr" indent="0" marL="0">
-              <a:lnSpc>
-                <a:spcPct val="120000"/>
-              </a:lnSpc>
-              <a:buNone/>
-            </a:pPr>
-            <a:r>
-              <a:rPr lang="en-US" sz="1800" dirty="0">
-                <a:solidFill>
-                  <a:srgbClr val="111111"/>
-                </a:solidFill>
-                <a:latin typeface="Pretendard" pitchFamily="34" charset="0"/>
-                <a:ea typeface="Pretendard" pitchFamily="34" charset="-122"/>
-                <a:cs typeface="Pretendard" pitchFamily="34" charset="-120"/>
-              </a:rPr>
-              <a:t>10  Object Shape Grammar</a:t>
-            </a:r>
-            <a:endParaRPr lang="en-US" sz="1800" dirty="0"/>
-          </a:p>
-        </p:txBody>
-      </p:sp>
-      <p:sp>
-        <p:nvSpPr>
-          <p:cNvPr id="39" name="mdpr:1-2-0772f8:toc-item-11:toc-item-11"/>
-          <p:cNvSpPr txBox="1"/>
-          <p:nvPr/>
-        </p:nvSpPr>
-        <p:spPr>
-          <a:xfrm>
-            <a:off x="6492240" y="3621024"/>
-            <a:ext cx="4645152" cy="384048"/>
-          </a:xfrm>
-          <a:prstGeom prst="rect">
-            <a:avLst/>
-          </a:prstGeom>
-          <a:noFill/>
-          <a:ln/>
-        </p:spPr>
-        <p:txBody>
-          <a:bodyPr wrap="square" lIns="0" tIns="25400" rIns="25400" bIns="0" rtlCol="0" anchor="ctr"/>
-          <a:lstStyle/>
-          <a:p>
-            <a:pPr algn="ctr" indent="0" marL="0">
-              <a:lnSpc>
-                <a:spcPct val="120000"/>
-              </a:lnSpc>
-              <a:buNone/>
-            </a:pPr>
-            <a:r>
-              <a:rPr lang="en-US" sz="1800" dirty="0">
-                <a:solidFill>
-                  <a:srgbClr val="111111"/>
-                </a:solidFill>
-                <a:latin typeface="Pretendard" pitchFamily="34" charset="0"/>
-                <a:ea typeface="Pretendard" pitchFamily="34" charset="-122"/>
-                <a:cs typeface="Pretendard" pitchFamily="34" charset="-120"/>
-              </a:rPr>
-              <a:t>11  Icon and Text Aside</a:t>
-            </a:r>
-            <a:endParaRPr lang="en-US" sz="1800" dirty="0"/>
-          </a:p>
-        </p:txBody>
-      </p:sp>
-      <p:sp>
-        <p:nvSpPr>
-          <p:cNvPr id="40" name="mdpr:1-2-0772f8:toc-item-12:toc-item-12"/>
-          <p:cNvSpPr txBox="1"/>
-          <p:nvPr/>
-        </p:nvSpPr>
-        <p:spPr>
-          <a:xfrm>
-            <a:off x="6492240" y="4334256"/>
-            <a:ext cx="4645152" cy="384048"/>
-          </a:xfrm>
-          <a:prstGeom prst="rect">
-            <a:avLst/>
-          </a:prstGeom>
-          <a:noFill/>
-          <a:ln/>
-        </p:spPr>
-        <p:txBody>
-          <a:bodyPr wrap="square" lIns="0" tIns="25400" rIns="25400" bIns="0" rtlCol="0" anchor="ctr"/>
-          <a:lstStyle/>
-          <a:p>
-            <a:pPr algn="ctr" indent="0" marL="0">
-              <a:lnSpc>
-                <a:spcPct val="120000"/>
-              </a:lnSpc>
-              <a:buNone/>
-            </a:pPr>
-            <a:r>
-              <a:rPr lang="en-US" sz="1800" dirty="0">
-                <a:solidFill>
-                  <a:srgbClr val="111111"/>
-                </a:solidFill>
-                <a:latin typeface="Pretendard" pitchFamily="34" charset="0"/>
-                <a:ea typeface="Pretendard" pitchFamily="34" charset="-122"/>
-                <a:cs typeface="Pretendard" pitchFamily="34" charset="-120"/>
-              </a:rPr>
-              <a:t>12  Overflow Guard</a:t>
-            </a:r>
-            <a:endParaRPr lang="en-US" sz="1800" dirty="0"/>
-          </a:p>
-        </p:txBody>
-      </p:sp>
-      <p:sp>
-        <p:nvSpPr>
-          <p:cNvPr id="41" name="mdpr:1-2-0772f8:toc-item-13:toc-item-13"/>
-          <p:cNvSpPr txBox="1"/>
-          <p:nvPr/>
-        </p:nvSpPr>
-        <p:spPr>
-          <a:xfrm>
-            <a:off x="6492240" y="5047488"/>
-            <a:ext cx="4645152" cy="384048"/>
-          </a:xfrm>
-          <a:prstGeom prst="rect">
-            <a:avLst/>
-          </a:prstGeom>
-          <a:noFill/>
-          <a:ln/>
-        </p:spPr>
-        <p:txBody>
-          <a:bodyPr wrap="square" lIns="0" tIns="25400" rIns="25400" bIns="0" rtlCol="0" anchor="ctr"/>
-          <a:lstStyle/>
-          <a:p>
-            <a:pPr algn="ctr" indent="0" marL="0">
-              <a:lnSpc>
-                <a:spcPct val="120000"/>
-              </a:lnSpc>
-              <a:buNone/>
-            </a:pPr>
-            <a:r>
-              <a:rPr lang="en-US" sz="1800" dirty="0">
-                <a:solidFill>
-                  <a:srgbClr val="111111"/>
-                </a:solidFill>
-                <a:latin typeface="Pretendard" pitchFamily="34" charset="0"/>
-                <a:ea typeface="Pretendard" pitchFamily="34" charset="-122"/>
-                <a:cs typeface="Pretendard" pitchFamily="34" charset="-120"/>
-              </a:rPr>
-              <a:t>13  Image Safe Frame</a:t>
-            </a:r>
-            <a:endParaRPr lang="en-US" sz="1800" dirty="0"/>
-          </a:p>
-        </p:txBody>
-      </p:sp>
-      <p:sp>
-        <p:nvSpPr>
-          <p:cNvPr id="42" name="mdpr:1-2-0772f8:toc-item-14:toc-item-14"/>
-          <p:cNvSpPr txBox="1"/>
-          <p:nvPr/>
-        </p:nvSpPr>
-        <p:spPr>
-          <a:xfrm>
-            <a:off x="6492240" y="5760720"/>
-            <a:ext cx="4645152" cy="384048"/>
-          </a:xfrm>
-          <a:prstGeom prst="rect">
-            <a:avLst/>
-          </a:prstGeom>
-          <a:noFill/>
-          <a:ln/>
-        </p:spPr>
-        <p:txBody>
-          <a:bodyPr wrap="square" lIns="0" tIns="25400" rIns="25400" bIns="0" rtlCol="0" anchor="ctr"/>
-          <a:lstStyle/>
-          <a:p>
-            <a:pPr algn="ctr" indent="0" marL="0">
-              <a:lnSpc>
-                <a:spcPct val="120000"/>
-              </a:lnSpc>
-              <a:buNone/>
-            </a:pPr>
-            <a:r>
-              <a:rPr lang="en-US" sz="1800" dirty="0">
-                <a:solidFill>
-                  <a:srgbClr val="111111"/>
-                </a:solidFill>
-                <a:latin typeface="Pretendard" pitchFamily="34" charset="0"/>
-                <a:ea typeface="Pretendard" pitchFamily="34" charset="-122"/>
-                <a:cs typeface="Pretendard" pitchFamily="34" charset="-120"/>
-              </a:rPr>
-              <a:t>14  Mixed Object Packing</a:t>
             </a:r>
             <a:endParaRPr lang="en-US" sz="1800" dirty="0"/>
           </a:p>
@@ -14293,8 +13344,8 @@
         </p:nvSpPr>
         <p:spPr>
           <a:xfrm>
-            <a:off x="731520" y="1207008"/>
-            <a:ext cx="1325880" cy="54864"/>
+            <a:off x="914400" y="1463040"/>
+            <a:ext cx="10241280" cy="73152"/>
           </a:xfrm>
           <a:prstGeom prst="rect">
             <a:avLst/>
@@ -14314,61 +13365,7 @@
       </p:sp>
       <p:sp>
         <p:nvSpPr>
-          <p:cNvPr id="11" name="Shape 9"/>
-          <p:cNvSpPr/>
-          <p:nvPr/>
-        </p:nvSpPr>
-        <p:spPr>
-          <a:xfrm>
-            <a:off x="822960" y="1554480"/>
-            <a:ext cx="4937760" cy="73152"/>
-          </a:xfrm>
-          <a:prstGeom prst="rect">
-            <a:avLst/>
-          </a:prstGeom>
-          <a:solidFill>
-            <a:srgbClr val="111111"/>
-          </a:solidFill>
-          <a:ln w="12700">
-            <a:solidFill>
-              <a:srgbClr val="111111">
-                <a:alpha val="0"/>
-              </a:srgbClr>
-            </a:solidFill>
-            <a:prstDash val="solid"/>
-          </a:ln>
-        </p:spPr>
-      </p:sp>
-      <p:sp>
-        <p:nvSpPr>
-          <p:cNvPr id="12" name="Shape 10"/>
-          <p:cNvSpPr/>
-          <p:nvPr/>
-        </p:nvSpPr>
-        <p:spPr>
-          <a:xfrm>
-            <a:off x="6400800" y="1554480"/>
-            <a:ext cx="4937760" cy="73152"/>
-          </a:xfrm>
-          <a:prstGeom prst="rect">
-            <a:avLst/>
-          </a:prstGeom>
-          <a:solidFill>
-            <a:srgbClr val="111111"/>
-          </a:solidFill>
-          <a:ln w="12700">
-            <a:solidFill>
-              <a:srgbClr val="111111">
-                <a:alpha val="0"/>
-              </a:srgbClr>
-            </a:solidFill>
-            <a:prstDash val="solid"/>
-          </a:ln>
-        </p:spPr>
-      </p:sp>
-      <p:sp>
-        <p:nvSpPr>
-          <p:cNvPr id="13" name="mdpr:2-2-4f71ba:title:__title:2-2-4f71ba"/>
+          <p:cNvPr id="11" name="mdpr:2-2-4f71ba:title:__title:2-2-4f71ba"/>
           <p:cNvSpPr txBox="1"/>
           <p:nvPr/>
         </p:nvSpPr>
@@ -14402,7 +13399,24 @@
                 <a:ea typeface="Pretendard" pitchFamily="34" charset="-122"/>
                 <a:cs typeface="Pretendard" pitchFamily="34" charset="-120"/>
               </a:rPr>
-              <a:t>Object Shape Grammar (Cont. 2/2)</a:t>
+              <a:t>Object Shape Grammar</a:t>
+            </a:r>
+            <a:pPr algn="ctr" indent="0" marL="0">
+              <a:lnSpc>
+                <a:spcPct val="120000"/>
+              </a:lnSpc>
+              <a:buNone/>
+            </a:pPr>
+            <a:r>
+              <a:rPr lang="en-US" sz="2000" dirty="0">
+                <a:solidFill>
+                  <a:srgbClr val="888888"/>
+                </a:solidFill>
+                <a:latin typeface="Pretendard" pitchFamily="34" charset="0"/>
+                <a:ea typeface="Pretendard" pitchFamily="34" charset="-122"/>
+                <a:cs typeface="Pretendard" pitchFamily="34" charset="-120"/>
+              </a:rPr>
+              <a:t> (Cont. 2/2)</a:t>
             </a:r>
             <a:endParaRPr lang="en-US" sz="3400" dirty="0"/>
           </a:p>
@@ -14410,14 +13424,14 @@
       </p:sp>
       <p:sp>
         <p:nvSpPr>
-          <p:cNvPr id="14" name="mdpr:2-2-4f71ba:left:block-27-chunk-2"/>
+          <p:cNvPr id="12" name="mdpr:2-2-4f71ba:body:block-27-chunk-2"/>
           <p:cNvSpPr txBox="1"/>
           <p:nvPr/>
         </p:nvSpPr>
         <p:spPr>
           <a:xfrm>
-            <a:off x="896112" y="1664208"/>
-            <a:ext cx="4791456" cy="4169664"/>
+            <a:off x="987552" y="1572768"/>
+            <a:ext cx="10094976" cy="4261104"/>
           </a:xfrm>
           <a:prstGeom prst="rect">
             <a:avLst/>
@@ -14465,28 +13479,6 @@
             </a:r>
             <a:endParaRPr lang="en-US" sz="2200" dirty="0"/>
           </a:p>
-        </p:txBody>
-      </p:sp>
-      <p:sp>
-        <p:nvSpPr>
-          <p:cNvPr id="15" name="mdpr:2-2-4f71ba:right:block-27-chunk-2"/>
-          <p:cNvSpPr txBox="1"/>
-          <p:nvPr/>
-        </p:nvSpPr>
-        <p:spPr>
-          <a:xfrm>
-            <a:off x="6473952" y="1664208"/>
-            <a:ext cx="4791456" cy="4169664"/>
-          </a:xfrm>
-          <a:prstGeom prst="rect">
-            <a:avLst/>
-          </a:prstGeom>
-          <a:noFill/>
-          <a:ln/>
-        </p:spPr>
-        <p:txBody>
-          <a:bodyPr wrap="square" lIns="0" tIns="25400" rIns="25400" bIns="0" rtlCol="0" anchor="t"/>
-          <a:lstStyle/>
           <a:p>
             <a:pPr algn="l" indent="0" marL="0">
               <a:lnSpc>
@@ -14505,6 +13497,9 @@
               </a:rPr>
               <a:t>- Rounded panel</a:t>
             </a:r>
+            <a:endParaRPr lang="en-US" sz="2200" dirty="0"/>
+          </a:p>
+          <a:p>
             <a:pPr algn="l" indent="0" marL="0">
               <a:lnSpc>
                 <a:spcPct val="120000"/>
@@ -14762,36 +13757,9 @@
           </a:ln>
         </p:spPr>
       </p:sp>
-      <p:sp>
-        <p:nvSpPr>
-          <p:cNvPr id="10" name="Shape 8"/>
-          <p:cNvSpPr/>
-          <p:nvPr/>
-        </p:nvSpPr>
-        <p:spPr>
-          <a:xfrm>
-            <a:off x="731520" y="1207008"/>
-            <a:ext cx="1325880" cy="54864"/>
-          </a:xfrm>
-          <a:prstGeom prst="rect">
-            <a:avLst/>
-          </a:prstGeom>
-          <a:solidFill>
-            <a:srgbClr val="111111"/>
-          </a:solidFill>
-          <a:ln w="12700">
-            <a:solidFill>
-              <a:srgbClr val="111111">
-                <a:alpha val="0"/>
-              </a:srgbClr>
-            </a:solidFill>
-            <a:prstDash val="solid"/>
-          </a:ln>
-        </p:spPr>
-      </p:sp>
       <p:pic>
         <p:nvPicPr>
-          <p:cNvPr id="11" name="Image 0" descr="preencoded.png">    </p:cNvPr>
+          <p:cNvPr id="10" name="Image 0" descr="preencoded.png">    </p:cNvPr>
           <p:cNvPicPr>
             <a:picLocks noChangeAspect="1"/>
           </p:cNvPicPr>
@@ -14821,7 +13789,7 @@
       </p:pic>
       <p:pic>
         <p:nvPicPr>
-          <p:cNvPr id="12" name="Image 1" descr="preencoded.png">    </p:cNvPr>
+          <p:cNvPr id="11" name="Image 1" descr="preencoded.png">    </p:cNvPr>
           <p:cNvPicPr>
             <a:picLocks noChangeAspect="1"/>
           </p:cNvPicPr>
@@ -14851,7 +13819,7 @@
       </p:pic>
       <p:pic>
         <p:nvPicPr>
-          <p:cNvPr id="13" name="Image 2" descr="preencoded.png">    </p:cNvPr>
+          <p:cNvPr id="12" name="Image 2" descr="preencoded.png">    </p:cNvPr>
           <p:cNvPicPr>
             <a:picLocks noChangeAspect="1"/>
           </p:cNvPicPr>
@@ -14881,7 +13849,7 @@
       </p:pic>
       <p:pic>
         <p:nvPicPr>
-          <p:cNvPr id="14" name="Image 3" descr="preencoded.png">    </p:cNvPr>
+          <p:cNvPr id="13" name="Image 3" descr="preencoded.png">    </p:cNvPr>
           <p:cNvPicPr>
             <a:picLocks noChangeAspect="1"/>
           </p:cNvPicPr>
@@ -14911,7 +13879,7 @@
       </p:pic>
       <p:sp>
         <p:nvSpPr>
-          <p:cNvPr id="15" name="Shape 9"/>
+          <p:cNvPr id="14" name="Shape 8"/>
           <p:cNvSpPr/>
           <p:nvPr/>
         </p:nvSpPr>
@@ -14938,7 +13906,7 @@
       </p:sp>
       <p:sp>
         <p:nvSpPr>
-          <p:cNvPr id="16" name="Shape 10"/>
+          <p:cNvPr id="15" name="Shape 9"/>
           <p:cNvSpPr/>
           <p:nvPr/>
         </p:nvSpPr>
@@ -14965,7 +13933,7 @@
       </p:sp>
       <p:sp>
         <p:nvSpPr>
-          <p:cNvPr id="17" name="Shape 11"/>
+          <p:cNvPr id="16" name="Shape 10"/>
           <p:cNvSpPr/>
           <p:nvPr/>
         </p:nvSpPr>
@@ -14992,7 +13960,7 @@
       </p:sp>
       <p:sp>
         <p:nvSpPr>
-          <p:cNvPr id="18" name="Shape 12"/>
+          <p:cNvPr id="17" name="Shape 11"/>
           <p:cNvSpPr/>
           <p:nvPr/>
         </p:nvSpPr>
@@ -15019,7 +13987,7 @@
       </p:sp>
       <p:sp>
         <p:nvSpPr>
-          <p:cNvPr id="19" name="mdpr:icon-and-text-aside-8429fc:title:__title:icon-and-text-aside-8429fc"/>
+          <p:cNvPr id="18" name="mdpr:icon-and-text-aside-8429fc:title:__title:icon-and-text-aside-8429fc"/>
           <p:cNvSpPr txBox="1"/>
           <p:nvPr/>
         </p:nvSpPr>
@@ -15061,7 +14029,7 @@
       </p:sp>
       <p:sp>
         <p:nvSpPr>
-          <p:cNvPr id="20" name="mdpr:icon-and-text-aside-8429fc:item-1:block-29"/>
+          <p:cNvPr id="19" name="mdpr:icon-and-text-aside-8429fc:item-1:block-29"/>
           <p:cNvSpPr txBox="1"/>
           <p:nvPr/>
         </p:nvSpPr>
@@ -15120,7 +14088,7 @@
       </p:sp>
       <p:sp>
         <p:nvSpPr>
-          <p:cNvPr id="21" name="mdpr:icon-and-text-aside-8429fc:item-2:block-29"/>
+          <p:cNvPr id="20" name="mdpr:icon-and-text-aside-8429fc:item-2:block-29"/>
           <p:cNvSpPr txBox="1"/>
           <p:nvPr/>
         </p:nvSpPr>
@@ -15179,7 +14147,7 @@
       </p:sp>
       <p:sp>
         <p:nvSpPr>
-          <p:cNvPr id="22" name="mdpr:icon-and-text-aside-8429fc:item-3:block-29"/>
+          <p:cNvPr id="21" name="mdpr:icon-and-text-aside-8429fc:item-3:block-29"/>
           <p:cNvSpPr txBox="1"/>
           <p:nvPr/>
         </p:nvSpPr>
@@ -15238,7 +14206,7 @@
       </p:sp>
       <p:sp>
         <p:nvSpPr>
-          <p:cNvPr id="23" name="mdpr:icon-and-text-aside-8429fc:item-4:block-29"/>
+          <p:cNvPr id="22" name="mdpr:icon-and-text-aside-8429fc:item-4:block-29"/>
           <p:cNvSpPr txBox="1"/>
           <p:nvPr/>
         </p:nvSpPr>
@@ -15531,36 +14499,9 @@
           </a:ln>
         </p:spPr>
       </p:sp>
-      <p:sp>
-        <p:nvSpPr>
-          <p:cNvPr id="10" name="Shape 8"/>
-          <p:cNvSpPr/>
-          <p:nvPr/>
-        </p:nvSpPr>
-        <p:spPr>
-          <a:xfrm>
-            <a:off x="731520" y="1207008"/>
-            <a:ext cx="1325880" cy="54864"/>
-          </a:xfrm>
-          <a:prstGeom prst="rect">
-            <a:avLst/>
-          </a:prstGeom>
-          <a:solidFill>
-            <a:srgbClr val="111111"/>
-          </a:solidFill>
-          <a:ln w="12700">
-            <a:solidFill>
-              <a:srgbClr val="111111">
-                <a:alpha val="0"/>
-              </a:srgbClr>
-            </a:solidFill>
-            <a:prstDash val="solid"/>
-          </a:ln>
-        </p:spPr>
-      </p:sp>
       <p:pic>
         <p:nvPicPr>
-          <p:cNvPr id="11" name="Image 0" descr="preencoded.png">    </p:cNvPr>
+          <p:cNvPr id="10" name="Image 0" descr="preencoded.png">    </p:cNvPr>
           <p:cNvPicPr>
             <a:picLocks noChangeAspect="1"/>
           </p:cNvPicPr>
@@ -15590,7 +14531,7 @@
       </p:pic>
       <p:pic>
         <p:nvPicPr>
-          <p:cNvPr id="12" name="Image 1" descr="preencoded.png">    </p:cNvPr>
+          <p:cNvPr id="11" name="Image 1" descr="preencoded.png">    </p:cNvPr>
           <p:cNvPicPr>
             <a:picLocks noChangeAspect="1"/>
           </p:cNvPicPr>
@@ -15620,7 +14561,7 @@
       </p:pic>
       <p:pic>
         <p:nvPicPr>
-          <p:cNvPr id="13" name="Image 2" descr="preencoded.png">    </p:cNvPr>
+          <p:cNvPr id="12" name="Image 2" descr="preencoded.png">    </p:cNvPr>
           <p:cNvPicPr>
             <a:picLocks noChangeAspect="1"/>
           </p:cNvPicPr>
@@ -15650,7 +14591,7 @@
       </p:pic>
       <p:pic>
         <p:nvPicPr>
-          <p:cNvPr id="14" name="Image 3" descr="preencoded.png">    </p:cNvPr>
+          <p:cNvPr id="13" name="Image 3" descr="preencoded.png">    </p:cNvPr>
           <p:cNvPicPr>
             <a:picLocks noChangeAspect="1"/>
           </p:cNvPicPr>
@@ -15680,7 +14621,7 @@
       </p:pic>
       <p:sp>
         <p:nvSpPr>
-          <p:cNvPr id="15" name="Shape 9"/>
+          <p:cNvPr id="14" name="Shape 8"/>
           <p:cNvSpPr/>
           <p:nvPr/>
         </p:nvSpPr>
@@ -15707,7 +14648,7 @@
       </p:sp>
       <p:sp>
         <p:nvSpPr>
-          <p:cNvPr id="16" name="Shape 10"/>
+          <p:cNvPr id="15" name="Shape 9"/>
           <p:cNvSpPr/>
           <p:nvPr/>
         </p:nvSpPr>
@@ -15734,7 +14675,7 @@
       </p:sp>
       <p:sp>
         <p:nvSpPr>
-          <p:cNvPr id="17" name="Shape 11"/>
+          <p:cNvPr id="16" name="Shape 10"/>
           <p:cNvSpPr/>
           <p:nvPr/>
         </p:nvSpPr>
@@ -15761,7 +14702,7 @@
       </p:sp>
       <p:sp>
         <p:nvSpPr>
-          <p:cNvPr id="18" name="Shape 12"/>
+          <p:cNvPr id="17" name="Shape 11"/>
           <p:cNvSpPr/>
           <p:nvPr/>
         </p:nvSpPr>
@@ -15788,7 +14729,7 @@
       </p:sp>
       <p:sp>
         <p:nvSpPr>
-          <p:cNvPr id="19" name="mdpr:overflow-guard-f8d03e:title:__title:overflow-guard-f8d03e"/>
+          <p:cNvPr id="18" name="mdpr:overflow-guard-f8d03e:title:__title:overflow-guard-f8d03e"/>
           <p:cNvSpPr txBox="1"/>
           <p:nvPr/>
         </p:nvSpPr>
@@ -15830,7 +14771,7 @@
       </p:sp>
       <p:sp>
         <p:nvSpPr>
-          <p:cNvPr id="20" name="mdpr:overflow-guard-f8d03e:item-1:block-31"/>
+          <p:cNvPr id="19" name="mdpr:overflow-guard-f8d03e:item-1:block-31"/>
           <p:cNvSpPr txBox="1"/>
           <p:nvPr/>
         </p:nvSpPr>
@@ -15889,7 +14830,7 @@
       </p:sp>
       <p:sp>
         <p:nvSpPr>
-          <p:cNvPr id="21" name="mdpr:overflow-guard-f8d03e:item-2:block-31"/>
+          <p:cNvPr id="20" name="mdpr:overflow-guard-f8d03e:item-2:block-31"/>
           <p:cNvSpPr txBox="1"/>
           <p:nvPr/>
         </p:nvSpPr>
@@ -15948,7 +14889,7 @@
       </p:sp>
       <p:sp>
         <p:nvSpPr>
-          <p:cNvPr id="22" name="mdpr:overflow-guard-f8d03e:item-3:block-31"/>
+          <p:cNvPr id="21" name="mdpr:overflow-guard-f8d03e:item-3:block-31"/>
           <p:cNvSpPr txBox="1"/>
           <p:nvPr/>
         </p:nvSpPr>
@@ -16007,7 +14948,7 @@
       </p:sp>
       <p:sp>
         <p:nvSpPr>
-          <p:cNvPr id="23" name="mdpr:overflow-guard-f8d03e:item-4:block-31"/>
+          <p:cNvPr id="22" name="mdpr:overflow-guard-f8d03e:item-4:block-31"/>
           <p:cNvSpPr txBox="1"/>
           <p:nvPr/>
         </p:nvSpPr>
@@ -16300,36 +15241,9 @@
           </a:ln>
         </p:spPr>
       </p:sp>
-      <p:sp>
-        <p:nvSpPr>
-          <p:cNvPr id="10" name="Shape 8"/>
-          <p:cNvSpPr/>
-          <p:nvPr/>
-        </p:nvSpPr>
-        <p:spPr>
-          <a:xfrm>
-            <a:off x="731520" y="1207008"/>
-            <a:ext cx="1325880" cy="54864"/>
-          </a:xfrm>
-          <a:prstGeom prst="rect">
-            <a:avLst/>
-          </a:prstGeom>
-          <a:solidFill>
-            <a:srgbClr val="111111"/>
-          </a:solidFill>
-          <a:ln w="12700">
-            <a:solidFill>
-              <a:srgbClr val="111111">
-                <a:alpha val="0"/>
-              </a:srgbClr>
-            </a:solidFill>
-            <a:prstDash val="solid"/>
-          </a:ln>
-        </p:spPr>
-      </p:sp>
       <p:pic>
         <p:nvPicPr>
-          <p:cNvPr id="11" name="Image 0" descr="preencoded.png">    </p:cNvPr>
+          <p:cNvPr id="10" name="Image 0" descr="preencoded.png">    </p:cNvPr>
           <p:cNvPicPr>
             <a:picLocks noChangeAspect="1"/>
           </p:cNvPicPr>
@@ -16359,7 +15273,7 @@
       </p:pic>
       <p:sp>
         <p:nvSpPr>
-          <p:cNvPr id="12" name="Shape 9"/>
+          <p:cNvPr id="11" name="Shape 8"/>
           <p:cNvSpPr/>
           <p:nvPr/>
         </p:nvSpPr>
@@ -16386,7 +15300,7 @@
       </p:sp>
       <p:sp>
         <p:nvSpPr>
-          <p:cNvPr id="13" name="mdpr:image-safe-frame-d4d6a4:title:__title:image-safe-frame-d4d6a4"/>
+          <p:cNvPr id="12" name="mdpr:image-safe-frame-d4d6a4:title:__title:image-safe-frame-d4d6a4"/>
           <p:cNvSpPr txBox="1"/>
           <p:nvPr/>
         </p:nvSpPr>
@@ -16428,7 +15342,7 @@
       </p:sp>
       <p:sp>
         <p:nvSpPr>
-          <p:cNvPr id="14" name="mdpr:image-safe-frame-d4d6a4:body:block-33-block-33-block-33"/>
+          <p:cNvPr id="13" name="mdpr:image-safe-frame-d4d6a4:body:block-33-block-33-block-33"/>
           <p:cNvSpPr txBox="1"/>
           <p:nvPr/>
         </p:nvSpPr>
@@ -16567,7 +15481,7 @@
       </p:sp>
       <p:pic>
         <p:nvPicPr>
-          <p:cNvPr id="15" name="mdpr:image-safe-frame-d4d6a4:image-1:block-34" descr="{&quot;mdpr&quot;:{&quot;slideId&quot;:&quot;image-safe-frame-d4d6a4&quot;,&quot;layoutSlideId&quot;:&quot;layout-image-safe-frame-d4d6a4&quot;,&quot;regionId&quot;:&quot;image-1&quot;,&quot;blockIds&quot;:[&quot;block-34&quot;],&quot;objectKind&quot;:&quot;native-image&quot;,&quot;role&quot;:&quot;image&quot;,&quot;editable&quot;:false}}">    </p:cNvPr>
+          <p:cNvPr id="14" name="mdpr:image-safe-frame-d4d6a4:image-1:block-34" descr="{&quot;mdpr&quot;:{&quot;slideId&quot;:&quot;image-safe-frame-d4d6a4&quot;,&quot;layoutSlideId&quot;:&quot;layout-image-safe-frame-d4d6a4&quot;,&quot;regionId&quot;:&quot;image-1&quot;,&quot;blockIds&quot;:[&quot;block-34&quot;],&quot;objectKind&quot;:&quot;native-image&quot;,&quot;role&quot;:&quot;image&quot;,&quot;editable&quot;:false}}">    </p:cNvPr>
           <p:cNvPicPr>
             <a:picLocks noChangeAspect="1"/>
           </p:cNvPicPr>
@@ -16831,36 +15745,9 @@
           </a:ln>
         </p:spPr>
       </p:sp>
-      <p:sp>
-        <p:nvSpPr>
-          <p:cNvPr id="10" name="Shape 8"/>
-          <p:cNvSpPr/>
-          <p:nvPr/>
-        </p:nvSpPr>
-        <p:spPr>
-          <a:xfrm>
-            <a:off x="731520" y="1207008"/>
-            <a:ext cx="1325880" cy="54864"/>
-          </a:xfrm>
-          <a:prstGeom prst="rect">
-            <a:avLst/>
-          </a:prstGeom>
-          <a:solidFill>
-            <a:srgbClr val="111111"/>
-          </a:solidFill>
-          <a:ln w="12700">
-            <a:solidFill>
-              <a:srgbClr val="111111">
-                <a:alpha val="0"/>
-              </a:srgbClr>
-            </a:solidFill>
-            <a:prstDash val="solid"/>
-          </a:ln>
-        </p:spPr>
-      </p:sp>
       <p:pic>
         <p:nvPicPr>
-          <p:cNvPr id="11" name="Image 0" descr="preencoded.png">    </p:cNvPr>
+          <p:cNvPr id="10" name="Image 0" descr="preencoded.png">    </p:cNvPr>
           <p:cNvPicPr>
             <a:picLocks noChangeAspect="1"/>
           </p:cNvPicPr>
@@ -16890,7 +15777,7 @@
       </p:pic>
       <p:pic>
         <p:nvPicPr>
-          <p:cNvPr id="12" name="Image 1" descr="preencoded.png">    </p:cNvPr>
+          <p:cNvPr id="11" name="Image 1" descr="preencoded.png">    </p:cNvPr>
           <p:cNvPicPr>
             <a:picLocks noChangeAspect="1"/>
           </p:cNvPicPr>
@@ -16920,7 +15807,7 @@
       </p:pic>
       <p:pic>
         <p:nvPicPr>
-          <p:cNvPr id="13" name="Image 2" descr="preencoded.png">    </p:cNvPr>
+          <p:cNvPr id="12" name="Image 2" descr="preencoded.png">    </p:cNvPr>
           <p:cNvPicPr>
             <a:picLocks noChangeAspect="1"/>
           </p:cNvPicPr>
@@ -16950,7 +15837,7 @@
       </p:pic>
       <p:sp>
         <p:nvSpPr>
-          <p:cNvPr id="14" name="Shape 9"/>
+          <p:cNvPr id="13" name="Shape 8"/>
           <p:cNvSpPr/>
           <p:nvPr/>
         </p:nvSpPr>
@@ -16977,7 +15864,7 @@
       </p:sp>
       <p:sp>
         <p:nvSpPr>
-          <p:cNvPr id="15" name="mdpr:mixed-object-packing-438299:title:__title:mixed-object-packing-438299"/>
+          <p:cNvPr id="14" name="mdpr:mixed-object-packing-438299:title:__title:mixed-object-packing-438299"/>
           <p:cNvSpPr txBox="1"/>
           <p:nvPr/>
         </p:nvSpPr>
@@ -17019,7 +15906,7 @@
       </p:sp>
       <p:graphicFrame>
         <p:nvGraphicFramePr>
-          <p:cNvPr id="16" name="Chart 0" descr=""/>
+          <p:cNvPr id="15" name="Chart 0" descr=""/>
           <p:cNvGraphicFramePr/>
           <p:nvPr/>
         </p:nvGraphicFramePr>
@@ -17477,7 +16364,7 @@
       </p:graphicFrame>
       <p:sp>
         <p:nvSpPr>
-          <p:cNvPr id="18" name="mdpr:mixed-object-packing-438299:body:block-36"/>
+          <p:cNvPr id="17" name="mdpr:mixed-object-packing-438299:body:block-36"/>
           <p:cNvSpPr txBox="1"/>
           <p:nvPr/>
         </p:nvSpPr>
@@ -17576,7 +16463,7 @@
       </p:sp>
       <p:pic>
         <p:nvPicPr>
-          <p:cNvPr id="19" name="mdpr:mixed-object-packing-438299:image-1:block-39" descr="{&quot;mdpr&quot;:{&quot;slideId&quot;:&quot;mixed-object-packing-438299&quot;,&quot;layoutSlideId&quot;:&quot;layout-mixed-object-packing-438299&quot;,&quot;regionId&quot;:&quot;image-1&quot;,&quot;blockIds&quot;:[&quot;block-39&quot;],&quot;objectKind&quot;:&quot;native-image&quot;,&quot;role&quot;:&quot;image&quot;,&quot;editable&quot;:false}}">    </p:cNvPr>
+          <p:cNvPr id="18" name="mdpr:mixed-object-packing-438299:image-1:block-39" descr="{&quot;mdpr&quot;:{&quot;slideId&quot;:&quot;mixed-object-packing-438299&quot;,&quot;layoutSlideId&quot;:&quot;layout-mixed-object-packing-438299&quot;,&quot;regionId&quot;:&quot;image-1&quot;,&quot;blockIds&quot;:[&quot;block-39&quot;],&quot;objectKind&quot;:&quot;native-image&quot;,&quot;role&quot;:&quot;image&quot;,&quot;editable&quot;:false}}">    </p:cNvPr>
           <p:cNvPicPr>
             <a:picLocks noChangeAspect="1"/>
           </p:cNvPicPr>
@@ -17848,8 +16735,8 @@
         </p:nvSpPr>
         <p:spPr>
           <a:xfrm>
-            <a:off x="731520" y="1207008"/>
-            <a:ext cx="1325880" cy="54864"/>
+            <a:off x="822960" y="1938528"/>
+            <a:ext cx="73152" cy="2514600"/>
           </a:xfrm>
           <a:prstGeom prst="rect">
             <a:avLst/>
@@ -17867,114 +16754,22 @@
           </a:ln>
         </p:spPr>
       </p:sp>
-      <p:pic>
-        <p:nvPicPr>
-          <p:cNvPr id="11" name="Image 0" descr="preencoded.png">    </p:cNvPr>
-          <p:cNvPicPr>
-            <a:picLocks noChangeAspect="1"/>
-          </p:cNvPicPr>
-          <p:nvPr/>
-        </p:nvPicPr>
-        <p:blipFill>
-          <a:blip r:embed="rId1">
-            <a:extLst>
-              <a:ext uri="{96DAC541-7B7A-43D3-8B79-37D633B846F1}">
-                <asvg:svgBlip xmlns:asvg="http://schemas.microsoft.com/office/drawing/2016/SVG/main" r:embed="rId2"/>
-              </a:ext>
-            </a:extLst>
-          </a:blip>
-          <a:stretch>
-            <a:fillRect/>
-          </a:stretch>
-        </p:blipFill>
-        <p:spPr>
-          <a:xfrm>
-            <a:off x="914400" y="1865376"/>
-            <a:ext cx="10241280" cy="1024128"/>
-          </a:xfrm>
-          <a:prstGeom prst="rect">
-            <a:avLst/>
-          </a:prstGeom>
-        </p:spPr>
-      </p:pic>
-      <p:pic>
-        <p:nvPicPr>
-          <p:cNvPr id="12" name="Image 1" descr="preencoded.png">    </p:cNvPr>
-          <p:cNvPicPr>
-            <a:picLocks noChangeAspect="1"/>
-          </p:cNvPicPr>
-          <p:nvPr/>
-        </p:nvPicPr>
-        <p:blipFill>
-          <a:blip r:embed="rId3">
-            <a:extLst>
-              <a:ext uri="{96DAC541-7B7A-43D3-8B79-37D633B846F1}">
-                <asvg:svgBlip xmlns:asvg="http://schemas.microsoft.com/office/drawing/2016/SVG/main" r:embed="rId4"/>
-              </a:ext>
-            </a:extLst>
-          </a:blip>
-          <a:stretch>
-            <a:fillRect/>
-          </a:stretch>
-        </p:blipFill>
-        <p:spPr>
-          <a:xfrm>
-            <a:off x="914400" y="3191256"/>
-            <a:ext cx="10241280" cy="1024128"/>
-          </a:xfrm>
-          <a:prstGeom prst="rect">
-            <a:avLst/>
-          </a:prstGeom>
-        </p:spPr>
-      </p:pic>
-      <p:pic>
-        <p:nvPicPr>
-          <p:cNvPr id="13" name="Image 2" descr="preencoded.png">    </p:cNvPr>
-          <p:cNvPicPr>
-            <a:picLocks noChangeAspect="1"/>
-          </p:cNvPicPr>
-          <p:nvPr/>
-        </p:nvPicPr>
-        <p:blipFill>
-          <a:blip r:embed="rId5">
-            <a:extLst>
-              <a:ext uri="{96DAC541-7B7A-43D3-8B79-37D633B846F1}">
-                <asvg:svgBlip xmlns:asvg="http://schemas.microsoft.com/office/drawing/2016/SVG/main" r:embed="rId6"/>
-              </a:ext>
-            </a:extLst>
-          </a:blip>
-          <a:stretch>
-            <a:fillRect/>
-          </a:stretch>
-        </p:blipFill>
-        <p:spPr>
-          <a:xfrm>
-            <a:off x="914400" y="4507992"/>
-            <a:ext cx="10241280" cy="1024128"/>
-          </a:xfrm>
-          <a:prstGeom prst="rect">
-            <a:avLst/>
-          </a:prstGeom>
-        </p:spPr>
-      </p:pic>
-      <p:sp>
-        <p:nvSpPr>
-          <p:cNvPr id="14" name="Shape 9"/>
-          <p:cNvSpPr/>
-          <p:nvPr/>
-        </p:nvSpPr>
-        <p:spPr>
-          <a:xfrm>
-            <a:off x="786384" y="1956816"/>
-            <a:ext cx="32004" cy="3483864"/>
-          </a:xfrm>
-          <a:prstGeom prst="rect">
-            <a:avLst/>
-          </a:prstGeom>
-          <a:solidFill>
-            <a:srgbClr val="00A6FF">
-              <a:alpha val="80000"/>
-            </a:srgbClr>
+      <p:sp>
+        <p:nvSpPr>
+          <p:cNvPr id="11" name="Shape 9"/>
+          <p:cNvSpPr/>
+          <p:nvPr/>
+        </p:nvSpPr>
+        <p:spPr>
+          <a:xfrm>
+            <a:off x="4343400" y="1938528"/>
+            <a:ext cx="73152" cy="2514600"/>
+          </a:xfrm>
+          <a:prstGeom prst="rect">
+            <a:avLst/>
+          </a:prstGeom>
+          <a:solidFill>
+            <a:srgbClr val="00A6FF"/>
           </a:solidFill>
           <a:ln w="12700">
             <a:solidFill>
@@ -17988,14 +16783,14 @@
       </p:sp>
       <p:sp>
         <p:nvSpPr>
-          <p:cNvPr id="15" name="Shape 10"/>
-          <p:cNvSpPr/>
-          <p:nvPr/>
-        </p:nvSpPr>
-        <p:spPr>
-          <a:xfrm>
-            <a:off x="914400" y="1865376"/>
-            <a:ext cx="73152" cy="1024128"/>
+          <p:cNvPr id="12" name="Shape 10"/>
+          <p:cNvSpPr/>
+          <p:nvPr/>
+        </p:nvSpPr>
+        <p:spPr>
+          <a:xfrm>
+            <a:off x="7863840" y="1938528"/>
+            <a:ext cx="73152" cy="2514600"/>
           </a:xfrm>
           <a:prstGeom prst="rect">
             <a:avLst/>
@@ -18015,61 +16810,7 @@
       </p:sp>
       <p:sp>
         <p:nvSpPr>
-          <p:cNvPr id="16" name="Shape 11"/>
-          <p:cNvSpPr/>
-          <p:nvPr/>
-        </p:nvSpPr>
-        <p:spPr>
-          <a:xfrm>
-            <a:off x="914400" y="3191256"/>
-            <a:ext cx="73152" cy="1024128"/>
-          </a:xfrm>
-          <a:prstGeom prst="rect">
-            <a:avLst/>
-          </a:prstGeom>
-          <a:solidFill>
-            <a:srgbClr val="00A6FF"/>
-          </a:solidFill>
-          <a:ln w="12700">
-            <a:solidFill>
-              <a:srgbClr val="00A6FF">
-                <a:alpha val="0"/>
-              </a:srgbClr>
-            </a:solidFill>
-            <a:prstDash val="solid"/>
-          </a:ln>
-        </p:spPr>
-      </p:sp>
-      <p:sp>
-        <p:nvSpPr>
-          <p:cNvPr id="17" name="Shape 12"/>
-          <p:cNvSpPr/>
-          <p:nvPr/>
-        </p:nvSpPr>
-        <p:spPr>
-          <a:xfrm>
-            <a:off x="914400" y="4507992"/>
-            <a:ext cx="73152" cy="1024128"/>
-          </a:xfrm>
-          <a:prstGeom prst="rect">
-            <a:avLst/>
-          </a:prstGeom>
-          <a:solidFill>
-            <a:srgbClr val="111111"/>
-          </a:solidFill>
-          <a:ln w="12700">
-            <a:solidFill>
-              <a:srgbClr val="111111">
-                <a:alpha val="0"/>
-              </a:srgbClr>
-            </a:solidFill>
-            <a:prstDash val="solid"/>
-          </a:ln>
-        </p:spPr>
-      </p:sp>
-      <p:sp>
-        <p:nvSpPr>
-          <p:cNvPr id="18" name="mdpr:actions-output-review-326e07:title:__title:actions-output-review-326e07"/>
+          <p:cNvPr id="13" name="mdpr:actions-output-review-326e07:title:__title:actions-output-review-326e07"/>
           <p:cNvSpPr txBox="1"/>
           <p:nvPr/>
         </p:nvSpPr>
@@ -18111,14 +16852,14 @@
       </p:sp>
       <p:sp>
         <p:nvSpPr>
-          <p:cNvPr id="19" name="mdpr:actions-output-review-326e07:item-1:block-41"/>
+          <p:cNvPr id="14" name="mdpr:actions-output-review-326e07:item-1:block-41"/>
           <p:cNvSpPr txBox="1"/>
           <p:nvPr/>
         </p:nvSpPr>
         <p:spPr>
           <a:xfrm>
-            <a:off x="1133856" y="1957548"/>
-            <a:ext cx="9820656" cy="839785"/>
+            <a:off x="1042416" y="2103120"/>
+            <a:ext cx="2825496" cy="2185416"/>
           </a:xfrm>
           <a:prstGeom prst="rect">
             <a:avLst/>
@@ -18170,14 +16911,14 @@
       </p:sp>
       <p:sp>
         <p:nvSpPr>
-          <p:cNvPr id="20" name="mdpr:actions-output-review-326e07:item-2:block-41"/>
+          <p:cNvPr id="15" name="mdpr:actions-output-review-326e07:item-2:block-41"/>
           <p:cNvSpPr txBox="1"/>
           <p:nvPr/>
         </p:nvSpPr>
         <p:spPr>
           <a:xfrm>
-            <a:off x="1133856" y="3283428"/>
-            <a:ext cx="9820656" cy="839785"/>
+            <a:off x="4562856" y="2103120"/>
+            <a:ext cx="2825496" cy="2185416"/>
           </a:xfrm>
           <a:prstGeom prst="rect">
             <a:avLst/>
@@ -18229,14 +16970,14 @@
       </p:sp>
       <p:sp>
         <p:nvSpPr>
-          <p:cNvPr id="21" name="mdpr:actions-output-review-326e07:item-3:block-41"/>
+          <p:cNvPr id="16" name="mdpr:actions-output-review-326e07:item-3:block-41"/>
           <p:cNvSpPr txBox="1"/>
           <p:nvPr/>
         </p:nvSpPr>
         <p:spPr>
           <a:xfrm>
-            <a:off x="1133856" y="4600164"/>
-            <a:ext cx="9820656" cy="839785"/>
+            <a:off x="8083296" y="2103120"/>
+            <a:ext cx="2825496" cy="2185416"/>
           </a:xfrm>
           <a:prstGeom prst="rect">
             <a:avLst/>
@@ -18530,8 +17271,8 @@
         </p:nvSpPr>
         <p:spPr>
           <a:xfrm>
-            <a:off x="731520" y="1207008"/>
-            <a:ext cx="1325880" cy="54864"/>
+            <a:off x="822960" y="1737360"/>
+            <a:ext cx="73152" cy="841248"/>
           </a:xfrm>
           <a:prstGeom prst="rect">
             <a:avLst/>
@@ -18557,8 +17298,35 @@
         </p:nvSpPr>
         <p:spPr>
           <a:xfrm>
-            <a:off x="822960" y="3099816"/>
-            <a:ext cx="10515600" cy="45720"/>
+            <a:off x="822960" y="2779776"/>
+            <a:ext cx="73152" cy="841248"/>
+          </a:xfrm>
+          <a:prstGeom prst="rect">
+            <a:avLst/>
+          </a:prstGeom>
+          <a:solidFill>
+            <a:srgbClr val="00A6FF"/>
+          </a:solidFill>
+          <a:ln w="12700">
+            <a:solidFill>
+              <a:srgbClr val="00A6FF">
+                <a:alpha val="0"/>
+              </a:srgbClr>
+            </a:solidFill>
+            <a:prstDash val="solid"/>
+          </a:ln>
+        </p:spPr>
+      </p:sp>
+      <p:sp>
+        <p:nvSpPr>
+          <p:cNvPr id="12" name="Shape 10"/>
+          <p:cNvSpPr/>
+          <p:nvPr/>
+        </p:nvSpPr>
+        <p:spPr>
+          <a:xfrm>
+            <a:off x="822960" y="3822192"/>
+            <a:ext cx="73152" cy="841248"/>
           </a:xfrm>
           <a:prstGeom prst="rect">
             <a:avLst/>
@@ -18578,14 +17346,14 @@
       </p:sp>
       <p:sp>
         <p:nvSpPr>
-          <p:cNvPr id="12" name="Shape 10"/>
-          <p:cNvSpPr/>
-          <p:nvPr/>
-        </p:nvSpPr>
-        <p:spPr>
-          <a:xfrm>
-            <a:off x="822960" y="4288536"/>
-            <a:ext cx="2011680" cy="45720"/>
+          <p:cNvPr id="13" name="Shape 11"/>
+          <p:cNvSpPr/>
+          <p:nvPr/>
+        </p:nvSpPr>
+        <p:spPr>
+          <a:xfrm>
+            <a:off x="822960" y="4864608"/>
+            <a:ext cx="73152" cy="841248"/>
           </a:xfrm>
           <a:prstGeom prst="rect">
             <a:avLst/>
@@ -18605,13 +17373,13 @@
       </p:sp>
       <p:sp>
         <p:nvSpPr>
-          <p:cNvPr id="13" name="Shape 11"/>
-          <p:cNvSpPr/>
-          <p:nvPr/>
-        </p:nvSpPr>
-        <p:spPr>
-          <a:xfrm>
-            <a:off x="822960" y="3300984"/>
+          <p:cNvPr id="14" name="Shape 12"/>
+          <p:cNvSpPr/>
+          <p:nvPr/>
+        </p:nvSpPr>
+        <p:spPr>
+          <a:xfrm>
+            <a:off x="6272784" y="1737360"/>
             <a:ext cx="73152" cy="841248"/>
           </a:xfrm>
           <a:prstGeom prst="rect">
@@ -18632,7 +17400,61 @@
       </p:sp>
       <p:sp>
         <p:nvSpPr>
-          <p:cNvPr id="14" name="mdpr:2-2-7bfb60:title:__title:2-2-7bfb60"/>
+          <p:cNvPr id="15" name="Shape 13"/>
+          <p:cNvSpPr/>
+          <p:nvPr/>
+        </p:nvSpPr>
+        <p:spPr>
+          <a:xfrm>
+            <a:off x="6272784" y="2779776"/>
+            <a:ext cx="73152" cy="841248"/>
+          </a:xfrm>
+          <a:prstGeom prst="rect">
+            <a:avLst/>
+          </a:prstGeom>
+          <a:solidFill>
+            <a:srgbClr val="00A6FF"/>
+          </a:solidFill>
+          <a:ln w="12700">
+            <a:solidFill>
+              <a:srgbClr val="00A6FF">
+                <a:alpha val="0"/>
+              </a:srgbClr>
+            </a:solidFill>
+            <a:prstDash val="solid"/>
+          </a:ln>
+        </p:spPr>
+      </p:sp>
+      <p:sp>
+        <p:nvSpPr>
+          <p:cNvPr id="16" name="Shape 14"/>
+          <p:cNvSpPr/>
+          <p:nvPr/>
+        </p:nvSpPr>
+        <p:spPr>
+          <a:xfrm>
+            <a:off x="6272784" y="3822192"/>
+            <a:ext cx="73152" cy="841248"/>
+          </a:xfrm>
+          <a:prstGeom prst="rect">
+            <a:avLst/>
+          </a:prstGeom>
+          <a:solidFill>
+            <a:srgbClr val="111111"/>
+          </a:solidFill>
+          <a:ln w="12700">
+            <a:solidFill>
+              <a:srgbClr val="111111">
+                <a:alpha val="0"/>
+              </a:srgbClr>
+            </a:solidFill>
+            <a:prstDash val="solid"/>
+          </a:ln>
+        </p:spPr>
+      </p:sp>
+      <p:sp>
+        <p:nvSpPr>
+          <p:cNvPr id="17" name="mdpr:2-2-7bfb60:title:__title:2-2-7bfb60"/>
           <p:cNvSpPr txBox="1"/>
           <p:nvPr/>
         </p:nvSpPr>
@@ -18666,7 +17488,24 @@
                 <a:ea typeface="Pretendard" pitchFamily="34" charset="-122"/>
                 <a:cs typeface="Pretendard" pitchFamily="34" charset="-120"/>
               </a:rPr>
-              <a:t>Agenda (Cont. 2/2)</a:t>
+              <a:t>Agenda</a:t>
+            </a:r>
+            <a:pPr algn="ctr" indent="0" marL="0">
+              <a:lnSpc>
+                <a:spcPct val="120000"/>
+              </a:lnSpc>
+              <a:buNone/>
+            </a:pPr>
+            <a:r>
+              <a:rPr lang="en-US" sz="2300" dirty="0">
+                <a:solidFill>
+                  <a:srgbClr val="888888"/>
+                </a:solidFill>
+                <a:latin typeface="Pretendard" pitchFamily="34" charset="0"/>
+                <a:ea typeface="Pretendard" pitchFamily="34" charset="-122"/>
+                <a:cs typeface="Pretendard" pitchFamily="34" charset="-120"/>
+              </a:rPr>
+              <a:t> (Cont. 2/2)</a:t>
             </a:r>
             <a:endParaRPr lang="en-US" sz="3800" dirty="0"/>
           </a:p>
@@ -18674,14 +17513,14 @@
       </p:sp>
       <p:sp>
         <p:nvSpPr>
-          <p:cNvPr id="15" name="mdpr:2-2-7bfb60:toc-item-1:toc-item-15"/>
+          <p:cNvPr id="18" name="mdpr:2-2-7bfb60:toc-item-1:toc-item-9"/>
           <p:cNvSpPr txBox="1"/>
           <p:nvPr/>
         </p:nvSpPr>
         <p:spPr>
           <a:xfrm>
-            <a:off x="1042416" y="3392424"/>
-            <a:ext cx="10094976" cy="658368"/>
+            <a:off x="1042416" y="1828800"/>
+            <a:ext cx="4645152" cy="658368"/>
           </a:xfrm>
           <a:prstGeom prst="rect">
             <a:avLst/>
@@ -18700,7 +17539,7 @@
               <a:buNone/>
             </a:pPr>
             <a:r>
-              <a:rPr lang="en-US" sz="2200" dirty="0">
+              <a:rPr lang="en-US" sz="1800" dirty="0">
                 <a:solidFill>
                   <a:srgbClr val="111111"/>
                 </a:solidFill>
@@ -18708,9 +17547,261 @@
                 <a:ea typeface="Pretendard" pitchFamily="34" charset="-122"/>
                 <a:cs typeface="Pretendard" pitchFamily="34" charset="-120"/>
               </a:rPr>
-              <a:t>01  Actions Output Review</a:t>
+              <a:t>09  Editable Proof Objects</a:t>
             </a:r>
-            <a:endParaRPr lang="en-US" sz="2200" dirty="0"/>
+            <a:endParaRPr lang="en-US" sz="1800" dirty="0"/>
+          </a:p>
+        </p:txBody>
+      </p:sp>
+      <p:sp>
+        <p:nvSpPr>
+          <p:cNvPr id="19" name="mdpr:2-2-7bfb60:toc-item-2:toc-item-10"/>
+          <p:cNvSpPr txBox="1"/>
+          <p:nvPr/>
+        </p:nvSpPr>
+        <p:spPr>
+          <a:xfrm>
+            <a:off x="1042416" y="2871216"/>
+            <a:ext cx="4645152" cy="658368"/>
+          </a:xfrm>
+          <a:prstGeom prst="rect">
+            <a:avLst/>
+          </a:prstGeom>
+          <a:noFill/>
+          <a:ln/>
+        </p:spPr>
+        <p:txBody>
+          <a:bodyPr wrap="square" lIns="0" tIns="25400" rIns="25400" bIns="0" rtlCol="0" anchor="ctr"/>
+          <a:lstStyle/>
+          <a:p>
+            <a:pPr algn="ctr" indent="0" marL="0">
+              <a:lnSpc>
+                <a:spcPct val="120000"/>
+              </a:lnSpc>
+              <a:buNone/>
+            </a:pPr>
+            <a:r>
+              <a:rPr lang="en-US" sz="1800" dirty="0">
+                <a:solidFill>
+                  <a:srgbClr val="111111"/>
+                </a:solidFill>
+                <a:latin typeface="Pretendard" pitchFamily="34" charset="0"/>
+                <a:ea typeface="Pretendard" pitchFamily="34" charset="-122"/>
+                <a:cs typeface="Pretendard" pitchFamily="34" charset="-120"/>
+              </a:rPr>
+              <a:t>10  Object Shape Grammar</a:t>
+            </a:r>
+            <a:endParaRPr lang="en-US" sz="1800" dirty="0"/>
+          </a:p>
+        </p:txBody>
+      </p:sp>
+      <p:sp>
+        <p:nvSpPr>
+          <p:cNvPr id="20" name="mdpr:2-2-7bfb60:toc-item-3:toc-item-11"/>
+          <p:cNvSpPr txBox="1"/>
+          <p:nvPr/>
+        </p:nvSpPr>
+        <p:spPr>
+          <a:xfrm>
+            <a:off x="1042416" y="3913632"/>
+            <a:ext cx="4645152" cy="658368"/>
+          </a:xfrm>
+          <a:prstGeom prst="rect">
+            <a:avLst/>
+          </a:prstGeom>
+          <a:noFill/>
+          <a:ln/>
+        </p:spPr>
+        <p:txBody>
+          <a:bodyPr wrap="square" lIns="0" tIns="25400" rIns="25400" bIns="0" rtlCol="0" anchor="ctr"/>
+          <a:lstStyle/>
+          <a:p>
+            <a:pPr algn="ctr" indent="0" marL="0">
+              <a:lnSpc>
+                <a:spcPct val="120000"/>
+              </a:lnSpc>
+              <a:buNone/>
+            </a:pPr>
+            <a:r>
+              <a:rPr lang="en-US" sz="1800" dirty="0">
+                <a:solidFill>
+                  <a:srgbClr val="111111"/>
+                </a:solidFill>
+                <a:latin typeface="Pretendard" pitchFamily="34" charset="0"/>
+                <a:ea typeface="Pretendard" pitchFamily="34" charset="-122"/>
+                <a:cs typeface="Pretendard" pitchFamily="34" charset="-120"/>
+              </a:rPr>
+              <a:t>11  Icon and Text Aside</a:t>
+            </a:r>
+            <a:endParaRPr lang="en-US" sz="1800" dirty="0"/>
+          </a:p>
+        </p:txBody>
+      </p:sp>
+      <p:sp>
+        <p:nvSpPr>
+          <p:cNvPr id="21" name="mdpr:2-2-7bfb60:toc-item-4:toc-item-12"/>
+          <p:cNvSpPr txBox="1"/>
+          <p:nvPr/>
+        </p:nvSpPr>
+        <p:spPr>
+          <a:xfrm>
+            <a:off x="1042416" y="4956048"/>
+            <a:ext cx="4645152" cy="658368"/>
+          </a:xfrm>
+          <a:prstGeom prst="rect">
+            <a:avLst/>
+          </a:prstGeom>
+          <a:noFill/>
+          <a:ln/>
+        </p:spPr>
+        <p:txBody>
+          <a:bodyPr wrap="square" lIns="0" tIns="25400" rIns="25400" bIns="0" rtlCol="0" anchor="ctr"/>
+          <a:lstStyle/>
+          <a:p>
+            <a:pPr algn="ctr" indent="0" marL="0">
+              <a:lnSpc>
+                <a:spcPct val="120000"/>
+              </a:lnSpc>
+              <a:buNone/>
+            </a:pPr>
+            <a:r>
+              <a:rPr lang="en-US" sz="1800" dirty="0">
+                <a:solidFill>
+                  <a:srgbClr val="111111"/>
+                </a:solidFill>
+                <a:latin typeface="Pretendard" pitchFamily="34" charset="0"/>
+                <a:ea typeface="Pretendard" pitchFamily="34" charset="-122"/>
+                <a:cs typeface="Pretendard" pitchFamily="34" charset="-120"/>
+              </a:rPr>
+              <a:t>12  Overflow Guard</a:t>
+            </a:r>
+            <a:endParaRPr lang="en-US" sz="1800" dirty="0"/>
+          </a:p>
+        </p:txBody>
+      </p:sp>
+      <p:sp>
+        <p:nvSpPr>
+          <p:cNvPr id="22" name="mdpr:2-2-7bfb60:toc-item-5:toc-item-13"/>
+          <p:cNvSpPr txBox="1"/>
+          <p:nvPr/>
+        </p:nvSpPr>
+        <p:spPr>
+          <a:xfrm>
+            <a:off x="6492240" y="1828800"/>
+            <a:ext cx="4645152" cy="658368"/>
+          </a:xfrm>
+          <a:prstGeom prst="rect">
+            <a:avLst/>
+          </a:prstGeom>
+          <a:noFill/>
+          <a:ln/>
+        </p:spPr>
+        <p:txBody>
+          <a:bodyPr wrap="square" lIns="0" tIns="25400" rIns="25400" bIns="0" rtlCol="0" anchor="ctr"/>
+          <a:lstStyle/>
+          <a:p>
+            <a:pPr algn="ctr" indent="0" marL="0">
+              <a:lnSpc>
+                <a:spcPct val="120000"/>
+              </a:lnSpc>
+              <a:buNone/>
+            </a:pPr>
+            <a:r>
+              <a:rPr lang="en-US" sz="1800" dirty="0">
+                <a:solidFill>
+                  <a:srgbClr val="111111"/>
+                </a:solidFill>
+                <a:latin typeface="Pretendard" pitchFamily="34" charset="0"/>
+                <a:ea typeface="Pretendard" pitchFamily="34" charset="-122"/>
+                <a:cs typeface="Pretendard" pitchFamily="34" charset="-120"/>
+              </a:rPr>
+              <a:t>13  Image Safe Frame</a:t>
+            </a:r>
+            <a:endParaRPr lang="en-US" sz="1800" dirty="0"/>
+          </a:p>
+        </p:txBody>
+      </p:sp>
+      <p:sp>
+        <p:nvSpPr>
+          <p:cNvPr id="23" name="mdpr:2-2-7bfb60:toc-item-6:toc-item-14"/>
+          <p:cNvSpPr txBox="1"/>
+          <p:nvPr/>
+        </p:nvSpPr>
+        <p:spPr>
+          <a:xfrm>
+            <a:off x="6492240" y="2871216"/>
+            <a:ext cx="4645152" cy="658368"/>
+          </a:xfrm>
+          <a:prstGeom prst="rect">
+            <a:avLst/>
+          </a:prstGeom>
+          <a:noFill/>
+          <a:ln/>
+        </p:spPr>
+        <p:txBody>
+          <a:bodyPr wrap="square" lIns="0" tIns="25400" rIns="25400" bIns="0" rtlCol="0" anchor="ctr"/>
+          <a:lstStyle/>
+          <a:p>
+            <a:pPr algn="ctr" indent="0" marL="0">
+              <a:lnSpc>
+                <a:spcPct val="120000"/>
+              </a:lnSpc>
+              <a:buNone/>
+            </a:pPr>
+            <a:r>
+              <a:rPr lang="en-US" sz="1800" dirty="0">
+                <a:solidFill>
+                  <a:srgbClr val="111111"/>
+                </a:solidFill>
+                <a:latin typeface="Pretendard" pitchFamily="34" charset="0"/>
+                <a:ea typeface="Pretendard" pitchFamily="34" charset="-122"/>
+                <a:cs typeface="Pretendard" pitchFamily="34" charset="-120"/>
+              </a:rPr>
+              <a:t>14  Mixed Object Packing</a:t>
+            </a:r>
+            <a:endParaRPr lang="en-US" sz="1800" dirty="0"/>
+          </a:p>
+        </p:txBody>
+      </p:sp>
+      <p:sp>
+        <p:nvSpPr>
+          <p:cNvPr id="24" name="mdpr:2-2-7bfb60:toc-item-7:toc-item-15"/>
+          <p:cNvSpPr txBox="1"/>
+          <p:nvPr/>
+        </p:nvSpPr>
+        <p:spPr>
+          <a:xfrm>
+            <a:off x="6492240" y="3913632"/>
+            <a:ext cx="4645152" cy="658368"/>
+          </a:xfrm>
+          <a:prstGeom prst="rect">
+            <a:avLst/>
+          </a:prstGeom>
+          <a:noFill/>
+          <a:ln/>
+        </p:spPr>
+        <p:txBody>
+          <a:bodyPr wrap="square" lIns="0" tIns="25400" rIns="25400" bIns="0" rtlCol="0" anchor="ctr"/>
+          <a:lstStyle/>
+          <a:p>
+            <a:pPr algn="ctr" indent="0" marL="0">
+              <a:lnSpc>
+                <a:spcPct val="120000"/>
+              </a:lnSpc>
+              <a:buNone/>
+            </a:pPr>
+            <a:r>
+              <a:rPr lang="en-US" sz="1800" dirty="0">
+                <a:solidFill>
+                  <a:srgbClr val="111111"/>
+                </a:solidFill>
+                <a:latin typeface="Pretendard" pitchFamily="34" charset="0"/>
+                <a:ea typeface="Pretendard" pitchFamily="34" charset="-122"/>
+                <a:cs typeface="Pretendard" pitchFamily="34" charset="-120"/>
+              </a:rPr>
+              <a:t>15  Actions Output Review</a:t>
+            </a:r>
+            <a:endParaRPr lang="en-US" sz="1800" dirty="0"/>
           </a:p>
         </p:txBody>
       </p:sp>
@@ -18950,36 +18041,9 @@
           </a:ln>
         </p:spPr>
       </p:sp>
-      <p:sp>
-        <p:nvSpPr>
-          <p:cNvPr id="10" name="Shape 8"/>
-          <p:cNvSpPr/>
-          <p:nvPr/>
-        </p:nvSpPr>
-        <p:spPr>
-          <a:xfrm>
-            <a:off x="731520" y="1207008"/>
-            <a:ext cx="1325880" cy="54864"/>
-          </a:xfrm>
-          <a:prstGeom prst="rect">
-            <a:avLst/>
-          </a:prstGeom>
-          <a:solidFill>
-            <a:srgbClr val="111111"/>
-          </a:solidFill>
-          <a:ln w="12700">
-            <a:solidFill>
-              <a:srgbClr val="111111">
-                <a:alpha val="0"/>
-              </a:srgbClr>
-            </a:solidFill>
-            <a:prstDash val="solid"/>
-          </a:ln>
-        </p:spPr>
-      </p:sp>
       <p:pic>
         <p:nvPicPr>
-          <p:cNvPr id="11" name="Image 0" descr="preencoded.png">    </p:cNvPr>
+          <p:cNvPr id="10" name="Image 0" descr="preencoded.png">    </p:cNvPr>
           <p:cNvPicPr>
             <a:picLocks noChangeAspect="1"/>
           </p:cNvPicPr>
@@ -19009,7 +18073,7 @@
       </p:pic>
       <p:sp>
         <p:nvSpPr>
-          <p:cNvPr id="12" name="Shape 9"/>
+          <p:cNvPr id="11" name="Shape 8"/>
           <p:cNvSpPr/>
           <p:nvPr/>
         </p:nvSpPr>
@@ -19038,7 +18102,7 @@
       </p:sp>
       <p:sp>
         <p:nvSpPr>
-          <p:cNvPr id="13" name="Shape 10"/>
+          <p:cNvPr id="12" name="Shape 9"/>
           <p:cNvSpPr/>
           <p:nvPr/>
         </p:nvSpPr>
@@ -19065,7 +18129,7 @@
       </p:sp>
       <p:sp>
         <p:nvSpPr>
-          <p:cNvPr id="14" name="mdpr:teaser-summary-7731dc:title:__title:teaser-summary-7731dc"/>
+          <p:cNvPr id="13" name="mdpr:teaser-summary-7731dc:title:__title:teaser-summary-7731dc"/>
           <p:cNvSpPr txBox="1"/>
           <p:nvPr/>
         </p:nvSpPr>
@@ -19107,7 +18171,7 @@
       </p:sp>
       <p:sp>
         <p:nvSpPr>
-          <p:cNvPr id="15" name="mdpr:teaser-summary-7731dc:key-message:block-3"/>
+          <p:cNvPr id="14" name="mdpr:teaser-summary-7731dc:key-message:block-3"/>
           <p:cNvSpPr txBox="1"/>
           <p:nvPr/>
         </p:nvSpPr>
@@ -19149,7 +18213,7 @@
       </p:sp>
       <p:sp>
         <p:nvSpPr>
-          <p:cNvPr id="16" name="mdpr:teaser-summary-7731dc:body:block-4"/>
+          <p:cNvPr id="15" name="mdpr:teaser-summary-7731dc:body:block-4"/>
           <p:cNvSpPr txBox="1"/>
           <p:nvPr/>
         </p:nvSpPr>
@@ -19570,8 +18634,8 @@
         </p:nvSpPr>
         <p:spPr>
           <a:xfrm>
-            <a:off x="731520" y="1207008"/>
-            <a:ext cx="1325880" cy="54864"/>
+            <a:off x="822960" y="1938528"/>
+            <a:ext cx="73152" cy="2514600"/>
           </a:xfrm>
           <a:prstGeom prst="rect">
             <a:avLst/>
@@ -19589,114 +18653,22 @@
           </a:ln>
         </p:spPr>
       </p:sp>
-      <p:pic>
-        <p:nvPicPr>
-          <p:cNvPr id="11" name="Image 0" descr="preencoded.png">    </p:cNvPr>
-          <p:cNvPicPr>
-            <a:picLocks noChangeAspect="1"/>
-          </p:cNvPicPr>
-          <p:nvPr/>
-        </p:nvPicPr>
-        <p:blipFill>
-          <a:blip r:embed="rId1">
-            <a:extLst>
-              <a:ext uri="{96DAC541-7B7A-43D3-8B79-37D633B846F1}">
-                <asvg:svgBlip xmlns:asvg="http://schemas.microsoft.com/office/drawing/2016/SVG/main" r:embed="rId2"/>
-              </a:ext>
-            </a:extLst>
-          </a:blip>
-          <a:stretch>
-            <a:fillRect/>
-          </a:stretch>
-        </p:blipFill>
-        <p:spPr>
-          <a:xfrm>
-            <a:off x="914400" y="1865376"/>
-            <a:ext cx="10241280" cy="1024128"/>
-          </a:xfrm>
-          <a:prstGeom prst="rect">
-            <a:avLst/>
-          </a:prstGeom>
-        </p:spPr>
-      </p:pic>
-      <p:pic>
-        <p:nvPicPr>
-          <p:cNvPr id="12" name="Image 1" descr="preencoded.png">    </p:cNvPr>
-          <p:cNvPicPr>
-            <a:picLocks noChangeAspect="1"/>
-          </p:cNvPicPr>
-          <p:nvPr/>
-        </p:nvPicPr>
-        <p:blipFill>
-          <a:blip r:embed="rId3">
-            <a:extLst>
-              <a:ext uri="{96DAC541-7B7A-43D3-8B79-37D633B846F1}">
-                <asvg:svgBlip xmlns:asvg="http://schemas.microsoft.com/office/drawing/2016/SVG/main" r:embed="rId4"/>
-              </a:ext>
-            </a:extLst>
-          </a:blip>
-          <a:stretch>
-            <a:fillRect/>
-          </a:stretch>
-        </p:blipFill>
-        <p:spPr>
-          <a:xfrm>
-            <a:off x="914400" y="3191256"/>
-            <a:ext cx="10241280" cy="1024128"/>
-          </a:xfrm>
-          <a:prstGeom prst="rect">
-            <a:avLst/>
-          </a:prstGeom>
-        </p:spPr>
-      </p:pic>
-      <p:pic>
-        <p:nvPicPr>
-          <p:cNvPr id="13" name="Image 2" descr="preencoded.png">    </p:cNvPr>
-          <p:cNvPicPr>
-            <a:picLocks noChangeAspect="1"/>
-          </p:cNvPicPr>
-          <p:nvPr/>
-        </p:nvPicPr>
-        <p:blipFill>
-          <a:blip r:embed="rId5">
-            <a:extLst>
-              <a:ext uri="{96DAC541-7B7A-43D3-8B79-37D633B846F1}">
-                <asvg:svgBlip xmlns:asvg="http://schemas.microsoft.com/office/drawing/2016/SVG/main" r:embed="rId6"/>
-              </a:ext>
-            </a:extLst>
-          </a:blip>
-          <a:stretch>
-            <a:fillRect/>
-          </a:stretch>
-        </p:blipFill>
-        <p:spPr>
-          <a:xfrm>
-            <a:off x="914400" y="4507992"/>
-            <a:ext cx="10241280" cy="1024128"/>
-          </a:xfrm>
-          <a:prstGeom prst="rect">
-            <a:avLst/>
-          </a:prstGeom>
-        </p:spPr>
-      </p:pic>
-      <p:sp>
-        <p:nvSpPr>
-          <p:cNvPr id="14" name="Shape 9"/>
-          <p:cNvSpPr/>
-          <p:nvPr/>
-        </p:nvSpPr>
-        <p:spPr>
-          <a:xfrm>
-            <a:off x="786384" y="1956816"/>
-            <a:ext cx="32004" cy="3483864"/>
-          </a:xfrm>
-          <a:prstGeom prst="rect">
-            <a:avLst/>
-          </a:prstGeom>
-          <a:solidFill>
-            <a:srgbClr val="00A6FF">
-              <a:alpha val="80000"/>
-            </a:srgbClr>
+      <p:sp>
+        <p:nvSpPr>
+          <p:cNvPr id="11" name="Shape 9"/>
+          <p:cNvSpPr/>
+          <p:nvPr/>
+        </p:nvSpPr>
+        <p:spPr>
+          <a:xfrm>
+            <a:off x="4343400" y="1938528"/>
+            <a:ext cx="73152" cy="2514600"/>
+          </a:xfrm>
+          <a:prstGeom prst="rect">
+            <a:avLst/>
+          </a:prstGeom>
+          <a:solidFill>
+            <a:srgbClr val="00A6FF"/>
           </a:solidFill>
           <a:ln w="12700">
             <a:solidFill>
@@ -19710,14 +18682,14 @@
       </p:sp>
       <p:sp>
         <p:nvSpPr>
-          <p:cNvPr id="15" name="Shape 10"/>
-          <p:cNvSpPr/>
-          <p:nvPr/>
-        </p:nvSpPr>
-        <p:spPr>
-          <a:xfrm>
-            <a:off x="914400" y="1865376"/>
-            <a:ext cx="73152" cy="1024128"/>
+          <p:cNvPr id="12" name="Shape 10"/>
+          <p:cNvSpPr/>
+          <p:nvPr/>
+        </p:nvSpPr>
+        <p:spPr>
+          <a:xfrm>
+            <a:off x="7863840" y="1938528"/>
+            <a:ext cx="73152" cy="2514600"/>
           </a:xfrm>
           <a:prstGeom prst="rect">
             <a:avLst/>
@@ -19737,61 +18709,7 @@
       </p:sp>
       <p:sp>
         <p:nvSpPr>
-          <p:cNvPr id="16" name="Shape 11"/>
-          <p:cNvSpPr/>
-          <p:nvPr/>
-        </p:nvSpPr>
-        <p:spPr>
-          <a:xfrm>
-            <a:off x="914400" y="3191256"/>
-            <a:ext cx="73152" cy="1024128"/>
-          </a:xfrm>
-          <a:prstGeom prst="rect">
-            <a:avLst/>
-          </a:prstGeom>
-          <a:solidFill>
-            <a:srgbClr val="00A6FF"/>
-          </a:solidFill>
-          <a:ln w="12700">
-            <a:solidFill>
-              <a:srgbClr val="00A6FF">
-                <a:alpha val="0"/>
-              </a:srgbClr>
-            </a:solidFill>
-            <a:prstDash val="solid"/>
-          </a:ln>
-        </p:spPr>
-      </p:sp>
-      <p:sp>
-        <p:nvSpPr>
-          <p:cNvPr id="17" name="Shape 12"/>
-          <p:cNvSpPr/>
-          <p:nvPr/>
-        </p:nvSpPr>
-        <p:spPr>
-          <a:xfrm>
-            <a:off x="914400" y="4507992"/>
-            <a:ext cx="73152" cy="1024128"/>
-          </a:xfrm>
-          <a:prstGeom prst="rect">
-            <a:avLst/>
-          </a:prstGeom>
-          <a:solidFill>
-            <a:srgbClr val="111111"/>
-          </a:solidFill>
-          <a:ln w="12700">
-            <a:solidFill>
-              <a:srgbClr val="111111">
-                <a:alpha val="0"/>
-              </a:srgbClr>
-            </a:solidFill>
-            <a:prstDash val="solid"/>
-          </a:ln>
-        </p:spPr>
-      </p:sp>
-      <p:sp>
-        <p:nvSpPr>
-          <p:cNvPr id="18" name="mdpr:1-2-32ac08:title:__title:1-2-32ac08"/>
+          <p:cNvPr id="13" name="mdpr:1-2-32ac08:title:__title:1-2-32ac08"/>
           <p:cNvSpPr txBox="1"/>
           <p:nvPr/>
         </p:nvSpPr>
@@ -19833,14 +18751,14 @@
       </p:sp>
       <p:sp>
         <p:nvSpPr>
-          <p:cNvPr id="19" name="mdpr:1-2-32ac08:item-1:block-6-chunk-1"/>
+          <p:cNvPr id="14" name="mdpr:1-2-32ac08:item-1:block-6-chunk-1"/>
           <p:cNvSpPr txBox="1"/>
           <p:nvPr/>
         </p:nvSpPr>
         <p:spPr>
           <a:xfrm>
-            <a:off x="1133856" y="1957548"/>
-            <a:ext cx="9820656" cy="839785"/>
+            <a:off x="1042416" y="2103120"/>
+            <a:ext cx="2825496" cy="2185416"/>
           </a:xfrm>
           <a:prstGeom prst="rect">
             <a:avLst/>
@@ -19892,14 +18810,14 @@
       </p:sp>
       <p:sp>
         <p:nvSpPr>
-          <p:cNvPr id="20" name="mdpr:1-2-32ac08:item-2:block-6-chunk-1"/>
+          <p:cNvPr id="15" name="mdpr:1-2-32ac08:item-2:block-6-chunk-1"/>
           <p:cNvSpPr txBox="1"/>
           <p:nvPr/>
         </p:nvSpPr>
         <p:spPr>
           <a:xfrm>
-            <a:off x="1133856" y="3283428"/>
-            <a:ext cx="9820656" cy="839785"/>
+            <a:off x="4562856" y="2103120"/>
+            <a:ext cx="2825496" cy="2185416"/>
           </a:xfrm>
           <a:prstGeom prst="rect">
             <a:avLst/>
@@ -19951,14 +18869,14 @@
       </p:sp>
       <p:sp>
         <p:nvSpPr>
-          <p:cNvPr id="21" name="mdpr:1-2-32ac08:item-3:block-6-chunk-1"/>
+          <p:cNvPr id="16" name="mdpr:1-2-32ac08:item-3:block-6-chunk-1"/>
           <p:cNvSpPr txBox="1"/>
           <p:nvPr/>
         </p:nvSpPr>
         <p:spPr>
           <a:xfrm>
-            <a:off x="1133856" y="4600164"/>
-            <a:ext cx="9820656" cy="839785"/>
+            <a:off x="8083296" y="2103120"/>
+            <a:ext cx="2825496" cy="2185416"/>
           </a:xfrm>
           <a:prstGeom prst="rect">
             <a:avLst/>
@@ -20246,88 +19164,7 @@
       </p:sp>
       <p:sp>
         <p:nvSpPr>
-          <p:cNvPr id="10" name="Shape 8"/>
-          <p:cNvSpPr/>
-          <p:nvPr/>
-        </p:nvSpPr>
-        <p:spPr>
-          <a:xfrm>
-            <a:off x="731520" y="1207008"/>
-            <a:ext cx="1325880" cy="54864"/>
-          </a:xfrm>
-          <a:prstGeom prst="rect">
-            <a:avLst/>
-          </a:prstGeom>
-          <a:solidFill>
-            <a:srgbClr val="111111"/>
-          </a:solidFill>
-          <a:ln w="12700">
-            <a:solidFill>
-              <a:srgbClr val="111111">
-                <a:alpha val="0"/>
-              </a:srgbClr>
-            </a:solidFill>
-            <a:prstDash val="solid"/>
-          </a:ln>
-        </p:spPr>
-      </p:sp>
-      <p:sp>
-        <p:nvSpPr>
-          <p:cNvPr id="11" name="Shape 9"/>
-          <p:cNvSpPr/>
-          <p:nvPr/>
-        </p:nvSpPr>
-        <p:spPr>
-          <a:xfrm>
-            <a:off x="822960" y="1554480"/>
-            <a:ext cx="4937760" cy="73152"/>
-          </a:xfrm>
-          <a:prstGeom prst="rect">
-            <a:avLst/>
-          </a:prstGeom>
-          <a:solidFill>
-            <a:srgbClr val="111111"/>
-          </a:solidFill>
-          <a:ln w="12700">
-            <a:solidFill>
-              <a:srgbClr val="111111">
-                <a:alpha val="0"/>
-              </a:srgbClr>
-            </a:solidFill>
-            <a:prstDash val="solid"/>
-          </a:ln>
-        </p:spPr>
-      </p:sp>
-      <p:sp>
-        <p:nvSpPr>
-          <p:cNvPr id="12" name="Shape 10"/>
-          <p:cNvSpPr/>
-          <p:nvPr/>
-        </p:nvSpPr>
-        <p:spPr>
-          <a:xfrm>
-            <a:off x="6400800" y="1554480"/>
-            <a:ext cx="4937760" cy="73152"/>
-          </a:xfrm>
-          <a:prstGeom prst="rect">
-            <a:avLst/>
-          </a:prstGeom>
-          <a:solidFill>
-            <a:srgbClr val="111111"/>
-          </a:solidFill>
-          <a:ln w="12700">
-            <a:solidFill>
-              <a:srgbClr val="111111">
-                <a:alpha val="0"/>
-              </a:srgbClr>
-            </a:solidFill>
-            <a:prstDash val="solid"/>
-          </a:ln>
-        </p:spPr>
-      </p:sp>
-      <p:sp>
-        <p:nvSpPr>
-          <p:cNvPr id="13" name="mdpr:2-2-14f8eb:title:__title:2-2-14f8eb"/>
+          <p:cNvPr id="10" name="mdpr:2-2-14f8eb:title:__title:2-2-14f8eb"/>
           <p:cNvSpPr txBox="1"/>
           <p:nvPr/>
         </p:nvSpPr>
@@ -20361,7 +19198,24 @@
                 <a:ea typeface="Pretendard" pitchFamily="34" charset="-122"/>
                 <a:cs typeface="Pretendard" pitchFamily="34" charset="-120"/>
               </a:rPr>
-              <a:t>Composition Contract (Cont. 2/2)</a:t>
+              <a:t>Composition Contract</a:t>
+            </a:r>
+            <a:pPr algn="ctr" indent="0" marL="0">
+              <a:lnSpc>
+                <a:spcPct val="120000"/>
+              </a:lnSpc>
+              <a:buNone/>
+            </a:pPr>
+            <a:r>
+              <a:rPr lang="en-US" sz="2000" dirty="0">
+                <a:solidFill>
+                  <a:srgbClr val="888888"/>
+                </a:solidFill>
+                <a:latin typeface="Pretendard" pitchFamily="34" charset="0"/>
+                <a:ea typeface="Pretendard" pitchFamily="34" charset="-122"/>
+                <a:cs typeface="Pretendard" pitchFamily="34" charset="-120"/>
+              </a:rPr>
+              <a:t> (Cont. 2/2)</a:t>
             </a:r>
             <a:endParaRPr lang="en-US" sz="3400" dirty="0"/>
           </a:p>
@@ -20369,14 +19223,14 @@
       </p:sp>
       <p:sp>
         <p:nvSpPr>
-          <p:cNvPr id="14" name="mdpr:2-2-14f8eb:left:block-6-chunk-2"/>
+          <p:cNvPr id="11" name="mdpr:2-2-14f8eb:left:block-6-chunk-2"/>
           <p:cNvSpPr txBox="1"/>
           <p:nvPr/>
         </p:nvSpPr>
         <p:spPr>
           <a:xfrm>
-            <a:off x="896112" y="1664208"/>
-            <a:ext cx="4791456" cy="4169664"/>
+            <a:off x="896112" y="1463040"/>
+            <a:ext cx="4791456" cy="4261104"/>
           </a:xfrm>
           <a:prstGeom prst="rect">
             <a:avLst/>
@@ -20428,14 +19282,14 @@
       </p:sp>
       <p:sp>
         <p:nvSpPr>
-          <p:cNvPr id="15" name="mdpr:2-2-14f8eb:right:block-6-chunk-2"/>
+          <p:cNvPr id="12" name="mdpr:2-2-14f8eb:right:block-6-chunk-2"/>
           <p:cNvSpPr txBox="1"/>
           <p:nvPr/>
         </p:nvSpPr>
         <p:spPr>
           <a:xfrm>
-            <a:off x="6473952" y="1664208"/>
-            <a:ext cx="4791456" cy="4169664"/>
+            <a:off x="6473952" y="1463040"/>
+            <a:ext cx="4791456" cy="4261104"/>
           </a:xfrm>
           <a:prstGeom prst="rect">
             <a:avLst/>
@@ -20729,8 +19583,8 @@
         </p:nvSpPr>
         <p:spPr>
           <a:xfrm>
-            <a:off x="731520" y="1207008"/>
-            <a:ext cx="1325880" cy="54864"/>
+            <a:off x="822960" y="1938528"/>
+            <a:ext cx="73152" cy="2514600"/>
           </a:xfrm>
           <a:prstGeom prst="rect">
             <a:avLst/>
@@ -20748,114 +19602,22 @@
           </a:ln>
         </p:spPr>
       </p:sp>
-      <p:pic>
-        <p:nvPicPr>
-          <p:cNvPr id="11" name="Image 0" descr="preencoded.png">    </p:cNvPr>
-          <p:cNvPicPr>
-            <a:picLocks noChangeAspect="1"/>
-          </p:cNvPicPr>
-          <p:nvPr/>
-        </p:nvPicPr>
-        <p:blipFill>
-          <a:blip r:embed="rId1">
-            <a:extLst>
-              <a:ext uri="{96DAC541-7B7A-43D3-8B79-37D633B846F1}">
-                <asvg:svgBlip xmlns:asvg="http://schemas.microsoft.com/office/drawing/2016/SVG/main" r:embed="rId2"/>
-              </a:ext>
-            </a:extLst>
-          </a:blip>
-          <a:stretch>
-            <a:fillRect/>
-          </a:stretch>
-        </p:blipFill>
-        <p:spPr>
-          <a:xfrm>
-            <a:off x="914400" y="1865376"/>
-            <a:ext cx="10241280" cy="1024128"/>
-          </a:xfrm>
-          <a:prstGeom prst="rect">
-            <a:avLst/>
-          </a:prstGeom>
-        </p:spPr>
-      </p:pic>
-      <p:pic>
-        <p:nvPicPr>
-          <p:cNvPr id="12" name="Image 1" descr="preencoded.png">    </p:cNvPr>
-          <p:cNvPicPr>
-            <a:picLocks noChangeAspect="1"/>
-          </p:cNvPicPr>
-          <p:nvPr/>
-        </p:nvPicPr>
-        <p:blipFill>
-          <a:blip r:embed="rId3">
-            <a:extLst>
-              <a:ext uri="{96DAC541-7B7A-43D3-8B79-37D633B846F1}">
-                <asvg:svgBlip xmlns:asvg="http://schemas.microsoft.com/office/drawing/2016/SVG/main" r:embed="rId4"/>
-              </a:ext>
-            </a:extLst>
-          </a:blip>
-          <a:stretch>
-            <a:fillRect/>
-          </a:stretch>
-        </p:blipFill>
-        <p:spPr>
-          <a:xfrm>
-            <a:off x="914400" y="3191256"/>
-            <a:ext cx="10241280" cy="1024128"/>
-          </a:xfrm>
-          <a:prstGeom prst="rect">
-            <a:avLst/>
-          </a:prstGeom>
-        </p:spPr>
-      </p:pic>
-      <p:pic>
-        <p:nvPicPr>
-          <p:cNvPr id="13" name="Image 2" descr="preencoded.png">    </p:cNvPr>
-          <p:cNvPicPr>
-            <a:picLocks noChangeAspect="1"/>
-          </p:cNvPicPr>
-          <p:nvPr/>
-        </p:nvPicPr>
-        <p:blipFill>
-          <a:blip r:embed="rId5">
-            <a:extLst>
-              <a:ext uri="{96DAC541-7B7A-43D3-8B79-37D633B846F1}">
-                <asvg:svgBlip xmlns:asvg="http://schemas.microsoft.com/office/drawing/2016/SVG/main" r:embed="rId6"/>
-              </a:ext>
-            </a:extLst>
-          </a:blip>
-          <a:stretch>
-            <a:fillRect/>
-          </a:stretch>
-        </p:blipFill>
-        <p:spPr>
-          <a:xfrm>
-            <a:off x="914400" y="4507992"/>
-            <a:ext cx="10241280" cy="1024128"/>
-          </a:xfrm>
-          <a:prstGeom prst="rect">
-            <a:avLst/>
-          </a:prstGeom>
-        </p:spPr>
-      </p:pic>
-      <p:sp>
-        <p:nvSpPr>
-          <p:cNvPr id="14" name="Shape 9"/>
-          <p:cNvSpPr/>
-          <p:nvPr/>
-        </p:nvSpPr>
-        <p:spPr>
-          <a:xfrm>
-            <a:off x="786384" y="1956816"/>
-            <a:ext cx="32004" cy="3483864"/>
-          </a:xfrm>
-          <a:prstGeom prst="rect">
-            <a:avLst/>
-          </a:prstGeom>
-          <a:solidFill>
-            <a:srgbClr val="00A6FF">
-              <a:alpha val="80000"/>
-            </a:srgbClr>
+      <p:sp>
+        <p:nvSpPr>
+          <p:cNvPr id="11" name="Shape 9"/>
+          <p:cNvSpPr/>
+          <p:nvPr/>
+        </p:nvSpPr>
+        <p:spPr>
+          <a:xfrm>
+            <a:off x="4343400" y="1938528"/>
+            <a:ext cx="73152" cy="2514600"/>
+          </a:xfrm>
+          <a:prstGeom prst="rect">
+            <a:avLst/>
+          </a:prstGeom>
+          <a:solidFill>
+            <a:srgbClr val="00A6FF"/>
           </a:solidFill>
           <a:ln w="12700">
             <a:solidFill>
@@ -20869,14 +19631,14 @@
       </p:sp>
       <p:sp>
         <p:nvSpPr>
-          <p:cNvPr id="15" name="Shape 10"/>
-          <p:cNvSpPr/>
-          <p:nvPr/>
-        </p:nvSpPr>
-        <p:spPr>
-          <a:xfrm>
-            <a:off x="914400" y="1865376"/>
-            <a:ext cx="73152" cy="1024128"/>
+          <p:cNvPr id="12" name="Shape 10"/>
+          <p:cNvSpPr/>
+          <p:nvPr/>
+        </p:nvSpPr>
+        <p:spPr>
+          <a:xfrm>
+            <a:off x="7863840" y="1938528"/>
+            <a:ext cx="73152" cy="2514600"/>
           </a:xfrm>
           <a:prstGeom prst="rect">
             <a:avLst/>
@@ -20896,61 +19658,7 @@
       </p:sp>
       <p:sp>
         <p:nvSpPr>
-          <p:cNvPr id="16" name="Shape 11"/>
-          <p:cNvSpPr/>
-          <p:nvPr/>
-        </p:nvSpPr>
-        <p:spPr>
-          <a:xfrm>
-            <a:off x="914400" y="3191256"/>
-            <a:ext cx="73152" cy="1024128"/>
-          </a:xfrm>
-          <a:prstGeom prst="rect">
-            <a:avLst/>
-          </a:prstGeom>
-          <a:solidFill>
-            <a:srgbClr val="00A6FF"/>
-          </a:solidFill>
-          <a:ln w="12700">
-            <a:solidFill>
-              <a:srgbClr val="00A6FF">
-                <a:alpha val="0"/>
-              </a:srgbClr>
-            </a:solidFill>
-            <a:prstDash val="solid"/>
-          </a:ln>
-        </p:spPr>
-      </p:sp>
-      <p:sp>
-        <p:nvSpPr>
-          <p:cNvPr id="17" name="Shape 12"/>
-          <p:cNvSpPr/>
-          <p:nvPr/>
-        </p:nvSpPr>
-        <p:spPr>
-          <a:xfrm>
-            <a:off x="914400" y="4507992"/>
-            <a:ext cx="73152" cy="1024128"/>
-          </a:xfrm>
-          <a:prstGeom prst="rect">
-            <a:avLst/>
-          </a:prstGeom>
-          <a:solidFill>
-            <a:srgbClr val="111111"/>
-          </a:solidFill>
-          <a:ln w="12700">
-            <a:solidFill>
-              <a:srgbClr val="111111">
-                <a:alpha val="0"/>
-              </a:srgbClr>
-            </a:solidFill>
-            <a:prstDash val="solid"/>
-          </a:ln>
-        </p:spPr>
-      </p:sp>
-      <p:sp>
-        <p:nvSpPr>
-          <p:cNvPr id="18" name="mdpr:1-2-dfa474:title:__title:1-2-dfa474"/>
+          <p:cNvPr id="13" name="mdpr:1-2-dfa474:title:__title:1-2-dfa474"/>
           <p:cNvSpPr txBox="1"/>
           <p:nvPr/>
         </p:nvSpPr>
@@ -20992,14 +19700,14 @@
       </p:sp>
       <p:sp>
         <p:nvSpPr>
-          <p:cNvPr id="19" name="mdpr:1-2-dfa474:item-1:block-8-chunk-1"/>
+          <p:cNvPr id="14" name="mdpr:1-2-dfa474:item-1:block-8-chunk-1"/>
           <p:cNvSpPr txBox="1"/>
           <p:nvPr/>
         </p:nvSpPr>
         <p:spPr>
           <a:xfrm>
-            <a:off x="1133856" y="1957548"/>
-            <a:ext cx="9820656" cy="839785"/>
+            <a:off x="1042416" y="2103120"/>
+            <a:ext cx="2825496" cy="2185416"/>
           </a:xfrm>
           <a:prstGeom prst="rect">
             <a:avLst/>
@@ -21051,14 +19759,14 @@
       </p:sp>
       <p:sp>
         <p:nvSpPr>
-          <p:cNvPr id="20" name="mdpr:1-2-dfa474:item-2:block-8-chunk-1"/>
+          <p:cNvPr id="15" name="mdpr:1-2-dfa474:item-2:block-8-chunk-1"/>
           <p:cNvSpPr txBox="1"/>
           <p:nvPr/>
         </p:nvSpPr>
         <p:spPr>
           <a:xfrm>
-            <a:off x="1133856" y="3283428"/>
-            <a:ext cx="9820656" cy="839785"/>
+            <a:off x="4562856" y="2103120"/>
+            <a:ext cx="2825496" cy="2185416"/>
           </a:xfrm>
           <a:prstGeom prst="rect">
             <a:avLst/>
@@ -21110,14 +19818,14 @@
       </p:sp>
       <p:sp>
         <p:nvSpPr>
-          <p:cNvPr id="21" name="mdpr:1-2-dfa474:item-3:block-8-chunk-1"/>
+          <p:cNvPr id="16" name="mdpr:1-2-dfa474:item-3:block-8-chunk-1"/>
           <p:cNvSpPr txBox="1"/>
           <p:nvPr/>
         </p:nvSpPr>
         <p:spPr>
           <a:xfrm>
-            <a:off x="1133856" y="4600164"/>
-            <a:ext cx="9820656" cy="839785"/>
+            <a:off x="8083296" y="2103120"/>
+            <a:ext cx="2825496" cy="2185416"/>
           </a:xfrm>
           <a:prstGeom prst="rect">
             <a:avLst/>
@@ -21405,88 +20113,7 @@
       </p:sp>
       <p:sp>
         <p:nvSpPr>
-          <p:cNvPr id="10" name="Shape 8"/>
-          <p:cNvSpPr/>
-          <p:nvPr/>
-        </p:nvSpPr>
-        <p:spPr>
-          <a:xfrm>
-            <a:off x="731520" y="1207008"/>
-            <a:ext cx="1325880" cy="54864"/>
-          </a:xfrm>
-          <a:prstGeom prst="rect">
-            <a:avLst/>
-          </a:prstGeom>
-          <a:solidFill>
-            <a:srgbClr val="111111"/>
-          </a:solidFill>
-          <a:ln w="12700">
-            <a:solidFill>
-              <a:srgbClr val="111111">
-                <a:alpha val="0"/>
-              </a:srgbClr>
-            </a:solidFill>
-            <a:prstDash val="solid"/>
-          </a:ln>
-        </p:spPr>
-      </p:sp>
-      <p:sp>
-        <p:nvSpPr>
-          <p:cNvPr id="11" name="Shape 9"/>
-          <p:cNvSpPr/>
-          <p:nvPr/>
-        </p:nvSpPr>
-        <p:spPr>
-          <a:xfrm>
-            <a:off x="822960" y="1554480"/>
-            <a:ext cx="4937760" cy="73152"/>
-          </a:xfrm>
-          <a:prstGeom prst="rect">
-            <a:avLst/>
-          </a:prstGeom>
-          <a:solidFill>
-            <a:srgbClr val="111111"/>
-          </a:solidFill>
-          <a:ln w="12700">
-            <a:solidFill>
-              <a:srgbClr val="111111">
-                <a:alpha val="0"/>
-              </a:srgbClr>
-            </a:solidFill>
-            <a:prstDash val="solid"/>
-          </a:ln>
-        </p:spPr>
-      </p:sp>
-      <p:sp>
-        <p:nvSpPr>
-          <p:cNvPr id="12" name="Shape 10"/>
-          <p:cNvSpPr/>
-          <p:nvPr/>
-        </p:nvSpPr>
-        <p:spPr>
-          <a:xfrm>
-            <a:off x="6400800" y="1554480"/>
-            <a:ext cx="4937760" cy="73152"/>
-          </a:xfrm>
-          <a:prstGeom prst="rect">
-            <a:avLst/>
-          </a:prstGeom>
-          <a:solidFill>
-            <a:srgbClr val="111111"/>
-          </a:solidFill>
-          <a:ln w="12700">
-            <a:solidFill>
-              <a:srgbClr val="111111">
-                <a:alpha val="0"/>
-              </a:srgbClr>
-            </a:solidFill>
-            <a:prstDash val="solid"/>
-          </a:ln>
-        </p:spPr>
-      </p:sp>
-      <p:sp>
-        <p:nvSpPr>
-          <p:cNvPr id="13" name="mdpr:2-2-149bde:title:__title:2-2-149bde"/>
+          <p:cNvPr id="10" name="mdpr:2-2-149bde:title:__title:2-2-149bde"/>
           <p:cNvSpPr txBox="1"/>
           <p:nvPr/>
         </p:nvSpPr>
@@ -21520,7 +20147,24 @@
                 <a:ea typeface="Pretendard" pitchFamily="34" charset="-122"/>
                 <a:cs typeface="Pretendard" pitchFamily="34" charset="-120"/>
               </a:rPr>
-              <a:t>Pruned Style Families (Cont. 2/2)</a:t>
+              <a:t>Pruned Style Families</a:t>
+            </a:r>
+            <a:pPr algn="ctr" indent="0" marL="0">
+              <a:lnSpc>
+                <a:spcPct val="120000"/>
+              </a:lnSpc>
+              <a:buNone/>
+            </a:pPr>
+            <a:r>
+              <a:rPr lang="en-US" sz="2000" dirty="0">
+                <a:solidFill>
+                  <a:srgbClr val="888888"/>
+                </a:solidFill>
+                <a:latin typeface="Pretendard" pitchFamily="34" charset="0"/>
+                <a:ea typeface="Pretendard" pitchFamily="34" charset="-122"/>
+                <a:cs typeface="Pretendard" pitchFamily="34" charset="-120"/>
+              </a:rPr>
+              <a:t> (Cont. 2/2)</a:t>
             </a:r>
             <a:endParaRPr lang="en-US" sz="3400" dirty="0"/>
           </a:p>
@@ -21528,14 +20172,14 @@
       </p:sp>
       <p:sp>
         <p:nvSpPr>
-          <p:cNvPr id="14" name="mdpr:2-2-149bde:left:block-8-chunk-2"/>
+          <p:cNvPr id="11" name="mdpr:2-2-149bde:left:block-8-chunk-2"/>
           <p:cNvSpPr txBox="1"/>
           <p:nvPr/>
         </p:nvSpPr>
         <p:spPr>
           <a:xfrm>
-            <a:off x="896112" y="1664208"/>
-            <a:ext cx="4791456" cy="4169664"/>
+            <a:off x="896112" y="1463040"/>
+            <a:ext cx="4791456" cy="4261104"/>
           </a:xfrm>
           <a:prstGeom prst="rect">
             <a:avLst/>
@@ -21587,14 +20231,14 @@
       </p:sp>
       <p:sp>
         <p:nvSpPr>
-          <p:cNvPr id="15" name="mdpr:2-2-149bde:right:block-8-chunk-2"/>
+          <p:cNvPr id="12" name="mdpr:2-2-149bde:right:block-8-chunk-2"/>
           <p:cNvSpPr txBox="1"/>
           <p:nvPr/>
         </p:nvSpPr>
         <p:spPr>
           <a:xfrm>
-            <a:off x="6473952" y="1664208"/>
-            <a:ext cx="4791456" cy="4169664"/>
+            <a:off x="6473952" y="1463040"/>
+            <a:ext cx="4791456" cy="4261104"/>
           </a:xfrm>
           <a:prstGeom prst="rect">
             <a:avLst/>
@@ -21880,16 +20524,76 @@
           </a:ln>
         </p:spPr>
       </p:sp>
-      <p:sp>
-        <p:nvSpPr>
-          <p:cNvPr id="10" name="Shape 8"/>
-          <p:cNvSpPr/>
-          <p:nvPr/>
-        </p:nvSpPr>
-        <p:spPr>
-          <a:xfrm>
-            <a:off x="731520" y="1207008"/>
-            <a:ext cx="1325880" cy="54864"/>
+      <p:pic>
+        <p:nvPicPr>
+          <p:cNvPr id="10" name="Image 0" descr="preencoded.png">    </p:cNvPr>
+          <p:cNvPicPr>
+            <a:picLocks noChangeAspect="1"/>
+          </p:cNvPicPr>
+          <p:nvPr/>
+        </p:nvPicPr>
+        <p:blipFill>
+          <a:blip r:embed="rId1">
+            <a:extLst>
+              <a:ext uri="{96DAC541-7B7A-43D3-8B79-37D633B846F1}">
+                <asvg:svgBlip xmlns:asvg="http://schemas.microsoft.com/office/drawing/2016/SVG/main" r:embed="rId2"/>
+              </a:ext>
+            </a:extLst>
+          </a:blip>
+          <a:stretch>
+            <a:fillRect/>
+          </a:stretch>
+        </p:blipFill>
+        <p:spPr>
+          <a:xfrm>
+            <a:off x="914400" y="2523744"/>
+            <a:ext cx="10241280" cy="1024128"/>
+          </a:xfrm>
+          <a:prstGeom prst="rect">
+            <a:avLst/>
+          </a:prstGeom>
+        </p:spPr>
+      </p:pic>
+      <p:pic>
+        <p:nvPicPr>
+          <p:cNvPr id="11" name="Image 1" descr="preencoded.png">    </p:cNvPr>
+          <p:cNvPicPr>
+            <a:picLocks noChangeAspect="1"/>
+          </p:cNvPicPr>
+          <p:nvPr/>
+        </p:nvPicPr>
+        <p:blipFill>
+          <a:blip r:embed="rId3">
+            <a:extLst>
+              <a:ext uri="{96DAC541-7B7A-43D3-8B79-37D633B846F1}">
+                <asvg:svgBlip xmlns:asvg="http://schemas.microsoft.com/office/drawing/2016/SVG/main" r:embed="rId4"/>
+              </a:ext>
+            </a:extLst>
+          </a:blip>
+          <a:stretch>
+            <a:fillRect/>
+          </a:stretch>
+        </p:blipFill>
+        <p:spPr>
+          <a:xfrm>
+            <a:off x="914400" y="3849624"/>
+            <a:ext cx="10241280" cy="1024128"/>
+          </a:xfrm>
+          <a:prstGeom prst="rect">
+            <a:avLst/>
+          </a:prstGeom>
+        </p:spPr>
+      </p:pic>
+      <p:sp>
+        <p:nvSpPr>
+          <p:cNvPr id="12" name="Shape 8"/>
+          <p:cNvSpPr/>
+          <p:nvPr/>
+        </p:nvSpPr>
+        <p:spPr>
+          <a:xfrm>
+            <a:off x="914400" y="2523744"/>
+            <a:ext cx="73152" cy="1024128"/>
           </a:xfrm>
           <a:prstGeom prst="rect">
             <a:avLst/>
@@ -21909,24 +20613,24 @@
       </p:sp>
       <p:sp>
         <p:nvSpPr>
-          <p:cNvPr id="11" name="Shape 9"/>
-          <p:cNvSpPr/>
-          <p:nvPr/>
-        </p:nvSpPr>
-        <p:spPr>
-          <a:xfrm>
-            <a:off x="822960" y="1554480"/>
-            <a:ext cx="4937760" cy="73152"/>
-          </a:xfrm>
-          <a:prstGeom prst="rect">
-            <a:avLst/>
-          </a:prstGeom>
-          <a:solidFill>
-            <a:srgbClr val="111111"/>
-          </a:solidFill>
-          <a:ln w="12700">
-            <a:solidFill>
-              <a:srgbClr val="111111">
+          <p:cNvPr id="13" name="Shape 9"/>
+          <p:cNvSpPr/>
+          <p:nvPr/>
+        </p:nvSpPr>
+        <p:spPr>
+          <a:xfrm>
+            <a:off x="914400" y="3849624"/>
+            <a:ext cx="73152" cy="1024128"/>
+          </a:xfrm>
+          <a:prstGeom prst="rect">
+            <a:avLst/>
+          </a:prstGeom>
+          <a:solidFill>
+            <a:srgbClr val="00A6FF"/>
+          </a:solidFill>
+          <a:ln w="12700">
+            <a:solidFill>
+              <a:srgbClr val="00A6FF">
                 <a:alpha val="0"/>
               </a:srgbClr>
             </a:solidFill>
@@ -21936,34 +20640,7 @@
       </p:sp>
       <p:sp>
         <p:nvSpPr>
-          <p:cNvPr id="12" name="Shape 10"/>
-          <p:cNvSpPr/>
-          <p:nvPr/>
-        </p:nvSpPr>
-        <p:spPr>
-          <a:xfrm>
-            <a:off x="6400800" y="1554480"/>
-            <a:ext cx="4937760" cy="73152"/>
-          </a:xfrm>
-          <a:prstGeom prst="rect">
-            <a:avLst/>
-          </a:prstGeom>
-          <a:solidFill>
-            <a:srgbClr val="111111"/>
-          </a:solidFill>
-          <a:ln w="12700">
-            <a:solidFill>
-              <a:srgbClr val="111111">
-                <a:alpha val="0"/>
-              </a:srgbClr>
-            </a:solidFill>
-            <a:prstDash val="solid"/>
-          </a:ln>
-        </p:spPr>
-      </p:sp>
-      <p:sp>
-        <p:nvSpPr>
-          <p:cNvPr id="13" name="mdpr:1-2-5a84f1:title:__title:1-2-5a84f1"/>
+          <p:cNvPr id="14" name="mdpr:1-2-5a84f1:title:__title:1-2-5a84f1"/>
           <p:cNvSpPr txBox="1"/>
           <p:nvPr/>
         </p:nvSpPr>
@@ -22005,14 +20682,14 @@
       </p:sp>
       <p:sp>
         <p:nvSpPr>
-          <p:cNvPr id="14" name="mdpr:1-2-5a84f1:left:block-10-chunk-1"/>
+          <p:cNvPr id="15" name="mdpr:1-2-5a84f1:item-1:block-10-chunk-1"/>
           <p:cNvSpPr txBox="1"/>
           <p:nvPr/>
         </p:nvSpPr>
         <p:spPr>
           <a:xfrm>
-            <a:off x="896112" y="1664208"/>
-            <a:ext cx="4791456" cy="4169664"/>
+            <a:off x="1133856" y="2615916"/>
+            <a:ext cx="9820656" cy="839785"/>
           </a:xfrm>
           <a:prstGeom prst="rect">
             <a:avLst/>
@@ -22021,7 +20698,7 @@
           <a:ln/>
         </p:spPr>
         <p:txBody>
-          <a:bodyPr wrap="square" lIns="0" tIns="25400" rIns="25400" bIns="0" rtlCol="0" anchor="t"/>
+          <a:bodyPr wrap="square" lIns="0" tIns="25400" rIns="25400" bIns="0" rtlCol="0" anchor="ctr"/>
           <a:lstStyle/>
           <a:p>
             <a:pPr algn="l" indent="0" marL="0">
@@ -22039,7 +20716,7 @@
                 <a:ea typeface="Pretendard" pitchFamily="34" charset="-122"/>
                 <a:cs typeface="Pretendard" pitchFamily="34" charset="-120"/>
               </a:rPr>
-              <a:t>- Headings</a:t>
+              <a:t>Headings</a:t>
             </a:r>
             <a:pPr algn="l" indent="0" marL="0">
               <a:lnSpc>
@@ -22064,14 +20741,14 @@
       </p:sp>
       <p:sp>
         <p:nvSpPr>
-          <p:cNvPr id="15" name="mdpr:1-2-5a84f1:right:block-10-chunk-1"/>
+          <p:cNvPr id="16" name="mdpr:1-2-5a84f1:item-2:block-10-chunk-1"/>
           <p:cNvSpPr txBox="1"/>
           <p:nvPr/>
         </p:nvSpPr>
         <p:spPr>
           <a:xfrm>
-            <a:off x="6473952" y="1664208"/>
-            <a:ext cx="4791456" cy="4169664"/>
+            <a:off x="1133856" y="3941796"/>
+            <a:ext cx="9820656" cy="839785"/>
           </a:xfrm>
           <a:prstGeom prst="rect">
             <a:avLst/>
@@ -22080,7 +20757,7 @@
           <a:ln/>
         </p:spPr>
         <p:txBody>
-          <a:bodyPr wrap="square" lIns="0" tIns="25400" rIns="25400" bIns="0" rtlCol="0" anchor="t"/>
+          <a:bodyPr wrap="square" lIns="0" tIns="25400" rIns="25400" bIns="0" rtlCol="0" anchor="ctr"/>
           <a:lstStyle/>
           <a:p>
             <a:pPr algn="l" indent="0" marL="0">
@@ -22098,7 +20775,7 @@
                 <a:ea typeface="Pretendard" pitchFamily="34" charset="-122"/>
                 <a:cs typeface="Pretendard" pitchFamily="34" charset="-120"/>
               </a:rPr>
-              <a:t>- Lists</a:t>
+              <a:t>Lists</a:t>
             </a:r>
             <a:pPr algn="l" indent="0" marL="0">
               <a:lnSpc>
